--- a/summer school/afternoon_lab/afternoon_statsclaw_git_lab.pptx
+++ b/summer school/afternoon_lab/afternoon_statsclaw_git_lab.pptx
@@ -2,41 +2,41 @@
 <file path=ppt/presentation.xml><?xml version="1.0" encoding="utf-8"?>
 <p:presentation xmlns:p="http://schemas.openxmlformats.org/presentationml/2006/main">
   <p:sldMasterIdLst>
-    <p:sldMasterId xmlns:r="http://schemas.openxmlformats.org/officeDocument/2006/relationships" id="2147483648" r:id="Rda9e9fa8c9024793"/>
+    <p:sldMasterId xmlns:r="http://schemas.openxmlformats.org/officeDocument/2006/relationships" id="2147483648" r:id="R8e5f7b1b223b46d9"/>
   </p:sldMasterIdLst>
   <p:notesMasterIdLst>
-    <p:notesMasterId xmlns:r="http://schemas.openxmlformats.org/officeDocument/2006/relationships" r:id="R22a9d72fe0d949d2"/>
+    <p:notesMasterId xmlns:r="http://schemas.openxmlformats.org/officeDocument/2006/relationships" r:id="R05aa67b5adc74665"/>
   </p:notesMasterIdLst>
   <p:sldIdLst>
-    <p:sldId xmlns:r="http://schemas.openxmlformats.org/officeDocument/2006/relationships" id="256" r:id="R9320d7d160e844d5"/>
-    <p:sldId xmlns:r="http://schemas.openxmlformats.org/officeDocument/2006/relationships" id="257" r:id="Rbb46b67a119145eb"/>
-    <p:sldId xmlns:r="http://schemas.openxmlformats.org/officeDocument/2006/relationships" id="258" r:id="R3f6b94322990467e"/>
-    <p:sldId xmlns:r="http://schemas.openxmlformats.org/officeDocument/2006/relationships" id="259" r:id="R1e08321458844edc"/>
-    <p:sldId xmlns:r="http://schemas.openxmlformats.org/officeDocument/2006/relationships" id="260" r:id="Ra73f4d8c27cd4b35"/>
-    <p:sldId xmlns:r="http://schemas.openxmlformats.org/officeDocument/2006/relationships" id="261" r:id="Rb105c162be594f78"/>
-    <p:sldId xmlns:r="http://schemas.openxmlformats.org/officeDocument/2006/relationships" id="262" r:id="Rbb5004cc20974dd5"/>
-    <p:sldId xmlns:r="http://schemas.openxmlformats.org/officeDocument/2006/relationships" id="263" r:id="Rf95320a693564a22"/>
-    <p:sldId xmlns:r="http://schemas.openxmlformats.org/officeDocument/2006/relationships" id="264" r:id="R654cfc114be740f7"/>
-    <p:sldId xmlns:r="http://schemas.openxmlformats.org/officeDocument/2006/relationships" id="265" r:id="R8eecf1b3682845b3"/>
-    <p:sldId xmlns:r="http://schemas.openxmlformats.org/officeDocument/2006/relationships" id="266" r:id="R60d69ab22bc44df7"/>
-    <p:sldId xmlns:r="http://schemas.openxmlformats.org/officeDocument/2006/relationships" id="267" r:id="R960a48f380f04092"/>
-    <p:sldId xmlns:r="http://schemas.openxmlformats.org/officeDocument/2006/relationships" id="268" r:id="Re25150b16b8544d3"/>
-    <p:sldId xmlns:r="http://schemas.openxmlformats.org/officeDocument/2006/relationships" id="269" r:id="R36e76b8e34874b41"/>
-    <p:sldId xmlns:r="http://schemas.openxmlformats.org/officeDocument/2006/relationships" id="270" r:id="R513016b270424964"/>
-    <p:sldId xmlns:r="http://schemas.openxmlformats.org/officeDocument/2006/relationships" id="271" r:id="R196fed575d30431f"/>
-    <p:sldId xmlns:r="http://schemas.openxmlformats.org/officeDocument/2006/relationships" id="272" r:id="R9d5c9c6926484ce1"/>
-    <p:sldId xmlns:r="http://schemas.openxmlformats.org/officeDocument/2006/relationships" id="273" r:id="Re7d2ae9bb3794888"/>
-    <p:sldId xmlns:r="http://schemas.openxmlformats.org/officeDocument/2006/relationships" id="274" r:id="R3c54325061e349a5"/>
-    <p:sldId xmlns:r="http://schemas.openxmlformats.org/officeDocument/2006/relationships" id="275" r:id="Rb5dafeb13eef466a"/>
-    <p:sldId xmlns:r="http://schemas.openxmlformats.org/officeDocument/2006/relationships" id="276" r:id="R95d19cc82cc747b5"/>
-    <p:sldId xmlns:r="http://schemas.openxmlformats.org/officeDocument/2006/relationships" id="277" r:id="Red59e6238d604f8f"/>
-    <p:sldId xmlns:r="http://schemas.openxmlformats.org/officeDocument/2006/relationships" id="278" r:id="R0abf69a961d4463d"/>
-    <p:sldId xmlns:r="http://schemas.openxmlformats.org/officeDocument/2006/relationships" id="279" r:id="R561cc27dc3fe4115"/>
-    <p:sldId xmlns:r="http://schemas.openxmlformats.org/officeDocument/2006/relationships" id="280" r:id="Rf2cb714ce5aa4f6a"/>
-    <p:sldId xmlns:r="http://schemas.openxmlformats.org/officeDocument/2006/relationships" id="281" r:id="R5ecd827535fe4afd"/>
-    <p:sldId xmlns:r="http://schemas.openxmlformats.org/officeDocument/2006/relationships" id="282" r:id="Rd26a4b4a2d024f73"/>
-    <p:sldId xmlns:r="http://schemas.openxmlformats.org/officeDocument/2006/relationships" id="283" r:id="Rc61b76ede2e74da2"/>
-    <p:sldId xmlns:r="http://schemas.openxmlformats.org/officeDocument/2006/relationships" id="284" r:id="Rb084612eef214834"/>
+    <p:sldId xmlns:r="http://schemas.openxmlformats.org/officeDocument/2006/relationships" id="256" r:id="Rfd651d44a03e4d55"/>
+    <p:sldId xmlns:r="http://schemas.openxmlformats.org/officeDocument/2006/relationships" id="257" r:id="R7e9c24de386a49f8"/>
+    <p:sldId xmlns:r="http://schemas.openxmlformats.org/officeDocument/2006/relationships" id="258" r:id="Ra6d6e37968ae4f1f"/>
+    <p:sldId xmlns:r="http://schemas.openxmlformats.org/officeDocument/2006/relationships" id="259" r:id="R9ca4f8c2aff54080"/>
+    <p:sldId xmlns:r="http://schemas.openxmlformats.org/officeDocument/2006/relationships" id="260" r:id="R1de228f91d664d31"/>
+    <p:sldId xmlns:r="http://schemas.openxmlformats.org/officeDocument/2006/relationships" id="261" r:id="Reb73461460454fc3"/>
+    <p:sldId xmlns:r="http://schemas.openxmlformats.org/officeDocument/2006/relationships" id="262" r:id="R25f942f45ad54a29"/>
+    <p:sldId xmlns:r="http://schemas.openxmlformats.org/officeDocument/2006/relationships" id="263" r:id="R101cc016a6c140d1"/>
+    <p:sldId xmlns:r="http://schemas.openxmlformats.org/officeDocument/2006/relationships" id="264" r:id="R00332fb69a164079"/>
+    <p:sldId xmlns:r="http://schemas.openxmlformats.org/officeDocument/2006/relationships" id="265" r:id="R3a5266a7160f47ae"/>
+    <p:sldId xmlns:r="http://schemas.openxmlformats.org/officeDocument/2006/relationships" id="266" r:id="R27758c37ff1f4041"/>
+    <p:sldId xmlns:r="http://schemas.openxmlformats.org/officeDocument/2006/relationships" id="267" r:id="R4d1e0aed6ce64ede"/>
+    <p:sldId xmlns:r="http://schemas.openxmlformats.org/officeDocument/2006/relationships" id="268" r:id="R110788e38f9e42a0"/>
+    <p:sldId xmlns:r="http://schemas.openxmlformats.org/officeDocument/2006/relationships" id="269" r:id="Re683d5472e32499a"/>
+    <p:sldId xmlns:r="http://schemas.openxmlformats.org/officeDocument/2006/relationships" id="270" r:id="Rbd4c8bf987164e3e"/>
+    <p:sldId xmlns:r="http://schemas.openxmlformats.org/officeDocument/2006/relationships" id="271" r:id="Ra72799b4b9b1402e"/>
+    <p:sldId xmlns:r="http://schemas.openxmlformats.org/officeDocument/2006/relationships" id="272" r:id="Rf5dc64c4c4ad43eb"/>
+    <p:sldId xmlns:r="http://schemas.openxmlformats.org/officeDocument/2006/relationships" id="273" r:id="Rfdc25cf90d6d4a68"/>
+    <p:sldId xmlns:r="http://schemas.openxmlformats.org/officeDocument/2006/relationships" id="274" r:id="R05ab3441cb754d4d"/>
+    <p:sldId xmlns:r="http://schemas.openxmlformats.org/officeDocument/2006/relationships" id="275" r:id="R458d04648f4e498e"/>
+    <p:sldId xmlns:r="http://schemas.openxmlformats.org/officeDocument/2006/relationships" id="276" r:id="R372cf4d4fbfa4241"/>
+    <p:sldId xmlns:r="http://schemas.openxmlformats.org/officeDocument/2006/relationships" id="277" r:id="Rc29c332078f94b63"/>
+    <p:sldId xmlns:r="http://schemas.openxmlformats.org/officeDocument/2006/relationships" id="278" r:id="Rec008b1552924f36"/>
+    <p:sldId xmlns:r="http://schemas.openxmlformats.org/officeDocument/2006/relationships" id="279" r:id="R8002191bcc084e10"/>
+    <p:sldId xmlns:r="http://schemas.openxmlformats.org/officeDocument/2006/relationships" id="280" r:id="R597adb42411e4e7a"/>
+    <p:sldId xmlns:r="http://schemas.openxmlformats.org/officeDocument/2006/relationships" id="281" r:id="R7852d0446a4e44b8"/>
+    <p:sldId xmlns:r="http://schemas.openxmlformats.org/officeDocument/2006/relationships" id="282" r:id="R68f3d8b9f55e49fa"/>
+    <p:sldId xmlns:r="http://schemas.openxmlformats.org/officeDocument/2006/relationships" id="283" r:id="R8e4aeae810a346f4"/>
+    <p:sldId xmlns:r="http://schemas.openxmlformats.org/officeDocument/2006/relationships" id="284" r:id="R9842b636111f4d79"/>
   </p:sldIdLst>
   <p:sldSz cx="12192000" cy="6858000"/>
   <p:notesSz cx="6858000" cy="9144000"/>
@@ -1535,7 +1535,7 @@
           <a:lstStyle xmlns:a="http://schemas.openxmlformats.org/drawingml/2006/main"/>
           <a:p xmlns:a="http://schemas.openxmlformats.org/drawingml/2006/main">
             <a:r>
-              <a:t>Timing: 3 minutes. Take an initial vote without discussion. Record it for comparison with the final decision.</a:t>
+              <a:t>Timing: 7 minutes. Present the inherited output without diagnosis. Students then request a read-only StatsClaw audit of the unit, key, join cardinality, treatment, and estimand before assigning a status.</a:t>
             </a:r>
           </a:p>
           <a:p xmlns:a="http://schemas.openxmlformats.org/drawingml/2006/main">
@@ -1550,7 +1550,12 @@
           </a:p>
           <a:p xmlns:a="http://schemas.openxmlformats.org/drawingml/2006/main">
             <a:r>
-              <a:t>Synthetic teaching data designed for this lab; no external claims.</a:t>
+              <a:t>summer school/afternoon_lab/data/case_b_analysis_received.csv</a:t>
+            </a:r>
+          </a:p>
+          <a:p xmlns:a="http://schemas.openxmlformats.org/drawingml/2006/main">
+            <a:r>
+              <a:t>Synthetic teaching data designed for this lab.</a:t>
             </a:r>
           </a:p>
         </p:txBody>
@@ -2045,7 +2050,7 @@
           <a:lstStyle xmlns:a="http://schemas.openxmlformats.org/drawingml/2006/main"/>
           <a:p xmlns:a="http://schemas.openxmlformats.org/drawingml/2006/main">
             <a:r>
-              <a:t>Timing: 10 minutes. Reveal one line at a time. Ask which design-contract gate each fact violates. The inherited analysis used program_participant even though offered_training remains available. The repair preserves the randomized ITT experiment and uses attendance only to diagnose take-up.</a:t>
+              <a:t>Timing: 10 minutes. Reveal exactly two failures: unit/cardinality drift and estimand drift. Connect the compliance matrix to the distinction between randomized offer and post-randomization participation.</a:t>
             </a:r>
           </a:p>
           <a:p xmlns:a="http://schemas.openxmlformats.org/drawingml/2006/main">
@@ -2060,7 +2065,22 @@
           </a:p>
           <a:p xmlns:a="http://schemas.openxmlformats.org/drawingml/2006/main">
             <a:r>
-              <a:t>Synthetic teaching data designed for this lab; no external claims.</a:t>
+              <a:t>summer school/afternoon_lab/data/case_b_analysis_received.csv</a:t>
+            </a:r>
+          </a:p>
+          <a:p xmlns:a="http://schemas.openxmlformats.org/drawingml/2006/main">
+            <a:r>
+              <a:t>summer school/afternoon_lab/data/case_b_assignment.csv</a:t>
+            </a:r>
+          </a:p>
+          <a:p xmlns:a="http://schemas.openxmlformats.org/drawingml/2006/main">
+            <a:r>
+              <a:t>summer school/afternoon_lab/data/case_b_attendance_log.csv</a:t>
+            </a:r>
+          </a:p>
+          <a:p xmlns:a="http://schemas.openxmlformats.org/drawingml/2006/main">
+            <a:r>
+              <a:t>Synthetic teaching data designed for this lab.</a:t>
             </a:r>
           </a:p>
         </p:txBody>
@@ -2130,7 +2150,7 @@
           <a:lstStyle xmlns:a="http://schemas.openxmlformats.org/drawingml/2006/main"/>
           <a:p xmlns:a="http://schemas.openxmlformats.org/drawingml/2006/main">
             <a:r>
-              <a:t>Timing: 7 minutes. Compare the expected audit output with each team's pre-reveal status and evidence.</a:t>
+              <a:t>Timing: 6 minutes. Read the chart and audit rail together: control has one row per applicant; offered applicants generate 430 excess rows; all duplicated IDs are offered; status is BLOCK.</a:t>
             </a:r>
           </a:p>
           <a:p xmlns:a="http://schemas.openxmlformats.org/drawingml/2006/main">
@@ -2230,7 +2250,7 @@
           <a:lstStyle xmlns:a="http://schemas.openxmlformats.org/drawingml/2006/main"/>
           <a:p xmlns:a="http://schemas.openxmlformats.org/drawingml/2006/main">
             <a:r>
-              <a:t>Timing: 5 minutes. The control side remains one row per applicant. The offered side contains 430 more rows than unique applicants, so row-weighted analysis changes the experiment.</a:t>
+              <a:t>Timing: 5 minutes. Reconstruct the intended applicant-level ITT: 69% offered minus 62% control equals +7 pp. The inherited +5.6 pp uses a different unit and post-randomization exposure.</a:t>
             </a:r>
           </a:p>
           <a:p xmlns:a="http://schemas.openxmlformats.org/drawingml/2006/main">
@@ -2245,12 +2265,12 @@
           </a:p>
           <a:p xmlns:a="http://schemas.openxmlformats.org/drawingml/2006/main">
             <a:r>
-              <a:t>summer school/afternoon_lab/data/case_b_analysis_received.csv</a:t>
-            </a:r>
-          </a:p>
-          <a:p xmlns:a="http://schemas.openxmlformats.org/drawingml/2006/main">
-            <a:r>
               <a:t>summer school/afternoon_lab/data/case_b_assignment.csv</a:t>
+            </a:r>
+          </a:p>
+          <a:p xmlns:a="http://schemas.openxmlformats.org/drawingml/2006/main">
+            <a:r>
+              <a:t>summer school/afternoon_lab/data/case_b_followup.csv</a:t>
             </a:r>
           </a:p>
           <a:p xmlns:a="http://schemas.openxmlformats.org/drawingml/2006/main">
@@ -3063,7 +3083,7 @@
   </p:cSld>
   <p:clrMap bg1="lt1" tx1="dk1" bg2="lt2" tx2="dk2" accent1="accent1" accent2="accent2" accent3="accent3" accent4="accent4" accent5="accent5" accent6="accent6" hlink="hlink" folHlink="folHlink"/>
   <p:sldLayoutIdLst>
-    <p:sldLayoutId xmlns:r="http://schemas.openxmlformats.org/officeDocument/2006/relationships" id="2147483649" r:id="Rb33112e81eeb421e"/>
+    <p:sldLayoutId xmlns:r="http://schemas.openxmlformats.org/officeDocument/2006/relationships" id="2147483649" r:id="R4c81015a9afc4093"/>
   </p:sldLayoutIdLst>
   <p:txStyles>
     <p:titleStyle>
@@ -3614,7 +3634,7 @@
           <p:cNvPr id="6" name="page-number">
             <a:extLst xmlns:a="http://schemas.openxmlformats.org/drawingml/2006/main">
               <a:ext uri="{FF2B5EF4-FFF2-40B4-BE49-F238E27FC236}">
-                <a16:creationId xmlns:a16="http://schemas.microsoft.com/office/drawing/2014/main" id="{1BA85F49-F5D5-46AC-878B-C3FDDC783955}"/>
+                <a16:creationId xmlns:a16="http://schemas.microsoft.com/office/drawing/2014/main" id="{4DCF43CE-F06E-4E93-8883-662FDC20A73A}"/>
               </a:ext>
             </a:extLst>
           </p:cNvPr>
@@ -3664,7 +3684,7 @@
           <p:cNvPr id="2" name="title-accent">
             <a:extLst xmlns:a="http://schemas.openxmlformats.org/drawingml/2006/main">
               <a:ext uri="{FF2B5EF4-FFF2-40B4-BE49-F238E27FC236}">
-                <a16:creationId xmlns:a16="http://schemas.microsoft.com/office/drawing/2014/main" id="{71FA92C7-16FA-48BE-8B9D-2BBB1B05CC27}"/>
+                <a16:creationId xmlns:a16="http://schemas.microsoft.com/office/drawing/2014/main" id="{AB747938-DDF7-4956-BB50-373545D28099}"/>
               </a:ext>
             </a:extLst>
           </p:cNvPr>
@@ -3697,7 +3717,7 @@
           <p:cNvPr id="3" name="title">
             <a:extLst xmlns:a="http://schemas.openxmlformats.org/drawingml/2006/main">
               <a:ext uri="{FF2B5EF4-FFF2-40B4-BE49-F238E27FC236}">
-                <a16:creationId xmlns:a16="http://schemas.microsoft.com/office/drawing/2014/main" id="{9D3733B0-30C5-49E4-81DF-37B2215063C6}"/>
+                <a16:creationId xmlns:a16="http://schemas.microsoft.com/office/drawing/2014/main" id="{CB411A14-85BB-4844-A74E-8AC3F2ACB56B}"/>
               </a:ext>
             </a:extLst>
           </p:cNvPr>
@@ -3747,7 +3767,7 @@
           <p:cNvPr id="4" name="subtitle">
             <a:extLst xmlns:a="http://schemas.openxmlformats.org/drawingml/2006/main">
               <a:ext uri="{FF2B5EF4-FFF2-40B4-BE49-F238E27FC236}">
-                <a16:creationId xmlns:a16="http://schemas.microsoft.com/office/drawing/2014/main" id="{663273A6-77F6-4E71-BEE0-B75F2D673B5E}"/>
+                <a16:creationId xmlns:a16="http://schemas.microsoft.com/office/drawing/2014/main" id="{7BC3CCAB-3704-4117-B850-C0F530599E10}"/>
               </a:ext>
             </a:extLst>
           </p:cNvPr>
@@ -3797,7 +3817,7 @@
           <p:cNvPr id="5" name="tagline">
             <a:extLst xmlns:a="http://schemas.openxmlformats.org/drawingml/2006/main">
               <a:ext uri="{FF2B5EF4-FFF2-40B4-BE49-F238E27FC236}">
-                <a16:creationId xmlns:a16="http://schemas.microsoft.com/office/drawing/2014/main" id="{AE30C093-CD7F-404F-BB08-479199C88D27}"/>
+                <a16:creationId xmlns:a16="http://schemas.microsoft.com/office/drawing/2014/main" id="{8ED3938F-90AB-4655-9970-0B4D962D5DD2}"/>
               </a:ext>
             </a:extLst>
           </p:cNvPr>
@@ -3845,7 +3865,7 @@
     </p:spTree>
     <p:extLst>
       <p:ext uri="{BB962C8B-B14F-4D97-AF65-F5344CB8AC3E}">
-        <p14:creationId xmlns:p14="http://schemas.microsoft.com/office/powerpoint/2010/main" val="2140532892"/>
+        <p14:creationId xmlns:p14="http://schemas.microsoft.com/office/powerpoint/2010/main" val="168969521"/>
       </p:ext>
     </p:extLst>
   </p:cSld>
@@ -3876,7 +3896,7 @@
           <p:cNvPr id="9" name="slide-title">
             <a:extLst xmlns:a="http://schemas.openxmlformats.org/drawingml/2006/main">
               <a:ext uri="{FF2B5EF4-FFF2-40B4-BE49-F238E27FC236}">
-                <a16:creationId xmlns:a16="http://schemas.microsoft.com/office/drawing/2014/main" id="{9A79F910-8056-4283-B7FC-3C038D73B7B0}"/>
+                <a16:creationId xmlns:a16="http://schemas.microsoft.com/office/drawing/2014/main" id="{1EBE060C-16A3-4BC6-BAB1-6D8A93D43E98}"/>
               </a:ext>
             </a:extLst>
           </p:cNvPr>
@@ -3926,7 +3946,7 @@
           <p:cNvPr id="2" name="rule-68-107">
             <a:extLst xmlns:a="http://schemas.openxmlformats.org/drawingml/2006/main">
               <a:ext uri="{FF2B5EF4-FFF2-40B4-BE49-F238E27FC236}">
-                <a16:creationId xmlns:a16="http://schemas.microsoft.com/office/drawing/2014/main" id="{7D4D111A-457A-4655-99CF-D301FAB345F3}"/>
+                <a16:creationId xmlns:a16="http://schemas.microsoft.com/office/drawing/2014/main" id="{3B9C5BA2-B813-4282-84CD-BB6F76074C28}"/>
               </a:ext>
             </a:extLst>
           </p:cNvPr>
@@ -3959,7 +3979,7 @@
           <p:cNvPr id="3" name="page-number">
             <a:extLst xmlns:a="http://schemas.openxmlformats.org/drawingml/2006/main">
               <a:ext uri="{FF2B5EF4-FFF2-40B4-BE49-F238E27FC236}">
-                <a16:creationId xmlns:a16="http://schemas.microsoft.com/office/drawing/2014/main" id="{C4500CAE-B0BD-49B4-AE3A-25FCA083B98C}"/>
+                <a16:creationId xmlns:a16="http://schemas.microsoft.com/office/drawing/2014/main" id="{E5C5C0ED-BA7B-442B-B30B-A4F0DFB6C598}"/>
               </a:ext>
             </a:extLst>
           </p:cNvPr>
@@ -4009,7 +4029,7 @@
           <p:cNvPr id="4" name="case-label">
             <a:extLst xmlns:a="http://schemas.openxmlformats.org/drawingml/2006/main">
               <a:ext uri="{FF2B5EF4-FFF2-40B4-BE49-F238E27FC236}">
-                <a16:creationId xmlns:a16="http://schemas.microsoft.com/office/drawing/2014/main" id="{83CBA958-1F7A-4D61-8AD5-13990A3AAA50}"/>
+                <a16:creationId xmlns:a16="http://schemas.microsoft.com/office/drawing/2014/main" id="{8CC175FD-A8DC-46DF-9D45-38C6B196E16B}"/>
               </a:ext>
             </a:extLst>
           </p:cNvPr>
@@ -4059,7 +4079,7 @@
           <p:cNvPr id="5" name="question">
             <a:extLst xmlns:a="http://schemas.openxmlformats.org/drawingml/2006/main">
               <a:ext uri="{FF2B5EF4-FFF2-40B4-BE49-F238E27FC236}">
-                <a16:creationId xmlns:a16="http://schemas.microsoft.com/office/drawing/2014/main" id="{7FEB01AE-D21E-490F-8377-3E9995E5200F}"/>
+                <a16:creationId xmlns:a16="http://schemas.microsoft.com/office/drawing/2014/main" id="{2B093D2F-82B3-45C5-9113-991C934332E1}"/>
               </a:ext>
             </a:extLst>
           </p:cNvPr>
@@ -4126,7 +4146,7 @@
           <p:cNvPr id="6" name="design">
             <a:extLst xmlns:a="http://schemas.openxmlformats.org/drawingml/2006/main">
               <a:ext uri="{FF2B5EF4-FFF2-40B4-BE49-F238E27FC236}">
-                <a16:creationId xmlns:a16="http://schemas.microsoft.com/office/drawing/2014/main" id="{FFBF4DA5-6FC1-47EE-A868-897A7124CDD0}"/>
+                <a16:creationId xmlns:a16="http://schemas.microsoft.com/office/drawing/2014/main" id="{EFD90746-BF4D-4F24-8BE5-0C633B36FF78}"/>
               </a:ext>
             </a:extLst>
           </p:cNvPr>
@@ -4176,7 +4196,7 @@
           <p:cNvPr id="7" name="estimand">
             <a:extLst xmlns:a="http://schemas.openxmlformats.org/drawingml/2006/main">
               <a:ext uri="{FF2B5EF4-FFF2-40B4-BE49-F238E27FC236}">
-                <a16:creationId xmlns:a16="http://schemas.microsoft.com/office/drawing/2014/main" id="{059B9EAE-4D4A-4690-B1E4-8C519831E0F3}"/>
+                <a16:creationId xmlns:a16="http://schemas.microsoft.com/office/drawing/2014/main" id="{141213CD-030F-4DE0-95B0-480E582769BD}"/>
               </a:ext>
             </a:extLst>
           </p:cNvPr>
@@ -4226,7 +4246,7 @@
           <p:cNvPr id="8" name="unit">
             <a:extLst xmlns:a="http://schemas.openxmlformats.org/drawingml/2006/main">
               <a:ext uri="{FF2B5EF4-FFF2-40B4-BE49-F238E27FC236}">
-                <a16:creationId xmlns:a16="http://schemas.microsoft.com/office/drawing/2014/main" id="{EF1A8553-F802-4B3E-9837-35116D0748A4}"/>
+                <a16:creationId xmlns:a16="http://schemas.microsoft.com/office/drawing/2014/main" id="{73111F73-4603-4373-B954-5C284F70252B}"/>
               </a:ext>
             </a:extLst>
           </p:cNvPr>
@@ -4274,7 +4294,7 @@
     </p:spTree>
     <p:extLst>
       <p:ext uri="{BB962C8B-B14F-4D97-AF65-F5344CB8AC3E}">
-        <p14:creationId xmlns:p14="http://schemas.microsoft.com/office/powerpoint/2010/main" val="1097364697"/>
+        <p14:creationId xmlns:p14="http://schemas.microsoft.com/office/powerpoint/2010/main" val="619265982"/>
       </p:ext>
     </p:extLst>
   </p:cSld>
@@ -4305,7 +4325,7 @@
           <p:cNvPr id="13" name="slide-title">
             <a:extLst xmlns:a="http://schemas.openxmlformats.org/drawingml/2006/main">
               <a:ext uri="{FF2B5EF4-FFF2-40B4-BE49-F238E27FC236}">
-                <a16:creationId xmlns:a16="http://schemas.microsoft.com/office/drawing/2014/main" id="{7695B402-67B0-47C8-BA3B-2494FA807C5E}"/>
+                <a16:creationId xmlns:a16="http://schemas.microsoft.com/office/drawing/2014/main" id="{9D773F33-A8BF-4196-947F-1FC3941A00D5}"/>
               </a:ext>
             </a:extLst>
           </p:cNvPr>
@@ -4355,7 +4375,7 @@
           <p:cNvPr id="2" name="rule-68-107">
             <a:extLst xmlns:a="http://schemas.openxmlformats.org/drawingml/2006/main">
               <a:ext uri="{FF2B5EF4-FFF2-40B4-BE49-F238E27FC236}">
-                <a16:creationId xmlns:a16="http://schemas.microsoft.com/office/drawing/2014/main" id="{052C89CB-92D4-457E-803A-CEA600032E42}"/>
+                <a16:creationId xmlns:a16="http://schemas.microsoft.com/office/drawing/2014/main" id="{EBCC0586-9A74-4419-B127-9C08F970CB06}"/>
               </a:ext>
             </a:extLst>
           </p:cNvPr>
@@ -4388,7 +4408,7 @@
           <p:cNvPr id="3" name="page-number">
             <a:extLst xmlns:a="http://schemas.openxmlformats.org/drawingml/2006/main">
               <a:ext uri="{FF2B5EF4-FFF2-40B4-BE49-F238E27FC236}">
-                <a16:creationId xmlns:a16="http://schemas.microsoft.com/office/drawing/2014/main" id="{DB50CC03-19B4-4F8A-829E-DDDF16FA7F84}"/>
+                <a16:creationId xmlns:a16="http://schemas.microsoft.com/office/drawing/2014/main" id="{755AEC70-8BCA-433B-9D81-FC09DA1F2AC7}"/>
               </a:ext>
             </a:extLst>
           </p:cNvPr>
@@ -4438,7 +4458,7 @@
           <p:cNvPr id="4" name="path1">
             <a:extLst xmlns:a="http://schemas.openxmlformats.org/drawingml/2006/main">
               <a:ext uri="{FF2B5EF4-FFF2-40B4-BE49-F238E27FC236}">
-                <a16:creationId xmlns:a16="http://schemas.microsoft.com/office/drawing/2014/main" id="{A74E8B26-81A0-4ED5-9D72-A713830EC727}"/>
+                <a16:creationId xmlns:a16="http://schemas.microsoft.com/office/drawing/2014/main" id="{1B07EB93-CF69-4C80-A170-A511151860B4}"/>
               </a:ext>
             </a:extLst>
           </p:cNvPr>
@@ -4488,7 +4508,7 @@
           <p:cNvPr id="5" name="desc1">
             <a:extLst xmlns:a="http://schemas.openxmlformats.org/drawingml/2006/main">
               <a:ext uri="{FF2B5EF4-FFF2-40B4-BE49-F238E27FC236}">
-                <a16:creationId xmlns:a16="http://schemas.microsoft.com/office/drawing/2014/main" id="{9BA389C5-3AC9-4F6A-88B0-F60E9682B4BC}"/>
+                <a16:creationId xmlns:a16="http://schemas.microsoft.com/office/drawing/2014/main" id="{26F2C5E7-CAE9-44BB-90EB-47796D9DAAF0}"/>
               </a:ext>
             </a:extLst>
           </p:cNvPr>
@@ -4538,7 +4558,7 @@
           <p:cNvPr id="6" name="rule-96-217">
             <a:extLst xmlns:a="http://schemas.openxmlformats.org/drawingml/2006/main">
               <a:ext uri="{FF2B5EF4-FFF2-40B4-BE49-F238E27FC236}">
-                <a16:creationId xmlns:a16="http://schemas.microsoft.com/office/drawing/2014/main" id="{B8B0A4D5-99D8-4CC8-8B35-8E159F2884B7}"/>
+                <a16:creationId xmlns:a16="http://schemas.microsoft.com/office/drawing/2014/main" id="{3237B580-7FD9-4E2B-9C5A-35BC14028210}"/>
               </a:ext>
             </a:extLst>
           </p:cNvPr>
@@ -4571,7 +4591,7 @@
           <p:cNvPr id="7" name="path2">
             <a:extLst xmlns:a="http://schemas.openxmlformats.org/drawingml/2006/main">
               <a:ext uri="{FF2B5EF4-FFF2-40B4-BE49-F238E27FC236}">
-                <a16:creationId xmlns:a16="http://schemas.microsoft.com/office/drawing/2014/main" id="{DA5D187F-CAD1-43CE-BEBB-2CC2306E428C}"/>
+                <a16:creationId xmlns:a16="http://schemas.microsoft.com/office/drawing/2014/main" id="{597169B8-563C-450E-B086-547C6AD33B02}"/>
               </a:ext>
             </a:extLst>
           </p:cNvPr>
@@ -4621,7 +4641,7 @@
           <p:cNvPr id="8" name="desc2">
             <a:extLst xmlns:a="http://schemas.openxmlformats.org/drawingml/2006/main">
               <a:ext uri="{FF2B5EF4-FFF2-40B4-BE49-F238E27FC236}">
-                <a16:creationId xmlns:a16="http://schemas.microsoft.com/office/drawing/2014/main" id="{532CF149-54CF-4436-A015-A8282D452ACC}"/>
+                <a16:creationId xmlns:a16="http://schemas.microsoft.com/office/drawing/2014/main" id="{5CE95412-DC74-4733-9F2F-08F2AF68C2B6}"/>
               </a:ext>
             </a:extLst>
           </p:cNvPr>
@@ -4671,7 +4691,7 @@
           <p:cNvPr id="9" name="rule-96-312">
             <a:extLst xmlns:a="http://schemas.openxmlformats.org/drawingml/2006/main">
               <a:ext uri="{FF2B5EF4-FFF2-40B4-BE49-F238E27FC236}">
-                <a16:creationId xmlns:a16="http://schemas.microsoft.com/office/drawing/2014/main" id="{CDECA7DC-46A6-4278-8FF2-6B4C10219430}"/>
+                <a16:creationId xmlns:a16="http://schemas.microsoft.com/office/drawing/2014/main" id="{2429F6E4-750F-47FD-8DCC-2D2823966262}"/>
               </a:ext>
             </a:extLst>
           </p:cNvPr>
@@ -4704,7 +4724,7 @@
           <p:cNvPr id="10" name="path3">
             <a:extLst xmlns:a="http://schemas.openxmlformats.org/drawingml/2006/main">
               <a:ext uri="{FF2B5EF4-FFF2-40B4-BE49-F238E27FC236}">
-                <a16:creationId xmlns:a16="http://schemas.microsoft.com/office/drawing/2014/main" id="{9B79665B-A7AB-45BB-8EFC-B55779597C29}"/>
+                <a16:creationId xmlns:a16="http://schemas.microsoft.com/office/drawing/2014/main" id="{1EE82531-908B-4215-964A-056D3C60D049}"/>
               </a:ext>
             </a:extLst>
           </p:cNvPr>
@@ -4754,7 +4774,7 @@
           <p:cNvPr id="11" name="desc3">
             <a:extLst xmlns:a="http://schemas.openxmlformats.org/drawingml/2006/main">
               <a:ext uri="{FF2B5EF4-FFF2-40B4-BE49-F238E27FC236}">
-                <a16:creationId xmlns:a16="http://schemas.microsoft.com/office/drawing/2014/main" id="{568AD3B5-D8BF-4C54-B977-0E1DEC28E603}"/>
+                <a16:creationId xmlns:a16="http://schemas.microsoft.com/office/drawing/2014/main" id="{53587A93-C1F5-4DD2-B701-B0444A438C24}"/>
               </a:ext>
             </a:extLst>
           </p:cNvPr>
@@ -4804,7 +4824,7 @@
           <p:cNvPr id="12" name="question">
             <a:extLst xmlns:a="http://schemas.openxmlformats.org/drawingml/2006/main">
               <a:ext uri="{FF2B5EF4-FFF2-40B4-BE49-F238E27FC236}">
-                <a16:creationId xmlns:a16="http://schemas.microsoft.com/office/drawing/2014/main" id="{35E8F0FC-4C93-45CA-8835-329ACAC556AD}"/>
+                <a16:creationId xmlns:a16="http://schemas.microsoft.com/office/drawing/2014/main" id="{7C0F0C60-AD1B-42ED-ACC1-48B3D6330424}"/>
               </a:ext>
             </a:extLst>
           </p:cNvPr>
@@ -4852,7 +4872,7 @@
     </p:spTree>
     <p:extLst>
       <p:ext uri="{BB962C8B-B14F-4D97-AF65-F5344CB8AC3E}">
-        <p14:creationId xmlns:p14="http://schemas.microsoft.com/office/powerpoint/2010/main" val="1036067907"/>
+        <p14:creationId xmlns:p14="http://schemas.microsoft.com/office/powerpoint/2010/main" val="2107189658"/>
       </p:ext>
     </p:extLst>
   </p:cSld>
@@ -4883,7 +4903,7 @@
           <p:cNvPr id="7" name="slide-title">
             <a:extLst xmlns:a="http://schemas.openxmlformats.org/drawingml/2006/main">
               <a:ext uri="{FF2B5EF4-FFF2-40B4-BE49-F238E27FC236}">
-                <a16:creationId xmlns:a16="http://schemas.microsoft.com/office/drawing/2014/main" id="{0674EB15-54FA-4632-A580-76C5C1F5C1D0}"/>
+                <a16:creationId xmlns:a16="http://schemas.microsoft.com/office/drawing/2014/main" id="{B0C91D7C-8996-44DD-83F7-D05F119CC16E}"/>
               </a:ext>
             </a:extLst>
           </p:cNvPr>
@@ -4933,7 +4953,7 @@
           <p:cNvPr id="2" name="rule-68-107">
             <a:extLst xmlns:a="http://schemas.openxmlformats.org/drawingml/2006/main">
               <a:ext uri="{FF2B5EF4-FFF2-40B4-BE49-F238E27FC236}">
-                <a16:creationId xmlns:a16="http://schemas.microsoft.com/office/drawing/2014/main" id="{5DF3D168-06CC-4210-9137-4E44850107E9}"/>
+                <a16:creationId xmlns:a16="http://schemas.microsoft.com/office/drawing/2014/main" id="{DFEBB817-DD67-4747-9E1B-A1EC562E5248}"/>
               </a:ext>
             </a:extLst>
           </p:cNvPr>
@@ -4966,7 +4986,7 @@
           <p:cNvPr id="3" name="page-number">
             <a:extLst xmlns:a="http://schemas.openxmlformats.org/drawingml/2006/main">
               <a:ext uri="{FF2B5EF4-FFF2-40B4-BE49-F238E27FC236}">
-                <a16:creationId xmlns:a16="http://schemas.microsoft.com/office/drawing/2014/main" id="{984EADD0-0E5F-4E17-8B35-812607FD5C66}"/>
+                <a16:creationId xmlns:a16="http://schemas.microsoft.com/office/drawing/2014/main" id="{1466D721-9AB1-45E1-8B66-71BDC64B7452}"/>
               </a:ext>
             </a:extLst>
           </p:cNvPr>
@@ -5016,7 +5036,7 @@
           <p:cNvPr id="4" name="prompt-rule">
             <a:extLst xmlns:a="http://schemas.openxmlformats.org/drawingml/2006/main">
               <a:ext uri="{FF2B5EF4-FFF2-40B4-BE49-F238E27FC236}">
-                <a16:creationId xmlns:a16="http://schemas.microsoft.com/office/drawing/2014/main" id="{FF6C241C-6893-47BA-87BB-36313BDA0143}"/>
+                <a16:creationId xmlns:a16="http://schemas.microsoft.com/office/drawing/2014/main" id="{7C7E87AD-CB0B-4570-82FF-D6A717F4439C}"/>
               </a:ext>
             </a:extLst>
           </p:cNvPr>
@@ -5049,7 +5069,7 @@
           <p:cNvPr id="5" name="prompt">
             <a:extLst xmlns:a="http://schemas.openxmlformats.org/drawingml/2006/main">
               <a:ext uri="{FF2B5EF4-FFF2-40B4-BE49-F238E27FC236}">
-                <a16:creationId xmlns:a16="http://schemas.microsoft.com/office/drawing/2014/main" id="{3C195B06-851A-4DCE-8854-63F9D3B14FBB}"/>
+                <a16:creationId xmlns:a16="http://schemas.microsoft.com/office/drawing/2014/main" id="{01C28E32-A9A3-4A9F-9D94-0A628B7C10CC}"/>
               </a:ext>
             </a:extLst>
           </p:cNvPr>
@@ -5165,7 +5185,7 @@
           <p:cNvPr id="6" name="instruction">
             <a:extLst xmlns:a="http://schemas.openxmlformats.org/drawingml/2006/main">
               <a:ext uri="{FF2B5EF4-FFF2-40B4-BE49-F238E27FC236}">
-                <a16:creationId xmlns:a16="http://schemas.microsoft.com/office/drawing/2014/main" id="{C5ED5DC8-E8F9-4788-8B4C-3091E0F395F2}"/>
+                <a16:creationId xmlns:a16="http://schemas.microsoft.com/office/drawing/2014/main" id="{CC6963BD-C228-431A-8F9E-B1A1FAEDC6AD}"/>
               </a:ext>
             </a:extLst>
           </p:cNvPr>
@@ -5213,7 +5233,7 @@
     </p:spTree>
     <p:extLst>
       <p:ext uri="{BB962C8B-B14F-4D97-AF65-F5344CB8AC3E}">
-        <p14:creationId xmlns:p14="http://schemas.microsoft.com/office/powerpoint/2010/main" val="656018359"/>
+        <p14:creationId xmlns:p14="http://schemas.microsoft.com/office/powerpoint/2010/main" val="469677700"/>
       </p:ext>
     </p:extLst>
   </p:cSld>
@@ -5244,7 +5264,7 @@
           <p:cNvPr id="18" name="slide-title">
             <a:extLst xmlns:a="http://schemas.openxmlformats.org/drawingml/2006/main">
               <a:ext uri="{FF2B5EF4-FFF2-40B4-BE49-F238E27FC236}">
-                <a16:creationId xmlns:a16="http://schemas.microsoft.com/office/drawing/2014/main" id="{73E13F34-90CD-4FE1-87DA-356E2AA5C732}"/>
+                <a16:creationId xmlns:a16="http://schemas.microsoft.com/office/drawing/2014/main" id="{7655EACC-1CDC-452A-A9DE-8A2B689FCDF8}"/>
               </a:ext>
             </a:extLst>
           </p:cNvPr>
@@ -5294,7 +5314,7 @@
           <p:cNvPr id="2" name="rule-68-107">
             <a:extLst xmlns:a="http://schemas.openxmlformats.org/drawingml/2006/main">
               <a:ext uri="{FF2B5EF4-FFF2-40B4-BE49-F238E27FC236}">
-                <a16:creationId xmlns:a16="http://schemas.microsoft.com/office/drawing/2014/main" id="{0DBFF342-A4E7-4D87-A441-481AA800FB17}"/>
+                <a16:creationId xmlns:a16="http://schemas.microsoft.com/office/drawing/2014/main" id="{4C2075ED-0555-4301-B680-654C3423FE07}"/>
               </a:ext>
             </a:extLst>
           </p:cNvPr>
@@ -5327,7 +5347,7 @@
           <p:cNvPr id="3" name="page-number">
             <a:extLst xmlns:a="http://schemas.openxmlformats.org/drawingml/2006/main">
               <a:ext uri="{FF2B5EF4-FFF2-40B4-BE49-F238E27FC236}">
-                <a16:creationId xmlns:a16="http://schemas.microsoft.com/office/drawing/2014/main" id="{6F652228-3545-484F-AF54-B0A529026456}"/>
+                <a16:creationId xmlns:a16="http://schemas.microsoft.com/office/drawing/2014/main" id="{7D084098-3EA7-4489-8262-0A6F7AB1F602}"/>
               </a:ext>
             </a:extLst>
           </p:cNvPr>
@@ -5377,7 +5397,7 @@
           <p:cNvPr id="4" name="bullet-145">
             <a:extLst xmlns:a="http://schemas.openxmlformats.org/drawingml/2006/main">
               <a:ext uri="{FF2B5EF4-FFF2-40B4-BE49-F238E27FC236}">
-                <a16:creationId xmlns:a16="http://schemas.microsoft.com/office/drawing/2014/main" id="{2BF61630-0B4B-4D9C-ABD9-EC48CB363C0F}"/>
+                <a16:creationId xmlns:a16="http://schemas.microsoft.com/office/drawing/2014/main" id="{E41E9572-412F-4EAF-905B-796828EA1DA4}"/>
               </a:ext>
             </a:extLst>
           </p:cNvPr>
@@ -5427,7 +5447,7 @@
           <p:cNvPr id="5" name="bullet-label-145">
             <a:extLst xmlns:a="http://schemas.openxmlformats.org/drawingml/2006/main">
               <a:ext uri="{FF2B5EF4-FFF2-40B4-BE49-F238E27FC236}">
-                <a16:creationId xmlns:a16="http://schemas.microsoft.com/office/drawing/2014/main" id="{6562A634-18F7-4640-AE9F-108A03B0DE9C}"/>
+                <a16:creationId xmlns:a16="http://schemas.microsoft.com/office/drawing/2014/main" id="{E54149F4-4A76-446B-9F15-80B88173F756}"/>
               </a:ext>
             </a:extLst>
           </p:cNvPr>
@@ -5477,7 +5497,7 @@
           <p:cNvPr id="6" name="bullet-detail-145">
             <a:extLst xmlns:a="http://schemas.openxmlformats.org/drawingml/2006/main">
               <a:ext uri="{FF2B5EF4-FFF2-40B4-BE49-F238E27FC236}">
-                <a16:creationId xmlns:a16="http://schemas.microsoft.com/office/drawing/2014/main" id="{47A174C6-4415-4E8A-9D7C-BB8248A28497}"/>
+                <a16:creationId xmlns:a16="http://schemas.microsoft.com/office/drawing/2014/main" id="{59D0E6FA-B668-433C-B962-CBDE142A5EA9}"/>
               </a:ext>
             </a:extLst>
           </p:cNvPr>
@@ -5527,7 +5547,7 @@
           <p:cNvPr id="7" name="bullet-235">
             <a:extLst xmlns:a="http://schemas.openxmlformats.org/drawingml/2006/main">
               <a:ext uri="{FF2B5EF4-FFF2-40B4-BE49-F238E27FC236}">
-                <a16:creationId xmlns:a16="http://schemas.microsoft.com/office/drawing/2014/main" id="{2D1756B8-8A87-4EAE-802F-59B09885BF9D}"/>
+                <a16:creationId xmlns:a16="http://schemas.microsoft.com/office/drawing/2014/main" id="{1B866245-AFC4-4834-9EC1-E6ABFD4F3A4A}"/>
               </a:ext>
             </a:extLst>
           </p:cNvPr>
@@ -5577,7 +5597,7 @@
           <p:cNvPr id="8" name="bullet-label-235">
             <a:extLst xmlns:a="http://schemas.openxmlformats.org/drawingml/2006/main">
               <a:ext uri="{FF2B5EF4-FFF2-40B4-BE49-F238E27FC236}">
-                <a16:creationId xmlns:a16="http://schemas.microsoft.com/office/drawing/2014/main" id="{C40F4D82-0928-4748-8216-54893F7006DD}"/>
+                <a16:creationId xmlns:a16="http://schemas.microsoft.com/office/drawing/2014/main" id="{6899FE7F-D3D2-49AE-B606-7116D7EA18A9}"/>
               </a:ext>
             </a:extLst>
           </p:cNvPr>
@@ -5627,7 +5647,7 @@
           <p:cNvPr id="9" name="bullet-detail-235">
             <a:extLst xmlns:a="http://schemas.openxmlformats.org/drawingml/2006/main">
               <a:ext uri="{FF2B5EF4-FFF2-40B4-BE49-F238E27FC236}">
-                <a16:creationId xmlns:a16="http://schemas.microsoft.com/office/drawing/2014/main" id="{131ECCC5-E0F5-4CE2-8D1A-234729ACD0A6}"/>
+                <a16:creationId xmlns:a16="http://schemas.microsoft.com/office/drawing/2014/main" id="{A9F0252F-E1BF-4C1D-86F5-8A9CACFCCE16}"/>
               </a:ext>
             </a:extLst>
           </p:cNvPr>
@@ -5677,7 +5697,7 @@
           <p:cNvPr id="10" name="bullet-325">
             <a:extLst xmlns:a="http://schemas.openxmlformats.org/drawingml/2006/main">
               <a:ext uri="{FF2B5EF4-FFF2-40B4-BE49-F238E27FC236}">
-                <a16:creationId xmlns:a16="http://schemas.microsoft.com/office/drawing/2014/main" id="{4DB58F4D-82F9-40A1-81AD-82FD5DE70E6F}"/>
+                <a16:creationId xmlns:a16="http://schemas.microsoft.com/office/drawing/2014/main" id="{5BC023B3-99DB-46F8-8C33-5357907A1763}"/>
               </a:ext>
             </a:extLst>
           </p:cNvPr>
@@ -5727,7 +5747,7 @@
           <p:cNvPr id="11" name="bullet-label-325">
             <a:extLst xmlns:a="http://schemas.openxmlformats.org/drawingml/2006/main">
               <a:ext uri="{FF2B5EF4-FFF2-40B4-BE49-F238E27FC236}">
-                <a16:creationId xmlns:a16="http://schemas.microsoft.com/office/drawing/2014/main" id="{4C7E5213-35FF-4365-A68A-CF8F483DFFF4}"/>
+                <a16:creationId xmlns:a16="http://schemas.microsoft.com/office/drawing/2014/main" id="{C3D3F230-C59E-4BA6-9237-3FCA991158B3}"/>
               </a:ext>
             </a:extLst>
           </p:cNvPr>
@@ -5777,7 +5797,7 @@
           <p:cNvPr id="12" name="bullet-detail-325">
             <a:extLst xmlns:a="http://schemas.openxmlformats.org/drawingml/2006/main">
               <a:ext uri="{FF2B5EF4-FFF2-40B4-BE49-F238E27FC236}">
-                <a16:creationId xmlns:a16="http://schemas.microsoft.com/office/drawing/2014/main" id="{6A79ADFD-E274-4579-BF42-4693A5049972}"/>
+                <a16:creationId xmlns:a16="http://schemas.microsoft.com/office/drawing/2014/main" id="{69AC74DC-66AE-48B3-B8B5-542EE16901C6}"/>
               </a:ext>
             </a:extLst>
           </p:cNvPr>
@@ -5827,7 +5847,7 @@
           <p:cNvPr id="13" name="bullet-415">
             <a:extLst xmlns:a="http://schemas.openxmlformats.org/drawingml/2006/main">
               <a:ext uri="{FF2B5EF4-FFF2-40B4-BE49-F238E27FC236}">
-                <a16:creationId xmlns:a16="http://schemas.microsoft.com/office/drawing/2014/main" id="{A2F76AE0-64B0-4429-8EA7-7F6E9C19C9B2}"/>
+                <a16:creationId xmlns:a16="http://schemas.microsoft.com/office/drawing/2014/main" id="{E5663049-C8FB-440C-9943-67C181714FAA}"/>
               </a:ext>
             </a:extLst>
           </p:cNvPr>
@@ -5877,7 +5897,7 @@
           <p:cNvPr id="14" name="bullet-label-415">
             <a:extLst xmlns:a="http://schemas.openxmlformats.org/drawingml/2006/main">
               <a:ext uri="{FF2B5EF4-FFF2-40B4-BE49-F238E27FC236}">
-                <a16:creationId xmlns:a16="http://schemas.microsoft.com/office/drawing/2014/main" id="{E43330FA-2BCA-4AC3-BFE7-93B1C5491A80}"/>
+                <a16:creationId xmlns:a16="http://schemas.microsoft.com/office/drawing/2014/main" id="{9ACF25AA-DE86-4B1C-AA44-F273D347A66A}"/>
               </a:ext>
             </a:extLst>
           </p:cNvPr>
@@ -5927,7 +5947,7 @@
           <p:cNvPr id="15" name="bullet-detail-415">
             <a:extLst xmlns:a="http://schemas.openxmlformats.org/drawingml/2006/main">
               <a:ext uri="{FF2B5EF4-FFF2-40B4-BE49-F238E27FC236}">
-                <a16:creationId xmlns:a16="http://schemas.microsoft.com/office/drawing/2014/main" id="{B6F24C74-D3CD-4040-841E-75F17DEB0BE6}"/>
+                <a16:creationId xmlns:a16="http://schemas.microsoft.com/office/drawing/2014/main" id="{A99A6DCA-1775-42ED-A5FC-5BE1D699B6BF}"/>
               </a:ext>
             </a:extLst>
           </p:cNvPr>
@@ -5977,7 +5997,7 @@
           <p:cNvPr id="16" name="stop">
             <a:extLst xmlns:a="http://schemas.openxmlformats.org/drawingml/2006/main">
               <a:ext uri="{FF2B5EF4-FFF2-40B4-BE49-F238E27FC236}">
-                <a16:creationId xmlns:a16="http://schemas.microsoft.com/office/drawing/2014/main" id="{8F2F5A78-C8C1-4140-B117-1B6B57A6334F}"/>
+                <a16:creationId xmlns:a16="http://schemas.microsoft.com/office/drawing/2014/main" id="{50DA816F-8E6F-4F24-8ADB-0037BABF5B10}"/>
               </a:ext>
             </a:extLst>
           </p:cNvPr>
@@ -6027,7 +6047,7 @@
           <p:cNvPr id="17" name="stop2">
             <a:extLst xmlns:a="http://schemas.openxmlformats.org/drawingml/2006/main">
               <a:ext uri="{FF2B5EF4-FFF2-40B4-BE49-F238E27FC236}">
-                <a16:creationId xmlns:a16="http://schemas.microsoft.com/office/drawing/2014/main" id="{9FF91ECC-20FA-4A30-B664-C7E1E2255302}"/>
+                <a16:creationId xmlns:a16="http://schemas.microsoft.com/office/drawing/2014/main" id="{4F3FC28D-BF3A-4A9D-AE51-C539C1AD9E12}"/>
               </a:ext>
             </a:extLst>
           </p:cNvPr>
@@ -6075,7 +6095,7 @@
     </p:spTree>
     <p:extLst>
       <p:ext uri="{BB962C8B-B14F-4D97-AF65-F5344CB8AC3E}">
-        <p14:creationId xmlns:p14="http://schemas.microsoft.com/office/powerpoint/2010/main" val="671739493"/>
+        <p14:creationId xmlns:p14="http://schemas.microsoft.com/office/powerpoint/2010/main" val="13690829"/>
       </p:ext>
     </p:extLst>
   </p:cSld>
@@ -6106,7 +6126,7 @@
           <p:cNvPr id="16" name="slide-title">
             <a:extLst xmlns:a="http://schemas.openxmlformats.org/drawingml/2006/main">
               <a:ext uri="{FF2B5EF4-FFF2-40B4-BE49-F238E27FC236}">
-                <a16:creationId xmlns:a16="http://schemas.microsoft.com/office/drawing/2014/main" id="{25AE43F4-0A49-4A7A-822D-8B26CCBF44B9}"/>
+                <a16:creationId xmlns:a16="http://schemas.microsoft.com/office/drawing/2014/main" id="{2CA058BC-D3A2-4A9F-A46B-B7F2AA5763B2}"/>
               </a:ext>
             </a:extLst>
           </p:cNvPr>
@@ -6156,7 +6176,7 @@
           <p:cNvPr id="2" name="rule-68-107">
             <a:extLst xmlns:a="http://schemas.openxmlformats.org/drawingml/2006/main">
               <a:ext uri="{FF2B5EF4-FFF2-40B4-BE49-F238E27FC236}">
-                <a16:creationId xmlns:a16="http://schemas.microsoft.com/office/drawing/2014/main" id="{1403B2A6-5B77-463F-A9A4-BAA9B1236B82}"/>
+                <a16:creationId xmlns:a16="http://schemas.microsoft.com/office/drawing/2014/main" id="{7CA620C5-F3E6-4355-8016-8AA432B2D94F}"/>
               </a:ext>
             </a:extLst>
           </p:cNvPr>
@@ -6189,7 +6209,7 @@
           <p:cNvPr id="3" name="page-number">
             <a:extLst xmlns:a="http://schemas.openxmlformats.org/drawingml/2006/main">
               <a:ext uri="{FF2B5EF4-FFF2-40B4-BE49-F238E27FC236}">
-                <a16:creationId xmlns:a16="http://schemas.microsoft.com/office/drawing/2014/main" id="{CA658070-0D33-4F23-BF50-0997351905D2}"/>
+                <a16:creationId xmlns:a16="http://schemas.microsoft.com/office/drawing/2014/main" id="{07337266-4B8F-4882-83DE-9EAA98A70D9D}"/>
               </a:ext>
             </a:extLst>
           </p:cNvPr>
@@ -6239,7 +6259,7 @@
           <p:cNvPr id="4" name="step-0">
             <a:extLst xmlns:a="http://schemas.openxmlformats.org/drawingml/2006/main">
               <a:ext uri="{FF2B5EF4-FFF2-40B4-BE49-F238E27FC236}">
-                <a16:creationId xmlns:a16="http://schemas.microsoft.com/office/drawing/2014/main" id="{91151765-C7A2-4D29-A4FA-EEA1D768F438}"/>
+                <a16:creationId xmlns:a16="http://schemas.microsoft.com/office/drawing/2014/main" id="{9ECFFF05-7BFE-4FBE-96D5-A9925B566A2F}"/>
               </a:ext>
             </a:extLst>
           </p:cNvPr>
@@ -6306,7 +6326,7 @@
           <p:cNvPr id="5" name="arrow-0">
             <a:extLst xmlns:a="http://schemas.openxmlformats.org/drawingml/2006/main">
               <a:ext uri="{FF2B5EF4-FFF2-40B4-BE49-F238E27FC236}">
-                <a16:creationId xmlns:a16="http://schemas.microsoft.com/office/drawing/2014/main" id="{06A73D2C-C6D5-4A37-9EC2-1007D12E5820}"/>
+                <a16:creationId xmlns:a16="http://schemas.microsoft.com/office/drawing/2014/main" id="{77F16248-8162-427C-8230-C98C04074872}"/>
               </a:ext>
             </a:extLst>
           </p:cNvPr>
@@ -6356,7 +6376,7 @@
           <p:cNvPr id="6" name="step-1">
             <a:extLst xmlns:a="http://schemas.openxmlformats.org/drawingml/2006/main">
               <a:ext uri="{FF2B5EF4-FFF2-40B4-BE49-F238E27FC236}">
-                <a16:creationId xmlns:a16="http://schemas.microsoft.com/office/drawing/2014/main" id="{E2F33A43-0914-4580-9AAC-3792E545EE15}"/>
+                <a16:creationId xmlns:a16="http://schemas.microsoft.com/office/drawing/2014/main" id="{5DDE41FC-45BF-4E70-AD29-183970099D1D}"/>
               </a:ext>
             </a:extLst>
           </p:cNvPr>
@@ -6423,7 +6443,7 @@
           <p:cNvPr id="7" name="arrow-1">
             <a:extLst xmlns:a="http://schemas.openxmlformats.org/drawingml/2006/main">
               <a:ext uri="{FF2B5EF4-FFF2-40B4-BE49-F238E27FC236}">
-                <a16:creationId xmlns:a16="http://schemas.microsoft.com/office/drawing/2014/main" id="{B2CA58F9-BAB3-4BF3-AADF-9FD7F6860FCD}"/>
+                <a16:creationId xmlns:a16="http://schemas.microsoft.com/office/drawing/2014/main" id="{34561298-A6BB-4E21-A846-5283CB9EB399}"/>
               </a:ext>
             </a:extLst>
           </p:cNvPr>
@@ -6473,7 +6493,7 @@
           <p:cNvPr id="8" name="step-2">
             <a:extLst xmlns:a="http://schemas.openxmlformats.org/drawingml/2006/main">
               <a:ext uri="{FF2B5EF4-FFF2-40B4-BE49-F238E27FC236}">
-                <a16:creationId xmlns:a16="http://schemas.microsoft.com/office/drawing/2014/main" id="{F19DFB41-352E-4627-ADBE-3F85F2B08385}"/>
+                <a16:creationId xmlns:a16="http://schemas.microsoft.com/office/drawing/2014/main" id="{19617574-12E3-4744-8F77-88F838639588}"/>
               </a:ext>
             </a:extLst>
           </p:cNvPr>
@@ -6540,7 +6560,7 @@
           <p:cNvPr id="9" name="arrow-2">
             <a:extLst xmlns:a="http://schemas.openxmlformats.org/drawingml/2006/main">
               <a:ext uri="{FF2B5EF4-FFF2-40B4-BE49-F238E27FC236}">
-                <a16:creationId xmlns:a16="http://schemas.microsoft.com/office/drawing/2014/main" id="{D87A6CB7-26A1-450A-8B99-EBF1DA614411}"/>
+                <a16:creationId xmlns:a16="http://schemas.microsoft.com/office/drawing/2014/main" id="{C35F269D-6982-4EB9-87D7-2C6B90DCDE22}"/>
               </a:ext>
             </a:extLst>
           </p:cNvPr>
@@ -6590,7 +6610,7 @@
           <p:cNvPr id="10" name="step-3">
             <a:extLst xmlns:a="http://schemas.openxmlformats.org/drawingml/2006/main">
               <a:ext uri="{FF2B5EF4-FFF2-40B4-BE49-F238E27FC236}">
-                <a16:creationId xmlns:a16="http://schemas.microsoft.com/office/drawing/2014/main" id="{D8E01F8B-04FB-422B-8B8D-303FC35C60A6}"/>
+                <a16:creationId xmlns:a16="http://schemas.microsoft.com/office/drawing/2014/main" id="{2BB75FBB-B2A5-43B4-BB44-BD06A14D0F4F}"/>
               </a:ext>
             </a:extLst>
           </p:cNvPr>
@@ -6640,7 +6660,7 @@
           <p:cNvPr id="11" name="arrow-3">
             <a:extLst xmlns:a="http://schemas.openxmlformats.org/drawingml/2006/main">
               <a:ext uri="{FF2B5EF4-FFF2-40B4-BE49-F238E27FC236}">
-                <a16:creationId xmlns:a16="http://schemas.microsoft.com/office/drawing/2014/main" id="{B84C8B2B-0DA9-4A1C-A220-ADC2ACB3F314}"/>
+                <a16:creationId xmlns:a16="http://schemas.microsoft.com/office/drawing/2014/main" id="{2EAC7B7E-AFB0-46C8-B5AA-46FE5B1C5CAD}"/>
               </a:ext>
             </a:extLst>
           </p:cNvPr>
@@ -6690,7 +6710,7 @@
           <p:cNvPr id="12" name="step-4">
             <a:extLst xmlns:a="http://schemas.openxmlformats.org/drawingml/2006/main">
               <a:ext uri="{FF2B5EF4-FFF2-40B4-BE49-F238E27FC236}">
-                <a16:creationId xmlns:a16="http://schemas.microsoft.com/office/drawing/2014/main" id="{C97AC4D1-22C0-4218-8D12-7AC6987DD2E8}"/>
+                <a16:creationId xmlns:a16="http://schemas.microsoft.com/office/drawing/2014/main" id="{56805884-B44C-4EC6-99D7-DA86B92A607B}"/>
               </a:ext>
             </a:extLst>
           </p:cNvPr>
@@ -6757,7 +6777,7 @@
           <p:cNvPr id="13" name="cmd-355">
             <a:extLst xmlns:a="http://schemas.openxmlformats.org/drawingml/2006/main">
               <a:ext uri="{FF2B5EF4-FFF2-40B4-BE49-F238E27FC236}">
-                <a16:creationId xmlns:a16="http://schemas.microsoft.com/office/drawing/2014/main" id="{0A854336-CF5F-4E0F-BE5A-53E10AAFBCCE}"/>
+                <a16:creationId xmlns:a16="http://schemas.microsoft.com/office/drawing/2014/main" id="{AD647DFD-D32C-4820-BDC6-24870BB10157}"/>
               </a:ext>
             </a:extLst>
           </p:cNvPr>
@@ -6807,7 +6827,7 @@
           <p:cNvPr id="14" name="pass-rule">
             <a:extLst xmlns:a="http://schemas.openxmlformats.org/drawingml/2006/main">
               <a:ext uri="{FF2B5EF4-FFF2-40B4-BE49-F238E27FC236}">
-                <a16:creationId xmlns:a16="http://schemas.microsoft.com/office/drawing/2014/main" id="{E0642A7C-F12A-4B7D-B5C4-2E97AC48354C}"/>
+                <a16:creationId xmlns:a16="http://schemas.microsoft.com/office/drawing/2014/main" id="{9E4E64E9-86C4-4D3B-92D5-F202659A37F1}"/>
               </a:ext>
             </a:extLst>
           </p:cNvPr>
@@ -6857,7 +6877,7 @@
           <p:cNvPr id="15" name="no-ship">
             <a:extLst xmlns:a="http://schemas.openxmlformats.org/drawingml/2006/main">
               <a:ext uri="{FF2B5EF4-FFF2-40B4-BE49-F238E27FC236}">
-                <a16:creationId xmlns:a16="http://schemas.microsoft.com/office/drawing/2014/main" id="{CFA4BF59-164F-40DE-9E6E-58780BFF3FA3}"/>
+                <a16:creationId xmlns:a16="http://schemas.microsoft.com/office/drawing/2014/main" id="{DACAE969-E97A-42E5-A86C-C8F5E6053B70}"/>
               </a:ext>
             </a:extLst>
           </p:cNvPr>
@@ -6905,7 +6925,7 @@
     </p:spTree>
     <p:extLst>
       <p:ext uri="{BB962C8B-B14F-4D97-AF65-F5344CB8AC3E}">
-        <p14:creationId xmlns:p14="http://schemas.microsoft.com/office/powerpoint/2010/main" val="670016081"/>
+        <p14:creationId xmlns:p14="http://schemas.microsoft.com/office/powerpoint/2010/main" val="363573276"/>
       </p:ext>
     </p:extLst>
   </p:cSld>
@@ -6936,7 +6956,7 @@
           <p:cNvPr id="21" name="slide-title">
             <a:extLst xmlns:a="http://schemas.openxmlformats.org/drawingml/2006/main">
               <a:ext uri="{FF2B5EF4-FFF2-40B4-BE49-F238E27FC236}">
-                <a16:creationId xmlns:a16="http://schemas.microsoft.com/office/drawing/2014/main" id="{C71F9C63-29DE-4FDA-926D-8054092FACC3}"/>
+                <a16:creationId xmlns:a16="http://schemas.microsoft.com/office/drawing/2014/main" id="{391912CC-D819-4F95-9C90-B48C7335FE41}"/>
               </a:ext>
             </a:extLst>
           </p:cNvPr>
@@ -6986,7 +7006,7 @@
           <p:cNvPr id="2" name="rule-68-107">
             <a:extLst xmlns:a="http://schemas.openxmlformats.org/drawingml/2006/main">
               <a:ext uri="{FF2B5EF4-FFF2-40B4-BE49-F238E27FC236}">
-                <a16:creationId xmlns:a16="http://schemas.microsoft.com/office/drawing/2014/main" id="{4DB5307C-479F-4B62-8C1C-2467361F40D2}"/>
+                <a16:creationId xmlns:a16="http://schemas.microsoft.com/office/drawing/2014/main" id="{9B3EB0E3-9E1C-404C-BEBC-145CD0EAA97D}"/>
               </a:ext>
             </a:extLst>
           </p:cNvPr>
@@ -7019,7 +7039,7 @@
           <p:cNvPr id="3" name="page-number">
             <a:extLst xmlns:a="http://schemas.openxmlformats.org/drawingml/2006/main">
               <a:ext uri="{FF2B5EF4-FFF2-40B4-BE49-F238E27FC236}">
-                <a16:creationId xmlns:a16="http://schemas.microsoft.com/office/drawing/2014/main" id="{5EA9D138-8FB7-4717-AAB2-03BEFBFF4B01}"/>
+                <a16:creationId xmlns:a16="http://schemas.microsoft.com/office/drawing/2014/main" id="{4042AE42-6534-4B1E-B050-0927CA1C453F}"/>
               </a:ext>
             </a:extLst>
           </p:cNvPr>
@@ -7069,7 +7089,7 @@
           <p:cNvPr id="4" name="gate-0">
             <a:extLst xmlns:a="http://schemas.openxmlformats.org/drawingml/2006/main">
               <a:ext uri="{FF2B5EF4-FFF2-40B4-BE49-F238E27FC236}">
-                <a16:creationId xmlns:a16="http://schemas.microsoft.com/office/drawing/2014/main" id="{102CD238-1556-4DD3-BBE7-847F9679FD00}"/>
+                <a16:creationId xmlns:a16="http://schemas.microsoft.com/office/drawing/2014/main" id="{03F1A5F0-ED54-4AE6-8D61-0B7F30372330}"/>
               </a:ext>
             </a:extLst>
           </p:cNvPr>
@@ -7119,7 +7139,7 @@
           <p:cNvPr id="5" name="gate-desc-0">
             <a:extLst xmlns:a="http://schemas.openxmlformats.org/drawingml/2006/main">
               <a:ext uri="{FF2B5EF4-FFF2-40B4-BE49-F238E27FC236}">
-                <a16:creationId xmlns:a16="http://schemas.microsoft.com/office/drawing/2014/main" id="{AFEC9DBA-D187-4821-99B8-D28C8CD0633B}"/>
+                <a16:creationId xmlns:a16="http://schemas.microsoft.com/office/drawing/2014/main" id="{9488A494-C614-478E-A129-998F66196D45}"/>
               </a:ext>
             </a:extLst>
           </p:cNvPr>
@@ -7169,7 +7189,7 @@
           <p:cNvPr id="6" name="rule-88-196">
             <a:extLst xmlns:a="http://schemas.openxmlformats.org/drawingml/2006/main">
               <a:ext uri="{FF2B5EF4-FFF2-40B4-BE49-F238E27FC236}">
-                <a16:creationId xmlns:a16="http://schemas.microsoft.com/office/drawing/2014/main" id="{E9FB1DF8-BFD8-409E-8C2B-3B968B9617F3}"/>
+                <a16:creationId xmlns:a16="http://schemas.microsoft.com/office/drawing/2014/main" id="{587507C1-DEDA-40CA-AACB-C56A2CC87540}"/>
               </a:ext>
             </a:extLst>
           </p:cNvPr>
@@ -7202,7 +7222,7 @@
           <p:cNvPr id="7" name="gate-1">
             <a:extLst xmlns:a="http://schemas.openxmlformats.org/drawingml/2006/main">
               <a:ext uri="{FF2B5EF4-FFF2-40B4-BE49-F238E27FC236}">
-                <a16:creationId xmlns:a16="http://schemas.microsoft.com/office/drawing/2014/main" id="{672AEC73-48C1-4DE1-8084-FBB496331E35}"/>
+                <a16:creationId xmlns:a16="http://schemas.microsoft.com/office/drawing/2014/main" id="{6989C483-2825-4FA3-B6FF-6FCA707C23B0}"/>
               </a:ext>
             </a:extLst>
           </p:cNvPr>
@@ -7252,7 +7272,7 @@
           <p:cNvPr id="8" name="gate-desc-1">
             <a:extLst xmlns:a="http://schemas.openxmlformats.org/drawingml/2006/main">
               <a:ext uri="{FF2B5EF4-FFF2-40B4-BE49-F238E27FC236}">
-                <a16:creationId xmlns:a16="http://schemas.microsoft.com/office/drawing/2014/main" id="{90D357AD-BB81-4E99-AD31-728B8123A5E3}"/>
+                <a16:creationId xmlns:a16="http://schemas.microsoft.com/office/drawing/2014/main" id="{24C44157-4582-4338-B85B-07093ABF8573}"/>
               </a:ext>
             </a:extLst>
           </p:cNvPr>
@@ -7302,7 +7322,7 @@
           <p:cNvPr id="9" name="rule-88-274">
             <a:extLst xmlns:a="http://schemas.openxmlformats.org/drawingml/2006/main">
               <a:ext uri="{FF2B5EF4-FFF2-40B4-BE49-F238E27FC236}">
-                <a16:creationId xmlns:a16="http://schemas.microsoft.com/office/drawing/2014/main" id="{584A397D-F457-4456-92DB-1D129205C588}"/>
+                <a16:creationId xmlns:a16="http://schemas.microsoft.com/office/drawing/2014/main" id="{274701C1-5805-4F10-839F-85D6F583A40E}"/>
               </a:ext>
             </a:extLst>
           </p:cNvPr>
@@ -7335,7 +7355,7 @@
           <p:cNvPr id="10" name="gate-2">
             <a:extLst xmlns:a="http://schemas.openxmlformats.org/drawingml/2006/main">
               <a:ext uri="{FF2B5EF4-FFF2-40B4-BE49-F238E27FC236}">
-                <a16:creationId xmlns:a16="http://schemas.microsoft.com/office/drawing/2014/main" id="{D3B26DDE-4DBD-4B03-968A-600EAC53676B}"/>
+                <a16:creationId xmlns:a16="http://schemas.microsoft.com/office/drawing/2014/main" id="{69A62884-69F6-4C6C-A9E1-B86329278C9B}"/>
               </a:ext>
             </a:extLst>
           </p:cNvPr>
@@ -7385,7 +7405,7 @@
           <p:cNvPr id="11" name="gate-desc-2">
             <a:extLst xmlns:a="http://schemas.openxmlformats.org/drawingml/2006/main">
               <a:ext uri="{FF2B5EF4-FFF2-40B4-BE49-F238E27FC236}">
-                <a16:creationId xmlns:a16="http://schemas.microsoft.com/office/drawing/2014/main" id="{7F1A45E8-3FC6-4F87-8478-4FBF7BE1F215}"/>
+                <a16:creationId xmlns:a16="http://schemas.microsoft.com/office/drawing/2014/main" id="{F51FA90A-65AD-4639-AFAD-69666FB3C960}"/>
               </a:ext>
             </a:extLst>
           </p:cNvPr>
@@ -7435,7 +7455,7 @@
           <p:cNvPr id="12" name="rule-88-352">
             <a:extLst xmlns:a="http://schemas.openxmlformats.org/drawingml/2006/main">
               <a:ext uri="{FF2B5EF4-FFF2-40B4-BE49-F238E27FC236}">
-                <a16:creationId xmlns:a16="http://schemas.microsoft.com/office/drawing/2014/main" id="{3015EB72-1F43-4978-AE4E-4D6C317C1937}"/>
+                <a16:creationId xmlns:a16="http://schemas.microsoft.com/office/drawing/2014/main" id="{E9CF7B6B-169F-4565-95FC-CDC66F6CD91B}"/>
               </a:ext>
             </a:extLst>
           </p:cNvPr>
@@ -7468,7 +7488,7 @@
           <p:cNvPr id="13" name="gate-3">
             <a:extLst xmlns:a="http://schemas.openxmlformats.org/drawingml/2006/main">
               <a:ext uri="{FF2B5EF4-FFF2-40B4-BE49-F238E27FC236}">
-                <a16:creationId xmlns:a16="http://schemas.microsoft.com/office/drawing/2014/main" id="{B703A95E-7D41-401D-80D1-760E69165C2F}"/>
+                <a16:creationId xmlns:a16="http://schemas.microsoft.com/office/drawing/2014/main" id="{3FCF8C12-F99D-44A8-A14D-0799C1D056E8}"/>
               </a:ext>
             </a:extLst>
           </p:cNvPr>
@@ -7518,7 +7538,7 @@
           <p:cNvPr id="14" name="gate-desc-3">
             <a:extLst xmlns:a="http://schemas.openxmlformats.org/drawingml/2006/main">
               <a:ext uri="{FF2B5EF4-FFF2-40B4-BE49-F238E27FC236}">
-                <a16:creationId xmlns:a16="http://schemas.microsoft.com/office/drawing/2014/main" id="{7296052D-CD32-4BF6-9572-2C37C7554825}"/>
+                <a16:creationId xmlns:a16="http://schemas.microsoft.com/office/drawing/2014/main" id="{A93391D1-9204-4F99-B6EE-3BCA6AF5591A}"/>
               </a:ext>
             </a:extLst>
           </p:cNvPr>
@@ -7568,7 +7588,7 @@
           <p:cNvPr id="15" name="rule-88-430">
             <a:extLst xmlns:a="http://schemas.openxmlformats.org/drawingml/2006/main">
               <a:ext uri="{FF2B5EF4-FFF2-40B4-BE49-F238E27FC236}">
-                <a16:creationId xmlns:a16="http://schemas.microsoft.com/office/drawing/2014/main" id="{FC80E5F4-87F2-4331-A877-15C863D533AE}"/>
+                <a16:creationId xmlns:a16="http://schemas.microsoft.com/office/drawing/2014/main" id="{F4D8E74A-257A-40F6-BB91-649D094F04F3}"/>
               </a:ext>
             </a:extLst>
           </p:cNvPr>
@@ -7601,7 +7621,7 @@
           <p:cNvPr id="16" name="gate-4">
             <a:extLst xmlns:a="http://schemas.openxmlformats.org/drawingml/2006/main">
               <a:ext uri="{FF2B5EF4-FFF2-40B4-BE49-F238E27FC236}">
-                <a16:creationId xmlns:a16="http://schemas.microsoft.com/office/drawing/2014/main" id="{4F80951F-ED38-4EDC-B97D-003B3AF5DCD5}"/>
+                <a16:creationId xmlns:a16="http://schemas.microsoft.com/office/drawing/2014/main" id="{2EE04A5E-0B58-49B8-B685-574FE153D89A}"/>
               </a:ext>
             </a:extLst>
           </p:cNvPr>
@@ -7651,7 +7671,7 @@
           <p:cNvPr id="17" name="gate-desc-4">
             <a:extLst xmlns:a="http://schemas.openxmlformats.org/drawingml/2006/main">
               <a:ext uri="{FF2B5EF4-FFF2-40B4-BE49-F238E27FC236}">
-                <a16:creationId xmlns:a16="http://schemas.microsoft.com/office/drawing/2014/main" id="{DC04E349-4E4B-4AA7-B9A7-2A089D8F69E1}"/>
+                <a16:creationId xmlns:a16="http://schemas.microsoft.com/office/drawing/2014/main" id="{52CFD0D6-103F-4CF3-8782-5F957B4AC6FF}"/>
               </a:ext>
             </a:extLst>
           </p:cNvPr>
@@ -7701,7 +7721,7 @@
           <p:cNvPr id="18" name="rule-88-508">
             <a:extLst xmlns:a="http://schemas.openxmlformats.org/drawingml/2006/main">
               <a:ext uri="{FF2B5EF4-FFF2-40B4-BE49-F238E27FC236}">
-                <a16:creationId xmlns:a16="http://schemas.microsoft.com/office/drawing/2014/main" id="{49044035-0D78-41DF-BDFC-C63C48C793C5}"/>
+                <a16:creationId xmlns:a16="http://schemas.microsoft.com/office/drawing/2014/main" id="{AD7D1D61-841F-4B0E-A366-E15833CFA748}"/>
               </a:ext>
             </a:extLst>
           </p:cNvPr>
@@ -7734,7 +7754,7 @@
           <p:cNvPr id="19" name="gate-5">
             <a:extLst xmlns:a="http://schemas.openxmlformats.org/drawingml/2006/main">
               <a:ext uri="{FF2B5EF4-FFF2-40B4-BE49-F238E27FC236}">
-                <a16:creationId xmlns:a16="http://schemas.microsoft.com/office/drawing/2014/main" id="{AED1B09C-7D88-4602-BCC3-2C7AA55CB0F9}"/>
+                <a16:creationId xmlns:a16="http://schemas.microsoft.com/office/drawing/2014/main" id="{57E59A16-6DF5-470D-8966-92A225A05213}"/>
               </a:ext>
             </a:extLst>
           </p:cNvPr>
@@ -7784,7 +7804,7 @@
           <p:cNvPr id="20" name="gate-desc-5">
             <a:extLst xmlns:a="http://schemas.openxmlformats.org/drawingml/2006/main">
               <a:ext uri="{FF2B5EF4-FFF2-40B4-BE49-F238E27FC236}">
-                <a16:creationId xmlns:a16="http://schemas.microsoft.com/office/drawing/2014/main" id="{543EFF35-754F-43D5-8496-51F589D13760}"/>
+                <a16:creationId xmlns:a16="http://schemas.microsoft.com/office/drawing/2014/main" id="{54D4B159-CB0D-4976-B598-A7C13C26041D}"/>
               </a:ext>
             </a:extLst>
           </p:cNvPr>
@@ -7832,7 +7852,7 @@
     </p:spTree>
     <p:extLst>
       <p:ext uri="{BB962C8B-B14F-4D97-AF65-F5344CB8AC3E}">
-        <p14:creationId xmlns:p14="http://schemas.microsoft.com/office/powerpoint/2010/main" val="1690624213"/>
+        <p14:creationId xmlns:p14="http://schemas.microsoft.com/office/powerpoint/2010/main" val="651720294"/>
       </p:ext>
     </p:extLst>
   </p:cSld>
@@ -7863,7 +7883,7 @@
           <p:cNvPr id="25" name="slide-title">
             <a:extLst xmlns:a="http://schemas.openxmlformats.org/drawingml/2006/main">
               <a:ext uri="{FF2B5EF4-FFF2-40B4-BE49-F238E27FC236}">
-                <a16:creationId xmlns:a16="http://schemas.microsoft.com/office/drawing/2014/main" id="{4E78F7E5-D118-455F-AEDD-C60142095D9B}"/>
+                <a16:creationId xmlns:a16="http://schemas.microsoft.com/office/drawing/2014/main" id="{3DA20AA6-D4BD-4F09-9BDF-8CF1D3CDF471}"/>
               </a:ext>
             </a:extLst>
           </p:cNvPr>
@@ -7913,7 +7933,7 @@
           <p:cNvPr id="2" name="rule-68-107">
             <a:extLst xmlns:a="http://schemas.openxmlformats.org/drawingml/2006/main">
               <a:ext uri="{FF2B5EF4-FFF2-40B4-BE49-F238E27FC236}">
-                <a16:creationId xmlns:a16="http://schemas.microsoft.com/office/drawing/2014/main" id="{73335A41-8361-4776-8387-3C5F1A1E6678}"/>
+                <a16:creationId xmlns:a16="http://schemas.microsoft.com/office/drawing/2014/main" id="{E2A5D3FD-67AE-4028-9C6F-CC9D7F375C42}"/>
               </a:ext>
             </a:extLst>
           </p:cNvPr>
@@ -7946,7 +7966,7 @@
           <p:cNvPr id="3" name="page-number">
             <a:extLst xmlns:a="http://schemas.openxmlformats.org/drawingml/2006/main">
               <a:ext uri="{FF2B5EF4-FFF2-40B4-BE49-F238E27FC236}">
-                <a16:creationId xmlns:a16="http://schemas.microsoft.com/office/drawing/2014/main" id="{8C87C0DC-3DCD-46F9-97EE-E5E81A386B72}"/>
+                <a16:creationId xmlns:a16="http://schemas.microsoft.com/office/drawing/2014/main" id="{508510FE-71F1-4F53-A3E4-868B73883B63}"/>
               </a:ext>
             </a:extLst>
           </p:cNvPr>
@@ -7996,7 +8016,7 @@
           <p:cNvPr id="4" name="tester-label-0">
             <a:extLst xmlns:a="http://schemas.openxmlformats.org/drawingml/2006/main">
               <a:ext uri="{FF2B5EF4-FFF2-40B4-BE49-F238E27FC236}">
-                <a16:creationId xmlns:a16="http://schemas.microsoft.com/office/drawing/2014/main" id="{06400137-335C-4F2E-B67B-72BB6DDEC66F}"/>
+                <a16:creationId xmlns:a16="http://schemas.microsoft.com/office/drawing/2014/main" id="{39BF6AB2-6C41-4A35-9F69-4A0CE3875990}"/>
               </a:ext>
             </a:extLst>
           </p:cNvPr>
@@ -8046,7 +8066,7 @@
           <p:cNvPr id="5" name="tester-value-0">
             <a:extLst xmlns:a="http://schemas.openxmlformats.org/drawingml/2006/main">
               <a:ext uri="{FF2B5EF4-FFF2-40B4-BE49-F238E27FC236}">
-                <a16:creationId xmlns:a16="http://schemas.microsoft.com/office/drawing/2014/main" id="{6440F9DE-1A3E-497D-B894-38FD4EE89980}"/>
+                <a16:creationId xmlns:a16="http://schemas.microsoft.com/office/drawing/2014/main" id="{3C8B99E4-A5A6-4359-814D-F3CBC992BB49}"/>
               </a:ext>
             </a:extLst>
           </p:cNvPr>
@@ -8096,7 +8116,7 @@
           <p:cNvPr id="6" name="rule-82-177">
             <a:extLst xmlns:a="http://schemas.openxmlformats.org/drawingml/2006/main">
               <a:ext uri="{FF2B5EF4-FFF2-40B4-BE49-F238E27FC236}">
-                <a16:creationId xmlns:a16="http://schemas.microsoft.com/office/drawing/2014/main" id="{5C065FBD-7937-4A62-86ED-2D234A5A2752}"/>
+                <a16:creationId xmlns:a16="http://schemas.microsoft.com/office/drawing/2014/main" id="{C169D4C0-9E65-4F26-9DBF-67700F3178CA}"/>
               </a:ext>
             </a:extLst>
           </p:cNvPr>
@@ -8129,7 +8149,7 @@
           <p:cNvPr id="7" name="tester-label-1">
             <a:extLst xmlns:a="http://schemas.openxmlformats.org/drawingml/2006/main">
               <a:ext uri="{FF2B5EF4-FFF2-40B4-BE49-F238E27FC236}">
-                <a16:creationId xmlns:a16="http://schemas.microsoft.com/office/drawing/2014/main" id="{77345B65-4180-4C6B-9E8F-682E236AB86A}"/>
+                <a16:creationId xmlns:a16="http://schemas.microsoft.com/office/drawing/2014/main" id="{85342C20-C186-4D1B-8F9D-A215BAE61A33}"/>
               </a:ext>
             </a:extLst>
           </p:cNvPr>
@@ -8179,7 +8199,7 @@
           <p:cNvPr id="8" name="tester-value-1">
             <a:extLst xmlns:a="http://schemas.openxmlformats.org/drawingml/2006/main">
               <a:ext uri="{FF2B5EF4-FFF2-40B4-BE49-F238E27FC236}">
-                <a16:creationId xmlns:a16="http://schemas.microsoft.com/office/drawing/2014/main" id="{1A860A5A-EA64-4E27-BFE5-289F5C4FB30C}"/>
+                <a16:creationId xmlns:a16="http://schemas.microsoft.com/office/drawing/2014/main" id="{E3B34C04-19AF-4017-BE9A-9AC5FBFC1714}"/>
               </a:ext>
             </a:extLst>
           </p:cNvPr>
@@ -8229,7 +8249,7 @@
           <p:cNvPr id="9" name="rule-82-242">
             <a:extLst xmlns:a="http://schemas.openxmlformats.org/drawingml/2006/main">
               <a:ext uri="{FF2B5EF4-FFF2-40B4-BE49-F238E27FC236}">
-                <a16:creationId xmlns:a16="http://schemas.microsoft.com/office/drawing/2014/main" id="{3AFE0DE8-3462-4C7C-A739-6655FACC630B}"/>
+                <a16:creationId xmlns:a16="http://schemas.microsoft.com/office/drawing/2014/main" id="{2FF3C36A-17C7-4E7E-8222-55ECA5ABAD2F}"/>
               </a:ext>
             </a:extLst>
           </p:cNvPr>
@@ -8262,7 +8282,7 @@
           <p:cNvPr id="10" name="tester-label-2">
             <a:extLst xmlns:a="http://schemas.openxmlformats.org/drawingml/2006/main">
               <a:ext uri="{FF2B5EF4-FFF2-40B4-BE49-F238E27FC236}">
-                <a16:creationId xmlns:a16="http://schemas.microsoft.com/office/drawing/2014/main" id="{7AA42364-B3F9-4AA7-98EA-1F54B4B643FF}"/>
+                <a16:creationId xmlns:a16="http://schemas.microsoft.com/office/drawing/2014/main" id="{FF87C3E1-4E33-44CC-83FE-B85707DDD69C}"/>
               </a:ext>
             </a:extLst>
           </p:cNvPr>
@@ -8312,7 +8332,7 @@
           <p:cNvPr id="11" name="tester-value-2">
             <a:extLst xmlns:a="http://schemas.openxmlformats.org/drawingml/2006/main">
               <a:ext uri="{FF2B5EF4-FFF2-40B4-BE49-F238E27FC236}">
-                <a16:creationId xmlns:a16="http://schemas.microsoft.com/office/drawing/2014/main" id="{23F8D0F2-D851-49F9-9959-85F9C1E73A59}"/>
+                <a16:creationId xmlns:a16="http://schemas.microsoft.com/office/drawing/2014/main" id="{2E30DCAD-511E-4D7D-9550-D46918CB3ADC}"/>
               </a:ext>
             </a:extLst>
           </p:cNvPr>
@@ -8362,7 +8382,7 @@
           <p:cNvPr id="12" name="rule-82-307">
             <a:extLst xmlns:a="http://schemas.openxmlformats.org/drawingml/2006/main">
               <a:ext uri="{FF2B5EF4-FFF2-40B4-BE49-F238E27FC236}">
-                <a16:creationId xmlns:a16="http://schemas.microsoft.com/office/drawing/2014/main" id="{67A12279-2627-48C0-8B2F-2C75296A05FA}"/>
+                <a16:creationId xmlns:a16="http://schemas.microsoft.com/office/drawing/2014/main" id="{D3E1F2B4-2402-4E7E-B1B9-C9F3C620CEAF}"/>
               </a:ext>
             </a:extLst>
           </p:cNvPr>
@@ -8395,7 +8415,7 @@
           <p:cNvPr id="13" name="tester-label-3">
             <a:extLst xmlns:a="http://schemas.openxmlformats.org/drawingml/2006/main">
               <a:ext uri="{FF2B5EF4-FFF2-40B4-BE49-F238E27FC236}">
-                <a16:creationId xmlns:a16="http://schemas.microsoft.com/office/drawing/2014/main" id="{57359B68-8C14-42C2-9F68-38C588335CE3}"/>
+                <a16:creationId xmlns:a16="http://schemas.microsoft.com/office/drawing/2014/main" id="{E5BA33AA-1D41-4336-930B-BBE69A69BB56}"/>
               </a:ext>
             </a:extLst>
           </p:cNvPr>
@@ -8445,7 +8465,7 @@
           <p:cNvPr id="14" name="tester-value-3">
             <a:extLst xmlns:a="http://schemas.openxmlformats.org/drawingml/2006/main">
               <a:ext uri="{FF2B5EF4-FFF2-40B4-BE49-F238E27FC236}">
-                <a16:creationId xmlns:a16="http://schemas.microsoft.com/office/drawing/2014/main" id="{4E13E238-8205-498F-AD3A-731BAEF664C7}"/>
+                <a16:creationId xmlns:a16="http://schemas.microsoft.com/office/drawing/2014/main" id="{5F31B391-9A2D-470B-8A71-FE6EEA627FA9}"/>
               </a:ext>
             </a:extLst>
           </p:cNvPr>
@@ -8495,7 +8515,7 @@
           <p:cNvPr id="15" name="rule-82-372">
             <a:extLst xmlns:a="http://schemas.openxmlformats.org/drawingml/2006/main">
               <a:ext uri="{FF2B5EF4-FFF2-40B4-BE49-F238E27FC236}">
-                <a16:creationId xmlns:a16="http://schemas.microsoft.com/office/drawing/2014/main" id="{6778CB5E-0375-4740-8278-1CF9AC537916}"/>
+                <a16:creationId xmlns:a16="http://schemas.microsoft.com/office/drawing/2014/main" id="{900DF031-1A87-4863-875C-85D71B0C270B}"/>
               </a:ext>
             </a:extLst>
           </p:cNvPr>
@@ -8528,7 +8548,7 @@
           <p:cNvPr id="16" name="tester-label-4">
             <a:extLst xmlns:a="http://schemas.openxmlformats.org/drawingml/2006/main">
               <a:ext uri="{FF2B5EF4-FFF2-40B4-BE49-F238E27FC236}">
-                <a16:creationId xmlns:a16="http://schemas.microsoft.com/office/drawing/2014/main" id="{93AF1F0E-1035-4EE5-99B5-F6C6EF05101E}"/>
+                <a16:creationId xmlns:a16="http://schemas.microsoft.com/office/drawing/2014/main" id="{3C8AFB1E-4DEC-42D8-B420-04BCC1EC9E63}"/>
               </a:ext>
             </a:extLst>
           </p:cNvPr>
@@ -8578,7 +8598,7 @@
           <p:cNvPr id="17" name="tester-value-4">
             <a:extLst xmlns:a="http://schemas.openxmlformats.org/drawingml/2006/main">
               <a:ext uri="{FF2B5EF4-FFF2-40B4-BE49-F238E27FC236}">
-                <a16:creationId xmlns:a16="http://schemas.microsoft.com/office/drawing/2014/main" id="{1F622A8E-10E0-42BC-97A6-9B02D419522E}"/>
+                <a16:creationId xmlns:a16="http://schemas.microsoft.com/office/drawing/2014/main" id="{1511E521-708F-439E-8539-D80E4BA928EA}"/>
               </a:ext>
             </a:extLst>
           </p:cNvPr>
@@ -8628,7 +8648,7 @@
           <p:cNvPr id="18" name="rule-82-437">
             <a:extLst xmlns:a="http://schemas.openxmlformats.org/drawingml/2006/main">
               <a:ext uri="{FF2B5EF4-FFF2-40B4-BE49-F238E27FC236}">
-                <a16:creationId xmlns:a16="http://schemas.microsoft.com/office/drawing/2014/main" id="{93ACFCE8-9D5C-4DF9-AA24-278D96B78570}"/>
+                <a16:creationId xmlns:a16="http://schemas.microsoft.com/office/drawing/2014/main" id="{8B718B5B-28DD-4EAF-B7E5-BC072AF2533D}"/>
               </a:ext>
             </a:extLst>
           </p:cNvPr>
@@ -8661,7 +8681,7 @@
           <p:cNvPr id="19" name="tester-label-5">
             <a:extLst xmlns:a="http://schemas.openxmlformats.org/drawingml/2006/main">
               <a:ext uri="{FF2B5EF4-FFF2-40B4-BE49-F238E27FC236}">
-                <a16:creationId xmlns:a16="http://schemas.microsoft.com/office/drawing/2014/main" id="{BC16815B-3B97-4938-8214-AB8710559400}"/>
+                <a16:creationId xmlns:a16="http://schemas.microsoft.com/office/drawing/2014/main" id="{C63AB404-5D86-4B8C-906A-D83CE0F910BA}"/>
               </a:ext>
             </a:extLst>
           </p:cNvPr>
@@ -8711,7 +8731,7 @@
           <p:cNvPr id="20" name="tester-value-5">
             <a:extLst xmlns:a="http://schemas.openxmlformats.org/drawingml/2006/main">
               <a:ext uri="{FF2B5EF4-FFF2-40B4-BE49-F238E27FC236}">
-                <a16:creationId xmlns:a16="http://schemas.microsoft.com/office/drawing/2014/main" id="{14899321-8720-402F-8852-7EC6C5F02AD2}"/>
+                <a16:creationId xmlns:a16="http://schemas.microsoft.com/office/drawing/2014/main" id="{869A605F-4FB6-4472-8C5C-79E1066F1C47}"/>
               </a:ext>
             </a:extLst>
           </p:cNvPr>
@@ -8761,7 +8781,7 @@
           <p:cNvPr id="21" name="rule-82-502">
             <a:extLst xmlns:a="http://schemas.openxmlformats.org/drawingml/2006/main">
               <a:ext uri="{FF2B5EF4-FFF2-40B4-BE49-F238E27FC236}">
-                <a16:creationId xmlns:a16="http://schemas.microsoft.com/office/drawing/2014/main" id="{593A8848-FDA0-497F-9BF2-478B2CEA2028}"/>
+                <a16:creationId xmlns:a16="http://schemas.microsoft.com/office/drawing/2014/main" id="{8844F3E3-342D-4F7F-8502-3CF91F14C943}"/>
               </a:ext>
             </a:extLst>
           </p:cNvPr>
@@ -8794,7 +8814,7 @@
           <p:cNvPr id="22" name="tester-label-6">
             <a:extLst xmlns:a="http://schemas.openxmlformats.org/drawingml/2006/main">
               <a:ext uri="{FF2B5EF4-FFF2-40B4-BE49-F238E27FC236}">
-                <a16:creationId xmlns:a16="http://schemas.microsoft.com/office/drawing/2014/main" id="{6EDC5BDA-BF2D-4665-9C22-5929903253D3}"/>
+                <a16:creationId xmlns:a16="http://schemas.microsoft.com/office/drawing/2014/main" id="{FF48CD0B-4BA3-419E-88DA-A2B96010515D}"/>
               </a:ext>
             </a:extLst>
           </p:cNvPr>
@@ -8844,7 +8864,7 @@
           <p:cNvPr id="23" name="tester-value-6">
             <a:extLst xmlns:a="http://schemas.openxmlformats.org/drawingml/2006/main">
               <a:ext uri="{FF2B5EF4-FFF2-40B4-BE49-F238E27FC236}">
-                <a16:creationId xmlns:a16="http://schemas.microsoft.com/office/drawing/2014/main" id="{F275D041-250C-450E-8E63-1451A652CEBA}"/>
+                <a16:creationId xmlns:a16="http://schemas.microsoft.com/office/drawing/2014/main" id="{CAE9F28E-1C5B-42B7-8969-8C245D33BBBD}"/>
               </a:ext>
             </a:extLst>
           </p:cNvPr>
@@ -8894,7 +8914,7 @@
           <p:cNvPr id="24" name="framing">
             <a:extLst xmlns:a="http://schemas.openxmlformats.org/drawingml/2006/main">
               <a:ext uri="{FF2B5EF4-FFF2-40B4-BE49-F238E27FC236}">
-                <a16:creationId xmlns:a16="http://schemas.microsoft.com/office/drawing/2014/main" id="{E5E954A4-97FA-4A78-B009-29246F38DDA5}"/>
+                <a16:creationId xmlns:a16="http://schemas.microsoft.com/office/drawing/2014/main" id="{20A3F30D-4F65-4A41-A9BB-D2E1D50C3DAD}"/>
               </a:ext>
             </a:extLst>
           </p:cNvPr>
@@ -8942,7 +8962,7 @@
     </p:spTree>
     <p:extLst>
       <p:ext uri="{BB962C8B-B14F-4D97-AF65-F5344CB8AC3E}">
-        <p14:creationId xmlns:p14="http://schemas.microsoft.com/office/powerpoint/2010/main" val="1139884035"/>
+        <p14:creationId xmlns:p14="http://schemas.microsoft.com/office/powerpoint/2010/main" val="600692105"/>
       </p:ext>
     </p:extLst>
   </p:cSld>
@@ -8973,7 +8993,7 @@
           <p:cNvPr id="27" name="slide-title">
             <a:extLst xmlns:a="http://schemas.openxmlformats.org/drawingml/2006/main">
               <a:ext uri="{FF2B5EF4-FFF2-40B4-BE49-F238E27FC236}">
-                <a16:creationId xmlns:a16="http://schemas.microsoft.com/office/drawing/2014/main" id="{70537CF5-2D35-415E-B197-9FD4178C344E}"/>
+                <a16:creationId xmlns:a16="http://schemas.microsoft.com/office/drawing/2014/main" id="{BB6388EA-1030-4A66-ACBE-F4F9667EC2D0}"/>
               </a:ext>
             </a:extLst>
           </p:cNvPr>
@@ -9023,7 +9043,7 @@
           <p:cNvPr id="2" name="rule-68-107">
             <a:extLst xmlns:a="http://schemas.openxmlformats.org/drawingml/2006/main">
               <a:ext uri="{FF2B5EF4-FFF2-40B4-BE49-F238E27FC236}">
-                <a16:creationId xmlns:a16="http://schemas.microsoft.com/office/drawing/2014/main" id="{C0C73F3F-49C8-448D-8903-75C377099E99}"/>
+                <a16:creationId xmlns:a16="http://schemas.microsoft.com/office/drawing/2014/main" id="{F6B772DA-8C46-4647-98B4-10EDF0EC645D}"/>
               </a:ext>
             </a:extLst>
           </p:cNvPr>
@@ -9056,7 +9076,7 @@
           <p:cNvPr id="3" name="page-number">
             <a:extLst xmlns:a="http://schemas.openxmlformats.org/drawingml/2006/main">
               <a:ext uri="{FF2B5EF4-FFF2-40B4-BE49-F238E27FC236}">
-                <a16:creationId xmlns:a16="http://schemas.microsoft.com/office/drawing/2014/main" id="{7E33F17C-E5B5-4068-A58B-FF2CB34E671F}"/>
+                <a16:creationId xmlns:a16="http://schemas.microsoft.com/office/drawing/2014/main" id="{375A15C0-49F4-4B19-A866-1DDEF17832B5}"/>
               </a:ext>
             </a:extLst>
           </p:cNvPr>
@@ -9106,7 +9126,7 @@
           <p:cNvPr id="4" name="rule-130-570">
             <a:extLst xmlns:a="http://schemas.openxmlformats.org/drawingml/2006/main">
               <a:ext uri="{FF2B5EF4-FFF2-40B4-BE49-F238E27FC236}">
-                <a16:creationId xmlns:a16="http://schemas.microsoft.com/office/drawing/2014/main" id="{A2948FEC-A098-4793-B37F-DB5D39B0FFAF}"/>
+                <a16:creationId xmlns:a16="http://schemas.microsoft.com/office/drawing/2014/main" id="{26CCE36A-89C9-4256-B952-A598EA0A92D9}"/>
               </a:ext>
             </a:extLst>
           </p:cNvPr>
@@ -9139,7 +9159,7 @@
           <p:cNvPr id="5" name="case-a-axis-0">
             <a:extLst xmlns:a="http://schemas.openxmlformats.org/drawingml/2006/main">
               <a:ext uri="{FF2B5EF4-FFF2-40B4-BE49-F238E27FC236}">
-                <a16:creationId xmlns:a16="http://schemas.microsoft.com/office/drawing/2014/main" id="{F1B72EF2-CF75-485B-9FD6-EFE4F3144E32}"/>
+                <a16:creationId xmlns:a16="http://schemas.microsoft.com/office/drawing/2014/main" id="{67CD1072-1902-456F-9609-DB5CFE14CDA5}"/>
               </a:ext>
             </a:extLst>
           </p:cNvPr>
@@ -9189,7 +9209,7 @@
           <p:cNvPr id="6" name="rule-130-492">
             <a:extLst xmlns:a="http://schemas.openxmlformats.org/drawingml/2006/main">
               <a:ext uri="{FF2B5EF4-FFF2-40B4-BE49-F238E27FC236}">
-                <a16:creationId xmlns:a16="http://schemas.microsoft.com/office/drawing/2014/main" id="{371FFFAC-BED8-4207-9280-03CA58015B30}"/>
+                <a16:creationId xmlns:a16="http://schemas.microsoft.com/office/drawing/2014/main" id="{517F933A-FFF4-45FF-A824-51519593F183}"/>
               </a:ext>
             </a:extLst>
           </p:cNvPr>
@@ -9222,7 +9242,7 @@
           <p:cNvPr id="7" name="case-a-axis-20">
             <a:extLst xmlns:a="http://schemas.openxmlformats.org/drawingml/2006/main">
               <a:ext uri="{FF2B5EF4-FFF2-40B4-BE49-F238E27FC236}">
-                <a16:creationId xmlns:a16="http://schemas.microsoft.com/office/drawing/2014/main" id="{87EC7357-D7D5-487F-A95E-C5F9A274F509}"/>
+                <a16:creationId xmlns:a16="http://schemas.microsoft.com/office/drawing/2014/main" id="{B15259E8-B32B-49E0-9FC1-22620C7A3DFD}"/>
               </a:ext>
             </a:extLst>
           </p:cNvPr>
@@ -9272,7 +9292,7 @@
           <p:cNvPr id="8" name="rule-130-414">
             <a:extLst xmlns:a="http://schemas.openxmlformats.org/drawingml/2006/main">
               <a:ext uri="{FF2B5EF4-FFF2-40B4-BE49-F238E27FC236}">
-                <a16:creationId xmlns:a16="http://schemas.microsoft.com/office/drawing/2014/main" id="{7570CA50-865E-4A2A-BEEE-86B948A4B537}"/>
+                <a16:creationId xmlns:a16="http://schemas.microsoft.com/office/drawing/2014/main" id="{DC3568C0-0C52-45E2-A7A1-6703D6732926}"/>
               </a:ext>
             </a:extLst>
           </p:cNvPr>
@@ -9305,7 +9325,7 @@
           <p:cNvPr id="9" name="case-a-axis-40">
             <a:extLst xmlns:a="http://schemas.openxmlformats.org/drawingml/2006/main">
               <a:ext uri="{FF2B5EF4-FFF2-40B4-BE49-F238E27FC236}">
-                <a16:creationId xmlns:a16="http://schemas.microsoft.com/office/drawing/2014/main" id="{912B118A-E634-4B3B-A71F-62FA678D0FB3}"/>
+                <a16:creationId xmlns:a16="http://schemas.microsoft.com/office/drawing/2014/main" id="{E27347A0-E85C-4F79-81EA-0866236D1188}"/>
               </a:ext>
             </a:extLst>
           </p:cNvPr>
@@ -9355,7 +9375,7 @@
           <p:cNvPr id="10" name="rule-130-336">
             <a:extLst xmlns:a="http://schemas.openxmlformats.org/drawingml/2006/main">
               <a:ext uri="{FF2B5EF4-FFF2-40B4-BE49-F238E27FC236}">
-                <a16:creationId xmlns:a16="http://schemas.microsoft.com/office/drawing/2014/main" id="{42D79A3B-7AC9-4D88-B503-046C784B56BD}"/>
+                <a16:creationId xmlns:a16="http://schemas.microsoft.com/office/drawing/2014/main" id="{628D8269-00A5-48A9-B4F9-5735D921F326}"/>
               </a:ext>
             </a:extLst>
           </p:cNvPr>
@@ -9388,7 +9408,7 @@
           <p:cNvPr id="11" name="case-a-axis-60">
             <a:extLst xmlns:a="http://schemas.openxmlformats.org/drawingml/2006/main">
               <a:ext uri="{FF2B5EF4-FFF2-40B4-BE49-F238E27FC236}">
-                <a16:creationId xmlns:a16="http://schemas.microsoft.com/office/drawing/2014/main" id="{C2459240-9F5C-422E-BED3-64D79CCB895A}"/>
+                <a16:creationId xmlns:a16="http://schemas.microsoft.com/office/drawing/2014/main" id="{9D8E8A5D-A9E9-4764-BEB0-B7E2A3A3FB61}"/>
               </a:ext>
             </a:extLst>
           </p:cNvPr>
@@ -9438,7 +9458,7 @@
           <p:cNvPr id="12" name="rule-130-258">
             <a:extLst xmlns:a="http://schemas.openxmlformats.org/drawingml/2006/main">
               <a:ext uri="{FF2B5EF4-FFF2-40B4-BE49-F238E27FC236}">
-                <a16:creationId xmlns:a16="http://schemas.microsoft.com/office/drawing/2014/main" id="{934B7A6D-FD81-4BCC-9BF3-640121EA906E}"/>
+                <a16:creationId xmlns:a16="http://schemas.microsoft.com/office/drawing/2014/main" id="{68779982-AE87-4978-A62A-B0B018EA2894}"/>
               </a:ext>
             </a:extLst>
           </p:cNvPr>
@@ -9471,7 +9491,7 @@
           <p:cNvPr id="13" name="case-a-axis-80">
             <a:extLst xmlns:a="http://schemas.openxmlformats.org/drawingml/2006/main">
               <a:ext uri="{FF2B5EF4-FFF2-40B4-BE49-F238E27FC236}">
-                <a16:creationId xmlns:a16="http://schemas.microsoft.com/office/drawing/2014/main" id="{8AAC3705-0CCF-4229-9D0E-9163868AD358}"/>
+                <a16:creationId xmlns:a16="http://schemas.microsoft.com/office/drawing/2014/main" id="{FE3034E4-8B0C-4305-9B8E-953BDD6D9487}"/>
               </a:ext>
             </a:extLst>
           </p:cNvPr>
@@ -9521,7 +9541,7 @@
           <p:cNvPr id="14" name="rule-130-180">
             <a:extLst xmlns:a="http://schemas.openxmlformats.org/drawingml/2006/main">
               <a:ext uri="{FF2B5EF4-FFF2-40B4-BE49-F238E27FC236}">
-                <a16:creationId xmlns:a16="http://schemas.microsoft.com/office/drawing/2014/main" id="{26AAA50A-7109-40E6-BEDA-77D51D137198}"/>
+                <a16:creationId xmlns:a16="http://schemas.microsoft.com/office/drawing/2014/main" id="{00729D70-CE11-445D-99E1-6BD485E80040}"/>
               </a:ext>
             </a:extLst>
           </p:cNvPr>
@@ -9554,7 +9574,7 @@
           <p:cNvPr id="15" name="case-a-axis-100">
             <a:extLst xmlns:a="http://schemas.openxmlformats.org/drawingml/2006/main">
               <a:ext uri="{FF2B5EF4-FFF2-40B4-BE49-F238E27FC236}">
-                <a16:creationId xmlns:a16="http://schemas.microsoft.com/office/drawing/2014/main" id="{32F91F95-1A32-4BFF-882C-99749021C77A}"/>
+                <a16:creationId xmlns:a16="http://schemas.microsoft.com/office/drawing/2014/main" id="{89C33919-EA91-4EAA-830D-0E965B94924D}"/>
               </a:ext>
             </a:extLst>
           </p:cNvPr>
@@ -9604,7 +9624,7 @@
           <p:cNvPr id="16" name="case-a-control-bar">
             <a:extLst xmlns:a="http://schemas.openxmlformats.org/drawingml/2006/main">
               <a:ext uri="{FF2B5EF4-FFF2-40B4-BE49-F238E27FC236}">
-                <a16:creationId xmlns:a16="http://schemas.microsoft.com/office/drawing/2014/main" id="{34A451A7-D0BA-4FCD-9061-F1ADC18B6390}"/>
+                <a16:creationId xmlns:a16="http://schemas.microsoft.com/office/drawing/2014/main" id="{FF3FA710-D8FF-44C4-902B-65C83BC6F335}"/>
               </a:ext>
             </a:extLst>
           </p:cNvPr>
@@ -9637,7 +9657,7 @@
           <p:cNvPr id="17" name="case-a-offered-bar">
             <a:extLst xmlns:a="http://schemas.openxmlformats.org/drawingml/2006/main">
               <a:ext uri="{FF2B5EF4-FFF2-40B4-BE49-F238E27FC236}">
-                <a16:creationId xmlns:a16="http://schemas.microsoft.com/office/drawing/2014/main" id="{9657254B-07A5-4C73-B511-9B562448068F}"/>
+                <a16:creationId xmlns:a16="http://schemas.microsoft.com/office/drawing/2014/main" id="{88F7CB90-E3D0-4E65-B33E-B00F199902D7}"/>
               </a:ext>
             </a:extLst>
           </p:cNvPr>
@@ -9670,7 +9690,7 @@
           <p:cNvPr id="18" name="case-a-control-label">
             <a:extLst xmlns:a="http://schemas.openxmlformats.org/drawingml/2006/main">
               <a:ext uri="{FF2B5EF4-FFF2-40B4-BE49-F238E27FC236}">
-                <a16:creationId xmlns:a16="http://schemas.microsoft.com/office/drawing/2014/main" id="{EBCDD32B-950B-43E0-826F-A3A756E3257C}"/>
+                <a16:creationId xmlns:a16="http://schemas.microsoft.com/office/drawing/2014/main" id="{53D2688D-DE25-4FA5-95EF-E3775ECB72D6}"/>
               </a:ext>
             </a:extLst>
           </p:cNvPr>
@@ -9720,7 +9740,7 @@
           <p:cNvPr id="19" name="case-a-offered-label">
             <a:extLst xmlns:a="http://schemas.openxmlformats.org/drawingml/2006/main">
               <a:ext uri="{FF2B5EF4-FFF2-40B4-BE49-F238E27FC236}">
-                <a16:creationId xmlns:a16="http://schemas.microsoft.com/office/drawing/2014/main" id="{711F455F-0B87-4763-AB4A-AE0D6F06B9DC}"/>
+                <a16:creationId xmlns:a16="http://schemas.microsoft.com/office/drawing/2014/main" id="{98D68CD3-CB44-459D-8B1C-993D7E75B8C2}"/>
               </a:ext>
             </a:extLst>
           </p:cNvPr>
@@ -9770,7 +9790,7 @@
           <p:cNvPr id="20" name="case-a-control-category">
             <a:extLst xmlns:a="http://schemas.openxmlformats.org/drawingml/2006/main">
               <a:ext uri="{FF2B5EF4-FFF2-40B4-BE49-F238E27FC236}">
-                <a16:creationId xmlns:a16="http://schemas.microsoft.com/office/drawing/2014/main" id="{83383191-383E-4F0F-A401-D213FAC68C47}"/>
+                <a16:creationId xmlns:a16="http://schemas.microsoft.com/office/drawing/2014/main" id="{B0A2EE67-FCB7-43E3-B360-B54A7662D41B}"/>
               </a:ext>
             </a:extLst>
           </p:cNvPr>
@@ -9820,7 +9840,7 @@
           <p:cNvPr id="21" name="case-a-offered-category">
             <a:extLst xmlns:a="http://schemas.openxmlformats.org/drawingml/2006/main">
               <a:ext uri="{FF2B5EF4-FFF2-40B4-BE49-F238E27FC236}">
-                <a16:creationId xmlns:a16="http://schemas.microsoft.com/office/drawing/2014/main" id="{30BB7583-917B-481B-BA32-D0DC97428E37}"/>
+                <a16:creationId xmlns:a16="http://schemas.microsoft.com/office/drawing/2014/main" id="{E7907741-20CB-4F0F-9A85-03A8285976DF}"/>
               </a:ext>
             </a:extLst>
           </p:cNvPr>
@@ -9870,7 +9890,7 @@
           <p:cNvPr id="22" name="case-a-y-title">
             <a:extLst xmlns:a="http://schemas.openxmlformats.org/drawingml/2006/main">
               <a:ext uri="{FF2B5EF4-FFF2-40B4-BE49-F238E27FC236}">
-                <a16:creationId xmlns:a16="http://schemas.microsoft.com/office/drawing/2014/main" id="{85B2A413-A440-4CDD-BED3-1EF32597946F}"/>
+                <a16:creationId xmlns:a16="http://schemas.microsoft.com/office/drawing/2014/main" id="{E26CE720-0CE7-44F2-BA12-867C6B4418E3}"/>
               </a:ext>
             </a:extLst>
           </p:cNvPr>
@@ -9920,7 +9940,7 @@
           <p:cNvPr id="23" name="control-exact">
             <a:extLst xmlns:a="http://schemas.openxmlformats.org/drawingml/2006/main">
               <a:ext uri="{FF2B5EF4-FFF2-40B4-BE49-F238E27FC236}">
-                <a16:creationId xmlns:a16="http://schemas.microsoft.com/office/drawing/2014/main" id="{0D491035-1DA9-48C7-8D47-37CDC7D07AF7}"/>
+                <a16:creationId xmlns:a16="http://schemas.microsoft.com/office/drawing/2014/main" id="{3F3360B6-9512-40EB-BB2C-1D56F8B8E748}"/>
               </a:ext>
             </a:extLst>
           </p:cNvPr>
@@ -10004,7 +10024,7 @@
           <p:cNvPr id="24" name="offered-exact">
             <a:extLst xmlns:a="http://schemas.openxmlformats.org/drawingml/2006/main">
               <a:ext uri="{FF2B5EF4-FFF2-40B4-BE49-F238E27FC236}">
-                <a16:creationId xmlns:a16="http://schemas.microsoft.com/office/drawing/2014/main" id="{D42359D0-B5F7-473C-97A8-EC6865FF8991}"/>
+                <a16:creationId xmlns:a16="http://schemas.microsoft.com/office/drawing/2014/main" id="{B3FDB54E-EE75-4866-A2F5-4D13D018C68A}"/>
               </a:ext>
             </a:extLst>
           </p:cNvPr>
@@ -10088,7 +10108,7 @@
           <p:cNvPr id="25" name="itt-callout">
             <a:extLst xmlns:a="http://schemas.openxmlformats.org/drawingml/2006/main">
               <a:ext uri="{FF2B5EF4-FFF2-40B4-BE49-F238E27FC236}">
-                <a16:creationId xmlns:a16="http://schemas.microsoft.com/office/drawing/2014/main" id="{DB8D2807-AF95-4678-BE70-D8AA22F9F638}"/>
+                <a16:creationId xmlns:a16="http://schemas.microsoft.com/office/drawing/2014/main" id="{4B75A23E-C7B7-47DF-95C1-3EDA44564F24}"/>
               </a:ext>
             </a:extLst>
           </p:cNvPr>
@@ -10138,7 +10158,7 @@
           <p:cNvPr id="26" name="framing">
             <a:extLst xmlns:a="http://schemas.openxmlformats.org/drawingml/2006/main">
               <a:ext uri="{FF2B5EF4-FFF2-40B4-BE49-F238E27FC236}">
-                <a16:creationId xmlns:a16="http://schemas.microsoft.com/office/drawing/2014/main" id="{15881E28-7D3F-4F9D-90C2-C238177F5EEB}"/>
+                <a16:creationId xmlns:a16="http://schemas.microsoft.com/office/drawing/2014/main" id="{FF0EABF5-4F79-4666-AB1F-8768166DB72A}"/>
               </a:ext>
             </a:extLst>
           </p:cNvPr>
@@ -10186,7 +10206,7 @@
     </p:spTree>
     <p:extLst>
       <p:ext uri="{BB962C8B-B14F-4D97-AF65-F5344CB8AC3E}">
-        <p14:creationId xmlns:p14="http://schemas.microsoft.com/office/powerpoint/2010/main" val="524339646"/>
+        <p14:creationId xmlns:p14="http://schemas.microsoft.com/office/powerpoint/2010/main" val="794322115"/>
       </p:ext>
     </p:extLst>
   </p:cSld>
@@ -10217,7 +10237,7 @@
           <p:cNvPr id="10" name="slide-title">
             <a:extLst xmlns:a="http://schemas.openxmlformats.org/drawingml/2006/main">
               <a:ext uri="{FF2B5EF4-FFF2-40B4-BE49-F238E27FC236}">
-                <a16:creationId xmlns:a16="http://schemas.microsoft.com/office/drawing/2014/main" id="{4E829DEA-20EF-40EC-AD63-19E654793F1E}"/>
+                <a16:creationId xmlns:a16="http://schemas.microsoft.com/office/drawing/2014/main" id="{1C1A7771-1367-495B-AD76-23EEC6FDA371}"/>
               </a:ext>
             </a:extLst>
           </p:cNvPr>
@@ -10267,7 +10287,7 @@
           <p:cNvPr id="2" name="rule-68-107">
             <a:extLst xmlns:a="http://schemas.openxmlformats.org/drawingml/2006/main">
               <a:ext uri="{FF2B5EF4-FFF2-40B4-BE49-F238E27FC236}">
-                <a16:creationId xmlns:a16="http://schemas.microsoft.com/office/drawing/2014/main" id="{DB22C3EB-31E5-4F0B-9564-BB21A3F20703}"/>
+                <a16:creationId xmlns:a16="http://schemas.microsoft.com/office/drawing/2014/main" id="{07DBB7BA-A733-473E-AF29-CFC78C6BA0FB}"/>
               </a:ext>
             </a:extLst>
           </p:cNvPr>
@@ -10300,7 +10320,7 @@
           <p:cNvPr id="3" name="page-number">
             <a:extLst xmlns:a="http://schemas.openxmlformats.org/drawingml/2006/main">
               <a:ext uri="{FF2B5EF4-FFF2-40B4-BE49-F238E27FC236}">
-                <a16:creationId xmlns:a16="http://schemas.microsoft.com/office/drawing/2014/main" id="{99CFF913-3163-4237-9ABD-188BC867CAA3}"/>
+                <a16:creationId xmlns:a16="http://schemas.microsoft.com/office/drawing/2014/main" id="{DBF90997-9046-4D01-AA7C-56CDEF0EA14C}"/>
               </a:ext>
             </a:extLst>
           </p:cNvPr>
@@ -10350,7 +10370,7 @@
           <p:cNvPr id="4" name="decision">
             <a:extLst xmlns:a="http://schemas.openxmlformats.org/drawingml/2006/main">
               <a:ext uri="{FF2B5EF4-FFF2-40B4-BE49-F238E27FC236}">
-                <a16:creationId xmlns:a16="http://schemas.microsoft.com/office/drawing/2014/main" id="{FE23B7C3-D8E6-42E2-880D-71B24391A21D}"/>
+                <a16:creationId xmlns:a16="http://schemas.microsoft.com/office/drawing/2014/main" id="{CCEECE48-55C9-4F24-8E3B-7FBFDCAA341A}"/>
               </a:ext>
             </a:extLst>
           </p:cNvPr>
@@ -10400,7 +10420,7 @@
           <p:cNvPr id="5" name="condition">
             <a:extLst xmlns:a="http://schemas.openxmlformats.org/drawingml/2006/main">
               <a:ext uri="{FF2B5EF4-FFF2-40B4-BE49-F238E27FC236}">
-                <a16:creationId xmlns:a16="http://schemas.microsoft.com/office/drawing/2014/main" id="{12D696BB-047F-41DC-A944-86FA763775C5}"/>
+                <a16:creationId xmlns:a16="http://schemas.microsoft.com/office/drawing/2014/main" id="{5A9CA42D-6A70-4214-AF58-53A67BD5B7F0}"/>
               </a:ext>
             </a:extLst>
           </p:cNvPr>
@@ -10450,7 +10470,7 @@
           <p:cNvPr id="6" name="evidence1">
             <a:extLst xmlns:a="http://schemas.openxmlformats.org/drawingml/2006/main">
               <a:ext uri="{FF2B5EF4-FFF2-40B4-BE49-F238E27FC236}">
-                <a16:creationId xmlns:a16="http://schemas.microsoft.com/office/drawing/2014/main" id="{FC1669F0-CA77-4731-899F-3DDDEFB52073}"/>
+                <a16:creationId xmlns:a16="http://schemas.microsoft.com/office/drawing/2014/main" id="{82E69657-95D2-4757-B3C9-D9C670BFAF73}"/>
               </a:ext>
             </a:extLst>
           </p:cNvPr>
@@ -10500,7 +10520,7 @@
           <p:cNvPr id="7" name="evidence2">
             <a:extLst xmlns:a="http://schemas.openxmlformats.org/drawingml/2006/main">
               <a:ext uri="{FF2B5EF4-FFF2-40B4-BE49-F238E27FC236}">
-                <a16:creationId xmlns:a16="http://schemas.microsoft.com/office/drawing/2014/main" id="{AD44973A-96A8-4F9A-920E-6A7B6662F8B3}"/>
+                <a16:creationId xmlns:a16="http://schemas.microsoft.com/office/drawing/2014/main" id="{A0659873-F915-4F44-9E76-76622DDEB46B}"/>
               </a:ext>
             </a:extLst>
           </p:cNvPr>
@@ -10550,7 +10570,7 @@
           <p:cNvPr id="8" name="evidence3">
             <a:extLst xmlns:a="http://schemas.openxmlformats.org/drawingml/2006/main">
               <a:ext uri="{FF2B5EF4-FFF2-40B4-BE49-F238E27FC236}">
-                <a16:creationId xmlns:a16="http://schemas.microsoft.com/office/drawing/2014/main" id="{B1C09CD6-5C6F-4558-A9CE-D13187D2131C}"/>
+                <a16:creationId xmlns:a16="http://schemas.microsoft.com/office/drawing/2014/main" id="{BD49AB96-2B29-4FCF-A230-476BC266E48F}"/>
               </a:ext>
             </a:extLst>
           </p:cNvPr>
@@ -10600,7 +10620,7 @@
           <p:cNvPr id="9" name="debrief">
             <a:extLst xmlns:a="http://schemas.openxmlformats.org/drawingml/2006/main">
               <a:ext uri="{FF2B5EF4-FFF2-40B4-BE49-F238E27FC236}">
-                <a16:creationId xmlns:a16="http://schemas.microsoft.com/office/drawing/2014/main" id="{25B40563-B348-4F2C-A89E-0381C8F82F46}"/>
+                <a16:creationId xmlns:a16="http://schemas.microsoft.com/office/drawing/2014/main" id="{24012FD1-09F3-4910-A8BE-9686C9820075}"/>
               </a:ext>
             </a:extLst>
           </p:cNvPr>
@@ -10648,7 +10668,7 @@
     </p:spTree>
     <p:extLst>
       <p:ext uri="{BB962C8B-B14F-4D97-AF65-F5344CB8AC3E}">
-        <p14:creationId xmlns:p14="http://schemas.microsoft.com/office/powerpoint/2010/main" val="320402591"/>
+        <p14:creationId xmlns:p14="http://schemas.microsoft.com/office/powerpoint/2010/main" val="306433341"/>
       </p:ext>
     </p:extLst>
   </p:cSld>
@@ -10679,7 +10699,7 @@
           <p:cNvPr id="6" name="page-number">
             <a:extLst xmlns:a="http://schemas.openxmlformats.org/drawingml/2006/main">
               <a:ext uri="{FF2B5EF4-FFF2-40B4-BE49-F238E27FC236}">
-                <a16:creationId xmlns:a16="http://schemas.microsoft.com/office/drawing/2014/main" id="{CC3AD9E6-E0FD-43EE-ACB9-5A9F69894909}"/>
+                <a16:creationId xmlns:a16="http://schemas.microsoft.com/office/drawing/2014/main" id="{9FE61186-6153-460C-9D25-EDBC76C24038}"/>
               </a:ext>
             </a:extLst>
           </p:cNvPr>
@@ -10729,7 +10749,7 @@
           <p:cNvPr id="2" name="section">
             <a:extLst xmlns:a="http://schemas.openxmlformats.org/drawingml/2006/main">
               <a:ext uri="{FF2B5EF4-FFF2-40B4-BE49-F238E27FC236}">
-                <a16:creationId xmlns:a16="http://schemas.microsoft.com/office/drawing/2014/main" id="{213B1E72-E45F-437D-961C-52BDC72EA122}"/>
+                <a16:creationId xmlns:a16="http://schemas.microsoft.com/office/drawing/2014/main" id="{2BA095EF-7594-41B8-85C5-5B3E8603D93C}"/>
               </a:ext>
             </a:extLst>
           </p:cNvPr>
@@ -10779,7 +10799,7 @@
           <p:cNvPr id="3" name="title">
             <a:extLst xmlns:a="http://schemas.openxmlformats.org/drawingml/2006/main">
               <a:ext uri="{FF2B5EF4-FFF2-40B4-BE49-F238E27FC236}">
-                <a16:creationId xmlns:a16="http://schemas.microsoft.com/office/drawing/2014/main" id="{8BAD4E90-63F5-4F6B-9FDF-DECFA7346288}"/>
+                <a16:creationId xmlns:a16="http://schemas.microsoft.com/office/drawing/2014/main" id="{9C4820AE-07F9-4F14-B1ED-5084140F48BC}"/>
               </a:ext>
             </a:extLst>
           </p:cNvPr>
@@ -10829,7 +10849,7 @@
           <p:cNvPr id="4" name="subtitle">
             <a:extLst xmlns:a="http://schemas.openxmlformats.org/drawingml/2006/main">
               <a:ext uri="{FF2B5EF4-FFF2-40B4-BE49-F238E27FC236}">
-                <a16:creationId xmlns:a16="http://schemas.microsoft.com/office/drawing/2014/main" id="{5DCBC3F9-41EC-42B2-AEAC-5126FAFB1DCF}"/>
+                <a16:creationId xmlns:a16="http://schemas.microsoft.com/office/drawing/2014/main" id="{466093F5-EAB8-4F57-B419-02212D2D2F9D}"/>
               </a:ext>
             </a:extLst>
           </p:cNvPr>
@@ -10879,7 +10899,7 @@
           <p:cNvPr id="5" name="rule-82-480">
             <a:extLst xmlns:a="http://schemas.openxmlformats.org/drawingml/2006/main">
               <a:ext uri="{FF2B5EF4-FFF2-40B4-BE49-F238E27FC236}">
-                <a16:creationId xmlns:a16="http://schemas.microsoft.com/office/drawing/2014/main" id="{5F08EF37-5FDA-4A6D-ABF5-1B99D890F36C}"/>
+                <a16:creationId xmlns:a16="http://schemas.microsoft.com/office/drawing/2014/main" id="{3D5CED55-1F94-48C7-A471-79DDD311EF72}"/>
               </a:ext>
             </a:extLst>
           </p:cNvPr>
@@ -10910,7 +10930,7 @@
     </p:spTree>
     <p:extLst>
       <p:ext uri="{BB962C8B-B14F-4D97-AF65-F5344CB8AC3E}">
-        <p14:creationId xmlns:p14="http://schemas.microsoft.com/office/powerpoint/2010/main" val="99940371"/>
+        <p14:creationId xmlns:p14="http://schemas.microsoft.com/office/powerpoint/2010/main" val="1323718375"/>
       </p:ext>
     </p:extLst>
   </p:cSld>
@@ -10941,7 +10961,7 @@
           <p:cNvPr id="18" name="slide-title">
             <a:extLst xmlns:a="http://schemas.openxmlformats.org/drawingml/2006/main">
               <a:ext uri="{FF2B5EF4-FFF2-40B4-BE49-F238E27FC236}">
-                <a16:creationId xmlns:a16="http://schemas.microsoft.com/office/drawing/2014/main" id="{3C130F44-0DF9-459A-B828-FC0659FBF960}"/>
+                <a16:creationId xmlns:a16="http://schemas.microsoft.com/office/drawing/2014/main" id="{1ACD1098-5065-4EF5-A301-13ADA1E455DA}"/>
               </a:ext>
             </a:extLst>
           </p:cNvPr>
@@ -10991,7 +11011,7 @@
           <p:cNvPr id="2" name="rule-68-107">
             <a:extLst xmlns:a="http://schemas.openxmlformats.org/drawingml/2006/main">
               <a:ext uri="{FF2B5EF4-FFF2-40B4-BE49-F238E27FC236}">
-                <a16:creationId xmlns:a16="http://schemas.microsoft.com/office/drawing/2014/main" id="{3FD32D40-8F39-496A-A21B-A72925AAE2C4}"/>
+                <a16:creationId xmlns:a16="http://schemas.microsoft.com/office/drawing/2014/main" id="{3E45E7CF-A913-4023-A081-30E2F5EA860A}"/>
               </a:ext>
             </a:extLst>
           </p:cNvPr>
@@ -11024,7 +11044,7 @@
           <p:cNvPr id="3" name="page-number">
             <a:extLst xmlns:a="http://schemas.openxmlformats.org/drawingml/2006/main">
               <a:ext uri="{FF2B5EF4-FFF2-40B4-BE49-F238E27FC236}">
-                <a16:creationId xmlns:a16="http://schemas.microsoft.com/office/drawing/2014/main" id="{8850D899-F99E-4C87-A8E8-4D6DDEAA33E7}"/>
+                <a16:creationId xmlns:a16="http://schemas.microsoft.com/office/drawing/2014/main" id="{3B192ABD-DA22-439A-BCD8-20D9A6666B32}"/>
               </a:ext>
             </a:extLst>
           </p:cNvPr>
@@ -11074,7 +11094,7 @@
           <p:cNvPr id="4" name="mac-label">
             <a:extLst xmlns:a="http://schemas.openxmlformats.org/drawingml/2006/main">
               <a:ext uri="{FF2B5EF4-FFF2-40B4-BE49-F238E27FC236}">
-                <a16:creationId xmlns:a16="http://schemas.microsoft.com/office/drawing/2014/main" id="{49E88DE3-599E-4349-B239-177B5E3101F4}"/>
+                <a16:creationId xmlns:a16="http://schemas.microsoft.com/office/drawing/2014/main" id="{97830581-09A4-42C0-9432-F266CCF85D60}"/>
               </a:ext>
             </a:extLst>
           </p:cNvPr>
@@ -11124,7 +11144,7 @@
           <p:cNvPr id="5" name="cmd-181">
             <a:extLst xmlns:a="http://schemas.openxmlformats.org/drawingml/2006/main">
               <a:ext uri="{FF2B5EF4-FFF2-40B4-BE49-F238E27FC236}">
-                <a16:creationId xmlns:a16="http://schemas.microsoft.com/office/drawing/2014/main" id="{C4815957-12BF-4F42-901F-1A9E62894F2B}"/>
+                <a16:creationId xmlns:a16="http://schemas.microsoft.com/office/drawing/2014/main" id="{92A8D3B8-6767-41ED-B064-5AF5A9932DBF}"/>
               </a:ext>
             </a:extLst>
           </p:cNvPr>
@@ -11174,7 +11194,7 @@
           <p:cNvPr id="6" name="win-label">
             <a:extLst xmlns:a="http://schemas.openxmlformats.org/drawingml/2006/main">
               <a:ext uri="{FF2B5EF4-FFF2-40B4-BE49-F238E27FC236}">
-                <a16:creationId xmlns:a16="http://schemas.microsoft.com/office/drawing/2014/main" id="{91425747-36F4-47F2-919F-6EB5E5E921DA}"/>
+                <a16:creationId xmlns:a16="http://schemas.microsoft.com/office/drawing/2014/main" id="{5664EF66-5B90-4C96-8EE4-9A27E942CB2B}"/>
               </a:ext>
             </a:extLst>
           </p:cNvPr>
@@ -11224,7 +11244,7 @@
           <p:cNvPr id="7" name="win-note">
             <a:extLst xmlns:a="http://schemas.openxmlformats.org/drawingml/2006/main">
               <a:ext uri="{FF2B5EF4-FFF2-40B4-BE49-F238E27FC236}">
-                <a16:creationId xmlns:a16="http://schemas.microsoft.com/office/drawing/2014/main" id="{C0C9B018-3F2E-4D81-9CD7-49FE39957F36}"/>
+                <a16:creationId xmlns:a16="http://schemas.microsoft.com/office/drawing/2014/main" id="{7A71BB28-296D-40BD-9486-343E4EC32AEA}"/>
               </a:ext>
             </a:extLst>
           </p:cNvPr>
@@ -11274,7 +11294,7 @@
           <p:cNvPr id="8" name="win-command">
             <a:extLst xmlns:a="http://schemas.openxmlformats.org/drawingml/2006/main">
               <a:ext uri="{FF2B5EF4-FFF2-40B4-BE49-F238E27FC236}">
-                <a16:creationId xmlns:a16="http://schemas.microsoft.com/office/drawing/2014/main" id="{0421F930-5543-403D-8AA6-CE457C037B69}"/>
+                <a16:creationId xmlns:a16="http://schemas.microsoft.com/office/drawing/2014/main" id="{AD8515E6-DCDD-46D6-96C0-42FC569A1411}"/>
               </a:ext>
             </a:extLst>
           </p:cNvPr>
@@ -11341,7 +11361,7 @@
           <p:cNvPr id="9" name="linux-label">
             <a:extLst xmlns:a="http://schemas.openxmlformats.org/drawingml/2006/main">
               <a:ext uri="{FF2B5EF4-FFF2-40B4-BE49-F238E27FC236}">
-                <a16:creationId xmlns:a16="http://schemas.microsoft.com/office/drawing/2014/main" id="{74F0871C-0AE9-43F4-9873-34D4D1346D10}"/>
+                <a16:creationId xmlns:a16="http://schemas.microsoft.com/office/drawing/2014/main" id="{3F20EB82-5D9F-451D-818A-7098A40D3394}"/>
               </a:ext>
             </a:extLst>
           </p:cNvPr>
@@ -11391,7 +11411,7 @@
           <p:cNvPr id="10" name="linux-command">
             <a:extLst xmlns:a="http://schemas.openxmlformats.org/drawingml/2006/main">
               <a:ext uri="{FF2B5EF4-FFF2-40B4-BE49-F238E27FC236}">
-                <a16:creationId xmlns:a16="http://schemas.microsoft.com/office/drawing/2014/main" id="{3E2E97F1-45DA-4620-8A13-69CE104CECBB}"/>
+                <a16:creationId xmlns:a16="http://schemas.microsoft.com/office/drawing/2014/main" id="{92E6883C-E2BA-4C8E-B0D3-E02284ABC4FA}"/>
               </a:ext>
             </a:extLst>
           </p:cNvPr>
@@ -11475,7 +11495,7 @@
           <p:cNvPr id="11" name="rule-78-310">
             <a:extLst xmlns:a="http://schemas.openxmlformats.org/drawingml/2006/main">
               <a:ext uri="{FF2B5EF4-FFF2-40B4-BE49-F238E27FC236}">
-                <a16:creationId xmlns:a16="http://schemas.microsoft.com/office/drawing/2014/main" id="{4F1AAABD-E1B4-463A-8583-A02016EF9A15}"/>
+                <a16:creationId xmlns:a16="http://schemas.microsoft.com/office/drawing/2014/main" id="{05EC7F01-A9C1-4DCA-8BFD-BD10FADE038E}"/>
               </a:ext>
             </a:extLst>
           </p:cNvPr>
@@ -11508,7 +11528,7 @@
           <p:cNvPr id="12" name="verify-label">
             <a:extLst xmlns:a="http://schemas.openxmlformats.org/drawingml/2006/main">
               <a:ext uri="{FF2B5EF4-FFF2-40B4-BE49-F238E27FC236}">
-                <a16:creationId xmlns:a16="http://schemas.microsoft.com/office/drawing/2014/main" id="{A41BEF3D-45E6-4736-9541-8E921BCA991C}"/>
+                <a16:creationId xmlns:a16="http://schemas.microsoft.com/office/drawing/2014/main" id="{CBA003BB-5C91-4DBE-B5DE-CDB63CFF42BE}"/>
               </a:ext>
             </a:extLst>
           </p:cNvPr>
@@ -11558,7 +11578,7 @@
           <p:cNvPr id="13" name="cmd-380">
             <a:extLst xmlns:a="http://schemas.openxmlformats.org/drawingml/2006/main">
               <a:ext uri="{FF2B5EF4-FFF2-40B4-BE49-F238E27FC236}">
-                <a16:creationId xmlns:a16="http://schemas.microsoft.com/office/drawing/2014/main" id="{1883FDF3-FE32-4242-BEDC-3D51DA583211}"/>
+                <a16:creationId xmlns:a16="http://schemas.microsoft.com/office/drawing/2014/main" id="{785FFD4A-21B6-4B77-93F4-6D0654202E83}"/>
               </a:ext>
             </a:extLst>
           </p:cNvPr>
@@ -11608,7 +11628,7 @@
           <p:cNvPr id="14" name="identity-label">
             <a:extLst xmlns:a="http://schemas.openxmlformats.org/drawingml/2006/main">
               <a:ext uri="{FF2B5EF4-FFF2-40B4-BE49-F238E27FC236}">
-                <a16:creationId xmlns:a16="http://schemas.microsoft.com/office/drawing/2014/main" id="{DA543833-0BF9-47E2-9122-25E6BB383CD0}"/>
+                <a16:creationId xmlns:a16="http://schemas.microsoft.com/office/drawing/2014/main" id="{FC32E344-BB34-4CF8-98E5-2878F2B41BAB}"/>
               </a:ext>
             </a:extLst>
           </p:cNvPr>
@@ -11658,7 +11678,7 @@
           <p:cNvPr id="15" name="cmd-478">
             <a:extLst xmlns:a="http://schemas.openxmlformats.org/drawingml/2006/main">
               <a:ext uri="{FF2B5EF4-FFF2-40B4-BE49-F238E27FC236}">
-                <a16:creationId xmlns:a16="http://schemas.microsoft.com/office/drawing/2014/main" id="{EB519852-F5DF-4DB4-8C6E-2303837D311F}"/>
+                <a16:creationId xmlns:a16="http://schemas.microsoft.com/office/drawing/2014/main" id="{700BFAA2-84C3-4406-915D-7DE0A43FB35C}"/>
               </a:ext>
             </a:extLst>
           </p:cNvPr>
@@ -11708,7 +11728,7 @@
           <p:cNvPr id="16" name="cmd-525">
             <a:extLst xmlns:a="http://schemas.openxmlformats.org/drawingml/2006/main">
               <a:ext uri="{FF2B5EF4-FFF2-40B4-BE49-F238E27FC236}">
-                <a16:creationId xmlns:a16="http://schemas.microsoft.com/office/drawing/2014/main" id="{CB47ED81-541D-4756-AEBD-16C3EE2C9C81}"/>
+                <a16:creationId xmlns:a16="http://schemas.microsoft.com/office/drawing/2014/main" id="{654FAE73-8664-4222-BDC2-9D55B3B19E4F}"/>
               </a:ext>
             </a:extLst>
           </p:cNvPr>
@@ -11758,7 +11778,7 @@
           <p:cNvPr id="17" name="takeaway">
             <a:extLst xmlns:a="http://schemas.openxmlformats.org/drawingml/2006/main">
               <a:ext uri="{FF2B5EF4-FFF2-40B4-BE49-F238E27FC236}">
-                <a16:creationId xmlns:a16="http://schemas.microsoft.com/office/drawing/2014/main" id="{24510B05-258B-49E9-AB9C-08B8C9026A4D}"/>
+                <a16:creationId xmlns:a16="http://schemas.microsoft.com/office/drawing/2014/main" id="{B9840CDD-F2EE-40A4-A90E-E6535FA5DC53}"/>
               </a:ext>
             </a:extLst>
           </p:cNvPr>
@@ -11806,7 +11826,7 @@
     </p:spTree>
     <p:extLst>
       <p:ext uri="{BB962C8B-B14F-4D97-AF65-F5344CB8AC3E}">
-        <p14:creationId xmlns:p14="http://schemas.microsoft.com/office/powerpoint/2010/main" val="1684949518"/>
+        <p14:creationId xmlns:p14="http://schemas.microsoft.com/office/powerpoint/2010/main" val="709767704"/>
       </p:ext>
     </p:extLst>
   </p:cSld>
@@ -11834,10 +11854,10 @@
       </p:grpSpPr>
       <p:sp>
         <p:nvSpPr>
-          <p:cNvPr id="8" name="slide-title">
-            <a:extLst xmlns:a="http://schemas.openxmlformats.org/drawingml/2006/main">
-              <a:ext uri="{FF2B5EF4-FFF2-40B4-BE49-F238E27FC236}">
-                <a16:creationId xmlns:a16="http://schemas.microsoft.com/office/drawing/2014/main" id="{B72F1E30-A106-4438-AF29-01DE76436CCB}"/>
+          <p:cNvPr id="17" name="slide-title">
+            <a:extLst xmlns:a="http://schemas.openxmlformats.org/drawingml/2006/main">
+              <a:ext uri="{FF2B5EF4-FFF2-40B4-BE49-F238E27FC236}">
+                <a16:creationId xmlns:a16="http://schemas.microsoft.com/office/drawing/2014/main" id="{0E942B76-E66F-4345-A3EF-A22B837202E2}"/>
               </a:ext>
             </a:extLst>
           </p:cNvPr>
@@ -11877,7 +11897,7 @@
                   <a:srgbClr val="3333B2"/>
                 </a:solidFill>
               </a:rPr>
-              <a:t>The inherited result is scheduled for tomorrow</a:t>
+              <a:t>Case B — The inherited output</a:t>
             </a:r>
           </a:p>
         </p:txBody>
@@ -11887,7 +11907,7 @@
           <p:cNvPr id="2" name="rule-68-107">
             <a:extLst xmlns:a="http://schemas.openxmlformats.org/drawingml/2006/main">
               <a:ext uri="{FF2B5EF4-FFF2-40B4-BE49-F238E27FC236}">
-                <a16:creationId xmlns:a16="http://schemas.microsoft.com/office/drawing/2014/main" id="{7A2C79B0-F879-4A43-A50D-283EE6873308}"/>
+                <a16:creationId xmlns:a16="http://schemas.microsoft.com/office/drawing/2014/main" id="{50AEF437-6B27-46A7-98D6-02E3F1073578}"/>
               </a:ext>
             </a:extLst>
           </p:cNvPr>
@@ -11920,7 +11940,7 @@
           <p:cNvPr id="3" name="page-number">
             <a:extLst xmlns:a="http://schemas.openxmlformats.org/drawingml/2006/main">
               <a:ext uri="{FF2B5EF4-FFF2-40B4-BE49-F238E27FC236}">
-                <a16:creationId xmlns:a16="http://schemas.microsoft.com/office/drawing/2014/main" id="{56010CD7-C1E1-4F64-9D03-4E13B6977F4D}"/>
+                <a16:creationId xmlns:a16="http://schemas.microsoft.com/office/drawing/2014/main" id="{4EA59D51-A56C-4871-9CD2-D0E4FA278D16}"/>
               </a:ext>
             </a:extLst>
           </p:cNvPr>
@@ -11967,200 +11987,732 @@
       </p:sp>
       <p:sp>
         <p:nvSpPr>
-          <p:cNvPr id="4" name="big-question">
-            <a:extLst xmlns:a="http://schemas.openxmlformats.org/drawingml/2006/main">
-              <a:ext uri="{FF2B5EF4-FFF2-40B4-BE49-F238E27FC236}">
-                <a16:creationId xmlns:a16="http://schemas.microsoft.com/office/drawing/2014/main" id="{547C8582-5EDE-4943-A5DE-6E1C8555DD59}"/>
-              </a:ext>
-            </a:extLst>
-          </p:cNvPr>
-          <p:cNvSpPr>
-            <a:spLocks xmlns:a="http://schemas.openxmlformats.org/drawingml/2006/main" noGrp="1"/>
-          </p:cNvSpPr>
-          <p:nvPr/>
-        </p:nvSpPr>
-        <p:spPr>
-          <a:xfrm xmlns:a="http://schemas.openxmlformats.org/drawingml/2006/main">
-            <a:off x="781050" y="1714500"/>
-            <a:ext cx="9525000" cy="904875"/>
-          </a:xfrm>
-          <a:prstGeom xmlns:a="http://schemas.openxmlformats.org/drawingml/2006/main" prst="rect">
-            <a:avLst/>
-          </a:prstGeom>
-          <a:noFill xmlns:a="http://schemas.openxmlformats.org/drawingml/2006/main"/>
-          <a:ln xmlns:a="http://schemas.openxmlformats.org/drawingml/2006/main" w="0">
-            <a:noFill/>
-            <a:prstDash val="solid"/>
-          </a:ln>
-        </p:spPr>
-        <p:txBody>
-          <a:bodyPr xmlns:a="http://schemas.openxmlformats.org/drawingml/2006/main" anchor="t"/>
-          <a:lstStyle xmlns:a="http://schemas.openxmlformats.org/drawingml/2006/main"/>
-          <a:p xmlns:a="http://schemas.openxmlformats.org/drawingml/2006/main">
-            <a:pPr algn="l">
-              <a:defRPr sz="4350" b="1" i="0">
+          <p:cNvPr id="4" name="n-label">
+            <a:extLst xmlns:a="http://schemas.openxmlformats.org/drawingml/2006/main">
+              <a:ext uri="{FF2B5EF4-FFF2-40B4-BE49-F238E27FC236}">
+                <a16:creationId xmlns:a16="http://schemas.microsoft.com/office/drawing/2014/main" id="{F912DD58-D122-4D75-AC03-C279D7F29227}"/>
+              </a:ext>
+            </a:extLst>
+          </p:cNvPr>
+          <p:cNvSpPr>
+            <a:spLocks xmlns:a="http://schemas.openxmlformats.org/drawingml/2006/main" noGrp="1"/>
+          </p:cNvSpPr>
+          <p:nvPr/>
+        </p:nvSpPr>
+        <p:spPr>
+          <a:xfrm xmlns:a="http://schemas.openxmlformats.org/drawingml/2006/main">
+            <a:off x="781050" y="1352550"/>
+            <a:ext cx="2381250" cy="304800"/>
+          </a:xfrm>
+          <a:prstGeom xmlns:a="http://schemas.openxmlformats.org/drawingml/2006/main" prst="rect">
+            <a:avLst/>
+          </a:prstGeom>
+          <a:noFill xmlns:a="http://schemas.openxmlformats.org/drawingml/2006/main"/>
+          <a:ln xmlns:a="http://schemas.openxmlformats.org/drawingml/2006/main" w="0">
+            <a:noFill/>
+            <a:prstDash val="solid"/>
+          </a:ln>
+        </p:spPr>
+        <p:txBody>
+          <a:bodyPr xmlns:a="http://schemas.openxmlformats.org/drawingml/2006/main" anchor="t"/>
+          <a:lstStyle xmlns:a="http://schemas.openxmlformats.org/drawingml/2006/main"/>
+          <a:p xmlns:a="http://schemas.openxmlformats.org/drawingml/2006/main">
+            <a:pPr algn="l">
+              <a:defRPr sz="1350" b="1" i="0">
+                <a:solidFill>
+                  <a:srgbClr val="3333B2"/>
+                </a:solidFill>
+              </a:defRPr>
+            </a:pPr>
+            <a:r>
+              <a:rPr sz="1350" b="1" i="0">
+                <a:solidFill>
+                  <a:srgbClr val="3333B2"/>
+                </a:solidFill>
+              </a:rPr>
+              <a:t>ANALYSIS SAMPLE</a:t>
+            </a:r>
+          </a:p>
+        </p:txBody>
+      </p:sp>
+      <p:sp>
+        <p:nvSpPr>
+          <p:cNvPr id="5" name="n-value">
+            <a:extLst xmlns:a="http://schemas.openxmlformats.org/drawingml/2006/main">
+              <a:ext uri="{FF2B5EF4-FFF2-40B4-BE49-F238E27FC236}">
+                <a16:creationId xmlns:a16="http://schemas.microsoft.com/office/drawing/2014/main" id="{A6FF4649-9C0F-4F8A-AE59-C50565C49791}"/>
+              </a:ext>
+            </a:extLst>
+          </p:cNvPr>
+          <p:cNvSpPr>
+            <a:spLocks xmlns:a="http://schemas.openxmlformats.org/drawingml/2006/main" noGrp="1"/>
+          </p:cNvSpPr>
+          <p:nvPr/>
+        </p:nvSpPr>
+        <p:spPr>
+          <a:xfrm xmlns:a="http://schemas.openxmlformats.org/drawingml/2006/main">
+            <a:off x="781050" y="1695450"/>
+            <a:ext cx="4762500" cy="428625"/>
+          </a:xfrm>
+          <a:prstGeom xmlns:a="http://schemas.openxmlformats.org/drawingml/2006/main" prst="rect">
+            <a:avLst/>
+          </a:prstGeom>
+          <a:noFill xmlns:a="http://schemas.openxmlformats.org/drawingml/2006/main"/>
+          <a:ln xmlns:a="http://schemas.openxmlformats.org/drawingml/2006/main" w="0">
+            <a:noFill/>
+            <a:prstDash val="solid"/>
+          </a:ln>
+        </p:spPr>
+        <p:txBody>
+          <a:bodyPr xmlns:a="http://schemas.openxmlformats.org/drawingml/2006/main" anchor="t"/>
+          <a:lstStyle xmlns:a="http://schemas.openxmlformats.org/drawingml/2006/main"/>
+          <a:p xmlns:a="http://schemas.openxmlformats.org/drawingml/2006/main">
+            <a:pPr algn="l">
+              <a:defRPr sz="2325" b="1" i="0">
+                <a:solidFill>
+                  <a:srgbClr val="17171C"/>
+                </a:solidFill>
+              </a:defRPr>
+            </a:pPr>
+            <a:r>
+              <a:rPr sz="2325" b="1" i="0">
+                <a:solidFill>
+                  <a:srgbClr val="17171C"/>
+                </a:solidFill>
+              </a:rPr>
+              <a:t>N = 3,430 rows</a:t>
+            </a:r>
+          </a:p>
+        </p:txBody>
+      </p:sp>
+      <p:sp>
+        <p:nvSpPr>
+          <p:cNvPr id="6" name="participants-label">
+            <a:extLst xmlns:a="http://schemas.openxmlformats.org/drawingml/2006/main">
+              <a:ext uri="{FF2B5EF4-FFF2-40B4-BE49-F238E27FC236}">
+                <a16:creationId xmlns:a16="http://schemas.microsoft.com/office/drawing/2014/main" id="{5351063F-A574-481E-8983-255058DBFD95}"/>
+              </a:ext>
+            </a:extLst>
+          </p:cNvPr>
+          <p:cNvSpPr>
+            <a:spLocks xmlns:a="http://schemas.openxmlformats.org/drawingml/2006/main" noGrp="1"/>
+          </p:cNvSpPr>
+          <p:nvPr/>
+        </p:nvSpPr>
+        <p:spPr>
+          <a:xfrm xmlns:a="http://schemas.openxmlformats.org/drawingml/2006/main">
+            <a:off x="781050" y="2343150"/>
+            <a:ext cx="3048000" cy="304800"/>
+          </a:xfrm>
+          <a:prstGeom xmlns:a="http://schemas.openxmlformats.org/drawingml/2006/main" prst="rect">
+            <a:avLst/>
+          </a:prstGeom>
+          <a:noFill xmlns:a="http://schemas.openxmlformats.org/drawingml/2006/main"/>
+          <a:ln xmlns:a="http://schemas.openxmlformats.org/drawingml/2006/main" w="0">
+            <a:noFill/>
+            <a:prstDash val="solid"/>
+          </a:ln>
+        </p:spPr>
+        <p:txBody>
+          <a:bodyPr xmlns:a="http://schemas.openxmlformats.org/drawingml/2006/main" anchor="t"/>
+          <a:lstStyle xmlns:a="http://schemas.openxmlformats.org/drawingml/2006/main"/>
+          <a:p xmlns:a="http://schemas.openxmlformats.org/drawingml/2006/main">
+            <a:pPr algn="l">
+              <a:defRPr sz="1350" b="1" i="0">
+                <a:solidFill>
+                  <a:srgbClr val="3333B2"/>
+                </a:solidFill>
+              </a:defRPr>
+            </a:pPr>
+            <a:r>
+              <a:rPr sz="1350" b="1" i="0">
+                <a:solidFill>
+                  <a:srgbClr val="3333B2"/>
+                </a:solidFill>
+              </a:rPr>
+              <a:t>PROGRAM PARTICIPANTS</a:t>
+            </a:r>
+          </a:p>
+        </p:txBody>
+      </p:sp>
+      <p:sp>
+        <p:nvSpPr>
+          <p:cNvPr id="7" name="participants-value">
+            <a:extLst xmlns:a="http://schemas.openxmlformats.org/drawingml/2006/main">
+              <a:ext uri="{FF2B5EF4-FFF2-40B4-BE49-F238E27FC236}">
+                <a16:creationId xmlns:a16="http://schemas.microsoft.com/office/drawing/2014/main" id="{C9B8E15E-C5C8-4336-B321-9B0F923B2260}"/>
+              </a:ext>
+            </a:extLst>
+          </p:cNvPr>
+          <p:cNvSpPr>
+            <a:spLocks xmlns:a="http://schemas.openxmlformats.org/drawingml/2006/main" noGrp="1"/>
+          </p:cNvSpPr>
+          <p:nvPr/>
+        </p:nvSpPr>
+        <p:spPr>
+          <a:xfrm xmlns:a="http://schemas.openxmlformats.org/drawingml/2006/main">
+            <a:off x="781050" y="2686050"/>
+            <a:ext cx="5810250" cy="400050"/>
+          </a:xfrm>
+          <a:prstGeom xmlns:a="http://schemas.openxmlformats.org/drawingml/2006/main" prst="rect">
+            <a:avLst/>
+          </a:prstGeom>
+          <a:noFill xmlns:a="http://schemas.openxmlformats.org/drawingml/2006/main"/>
+          <a:ln xmlns:a="http://schemas.openxmlformats.org/drawingml/2006/main" w="0">
+            <a:noFill/>
+            <a:prstDash val="solid"/>
+          </a:ln>
+        </p:spPr>
+        <p:txBody>
+          <a:bodyPr xmlns:a="http://schemas.openxmlformats.org/drawingml/2006/main" anchor="t"/>
+          <a:lstStyle xmlns:a="http://schemas.openxmlformats.org/drawingml/2006/main"/>
+          <a:p xmlns:a="http://schemas.openxmlformats.org/drawingml/2006/main">
+            <a:pPr algn="l">
+              <a:defRPr sz="1725" b="1" i="0">
+                <a:solidFill>
+                  <a:srgbClr val="17171C"/>
+                </a:solidFill>
+              </a:defRPr>
+            </a:pPr>
+            <a:r>
+              <a:rPr sz="1725" b="1" i="0">
+                <a:solidFill>
+                  <a:srgbClr val="17171C"/>
+                </a:solidFill>
+              </a:rPr>
+              <a:t>1,825 rows  •  1,248 employed  •  68.4%</a:t>
+            </a:r>
+          </a:p>
+        </p:txBody>
+      </p:sp>
+      <p:sp>
+        <p:nvSpPr>
+          <p:cNvPr id="8" name="nonparticipants-label">
+            <a:extLst xmlns:a="http://schemas.openxmlformats.org/drawingml/2006/main">
+              <a:ext uri="{FF2B5EF4-FFF2-40B4-BE49-F238E27FC236}">
+                <a16:creationId xmlns:a16="http://schemas.microsoft.com/office/drawing/2014/main" id="{CA3C63FD-4F55-4DC5-85F0-04AC28636597}"/>
+              </a:ext>
+            </a:extLst>
+          </p:cNvPr>
+          <p:cNvSpPr>
+            <a:spLocks xmlns:a="http://schemas.openxmlformats.org/drawingml/2006/main" noGrp="1"/>
+          </p:cNvSpPr>
+          <p:nvPr/>
+        </p:nvSpPr>
+        <p:spPr>
+          <a:xfrm xmlns:a="http://schemas.openxmlformats.org/drawingml/2006/main">
+            <a:off x="781050" y="3295650"/>
+            <a:ext cx="3048000" cy="304800"/>
+          </a:xfrm>
+          <a:prstGeom xmlns:a="http://schemas.openxmlformats.org/drawingml/2006/main" prst="rect">
+            <a:avLst/>
+          </a:prstGeom>
+          <a:noFill xmlns:a="http://schemas.openxmlformats.org/drawingml/2006/main"/>
+          <a:ln xmlns:a="http://schemas.openxmlformats.org/drawingml/2006/main" w="0">
+            <a:noFill/>
+            <a:prstDash val="solid"/>
+          </a:ln>
+        </p:spPr>
+        <p:txBody>
+          <a:bodyPr xmlns:a="http://schemas.openxmlformats.org/drawingml/2006/main" anchor="t"/>
+          <a:lstStyle xmlns:a="http://schemas.openxmlformats.org/drawingml/2006/main"/>
+          <a:p xmlns:a="http://schemas.openxmlformats.org/drawingml/2006/main">
+            <a:pPr algn="l">
+              <a:defRPr sz="1350" b="1" i="0">
+                <a:solidFill>
+                  <a:srgbClr val="3333B2"/>
+                </a:solidFill>
+              </a:defRPr>
+            </a:pPr>
+            <a:r>
+              <a:rPr sz="1350" b="1" i="0">
+                <a:solidFill>
+                  <a:srgbClr val="3333B2"/>
+                </a:solidFill>
+              </a:rPr>
+              <a:t>NONPARTICIPANTS</a:t>
+            </a:r>
+          </a:p>
+        </p:txBody>
+      </p:sp>
+      <p:sp>
+        <p:nvSpPr>
+          <p:cNvPr id="9" name="nonparticipants-value">
+            <a:extLst xmlns:a="http://schemas.openxmlformats.org/drawingml/2006/main">
+              <a:ext uri="{FF2B5EF4-FFF2-40B4-BE49-F238E27FC236}">
+                <a16:creationId xmlns:a16="http://schemas.microsoft.com/office/drawing/2014/main" id="{78A4884E-5365-447B-B1A5-742C2D5412F8}"/>
+              </a:ext>
+            </a:extLst>
+          </p:cNvPr>
+          <p:cNvSpPr>
+            <a:spLocks xmlns:a="http://schemas.openxmlformats.org/drawingml/2006/main" noGrp="1"/>
+          </p:cNvSpPr>
+          <p:nvPr/>
+        </p:nvSpPr>
+        <p:spPr>
+          <a:xfrm xmlns:a="http://schemas.openxmlformats.org/drawingml/2006/main">
+            <a:off x="781050" y="3638550"/>
+            <a:ext cx="5810250" cy="400050"/>
+          </a:xfrm>
+          <a:prstGeom xmlns:a="http://schemas.openxmlformats.org/drawingml/2006/main" prst="rect">
+            <a:avLst/>
+          </a:prstGeom>
+          <a:noFill xmlns:a="http://schemas.openxmlformats.org/drawingml/2006/main"/>
+          <a:ln xmlns:a="http://schemas.openxmlformats.org/drawingml/2006/main" w="0">
+            <a:noFill/>
+            <a:prstDash val="solid"/>
+          </a:ln>
+        </p:spPr>
+        <p:txBody>
+          <a:bodyPr xmlns:a="http://schemas.openxmlformats.org/drawingml/2006/main" anchor="t"/>
+          <a:lstStyle xmlns:a="http://schemas.openxmlformats.org/drawingml/2006/main"/>
+          <a:p xmlns:a="http://schemas.openxmlformats.org/drawingml/2006/main">
+            <a:pPr algn="l">
+              <a:defRPr sz="1725" b="1" i="0">
+                <a:solidFill>
+                  <a:srgbClr val="17171C"/>
+                </a:solidFill>
+              </a:defRPr>
+            </a:pPr>
+            <a:r>
+              <a:rPr sz="1725" b="1" i="0">
+                <a:solidFill>
+                  <a:srgbClr val="17171C"/>
+                </a:solidFill>
+              </a:rPr>
+              <a:t>1,605 rows  •  1,008 employed  •  62.8%</a:t>
+            </a:r>
+          </a:p>
+        </p:txBody>
+      </p:sp>
+      <p:sp>
+        <p:nvSpPr>
+          <p:cNvPr id="10" name="difference">
+            <a:extLst xmlns:a="http://schemas.openxmlformats.org/drawingml/2006/main">
+              <a:ext uri="{FF2B5EF4-FFF2-40B4-BE49-F238E27FC236}">
+                <a16:creationId xmlns:a16="http://schemas.microsoft.com/office/drawing/2014/main" id="{AAA7FB97-BFB9-45D6-B8B7-0DBC2DB65CDE}"/>
+              </a:ext>
+            </a:extLst>
+          </p:cNvPr>
+          <p:cNvSpPr>
+            <a:spLocks xmlns:a="http://schemas.openxmlformats.org/drawingml/2006/main" noGrp="1"/>
+          </p:cNvSpPr>
+          <p:nvPr/>
+        </p:nvSpPr>
+        <p:spPr>
+          <a:xfrm xmlns:a="http://schemas.openxmlformats.org/drawingml/2006/main">
+            <a:off x="781050" y="4362450"/>
+            <a:ext cx="5810250" cy="428625"/>
+          </a:xfrm>
+          <a:prstGeom xmlns:a="http://schemas.openxmlformats.org/drawingml/2006/main" prst="rect">
+            <a:avLst/>
+          </a:prstGeom>
+          <a:noFill xmlns:a="http://schemas.openxmlformats.org/drawingml/2006/main"/>
+          <a:ln xmlns:a="http://schemas.openxmlformats.org/drawingml/2006/main" w="0">
+            <a:noFill/>
+            <a:prstDash val="solid"/>
+          </a:ln>
+        </p:spPr>
+        <p:txBody>
+          <a:bodyPr xmlns:a="http://schemas.openxmlformats.org/drawingml/2006/main" anchor="t"/>
+          <a:lstStyle xmlns:a="http://schemas.openxmlformats.org/drawingml/2006/main"/>
+          <a:p xmlns:a="http://schemas.openxmlformats.org/drawingml/2006/main">
+            <a:pPr algn="l">
+              <a:defRPr sz="2175" b="1" i="0">
+                <a:solidFill>
+                  <a:srgbClr val="BF0040"/>
+                </a:solidFill>
+              </a:defRPr>
+            </a:pPr>
+            <a:r>
+              <a:rPr sz="2175" b="1" i="0">
+                <a:solidFill>
+                  <a:srgbClr val="BF0040"/>
+                </a:solidFill>
+              </a:rPr>
+              <a:t>Reported difference: +5.6 pp</a:t>
+            </a:r>
+          </a:p>
+        </p:txBody>
+      </p:sp>
+      <p:sp>
+        <p:nvSpPr>
+          <p:cNvPr id="11" name="quote-band">
+            <a:extLst xmlns:a="http://schemas.openxmlformats.org/drawingml/2006/main">
+              <a:ext uri="{FF2B5EF4-FFF2-40B4-BE49-F238E27FC236}">
+                <a16:creationId xmlns:a16="http://schemas.microsoft.com/office/drawing/2014/main" id="{B5B8E9EC-0A38-47AD-9B00-1A824440B72E}"/>
+              </a:ext>
+            </a:extLst>
+          </p:cNvPr>
+          <p:cNvSpPr>
+            <a:spLocks xmlns:a="http://schemas.openxmlformats.org/drawingml/2006/main" noGrp="1"/>
+          </p:cNvSpPr>
+          <p:nvPr/>
+        </p:nvSpPr>
+        <p:spPr>
+          <a:xfrm xmlns:a="http://schemas.openxmlformats.org/drawingml/2006/main">
+            <a:off x="781050" y="5000625"/>
+            <a:ext cx="5810250" cy="742950"/>
+          </a:xfrm>
+          <a:prstGeom xmlns:a="http://schemas.openxmlformats.org/drawingml/2006/main" prst="rect">
+            <a:avLst/>
+          </a:prstGeom>
+          <a:solidFill xmlns:a="http://schemas.openxmlformats.org/drawingml/2006/main">
+            <a:srgbClr val="EFEFFA"/>
+          </a:solidFill>
+          <a:ln xmlns:a="http://schemas.openxmlformats.org/drawingml/2006/main" w="0">
+            <a:noFill/>
+            <a:prstDash val="solid"/>
+          </a:ln>
+        </p:spPr>
+      </p:sp>
+      <p:sp>
+        <p:nvSpPr>
+          <p:cNvPr id="12" name="quote">
+            <a:extLst xmlns:a="http://schemas.openxmlformats.org/drawingml/2006/main">
+              <a:ext uri="{FF2B5EF4-FFF2-40B4-BE49-F238E27FC236}">
+                <a16:creationId xmlns:a16="http://schemas.microsoft.com/office/drawing/2014/main" id="{CDC1D430-8A3A-4C8E-99F2-B51722B602C7}"/>
+              </a:ext>
+            </a:extLst>
+          </p:cNvPr>
+          <p:cNvSpPr>
+            <a:spLocks xmlns:a="http://schemas.openxmlformats.org/drawingml/2006/main" noGrp="1"/>
+          </p:cNvSpPr>
+          <p:nvPr/>
+        </p:nvSpPr>
+        <p:spPr>
+          <a:xfrm xmlns:a="http://schemas.openxmlformats.org/drawingml/2006/main">
+            <a:off x="962025" y="5181600"/>
+            <a:ext cx="5476875" cy="400050"/>
+          </a:xfrm>
+          <a:prstGeom xmlns:a="http://schemas.openxmlformats.org/drawingml/2006/main" prst="rect">
+            <a:avLst/>
+          </a:prstGeom>
+          <a:noFill xmlns:a="http://schemas.openxmlformats.org/drawingml/2006/main"/>
+          <a:ln xmlns:a="http://schemas.openxmlformats.org/drawingml/2006/main" w="0">
+            <a:noFill/>
+            <a:prstDash val="solid"/>
+          </a:ln>
+        </p:spPr>
+        <p:txBody>
+          <a:bodyPr xmlns:a="http://schemas.openxmlformats.org/drawingml/2006/main" anchor="t"/>
+          <a:lstStyle xmlns:a="http://schemas.openxmlformats.org/drawingml/2006/main"/>
+          <a:p xmlns:a="http://schemas.openxmlformats.org/drawingml/2006/main">
+            <a:pPr algn="l">
+              <a:defRPr sz="1725" b="1" i="1">
+                <a:solidFill>
+                  <a:srgbClr val="17171C"/>
+                </a:solidFill>
+              </a:defRPr>
+            </a:pPr>
+            <a:r>
+              <a:rPr sz="1725" b="1" i="1">
+                <a:solidFill>
+                  <a:srgbClr val="17171C"/>
+                </a:solidFill>
+              </a:rPr>
+              <a:t>“Training participation increased employment.”</a:t>
+            </a:r>
+          </a:p>
+        </p:txBody>
+      </p:sp>
+      <p:sp>
+        <p:nvSpPr>
+          <p:cNvPr id="13" name="rule-728-142">
+            <a:extLst xmlns:a="http://schemas.openxmlformats.org/drawingml/2006/main">
+              <a:ext uri="{FF2B5EF4-FFF2-40B4-BE49-F238E27FC236}">
+                <a16:creationId xmlns:a16="http://schemas.microsoft.com/office/drawing/2014/main" id="{9DBD07B6-4F79-41FF-A974-7F7F8FAF5B82}"/>
+              </a:ext>
+            </a:extLst>
+          </p:cNvPr>
+          <p:cNvSpPr>
+            <a:spLocks xmlns:a="http://schemas.openxmlformats.org/drawingml/2006/main" noGrp="1"/>
+          </p:cNvSpPr>
+          <p:nvPr/>
+        </p:nvSpPr>
+        <p:spPr>
+          <a:xfrm xmlns:a="http://schemas.openxmlformats.org/drawingml/2006/main">
+            <a:off x="6934200" y="1352550"/>
+            <a:ext cx="19050" cy="0"/>
+          </a:xfrm>
+          <a:prstGeom xmlns:a="http://schemas.openxmlformats.org/drawingml/2006/main" prst="rect">
+            <a:avLst/>
+          </a:prstGeom>
+          <a:ln xmlns:a="http://schemas.openxmlformats.org/drawingml/2006/main" w="0">
+            <a:prstDash val="solid"/>
+          </a:ln>
+        </p:spPr>
+      </p:sp>
+      <p:sp>
+        <p:nvSpPr>
+          <p:cNvPr id="14" name="audit-title">
+            <a:extLst xmlns:a="http://schemas.openxmlformats.org/drawingml/2006/main">
+              <a:ext uri="{FF2B5EF4-FFF2-40B4-BE49-F238E27FC236}">
+                <a16:creationId xmlns:a16="http://schemas.microsoft.com/office/drawing/2014/main" id="{7F87CB37-1F1C-47A2-A001-BDF6A201DCCF}"/>
+              </a:ext>
+            </a:extLst>
+          </p:cNvPr>
+          <p:cNvSpPr>
+            <a:spLocks xmlns:a="http://schemas.openxmlformats.org/drawingml/2006/main" noGrp="1"/>
+          </p:cNvSpPr>
+          <p:nvPr/>
+        </p:nvSpPr>
+        <p:spPr>
+          <a:xfrm xmlns:a="http://schemas.openxmlformats.org/drawingml/2006/main">
+            <a:off x="7277100" y="1352550"/>
+            <a:ext cx="3905250" cy="381000"/>
+          </a:xfrm>
+          <a:prstGeom xmlns:a="http://schemas.openxmlformats.org/drawingml/2006/main" prst="rect">
+            <a:avLst/>
+          </a:prstGeom>
+          <a:noFill xmlns:a="http://schemas.openxmlformats.org/drawingml/2006/main"/>
+          <a:ln xmlns:a="http://schemas.openxmlformats.org/drawingml/2006/main" w="0">
+            <a:noFill/>
+            <a:prstDash val="solid"/>
+          </a:ln>
+        </p:spPr>
+        <p:txBody>
+          <a:bodyPr xmlns:a="http://schemas.openxmlformats.org/drawingml/2006/main" anchor="t"/>
+          <a:lstStyle xmlns:a="http://schemas.openxmlformats.org/drawingml/2006/main"/>
+          <a:p xmlns:a="http://schemas.openxmlformats.org/drawingml/2006/main">
+            <a:pPr algn="l">
+              <a:defRPr sz="1950" b="1" i="0">
+                <a:solidFill>
+                  <a:srgbClr val="3333B2"/>
+                </a:solidFill>
+              </a:defRPr>
+            </a:pPr>
+            <a:r>
+              <a:rPr sz="1950" b="1" i="0">
+                <a:solidFill>
+                  <a:srgbClr val="3333B2"/>
+                </a:solidFill>
+              </a:rPr>
+              <a:t>StatsClaw read-only audit</a:t>
+            </a:r>
+          </a:p>
+        </p:txBody>
+      </p:sp>
+      <p:sp>
+        <p:nvSpPr>
+          <p:cNvPr id="15" name="audit-request">
+            <a:extLst xmlns:a="http://schemas.openxmlformats.org/drawingml/2006/main">
+              <a:ext uri="{FF2B5EF4-FFF2-40B4-BE49-F238E27FC236}">
+                <a16:creationId xmlns:a16="http://schemas.microsoft.com/office/drawing/2014/main" id="{4723D909-8202-42EE-875B-F733404D77D8}"/>
+              </a:ext>
+            </a:extLst>
+          </p:cNvPr>
+          <p:cNvSpPr>
+            <a:spLocks xmlns:a="http://schemas.openxmlformats.org/drawingml/2006/main" noGrp="1"/>
+          </p:cNvSpPr>
+          <p:nvPr/>
+        </p:nvSpPr>
+        <p:spPr>
+          <a:xfrm xmlns:a="http://schemas.openxmlformats.org/drawingml/2006/main">
+            <a:off x="7277100" y="1914525"/>
+            <a:ext cx="4000500" cy="2286000"/>
+          </a:xfrm>
+          <a:prstGeom xmlns:a="http://schemas.openxmlformats.org/drawingml/2006/main" prst="rect">
+            <a:avLst/>
+          </a:prstGeom>
+          <a:noFill xmlns:a="http://schemas.openxmlformats.org/drawingml/2006/main"/>
+          <a:ln xmlns:a="http://schemas.openxmlformats.org/drawingml/2006/main" w="0">
+            <a:noFill/>
+            <a:prstDash val="solid"/>
+          </a:ln>
+        </p:spPr>
+        <p:txBody>
+          <a:bodyPr xmlns:a="http://schemas.openxmlformats.org/drawingml/2006/main" anchor="t"/>
+          <a:lstStyle xmlns:a="http://schemas.openxmlformats.org/drawingml/2006/main"/>
+          <a:p xmlns:a="http://schemas.openxmlformats.org/drawingml/2006/main">
+            <a:pPr algn="l">
+              <a:defRPr sz="1650" b="0" i="0">
+                <a:solidFill>
+                  <a:srgbClr val="17171C"/>
+                </a:solidFill>
+              </a:defRPr>
+            </a:pPr>
+            <a:r>
+              <a:rPr sz="1650" b="0" i="0">
+                <a:solidFill>
+                  <a:srgbClr val="17171C"/>
+                </a:solidFill>
+              </a:rPr>
+              <a:t>Trace:</a:t>
+            </a:r>
+          </a:p>
+          <a:p xmlns:a="http://schemas.openxmlformats.org/drawingml/2006/main">
+            <a:r>
+              <a:t/>
+            </a:r>
+          </a:p>
+          <a:p xmlns:a="http://schemas.openxmlformats.org/drawingml/2006/main">
+            <a:pPr algn="l">
+              <a:defRPr sz="1650" b="0" i="0">
+                <a:solidFill>
+                  <a:srgbClr val="17171C"/>
+                </a:solidFill>
+              </a:defRPr>
+            </a:pPr>
+            <a:r>
+              <a:rPr sz="1650" b="0" i="0">
+                <a:solidFill>
+                  <a:srgbClr val="17171C"/>
+                </a:solidFill>
+              </a:rPr>
+              <a:t>unit of observation</a:t>
+            </a:r>
+          </a:p>
+          <a:p xmlns:a="http://schemas.openxmlformats.org/drawingml/2006/main">
+            <a:pPr algn="l">
+              <a:defRPr sz="1650" b="0" i="0">
+                <a:solidFill>
+                  <a:srgbClr val="17171C"/>
+                </a:solidFill>
+              </a:defRPr>
+            </a:pPr>
+            <a:r>
+              <a:rPr sz="1650" b="0" i="0">
+                <a:solidFill>
+                  <a:srgbClr val="17171C"/>
+                </a:solidFill>
+              </a:rPr>
+              <a:t>applicant_id key</a:t>
+            </a:r>
+          </a:p>
+          <a:p xmlns:a="http://schemas.openxmlformats.org/drawingml/2006/main">
+            <a:pPr algn="l">
+              <a:defRPr sz="1650" b="0" i="0">
+                <a:solidFill>
+                  <a:srgbClr val="17171C"/>
+                </a:solidFill>
+              </a:defRPr>
+            </a:pPr>
+            <a:r>
+              <a:rPr sz="1650" b="0" i="0">
+                <a:solidFill>
+                  <a:srgbClr val="17171C"/>
+                </a:solidFill>
+              </a:rPr>
+              <a:t>join cardinality</a:t>
+            </a:r>
+          </a:p>
+          <a:p xmlns:a="http://schemas.openxmlformats.org/drawingml/2006/main">
+            <a:pPr algn="l">
+              <a:defRPr sz="1650" b="0" i="0">
+                <a:solidFill>
+                  <a:srgbClr val="17171C"/>
+                </a:solidFill>
+              </a:defRPr>
+            </a:pPr>
+            <a:r>
+              <a:rPr sz="1650" b="0" i="0">
+                <a:solidFill>
+                  <a:srgbClr val="17171C"/>
+                </a:solidFill>
+              </a:rPr>
+              <a:t>treatment definition</a:t>
+            </a:r>
+          </a:p>
+          <a:p xmlns:a="http://schemas.openxmlformats.org/drawingml/2006/main">
+            <a:pPr algn="l">
+              <a:defRPr sz="1650" b="0" i="0">
+                <a:solidFill>
+                  <a:srgbClr val="17171C"/>
+                </a:solidFill>
+              </a:defRPr>
+            </a:pPr>
+            <a:r>
+              <a:rPr sz="1650" b="0" i="0">
+                <a:solidFill>
+                  <a:srgbClr val="17171C"/>
+                </a:solidFill>
+              </a:rPr>
+              <a:t>estimand</a:t>
+            </a:r>
+          </a:p>
+        </p:txBody>
+      </p:sp>
+      <p:sp>
+        <p:nvSpPr>
+          <p:cNvPr id="16" name="audit-status">
+            <a:extLst xmlns:a="http://schemas.openxmlformats.org/drawingml/2006/main">
+              <a:ext uri="{FF2B5EF4-FFF2-40B4-BE49-F238E27FC236}">
+                <a16:creationId xmlns:a16="http://schemas.microsoft.com/office/drawing/2014/main" id="{D3C16366-0775-4B19-8474-8348BEC1700D}"/>
+              </a:ext>
+            </a:extLst>
+          </p:cNvPr>
+          <p:cNvSpPr>
+            <a:spLocks xmlns:a="http://schemas.openxmlformats.org/drawingml/2006/main" noGrp="1"/>
+          </p:cNvSpPr>
+          <p:nvPr/>
+        </p:nvSpPr>
+        <p:spPr>
+          <a:xfrm xmlns:a="http://schemas.openxmlformats.org/drawingml/2006/main">
+            <a:off x="7277100" y="4448175"/>
+            <a:ext cx="4000500" cy="1000125"/>
+          </a:xfrm>
+          <a:prstGeom xmlns:a="http://schemas.openxmlformats.org/drawingml/2006/main" prst="rect">
+            <a:avLst/>
+          </a:prstGeom>
+          <a:noFill xmlns:a="http://schemas.openxmlformats.org/drawingml/2006/main"/>
+          <a:ln xmlns:a="http://schemas.openxmlformats.org/drawingml/2006/main" w="0">
+            <a:noFill/>
+            <a:prstDash val="solid"/>
+          </a:ln>
+        </p:spPr>
+        <p:txBody>
+          <a:bodyPr xmlns:a="http://schemas.openxmlformats.org/drawingml/2006/main" anchor="t"/>
+          <a:lstStyle xmlns:a="http://schemas.openxmlformats.org/drawingml/2006/main"/>
+          <a:p xmlns:a="http://schemas.openxmlformats.org/drawingml/2006/main">
+            <a:pPr algn="l">
+              <a:defRPr sz="1650" b="1" i="0">
                 <a:solidFill>
                   <a:srgbClr val="FF0000"/>
                 </a:solidFill>
               </a:defRPr>
             </a:pPr>
             <a:r>
-              <a:rPr sz="4350" b="1" i="0">
+              <a:rPr sz="1650" b="1" i="0">
                 <a:solidFill>
                   <a:srgbClr val="FF0000"/>
                 </a:solidFill>
               </a:rPr>
-              <a:t>Would you sign off?</a:t>
-            </a:r>
-          </a:p>
-        </p:txBody>
-      </p:sp>
-      <p:sp>
-        <p:nvSpPr>
-          <p:cNvPr id="5" name="context">
-            <a:extLst xmlns:a="http://schemas.openxmlformats.org/drawingml/2006/main">
-              <a:ext uri="{FF2B5EF4-FFF2-40B4-BE49-F238E27FC236}">
-                <a16:creationId xmlns:a16="http://schemas.microsoft.com/office/drawing/2014/main" id="{E50EC693-28AC-4985-9C88-2112091D9BCD}"/>
-              </a:ext>
-            </a:extLst>
-          </p:cNvPr>
-          <p:cNvSpPr>
-            <a:spLocks xmlns:a="http://schemas.openxmlformats.org/drawingml/2006/main" noGrp="1"/>
-          </p:cNvSpPr>
-          <p:nvPr/>
-        </p:nvSpPr>
-        <p:spPr>
-          <a:xfrm xmlns:a="http://schemas.openxmlformats.org/drawingml/2006/main">
-            <a:off x="819150" y="3190875"/>
-            <a:ext cx="10001250" cy="533400"/>
-          </a:xfrm>
-          <a:prstGeom xmlns:a="http://schemas.openxmlformats.org/drawingml/2006/main" prst="rect">
-            <a:avLst/>
-          </a:prstGeom>
-          <a:noFill xmlns:a="http://schemas.openxmlformats.org/drawingml/2006/main"/>
-          <a:ln xmlns:a="http://schemas.openxmlformats.org/drawingml/2006/main" w="0">
-            <a:noFill/>
-            <a:prstDash val="solid"/>
-          </a:ln>
-        </p:spPr>
-        <p:txBody>
-          <a:bodyPr xmlns:a="http://schemas.openxmlformats.org/drawingml/2006/main" anchor="t"/>
-          <a:lstStyle xmlns:a="http://schemas.openxmlformats.org/drawingml/2006/main"/>
-          <a:p xmlns:a="http://schemas.openxmlformats.org/drawingml/2006/main">
-            <a:pPr algn="l">
-              <a:defRPr sz="2175" b="0" i="0">
-                <a:solidFill>
-                  <a:srgbClr val="17171C"/>
-                </a:solidFill>
-              </a:defRPr>
-            </a:pPr>
-            <a:r>
-              <a:rPr sz="2175" b="0" i="0">
-                <a:solidFill>
-                  <a:srgbClr val="17171C"/>
-                </a:solidFill>
-              </a:rPr>
-              <a:t>Claim: training participation increased employment at six months.</a:t>
-            </a:r>
-          </a:p>
-        </p:txBody>
-      </p:sp>
-      <p:sp>
-        <p:nvSpPr>
-          <p:cNvPr id="6" name="constraint">
-            <a:extLst xmlns:a="http://schemas.openxmlformats.org/drawingml/2006/main">
-              <a:ext uri="{FF2B5EF4-FFF2-40B4-BE49-F238E27FC236}">
-                <a16:creationId xmlns:a16="http://schemas.microsoft.com/office/drawing/2014/main" id="{AC1FBE01-6F6E-48EF-AD45-4476404F3CDC}"/>
-              </a:ext>
-            </a:extLst>
-          </p:cNvPr>
-          <p:cNvSpPr>
-            <a:spLocks xmlns:a="http://schemas.openxmlformats.org/drawingml/2006/main" noGrp="1"/>
-          </p:cNvSpPr>
-          <p:nvPr/>
-        </p:nvSpPr>
-        <p:spPr>
-          <a:xfrm xmlns:a="http://schemas.openxmlformats.org/drawingml/2006/main">
-            <a:off x="819150" y="4143375"/>
-            <a:ext cx="9144000" cy="476250"/>
-          </a:xfrm>
-          <a:prstGeom xmlns:a="http://schemas.openxmlformats.org/drawingml/2006/main" prst="rect">
-            <a:avLst/>
-          </a:prstGeom>
-          <a:noFill xmlns:a="http://schemas.openxmlformats.org/drawingml/2006/main"/>
-          <a:ln xmlns:a="http://schemas.openxmlformats.org/drawingml/2006/main" w="0">
-            <a:noFill/>
-            <a:prstDash val="solid"/>
-          </a:ln>
-        </p:spPr>
-        <p:txBody>
-          <a:bodyPr xmlns:a="http://schemas.openxmlformats.org/drawingml/2006/main" anchor="t"/>
-          <a:lstStyle xmlns:a="http://schemas.openxmlformats.org/drawingml/2006/main"/>
-          <a:p xmlns:a="http://schemas.openxmlformats.org/drawingml/2006/main">
-            <a:pPr algn="l">
-              <a:defRPr sz="2100" b="1" i="0">
-                <a:solidFill>
-                  <a:srgbClr val="BF0040"/>
-                </a:solidFill>
-              </a:defRPr>
-            </a:pPr>
-            <a:r>
-              <a:rPr sz="2100" b="1" i="0">
-                <a:solidFill>
-                  <a:srgbClr val="BF0040"/>
-                </a:solidFill>
-              </a:rPr>
-              <a:t>Your answer must be supported by repository evidence.</a:t>
-            </a:r>
-          </a:p>
-        </p:txBody>
-      </p:sp>
-      <p:sp>
-        <p:nvSpPr>
-          <p:cNvPr id="7" name="warning">
-            <a:extLst xmlns:a="http://schemas.openxmlformats.org/drawingml/2006/main">
-              <a:ext uri="{FF2B5EF4-FFF2-40B4-BE49-F238E27FC236}">
-                <a16:creationId xmlns:a16="http://schemas.microsoft.com/office/drawing/2014/main" id="{A7515E68-84A3-4F7C-BF1D-6F67A567BE87}"/>
-              </a:ext>
-            </a:extLst>
-          </p:cNvPr>
-          <p:cNvSpPr>
-            <a:spLocks xmlns:a="http://schemas.openxmlformats.org/drawingml/2006/main" noGrp="1"/>
-          </p:cNvSpPr>
-          <p:nvPr/>
-        </p:nvSpPr>
-        <p:spPr>
-          <a:xfrm xmlns:a="http://schemas.openxmlformats.org/drawingml/2006/main">
-            <a:off x="819150" y="5000625"/>
-            <a:ext cx="6667500" cy="400050"/>
-          </a:xfrm>
-          <a:prstGeom xmlns:a="http://schemas.openxmlformats.org/drawingml/2006/main" prst="rect">
-            <a:avLst/>
-          </a:prstGeom>
-          <a:noFill xmlns:a="http://schemas.openxmlformats.org/drawingml/2006/main"/>
-          <a:ln xmlns:a="http://schemas.openxmlformats.org/drawingml/2006/main" w="0">
-            <a:noFill/>
-            <a:prstDash val="solid"/>
-          </a:ln>
-        </p:spPr>
-        <p:txBody>
-          <a:bodyPr xmlns:a="http://schemas.openxmlformats.org/drawingml/2006/main" anchor="t"/>
-          <a:lstStyle xmlns:a="http://schemas.openxmlformats.org/drawingml/2006/main"/>
-          <a:p xmlns:a="http://schemas.openxmlformats.org/drawingml/2006/main">
-            <a:pPr algn="l">
-              <a:defRPr sz="1800" b="1" i="0">
-                <a:solidFill>
-                  <a:srgbClr val="3333B2"/>
-                </a:solidFill>
-              </a:defRPr>
-            </a:pPr>
-            <a:r>
-              <a:rPr sz="1800" b="1" i="0">
-                <a:solidFill>
-                  <a:srgbClr val="3333B2"/>
-                </a:solidFill>
-              </a:rPr>
-              <a:t>Do not begin with the point estimate.</a:t>
+              <a:t>Issue status before changes:</a:t>
+            </a:r>
+          </a:p>
+          <a:p xmlns:a="http://schemas.openxmlformats.org/drawingml/2006/main">
+            <a:pPr algn="l">
+              <a:defRPr sz="1650" b="1" i="0">
+                <a:solidFill>
+                  <a:srgbClr val="FF0000"/>
+                </a:solidFill>
+              </a:defRPr>
+            </a:pPr>
+            <a:r>
+              <a:rPr sz="1650" b="1" i="0">
+                <a:solidFill>
+                  <a:srgbClr val="FF0000"/>
+                </a:solidFill>
+              </a:rPr>
+              <a:t>PASS / REPAIR / BLOCK /</a:t>
+            </a:r>
+          </a:p>
+          <a:p xmlns:a="http://schemas.openxmlformats.org/drawingml/2006/main">
+            <a:pPr algn="l">
+              <a:defRPr sz="1650" b="1" i="0">
+                <a:solidFill>
+                  <a:srgbClr val="FF0000"/>
+                </a:solidFill>
+              </a:defRPr>
+            </a:pPr>
+            <a:r>
+              <a:rPr sz="1650" b="1" i="0">
+                <a:solidFill>
+                  <a:srgbClr val="FF0000"/>
+                </a:solidFill>
+              </a:rPr>
+              <a:t>DESIGN REVIEW</a:t>
             </a:r>
           </a:p>
         </p:txBody>
@@ -12168,7 +12720,7 @@
     </p:spTree>
     <p:extLst>
       <p:ext uri="{BB962C8B-B14F-4D97-AF65-F5344CB8AC3E}">
-        <p14:creationId xmlns:p14="http://schemas.microsoft.com/office/powerpoint/2010/main" val="928069187"/>
+        <p14:creationId xmlns:p14="http://schemas.microsoft.com/office/powerpoint/2010/main" val="1256800812"/>
       </p:ext>
     </p:extLst>
   </p:cSld>
@@ -12199,7 +12751,7 @@
           <p:cNvPr id="19" name="slide-title">
             <a:extLst xmlns:a="http://schemas.openxmlformats.org/drawingml/2006/main">
               <a:ext uri="{FF2B5EF4-FFF2-40B4-BE49-F238E27FC236}">
-                <a16:creationId xmlns:a16="http://schemas.microsoft.com/office/drawing/2014/main" id="{4FEAAECB-4D46-45C6-93B0-A18191DD22E3}"/>
+                <a16:creationId xmlns:a16="http://schemas.microsoft.com/office/drawing/2014/main" id="{3F525654-E6F6-41C3-85F2-FEA0FA760B36}"/>
               </a:ext>
             </a:extLst>
           </p:cNvPr>
@@ -12249,7 +12801,7 @@
           <p:cNvPr id="2" name="rule-68-107">
             <a:extLst xmlns:a="http://schemas.openxmlformats.org/drawingml/2006/main">
               <a:ext uri="{FF2B5EF4-FFF2-40B4-BE49-F238E27FC236}">
-                <a16:creationId xmlns:a16="http://schemas.microsoft.com/office/drawing/2014/main" id="{FD9355F2-FCB6-4E4F-8DF1-344D25A92059}"/>
+                <a16:creationId xmlns:a16="http://schemas.microsoft.com/office/drawing/2014/main" id="{4F477253-67DD-4D60-B871-B239F0559430}"/>
               </a:ext>
             </a:extLst>
           </p:cNvPr>
@@ -12282,7 +12834,7 @@
           <p:cNvPr id="3" name="page-number">
             <a:extLst xmlns:a="http://schemas.openxmlformats.org/drawingml/2006/main">
               <a:ext uri="{FF2B5EF4-FFF2-40B4-BE49-F238E27FC236}">
-                <a16:creationId xmlns:a16="http://schemas.microsoft.com/office/drawing/2014/main" id="{E2B97C37-8979-45EC-BEC3-57A44EE7CD41}"/>
+                <a16:creationId xmlns:a16="http://schemas.microsoft.com/office/drawing/2014/main" id="{56D6B61C-F613-4631-AF61-074ECB701850}"/>
               </a:ext>
             </a:extLst>
           </p:cNvPr>
@@ -12332,7 +12884,7 @@
           <p:cNvPr id="4" name="file-0">
             <a:extLst xmlns:a="http://schemas.openxmlformats.org/drawingml/2006/main">
               <a:ext uri="{FF2B5EF4-FFF2-40B4-BE49-F238E27FC236}">
-                <a16:creationId xmlns:a16="http://schemas.microsoft.com/office/drawing/2014/main" id="{7BECBFB3-45EB-4E06-9406-0E90C4B122DA}"/>
+                <a16:creationId xmlns:a16="http://schemas.microsoft.com/office/drawing/2014/main" id="{C13E7461-4A71-4206-BB35-4EE3BD709A8F}"/>
               </a:ext>
             </a:extLst>
           </p:cNvPr>
@@ -12382,7 +12934,7 @@
           <p:cNvPr id="5" name="file-desc-0">
             <a:extLst xmlns:a="http://schemas.openxmlformats.org/drawingml/2006/main">
               <a:ext uri="{FF2B5EF4-FFF2-40B4-BE49-F238E27FC236}">
-                <a16:creationId xmlns:a16="http://schemas.microsoft.com/office/drawing/2014/main" id="{743F1C59-E9D2-46B3-ACC5-251371A0B016}"/>
+                <a16:creationId xmlns:a16="http://schemas.microsoft.com/office/drawing/2014/main" id="{551D8A92-2589-4E50-8130-E4B053E1D7FB}"/>
               </a:ext>
             </a:extLst>
           </p:cNvPr>
@@ -12432,7 +12984,7 @@
           <p:cNvPr id="6" name="rule-84-197">
             <a:extLst xmlns:a="http://schemas.openxmlformats.org/drawingml/2006/main">
               <a:ext uri="{FF2B5EF4-FFF2-40B4-BE49-F238E27FC236}">
-                <a16:creationId xmlns:a16="http://schemas.microsoft.com/office/drawing/2014/main" id="{EE806B63-D610-4A59-83F3-2379DA710134}"/>
+                <a16:creationId xmlns:a16="http://schemas.microsoft.com/office/drawing/2014/main" id="{C1B43E24-1E7B-4B74-A8FE-F0C0F31F64C2}"/>
               </a:ext>
             </a:extLst>
           </p:cNvPr>
@@ -12465,7 +13017,7 @@
           <p:cNvPr id="7" name="file-1">
             <a:extLst xmlns:a="http://schemas.openxmlformats.org/drawingml/2006/main">
               <a:ext uri="{FF2B5EF4-FFF2-40B4-BE49-F238E27FC236}">
-                <a16:creationId xmlns:a16="http://schemas.microsoft.com/office/drawing/2014/main" id="{C56895A6-D2F4-44E3-8E5C-1E4E9D48B95B}"/>
+                <a16:creationId xmlns:a16="http://schemas.microsoft.com/office/drawing/2014/main" id="{F70BCB97-654B-4D96-8681-239B21D1404D}"/>
               </a:ext>
             </a:extLst>
           </p:cNvPr>
@@ -12515,7 +13067,7 @@
           <p:cNvPr id="8" name="file-desc-1">
             <a:extLst xmlns:a="http://schemas.openxmlformats.org/drawingml/2006/main">
               <a:ext uri="{FF2B5EF4-FFF2-40B4-BE49-F238E27FC236}">
-                <a16:creationId xmlns:a16="http://schemas.microsoft.com/office/drawing/2014/main" id="{1B29F08E-47B5-43E5-9C47-6BC0801B072D}"/>
+                <a16:creationId xmlns:a16="http://schemas.microsoft.com/office/drawing/2014/main" id="{F5D5685D-1FB3-4A99-92D6-905A2AA1A10A}"/>
               </a:ext>
             </a:extLst>
           </p:cNvPr>
@@ -12565,7 +13117,7 @@
           <p:cNvPr id="9" name="rule-84-280">
             <a:extLst xmlns:a="http://schemas.openxmlformats.org/drawingml/2006/main">
               <a:ext uri="{FF2B5EF4-FFF2-40B4-BE49-F238E27FC236}">
-                <a16:creationId xmlns:a16="http://schemas.microsoft.com/office/drawing/2014/main" id="{E1D79EF7-200A-45A6-A6C6-D0161DD1F15F}"/>
+                <a16:creationId xmlns:a16="http://schemas.microsoft.com/office/drawing/2014/main" id="{D16587B6-5FDF-444C-A708-E18DAB57DFB4}"/>
               </a:ext>
             </a:extLst>
           </p:cNvPr>
@@ -12598,7 +13150,7 @@
           <p:cNvPr id="10" name="file-2">
             <a:extLst xmlns:a="http://schemas.openxmlformats.org/drawingml/2006/main">
               <a:ext uri="{FF2B5EF4-FFF2-40B4-BE49-F238E27FC236}">
-                <a16:creationId xmlns:a16="http://schemas.microsoft.com/office/drawing/2014/main" id="{BCCDEDF2-B873-4F93-A8EF-0DA834C52D7F}"/>
+                <a16:creationId xmlns:a16="http://schemas.microsoft.com/office/drawing/2014/main" id="{F2DDE358-B1CF-46F1-AD77-122475B16118}"/>
               </a:ext>
             </a:extLst>
           </p:cNvPr>
@@ -12648,7 +13200,7 @@
           <p:cNvPr id="11" name="file-desc-2">
             <a:extLst xmlns:a="http://schemas.openxmlformats.org/drawingml/2006/main">
               <a:ext uri="{FF2B5EF4-FFF2-40B4-BE49-F238E27FC236}">
-                <a16:creationId xmlns:a16="http://schemas.microsoft.com/office/drawing/2014/main" id="{CF30FFFE-0E4A-43B7-B042-3509A7A157E5}"/>
+                <a16:creationId xmlns:a16="http://schemas.microsoft.com/office/drawing/2014/main" id="{902F000E-6FC5-4034-BEBD-CCE49A15BBA8}"/>
               </a:ext>
             </a:extLst>
           </p:cNvPr>
@@ -12698,7 +13250,7 @@
           <p:cNvPr id="12" name="rule-84-363">
             <a:extLst xmlns:a="http://schemas.openxmlformats.org/drawingml/2006/main">
               <a:ext uri="{FF2B5EF4-FFF2-40B4-BE49-F238E27FC236}">
-                <a16:creationId xmlns:a16="http://schemas.microsoft.com/office/drawing/2014/main" id="{22FCAF99-C7D7-4F22-847B-EF9C7EF10554}"/>
+                <a16:creationId xmlns:a16="http://schemas.microsoft.com/office/drawing/2014/main" id="{05D22CD2-6F4F-4B7D-AB97-8B0838066127}"/>
               </a:ext>
             </a:extLst>
           </p:cNvPr>
@@ -12731,7 +13283,7 @@
           <p:cNvPr id="13" name="file-3">
             <a:extLst xmlns:a="http://schemas.openxmlformats.org/drawingml/2006/main">
               <a:ext uri="{FF2B5EF4-FFF2-40B4-BE49-F238E27FC236}">
-                <a16:creationId xmlns:a16="http://schemas.microsoft.com/office/drawing/2014/main" id="{507636EC-0E58-4539-8E53-5E88C112E167}"/>
+                <a16:creationId xmlns:a16="http://schemas.microsoft.com/office/drawing/2014/main" id="{0A0C8B13-69C8-4626-A755-627BC8A5C03D}"/>
               </a:ext>
             </a:extLst>
           </p:cNvPr>
@@ -12781,7 +13333,7 @@
           <p:cNvPr id="14" name="file-desc-3">
             <a:extLst xmlns:a="http://schemas.openxmlformats.org/drawingml/2006/main">
               <a:ext uri="{FF2B5EF4-FFF2-40B4-BE49-F238E27FC236}">
-                <a16:creationId xmlns:a16="http://schemas.microsoft.com/office/drawing/2014/main" id="{6F9ACB01-A398-43C6-B72C-E93B1C74F64B}"/>
+                <a16:creationId xmlns:a16="http://schemas.microsoft.com/office/drawing/2014/main" id="{3B175D8A-EC31-4C90-8E22-687EB68B4478}"/>
               </a:ext>
             </a:extLst>
           </p:cNvPr>
@@ -12831,7 +13383,7 @@
           <p:cNvPr id="15" name="rule-84-446">
             <a:extLst xmlns:a="http://schemas.openxmlformats.org/drawingml/2006/main">
               <a:ext uri="{FF2B5EF4-FFF2-40B4-BE49-F238E27FC236}">
-                <a16:creationId xmlns:a16="http://schemas.microsoft.com/office/drawing/2014/main" id="{C1862D78-D45D-4A2A-AAA8-E0073208AED0}"/>
+                <a16:creationId xmlns:a16="http://schemas.microsoft.com/office/drawing/2014/main" id="{8AB0722E-1DE2-4974-AF14-62B19D6031BE}"/>
               </a:ext>
             </a:extLst>
           </p:cNvPr>
@@ -12864,7 +13416,7 @@
           <p:cNvPr id="16" name="file-4">
             <a:extLst xmlns:a="http://schemas.openxmlformats.org/drawingml/2006/main">
               <a:ext uri="{FF2B5EF4-FFF2-40B4-BE49-F238E27FC236}">
-                <a16:creationId xmlns:a16="http://schemas.microsoft.com/office/drawing/2014/main" id="{72891A02-8DF2-485F-A58B-23A8370F454B}"/>
+                <a16:creationId xmlns:a16="http://schemas.microsoft.com/office/drawing/2014/main" id="{D6DF5D40-49D9-49B9-9E59-1EDCAE9EEF0D}"/>
               </a:ext>
             </a:extLst>
           </p:cNvPr>
@@ -12914,7 +13466,7 @@
           <p:cNvPr id="17" name="file-desc-4">
             <a:extLst xmlns:a="http://schemas.openxmlformats.org/drawingml/2006/main">
               <a:ext uri="{FF2B5EF4-FFF2-40B4-BE49-F238E27FC236}">
-                <a16:creationId xmlns:a16="http://schemas.microsoft.com/office/drawing/2014/main" id="{9CF08A21-8432-449F-91E4-81F3C33A702C}"/>
+                <a16:creationId xmlns:a16="http://schemas.microsoft.com/office/drawing/2014/main" id="{B3DEDC28-32BD-4CD7-A05D-AC8007E235D1}"/>
               </a:ext>
             </a:extLst>
           </p:cNvPr>
@@ -12964,7 +13516,7 @@
           <p:cNvPr id="18" name="question">
             <a:extLst xmlns:a="http://schemas.openxmlformats.org/drawingml/2006/main">
               <a:ext uri="{FF2B5EF4-FFF2-40B4-BE49-F238E27FC236}">
-                <a16:creationId xmlns:a16="http://schemas.microsoft.com/office/drawing/2014/main" id="{BD3E081A-A5AE-4347-9805-F5BBA2EF16C5}"/>
+                <a16:creationId xmlns:a16="http://schemas.microsoft.com/office/drawing/2014/main" id="{F839614C-FA6D-4ABE-9460-DD1541876499}"/>
               </a:ext>
             </a:extLst>
           </p:cNvPr>
@@ -13012,7 +13564,7 @@
     </p:spTree>
     <p:extLst>
       <p:ext uri="{BB962C8B-B14F-4D97-AF65-F5344CB8AC3E}">
-        <p14:creationId xmlns:p14="http://schemas.microsoft.com/office/powerpoint/2010/main" val="1668513954"/>
+        <p14:creationId xmlns:p14="http://schemas.microsoft.com/office/powerpoint/2010/main" val="334987055"/>
       </p:ext>
     </p:extLst>
   </p:cSld>
@@ -13043,7 +13595,7 @@
           <p:cNvPr id="7" name="slide-title">
             <a:extLst xmlns:a="http://schemas.openxmlformats.org/drawingml/2006/main">
               <a:ext uri="{FF2B5EF4-FFF2-40B4-BE49-F238E27FC236}">
-                <a16:creationId xmlns:a16="http://schemas.microsoft.com/office/drawing/2014/main" id="{EA3FD359-7DCB-4A6F-9E8C-8CD11ED7352A}"/>
+                <a16:creationId xmlns:a16="http://schemas.microsoft.com/office/drawing/2014/main" id="{8599AB8B-16B8-47AC-B27D-ED6D481A4F1F}"/>
               </a:ext>
             </a:extLst>
           </p:cNvPr>
@@ -13093,7 +13645,7 @@
           <p:cNvPr id="2" name="rule-68-107">
             <a:extLst xmlns:a="http://schemas.openxmlformats.org/drawingml/2006/main">
               <a:ext uri="{FF2B5EF4-FFF2-40B4-BE49-F238E27FC236}">
-                <a16:creationId xmlns:a16="http://schemas.microsoft.com/office/drawing/2014/main" id="{01DF0DBF-411E-4672-A83F-DAC644495677}"/>
+                <a16:creationId xmlns:a16="http://schemas.microsoft.com/office/drawing/2014/main" id="{DFC07A1C-DBB9-4F08-8979-4B4794FE4188}"/>
               </a:ext>
             </a:extLst>
           </p:cNvPr>
@@ -13126,7 +13678,7 @@
           <p:cNvPr id="3" name="page-number">
             <a:extLst xmlns:a="http://schemas.openxmlformats.org/drawingml/2006/main">
               <a:ext uri="{FF2B5EF4-FFF2-40B4-BE49-F238E27FC236}">
-                <a16:creationId xmlns:a16="http://schemas.microsoft.com/office/drawing/2014/main" id="{60E7FBCE-98D9-46E1-9FDD-9A8DA3D564B5}"/>
+                <a16:creationId xmlns:a16="http://schemas.microsoft.com/office/drawing/2014/main" id="{685E490B-11EF-4FC3-A23B-3F0C1185B9B7}"/>
               </a:ext>
             </a:extLst>
           </p:cNvPr>
@@ -13176,7 +13728,7 @@
           <p:cNvPr id="4" name="prompt-rule">
             <a:extLst xmlns:a="http://schemas.openxmlformats.org/drawingml/2006/main">
               <a:ext uri="{FF2B5EF4-FFF2-40B4-BE49-F238E27FC236}">
-                <a16:creationId xmlns:a16="http://schemas.microsoft.com/office/drawing/2014/main" id="{F0DBFD73-859C-45EF-883F-6CA3BA6310A0}"/>
+                <a16:creationId xmlns:a16="http://schemas.microsoft.com/office/drawing/2014/main" id="{A98CDFA1-A657-4F4C-894A-9CF2A75CB356}"/>
               </a:ext>
             </a:extLst>
           </p:cNvPr>
@@ -13209,7 +13761,7 @@
           <p:cNvPr id="5" name="prompt">
             <a:extLst xmlns:a="http://schemas.openxmlformats.org/drawingml/2006/main">
               <a:ext uri="{FF2B5EF4-FFF2-40B4-BE49-F238E27FC236}">
-                <a16:creationId xmlns:a16="http://schemas.microsoft.com/office/drawing/2014/main" id="{ABA68F4D-0BB9-44BE-8BD5-F1108818650F}"/>
+                <a16:creationId xmlns:a16="http://schemas.microsoft.com/office/drawing/2014/main" id="{1A27DAE4-7BD6-498F-A594-8C5B641DA2FB}"/>
               </a:ext>
             </a:extLst>
           </p:cNvPr>
@@ -13325,7 +13877,7 @@
           <p:cNvPr id="6" name="instruction">
             <a:extLst xmlns:a="http://schemas.openxmlformats.org/drawingml/2006/main">
               <a:ext uri="{FF2B5EF4-FFF2-40B4-BE49-F238E27FC236}">
-                <a16:creationId xmlns:a16="http://schemas.microsoft.com/office/drawing/2014/main" id="{EA155298-443A-4B03-90A7-1A1A5BD1282F}"/>
+                <a16:creationId xmlns:a16="http://schemas.microsoft.com/office/drawing/2014/main" id="{0C57354E-7ADB-4453-8E56-F5E636B5BE30}"/>
               </a:ext>
             </a:extLst>
           </p:cNvPr>
@@ -13373,7 +13925,7 @@
     </p:spTree>
     <p:extLst>
       <p:ext uri="{BB962C8B-B14F-4D97-AF65-F5344CB8AC3E}">
-        <p14:creationId xmlns:p14="http://schemas.microsoft.com/office/powerpoint/2010/main" val="141488312"/>
+        <p14:creationId xmlns:p14="http://schemas.microsoft.com/office/powerpoint/2010/main" val="1596768779"/>
       </p:ext>
     </p:extLst>
   </p:cSld>
@@ -13404,7 +13956,7 @@
           <p:cNvPr id="12" name="slide-title">
             <a:extLst xmlns:a="http://schemas.openxmlformats.org/drawingml/2006/main">
               <a:ext uri="{FF2B5EF4-FFF2-40B4-BE49-F238E27FC236}">
-                <a16:creationId xmlns:a16="http://schemas.microsoft.com/office/drawing/2014/main" id="{C4600731-664F-4DAB-AF11-9C9CE2CE9BDE}"/>
+                <a16:creationId xmlns:a16="http://schemas.microsoft.com/office/drawing/2014/main" id="{80B01C80-710D-4CBE-88AE-897C42BB0A28}"/>
               </a:ext>
             </a:extLst>
           </p:cNvPr>
@@ -13454,7 +14006,7 @@
           <p:cNvPr id="2" name="rule-68-107">
             <a:extLst xmlns:a="http://schemas.openxmlformats.org/drawingml/2006/main">
               <a:ext uri="{FF2B5EF4-FFF2-40B4-BE49-F238E27FC236}">
-                <a16:creationId xmlns:a16="http://schemas.microsoft.com/office/drawing/2014/main" id="{2D50621C-E9B9-4719-880B-BDE02E0E37F1}"/>
+                <a16:creationId xmlns:a16="http://schemas.microsoft.com/office/drawing/2014/main" id="{01EC929E-898D-45B6-9932-0051B7C60365}"/>
               </a:ext>
             </a:extLst>
           </p:cNvPr>
@@ -13487,7 +14039,7 @@
           <p:cNvPr id="3" name="page-number">
             <a:extLst xmlns:a="http://schemas.openxmlformats.org/drawingml/2006/main">
               <a:ext uri="{FF2B5EF4-FFF2-40B4-BE49-F238E27FC236}">
-                <a16:creationId xmlns:a16="http://schemas.microsoft.com/office/drawing/2014/main" id="{BC2BD125-E9D9-46AE-9E4B-F6D300814C5B}"/>
+                <a16:creationId xmlns:a16="http://schemas.microsoft.com/office/drawing/2014/main" id="{5B5089B0-B643-47A8-8B65-1FB23B393E06}"/>
               </a:ext>
             </a:extLst>
           </p:cNvPr>
@@ -13537,7 +14089,7 @@
           <p:cNvPr id="4" name="qhead-0">
             <a:extLst xmlns:a="http://schemas.openxmlformats.org/drawingml/2006/main">
               <a:ext uri="{FF2B5EF4-FFF2-40B4-BE49-F238E27FC236}">
-                <a16:creationId xmlns:a16="http://schemas.microsoft.com/office/drawing/2014/main" id="{BEAF374F-1CFD-400E-AF63-CEA1DBDEB4E6}"/>
+                <a16:creationId xmlns:a16="http://schemas.microsoft.com/office/drawing/2014/main" id="{A541188E-E7D1-4AE1-8EB2-3F56B57AEEBB}"/>
               </a:ext>
             </a:extLst>
           </p:cNvPr>
@@ -13587,7 +14139,7 @@
           <p:cNvPr id="5" name="qbody-0">
             <a:extLst xmlns:a="http://schemas.openxmlformats.org/drawingml/2006/main">
               <a:ext uri="{FF2B5EF4-FFF2-40B4-BE49-F238E27FC236}">
-                <a16:creationId xmlns:a16="http://schemas.microsoft.com/office/drawing/2014/main" id="{6EA2AAD5-E401-4EC4-AB80-086028E77EDC}"/>
+                <a16:creationId xmlns:a16="http://schemas.microsoft.com/office/drawing/2014/main" id="{5EA705E9-5A67-428C-9CD8-ED718F277EF6}"/>
               </a:ext>
             </a:extLst>
           </p:cNvPr>
@@ -13637,7 +14189,7 @@
           <p:cNvPr id="6" name="qhead-1">
             <a:extLst xmlns:a="http://schemas.openxmlformats.org/drawingml/2006/main">
               <a:ext uri="{FF2B5EF4-FFF2-40B4-BE49-F238E27FC236}">
-                <a16:creationId xmlns:a16="http://schemas.microsoft.com/office/drawing/2014/main" id="{4BED48F7-23A0-4E01-A6A5-6345AD83E354}"/>
+                <a16:creationId xmlns:a16="http://schemas.microsoft.com/office/drawing/2014/main" id="{3C0176FD-7BA9-45A9-9E75-EAF8974CAE6E}"/>
               </a:ext>
             </a:extLst>
           </p:cNvPr>
@@ -13687,7 +14239,7 @@
           <p:cNvPr id="7" name="qbody-1">
             <a:extLst xmlns:a="http://schemas.openxmlformats.org/drawingml/2006/main">
               <a:ext uri="{FF2B5EF4-FFF2-40B4-BE49-F238E27FC236}">
-                <a16:creationId xmlns:a16="http://schemas.microsoft.com/office/drawing/2014/main" id="{EB0FBD69-D505-4A75-82A2-60861817E830}"/>
+                <a16:creationId xmlns:a16="http://schemas.microsoft.com/office/drawing/2014/main" id="{887F98E2-B5AB-4D93-A5E7-8723EDD334E5}"/>
               </a:ext>
             </a:extLst>
           </p:cNvPr>
@@ -13737,7 +14289,7 @@
           <p:cNvPr id="8" name="qhead-2">
             <a:extLst xmlns:a="http://schemas.openxmlformats.org/drawingml/2006/main">
               <a:ext uri="{FF2B5EF4-FFF2-40B4-BE49-F238E27FC236}">
-                <a16:creationId xmlns:a16="http://schemas.microsoft.com/office/drawing/2014/main" id="{A0C8A48E-FC7C-48B8-B163-0D08FF198F99}"/>
+                <a16:creationId xmlns:a16="http://schemas.microsoft.com/office/drawing/2014/main" id="{D113F104-0A8B-4D34-A5A4-4BACBCE5A41D}"/>
               </a:ext>
             </a:extLst>
           </p:cNvPr>
@@ -13787,7 +14339,7 @@
           <p:cNvPr id="9" name="qbody-2">
             <a:extLst xmlns:a="http://schemas.openxmlformats.org/drawingml/2006/main">
               <a:ext uri="{FF2B5EF4-FFF2-40B4-BE49-F238E27FC236}">
-                <a16:creationId xmlns:a16="http://schemas.microsoft.com/office/drawing/2014/main" id="{75C7E9EB-EE94-4003-A3A5-F5E8B1438C8B}"/>
+                <a16:creationId xmlns:a16="http://schemas.microsoft.com/office/drawing/2014/main" id="{229A493E-1835-4292-84FA-9E629CD4E496}"/>
               </a:ext>
             </a:extLst>
           </p:cNvPr>
@@ -13837,7 +14389,7 @@
           <p:cNvPr id="10" name="qhead-3">
             <a:extLst xmlns:a="http://schemas.openxmlformats.org/drawingml/2006/main">
               <a:ext uri="{FF2B5EF4-FFF2-40B4-BE49-F238E27FC236}">
-                <a16:creationId xmlns:a16="http://schemas.microsoft.com/office/drawing/2014/main" id="{B8249721-E7DD-4B3B-9F67-AC79DC8114BF}"/>
+                <a16:creationId xmlns:a16="http://schemas.microsoft.com/office/drawing/2014/main" id="{4E334A34-AAB9-44AF-A3B7-07C2222C46DE}"/>
               </a:ext>
             </a:extLst>
           </p:cNvPr>
@@ -13887,7 +14439,7 @@
           <p:cNvPr id="11" name="qbody-3">
             <a:extLst xmlns:a="http://schemas.openxmlformats.org/drawingml/2006/main">
               <a:ext uri="{FF2B5EF4-FFF2-40B4-BE49-F238E27FC236}">
-                <a16:creationId xmlns:a16="http://schemas.microsoft.com/office/drawing/2014/main" id="{2A1A26BA-6C2D-4EA5-BAE0-8A6E34205723}"/>
+                <a16:creationId xmlns:a16="http://schemas.microsoft.com/office/drawing/2014/main" id="{780EB397-9DC6-4FD2-B119-23744011D0F6}"/>
               </a:ext>
             </a:extLst>
           </p:cNvPr>
@@ -13935,7 +14487,7 @@
     </p:spTree>
     <p:extLst>
       <p:ext uri="{BB962C8B-B14F-4D97-AF65-F5344CB8AC3E}">
-        <p14:creationId xmlns:p14="http://schemas.microsoft.com/office/powerpoint/2010/main" val="608454046"/>
+        <p14:creationId xmlns:p14="http://schemas.microsoft.com/office/powerpoint/2010/main" val="1208225545"/>
       </p:ext>
     </p:extLst>
   </p:cSld>
@@ -13966,7 +14518,7 @@
           <p:cNvPr id="10" name="slide-title">
             <a:extLst xmlns:a="http://schemas.openxmlformats.org/drawingml/2006/main">
               <a:ext uri="{FF2B5EF4-FFF2-40B4-BE49-F238E27FC236}">
-                <a16:creationId xmlns:a16="http://schemas.microsoft.com/office/drawing/2014/main" id="{7E9A26BD-875E-409C-BE02-3D78C92D0C78}"/>
+                <a16:creationId xmlns:a16="http://schemas.microsoft.com/office/drawing/2014/main" id="{0BDE021A-6857-4B8C-AA5B-6EE13CC80307}"/>
               </a:ext>
             </a:extLst>
           </p:cNvPr>
@@ -14016,7 +14568,7 @@
           <p:cNvPr id="2" name="rule-68-107">
             <a:extLst xmlns:a="http://schemas.openxmlformats.org/drawingml/2006/main">
               <a:ext uri="{FF2B5EF4-FFF2-40B4-BE49-F238E27FC236}">
-                <a16:creationId xmlns:a16="http://schemas.microsoft.com/office/drawing/2014/main" id="{6DDA4791-BCD9-47AA-ABF4-ED3EEBD23E41}"/>
+                <a16:creationId xmlns:a16="http://schemas.microsoft.com/office/drawing/2014/main" id="{4AB2E986-D267-4510-BAF0-1252F14D4BFA}"/>
               </a:ext>
             </a:extLst>
           </p:cNvPr>
@@ -14049,7 +14601,7 @@
           <p:cNvPr id="3" name="page-number">
             <a:extLst xmlns:a="http://schemas.openxmlformats.org/drawingml/2006/main">
               <a:ext uri="{FF2B5EF4-FFF2-40B4-BE49-F238E27FC236}">
-                <a16:creationId xmlns:a16="http://schemas.microsoft.com/office/drawing/2014/main" id="{9CE3B584-87F5-4D67-938D-40B618F28D92}"/>
+                <a16:creationId xmlns:a16="http://schemas.microsoft.com/office/drawing/2014/main" id="{BC8ECD41-8688-42BA-9102-FED5DA3C62D6}"/>
               </a:ext>
             </a:extLst>
           </p:cNvPr>
@@ -14099,7 +14651,7 @@
           <p:cNvPr id="4" name="cmd-155">
             <a:extLst xmlns:a="http://schemas.openxmlformats.org/drawingml/2006/main">
               <a:ext uri="{FF2B5EF4-FFF2-40B4-BE49-F238E27FC236}">
-                <a16:creationId xmlns:a16="http://schemas.microsoft.com/office/drawing/2014/main" id="{AE3B61EC-24F5-49EC-A5DD-DCF71B2CB5C6}"/>
+                <a16:creationId xmlns:a16="http://schemas.microsoft.com/office/drawing/2014/main" id="{3470B5FF-94A0-4AE5-95FB-2AD882945915}"/>
               </a:ext>
             </a:extLst>
           </p:cNvPr>
@@ -14149,7 +14701,7 @@
           <p:cNvPr id="5" name="cmd-218">
             <a:extLst xmlns:a="http://schemas.openxmlformats.org/drawingml/2006/main">
               <a:ext uri="{FF2B5EF4-FFF2-40B4-BE49-F238E27FC236}">
-                <a16:creationId xmlns:a16="http://schemas.microsoft.com/office/drawing/2014/main" id="{E072D9CB-55DC-4AE2-A4E1-96284571C011}"/>
+                <a16:creationId xmlns:a16="http://schemas.microsoft.com/office/drawing/2014/main" id="{41220E45-C249-4E50-9677-FE1933048BD3}"/>
               </a:ext>
             </a:extLst>
           </p:cNvPr>
@@ -14199,7 +14751,7 @@
           <p:cNvPr id="6" name="cmd-281">
             <a:extLst xmlns:a="http://schemas.openxmlformats.org/drawingml/2006/main">
               <a:ext uri="{FF2B5EF4-FFF2-40B4-BE49-F238E27FC236}">
-                <a16:creationId xmlns:a16="http://schemas.microsoft.com/office/drawing/2014/main" id="{4541E755-CC68-4914-9735-6BFE414AB27B}"/>
+                <a16:creationId xmlns:a16="http://schemas.microsoft.com/office/drawing/2014/main" id="{AF3D345F-80D7-4258-8CD3-17D7CF5A27F0}"/>
               </a:ext>
             </a:extLst>
           </p:cNvPr>
@@ -14249,7 +14801,7 @@
           <p:cNvPr id="7" name="cmd-344">
             <a:extLst xmlns:a="http://schemas.openxmlformats.org/drawingml/2006/main">
               <a:ext uri="{FF2B5EF4-FFF2-40B4-BE49-F238E27FC236}">
-                <a16:creationId xmlns:a16="http://schemas.microsoft.com/office/drawing/2014/main" id="{F8890E65-1D60-435C-A557-93C9112276C3}"/>
+                <a16:creationId xmlns:a16="http://schemas.microsoft.com/office/drawing/2014/main" id="{B265F3FB-D4BB-4A03-B844-51407952E672}"/>
               </a:ext>
             </a:extLst>
           </p:cNvPr>
@@ -14299,7 +14851,7 @@
           <p:cNvPr id="8" name="cmd-407">
             <a:extLst xmlns:a="http://schemas.openxmlformats.org/drawingml/2006/main">
               <a:ext uri="{FF2B5EF4-FFF2-40B4-BE49-F238E27FC236}">
-                <a16:creationId xmlns:a16="http://schemas.microsoft.com/office/drawing/2014/main" id="{712B1C66-B5D9-4FC2-92EB-320DD2846128}"/>
+                <a16:creationId xmlns:a16="http://schemas.microsoft.com/office/drawing/2014/main" id="{1A44EC22-B479-459D-8748-2A438AD97F3E}"/>
               </a:ext>
             </a:extLst>
           </p:cNvPr>
@@ -14349,7 +14901,7 @@
           <p:cNvPr id="9" name="question">
             <a:extLst xmlns:a="http://schemas.openxmlformats.org/drawingml/2006/main">
               <a:ext uri="{FF2B5EF4-FFF2-40B4-BE49-F238E27FC236}">
-                <a16:creationId xmlns:a16="http://schemas.microsoft.com/office/drawing/2014/main" id="{4756CF73-90F6-49A0-9EAA-714BF832CF64}"/>
+                <a16:creationId xmlns:a16="http://schemas.microsoft.com/office/drawing/2014/main" id="{F3F135BB-803E-4AB6-86BC-07D005E39D27}"/>
               </a:ext>
             </a:extLst>
           </p:cNvPr>
@@ -14397,7 +14949,7 @@
     </p:spTree>
     <p:extLst>
       <p:ext uri="{BB962C8B-B14F-4D97-AF65-F5344CB8AC3E}">
-        <p14:creationId xmlns:p14="http://schemas.microsoft.com/office/powerpoint/2010/main" val="164620619"/>
+        <p14:creationId xmlns:p14="http://schemas.microsoft.com/office/powerpoint/2010/main" val="991707223"/>
       </p:ext>
     </p:extLst>
   </p:cSld>
@@ -14428,7 +14980,7 @@
           <p:cNvPr id="13" name="slide-title">
             <a:extLst xmlns:a="http://schemas.openxmlformats.org/drawingml/2006/main">
               <a:ext uri="{FF2B5EF4-FFF2-40B4-BE49-F238E27FC236}">
-                <a16:creationId xmlns:a16="http://schemas.microsoft.com/office/drawing/2014/main" id="{2ADBB930-B78D-46E5-BC5E-2B575ADBB87E}"/>
+                <a16:creationId xmlns:a16="http://schemas.microsoft.com/office/drawing/2014/main" id="{9E420B96-4BF3-42AA-88E4-E516E3868B4A}"/>
               </a:ext>
             </a:extLst>
           </p:cNvPr>
@@ -14478,7 +15030,7 @@
           <p:cNvPr id="2" name="rule-68-107">
             <a:extLst xmlns:a="http://schemas.openxmlformats.org/drawingml/2006/main">
               <a:ext uri="{FF2B5EF4-FFF2-40B4-BE49-F238E27FC236}">
-                <a16:creationId xmlns:a16="http://schemas.microsoft.com/office/drawing/2014/main" id="{822CDFC2-6D52-4CD3-95DE-956D0564D86E}"/>
+                <a16:creationId xmlns:a16="http://schemas.microsoft.com/office/drawing/2014/main" id="{B3B34A8D-5BE1-4CAD-BB03-68A2629222BE}"/>
               </a:ext>
             </a:extLst>
           </p:cNvPr>
@@ -14511,7 +15063,7 @@
           <p:cNvPr id="3" name="page-number">
             <a:extLst xmlns:a="http://schemas.openxmlformats.org/drawingml/2006/main">
               <a:ext uri="{FF2B5EF4-FFF2-40B4-BE49-F238E27FC236}">
-                <a16:creationId xmlns:a16="http://schemas.microsoft.com/office/drawing/2014/main" id="{42DE30E7-2F47-4511-8E3A-69EB61735CDF}"/>
+                <a16:creationId xmlns:a16="http://schemas.microsoft.com/office/drawing/2014/main" id="{C61B9C9B-87E2-4200-8103-4B1D171B5FC6}"/>
               </a:ext>
             </a:extLst>
           </p:cNvPr>
@@ -14561,7 +15113,7 @@
           <p:cNvPr id="4" name="decision-0">
             <a:extLst xmlns:a="http://schemas.openxmlformats.org/drawingml/2006/main">
               <a:ext uri="{FF2B5EF4-FFF2-40B4-BE49-F238E27FC236}">
-                <a16:creationId xmlns:a16="http://schemas.microsoft.com/office/drawing/2014/main" id="{3F9A0223-E1F9-45C4-9199-5DF5D6D01C02}"/>
+                <a16:creationId xmlns:a16="http://schemas.microsoft.com/office/drawing/2014/main" id="{73E0B9E6-DDB0-4399-9EEB-5DE785C382F5}"/>
               </a:ext>
             </a:extLst>
           </p:cNvPr>
@@ -14611,7 +15163,7 @@
           <p:cNvPr id="5" name="decision-desc-0">
             <a:extLst xmlns:a="http://schemas.openxmlformats.org/drawingml/2006/main">
               <a:ext uri="{FF2B5EF4-FFF2-40B4-BE49-F238E27FC236}">
-                <a16:creationId xmlns:a16="http://schemas.microsoft.com/office/drawing/2014/main" id="{32D90DBF-2390-446E-B65E-767D35A243AF}"/>
+                <a16:creationId xmlns:a16="http://schemas.microsoft.com/office/drawing/2014/main" id="{39D7ECF0-CD46-4B96-A3B9-7A8839D63605}"/>
               </a:ext>
             </a:extLst>
           </p:cNvPr>
@@ -14661,7 +15213,7 @@
           <p:cNvPr id="6" name="decision-1">
             <a:extLst xmlns:a="http://schemas.openxmlformats.org/drawingml/2006/main">
               <a:ext uri="{FF2B5EF4-FFF2-40B4-BE49-F238E27FC236}">
-                <a16:creationId xmlns:a16="http://schemas.microsoft.com/office/drawing/2014/main" id="{B4CB283A-A556-44D4-9826-9359808AA047}"/>
+                <a16:creationId xmlns:a16="http://schemas.microsoft.com/office/drawing/2014/main" id="{2B3B6ABB-2DAD-4E4D-9B4E-5FCC34E3D4FB}"/>
               </a:ext>
             </a:extLst>
           </p:cNvPr>
@@ -14711,7 +15263,7 @@
           <p:cNvPr id="7" name="decision-desc-1">
             <a:extLst xmlns:a="http://schemas.openxmlformats.org/drawingml/2006/main">
               <a:ext uri="{FF2B5EF4-FFF2-40B4-BE49-F238E27FC236}">
-                <a16:creationId xmlns:a16="http://schemas.microsoft.com/office/drawing/2014/main" id="{C9B1786D-7F17-4811-B594-4F3330A8F908}"/>
+                <a16:creationId xmlns:a16="http://schemas.microsoft.com/office/drawing/2014/main" id="{C4C2B1E1-C402-473A-97DF-F4F0D625359A}"/>
               </a:ext>
             </a:extLst>
           </p:cNvPr>
@@ -14761,7 +15313,7 @@
           <p:cNvPr id="8" name="decision-2">
             <a:extLst xmlns:a="http://schemas.openxmlformats.org/drawingml/2006/main">
               <a:ext uri="{FF2B5EF4-FFF2-40B4-BE49-F238E27FC236}">
-                <a16:creationId xmlns:a16="http://schemas.microsoft.com/office/drawing/2014/main" id="{87F1ECDB-9D50-442D-A305-BCD3A40B6DF9}"/>
+                <a16:creationId xmlns:a16="http://schemas.microsoft.com/office/drawing/2014/main" id="{D32E1908-33F5-4D38-9738-CFDCAAB7EF2E}"/>
               </a:ext>
             </a:extLst>
           </p:cNvPr>
@@ -14811,7 +15363,7 @@
           <p:cNvPr id="9" name="decision-desc-2">
             <a:extLst xmlns:a="http://schemas.openxmlformats.org/drawingml/2006/main">
               <a:ext uri="{FF2B5EF4-FFF2-40B4-BE49-F238E27FC236}">
-                <a16:creationId xmlns:a16="http://schemas.microsoft.com/office/drawing/2014/main" id="{1F5E5A15-F650-48DD-8DA0-3FAB6163EA79}"/>
+                <a16:creationId xmlns:a16="http://schemas.microsoft.com/office/drawing/2014/main" id="{93C442BF-5ADA-42D1-850A-64692875ECC8}"/>
               </a:ext>
             </a:extLst>
           </p:cNvPr>
@@ -14861,7 +15413,7 @@
           <p:cNvPr id="10" name="decision-3">
             <a:extLst xmlns:a="http://schemas.openxmlformats.org/drawingml/2006/main">
               <a:ext uri="{FF2B5EF4-FFF2-40B4-BE49-F238E27FC236}">
-                <a16:creationId xmlns:a16="http://schemas.microsoft.com/office/drawing/2014/main" id="{027DB22C-E44E-44E7-B009-C7CEBF8A785F}"/>
+                <a16:creationId xmlns:a16="http://schemas.microsoft.com/office/drawing/2014/main" id="{A4BEA8DC-A939-47DD-9509-BE499648B3BC}"/>
               </a:ext>
             </a:extLst>
           </p:cNvPr>
@@ -14911,7 +15463,7 @@
           <p:cNvPr id="11" name="decision-desc-3">
             <a:extLst xmlns:a="http://schemas.openxmlformats.org/drawingml/2006/main">
               <a:ext uri="{FF2B5EF4-FFF2-40B4-BE49-F238E27FC236}">
-                <a16:creationId xmlns:a16="http://schemas.microsoft.com/office/drawing/2014/main" id="{8150C51D-0435-476E-B040-4257013C079D}"/>
+                <a16:creationId xmlns:a16="http://schemas.microsoft.com/office/drawing/2014/main" id="{11C4A920-951B-4876-AFE5-ECA70810927E}"/>
               </a:ext>
             </a:extLst>
           </p:cNvPr>
@@ -14961,7 +15513,7 @@
           <p:cNvPr id="12" name="sentence">
             <a:extLst xmlns:a="http://schemas.openxmlformats.org/drawingml/2006/main">
               <a:ext uri="{FF2B5EF4-FFF2-40B4-BE49-F238E27FC236}">
-                <a16:creationId xmlns:a16="http://schemas.microsoft.com/office/drawing/2014/main" id="{C6493D8A-D357-4883-ADA5-44AAA654EE73}"/>
+                <a16:creationId xmlns:a16="http://schemas.microsoft.com/office/drawing/2014/main" id="{D916F0B7-4EEE-451E-924C-C88B40E6AE69}"/>
               </a:ext>
             </a:extLst>
           </p:cNvPr>
@@ -15009,7 +15561,7 @@
     </p:spTree>
     <p:extLst>
       <p:ext uri="{BB962C8B-B14F-4D97-AF65-F5344CB8AC3E}">
-        <p14:creationId xmlns:p14="http://schemas.microsoft.com/office/powerpoint/2010/main" val="1457465845"/>
+        <p14:creationId xmlns:p14="http://schemas.microsoft.com/office/powerpoint/2010/main" val="1069471896"/>
       </p:ext>
     </p:extLst>
   </p:cSld>
@@ -15037,10 +15589,10 @@
       </p:grpSpPr>
       <p:sp>
         <p:nvSpPr>
-          <p:cNvPr id="14" name="reveal-band">
-            <a:extLst xmlns:a="http://schemas.openxmlformats.org/drawingml/2006/main">
-              <a:ext uri="{FF2B5EF4-FFF2-40B4-BE49-F238E27FC236}">
-                <a16:creationId xmlns:a16="http://schemas.microsoft.com/office/drawing/2014/main" id="{E61CCE70-A3C0-4369-926B-12E43293F2E2}"/>
+          <p:cNvPr id="24" name="reveal-band">
+            <a:extLst xmlns:a="http://schemas.openxmlformats.org/drawingml/2006/main">
+              <a:ext uri="{FF2B5EF4-FFF2-40B4-BE49-F238E27FC236}">
+                <a16:creationId xmlns:a16="http://schemas.microsoft.com/office/drawing/2014/main" id="{279120B5-4875-4C9F-94A9-915D8DFA7755}"/>
               </a:ext>
             </a:extLst>
           </p:cNvPr>
@@ -15073,7 +15625,7 @@
           <p:cNvPr id="2" name="slide-title">
             <a:extLst xmlns:a="http://schemas.openxmlformats.org/drawingml/2006/main">
               <a:ext uri="{FF2B5EF4-FFF2-40B4-BE49-F238E27FC236}">
-                <a16:creationId xmlns:a16="http://schemas.microsoft.com/office/drawing/2014/main" id="{DED77E5B-EB93-476B-AF7F-936A88A47126}"/>
+                <a16:creationId xmlns:a16="http://schemas.microsoft.com/office/drawing/2014/main" id="{9C137FBB-CC1B-4038-BA92-C47E7CE2DEB9}"/>
               </a:ext>
             </a:extLst>
           </p:cNvPr>
@@ -15113,7 +15665,7 @@
                   <a:srgbClr val="FF0000"/>
                 </a:solidFill>
               </a:rPr>
-              <a:t>REVEAL — The inherited file changed the experiment</a:t>
+              <a:t>REVEAL — Two failures changed the experiment</a:t>
             </a:r>
           </a:p>
         </p:txBody>
@@ -15123,7 +15675,7 @@
           <p:cNvPr id="3" name="rule-68-107">
             <a:extLst xmlns:a="http://schemas.openxmlformats.org/drawingml/2006/main">
               <a:ext uri="{FF2B5EF4-FFF2-40B4-BE49-F238E27FC236}">
-                <a16:creationId xmlns:a16="http://schemas.microsoft.com/office/drawing/2014/main" id="{79DE9862-0924-40C1-8008-DE66DD983618}"/>
+                <a16:creationId xmlns:a16="http://schemas.microsoft.com/office/drawing/2014/main" id="{A725D1AB-7D1E-4EA8-8230-797892439ACC}"/>
               </a:ext>
             </a:extLst>
           </p:cNvPr>
@@ -15156,7 +15708,7 @@
           <p:cNvPr id="4" name="page-number">
             <a:extLst xmlns:a="http://schemas.openxmlformats.org/drawingml/2006/main">
               <a:ext uri="{FF2B5EF4-FFF2-40B4-BE49-F238E27FC236}">
-                <a16:creationId xmlns:a16="http://schemas.microsoft.com/office/drawing/2014/main" id="{67CBFB09-B324-4703-8B21-E9A25219F952}"/>
+                <a16:creationId xmlns:a16="http://schemas.microsoft.com/office/drawing/2014/main" id="{91A2EB5A-0EE5-458B-9C6D-E131DBCAA85E}"/>
               </a:ext>
             </a:extLst>
           </p:cNvPr>
@@ -15206,7 +15758,7 @@
           <p:cNvPr id="5" name="reveal-bg">
             <a:extLst xmlns:a="http://schemas.openxmlformats.org/drawingml/2006/main">
               <a:ext uri="{FF2B5EF4-FFF2-40B4-BE49-F238E27FC236}">
-                <a16:creationId xmlns:a16="http://schemas.microsoft.com/office/drawing/2014/main" id="{ADEE27CA-137B-46A7-964D-06FB012B6EB0}"/>
+                <a16:creationId xmlns:a16="http://schemas.microsoft.com/office/drawing/2014/main" id="{AAD5E145-F288-4C9D-9E42-46FEE4AC15E1}"/>
               </a:ext>
             </a:extLst>
           </p:cNvPr>
@@ -15218,7 +15770,7 @@
         <p:spPr>
           <a:xfrm xmlns:a="http://schemas.openxmlformats.org/drawingml/2006/main">
             <a:off x="590550" y="1219200"/>
-            <a:ext cx="10953750" cy="4457700"/>
+            <a:ext cx="10953750" cy="4552950"/>
           </a:xfrm>
           <a:prstGeom xmlns:a="http://schemas.openxmlformats.org/drawingml/2006/main" prst="rect">
             <a:avLst/>
@@ -15234,72 +15786,72 @@
       </p:sp>
       <p:sp>
         <p:nvSpPr>
-          <p:cNvPr id="6" name="rows">
-            <a:extLst xmlns:a="http://schemas.openxmlformats.org/drawingml/2006/main">
-              <a:ext uri="{FF2B5EF4-FFF2-40B4-BE49-F238E27FC236}">
-                <a16:creationId xmlns:a16="http://schemas.microsoft.com/office/drawing/2014/main" id="{82E53FC3-B852-4D95-9C79-3F23F90A3A86}"/>
-              </a:ext>
-            </a:extLst>
-          </p:cNvPr>
-          <p:cNvSpPr>
-            <a:spLocks xmlns:a="http://schemas.openxmlformats.org/drawingml/2006/main" noGrp="1"/>
-          </p:cNvSpPr>
-          <p:nvPr/>
-        </p:nvSpPr>
-        <p:spPr>
-          <a:xfrm xmlns:a="http://schemas.openxmlformats.org/drawingml/2006/main">
-            <a:off x="876300" y="1466850"/>
-            <a:ext cx="4000500" cy="523875"/>
-          </a:xfrm>
-          <a:prstGeom xmlns:a="http://schemas.openxmlformats.org/drawingml/2006/main" prst="rect">
-            <a:avLst/>
-          </a:prstGeom>
-          <a:noFill xmlns:a="http://schemas.openxmlformats.org/drawingml/2006/main"/>
-          <a:ln xmlns:a="http://schemas.openxmlformats.org/drawingml/2006/main" w="0">
-            <a:noFill/>
-            <a:prstDash val="solid"/>
-          </a:ln>
-        </p:spPr>
-        <p:txBody>
-          <a:bodyPr xmlns:a="http://schemas.openxmlformats.org/drawingml/2006/main" anchor="t"/>
-          <a:lstStyle xmlns:a="http://schemas.openxmlformats.org/drawingml/2006/main"/>
-          <a:p xmlns:a="http://schemas.openxmlformats.org/drawingml/2006/main">
-            <a:pPr algn="l">
-              <a:defRPr sz="2850" b="1" i="0">
+          <p:cNvPr id="6" name="failure1-number">
+            <a:extLst xmlns:a="http://schemas.openxmlformats.org/drawingml/2006/main">
+              <a:ext uri="{FF2B5EF4-FFF2-40B4-BE49-F238E27FC236}">
+                <a16:creationId xmlns:a16="http://schemas.microsoft.com/office/drawing/2014/main" id="{BB39AF3B-375D-4B87-9903-EFFDA22BC6BB}"/>
+              </a:ext>
+            </a:extLst>
+          </p:cNvPr>
+          <p:cNvSpPr>
+            <a:spLocks xmlns:a="http://schemas.openxmlformats.org/drawingml/2006/main" noGrp="1"/>
+          </p:cNvSpPr>
+          <p:nvPr/>
+        </p:nvSpPr>
+        <p:spPr>
+          <a:xfrm xmlns:a="http://schemas.openxmlformats.org/drawingml/2006/main">
+            <a:off x="838200" y="1381125"/>
+            <a:ext cx="495300" cy="523875"/>
+          </a:xfrm>
+          <a:prstGeom xmlns:a="http://schemas.openxmlformats.org/drawingml/2006/main" prst="rect">
+            <a:avLst/>
+          </a:prstGeom>
+          <a:noFill xmlns:a="http://schemas.openxmlformats.org/drawingml/2006/main"/>
+          <a:ln xmlns:a="http://schemas.openxmlformats.org/drawingml/2006/main" w="0">
+            <a:noFill/>
+            <a:prstDash val="solid"/>
+          </a:ln>
+        </p:spPr>
+        <p:txBody>
+          <a:bodyPr xmlns:a="http://schemas.openxmlformats.org/drawingml/2006/main" anchor="t"/>
+          <a:lstStyle xmlns:a="http://schemas.openxmlformats.org/drawingml/2006/main"/>
+          <a:p xmlns:a="http://schemas.openxmlformats.org/drawingml/2006/main">
+            <a:pPr algn="l">
+              <a:defRPr sz="3150" b="1" i="0">
                 <a:solidFill>
                   <a:srgbClr val="FF0000"/>
                 </a:solidFill>
               </a:defRPr>
             </a:pPr>
             <a:r>
-              <a:rPr sz="2850" b="1" i="0">
+              <a:rPr sz="3150" b="1" i="0">
                 <a:solidFill>
                   <a:srgbClr val="FF0000"/>
                 </a:solidFill>
               </a:rPr>
-              <a:t>3,430 rows</a:t>
-            </a:r>
-          </a:p>
-        </p:txBody>
-      </p:sp>
-      <p:sp>
-        <p:nvSpPr>
-          <p:cNvPr id="7" name="ids">
-            <a:extLst xmlns:a="http://schemas.openxmlformats.org/drawingml/2006/main">
-              <a:ext uri="{FF2B5EF4-FFF2-40B4-BE49-F238E27FC236}">
-                <a16:creationId xmlns:a16="http://schemas.microsoft.com/office/drawing/2014/main" id="{858618A1-6F6D-4E1E-9C1C-7CA8D8A130D4}"/>
-              </a:ext>
-            </a:extLst>
-          </p:cNvPr>
-          <p:cNvSpPr>
-            <a:spLocks xmlns:a="http://schemas.openxmlformats.org/drawingml/2006/main" noGrp="1"/>
-          </p:cNvSpPr>
-          <p:nvPr/>
-        </p:nvSpPr>
-        <p:spPr>
-          <a:xfrm xmlns:a="http://schemas.openxmlformats.org/drawingml/2006/main">
-            <a:off x="4762500" y="1543050"/>
-            <a:ext cx="5905500" cy="457200"/>
+              <a:t>1</a:t>
+            </a:r>
+          </a:p>
+        </p:txBody>
+      </p:sp>
+      <p:sp>
+        <p:nvSpPr>
+          <p:cNvPr id="7" name="failure1-title">
+            <a:extLst xmlns:a="http://schemas.openxmlformats.org/drawingml/2006/main">
+              <a:ext uri="{FF2B5EF4-FFF2-40B4-BE49-F238E27FC236}">
+                <a16:creationId xmlns:a16="http://schemas.microsoft.com/office/drawing/2014/main" id="{1579A0E9-88E6-42F3-8BDD-4FB870B1768C}"/>
+              </a:ext>
+            </a:extLst>
+          </p:cNvPr>
+          <p:cNvSpPr>
+            <a:spLocks xmlns:a="http://schemas.openxmlformats.org/drawingml/2006/main" noGrp="1"/>
+          </p:cNvSpPr>
+          <p:nvPr/>
+        </p:nvSpPr>
+        <p:spPr>
+          <a:xfrm xmlns:a="http://schemas.openxmlformats.org/drawingml/2006/main">
+            <a:off x="1428750" y="1438275"/>
+            <a:ext cx="4191000" cy="419100"/>
           </a:xfrm>
           <a:prstGeom xmlns:a="http://schemas.openxmlformats.org/drawingml/2006/main" prst="rect">
             <a:avLst/>
@@ -15317,189 +15869,767 @@
             <a:pPr algn="l">
               <a:defRPr sz="2175" b="1" i="0">
                 <a:solidFill>
+                  <a:srgbClr val="FF0000"/>
+                </a:solidFill>
+              </a:defRPr>
+            </a:pPr>
+            <a:r>
+              <a:rPr sz="2175" b="1" i="0">
+                <a:solidFill>
+                  <a:srgbClr val="FF0000"/>
+                </a:solidFill>
+              </a:rPr>
+              <a:t>Unit / cardinality drift</a:t>
+            </a:r>
+          </a:p>
+        </p:txBody>
+      </p:sp>
+      <p:sp>
+        <p:nvSpPr>
+          <p:cNvPr id="8" name="failure1-drift">
+            <a:extLst xmlns:a="http://schemas.openxmlformats.org/drawingml/2006/main">
+              <a:ext uri="{FF2B5EF4-FFF2-40B4-BE49-F238E27FC236}">
+                <a16:creationId xmlns:a16="http://schemas.microsoft.com/office/drawing/2014/main" id="{98E08B9A-E130-46B1-B54E-DAEFFCD75137}"/>
+              </a:ext>
+            </a:extLst>
+          </p:cNvPr>
+          <p:cNvSpPr>
+            <a:spLocks xmlns:a="http://schemas.openxmlformats.org/drawingml/2006/main" noGrp="1"/>
+          </p:cNvSpPr>
+          <p:nvPr/>
+        </p:nvSpPr>
+        <p:spPr>
+          <a:xfrm xmlns:a="http://schemas.openxmlformats.org/drawingml/2006/main">
+            <a:off x="857250" y="2028825"/>
+            <a:ext cx="4762500" cy="381000"/>
+          </a:xfrm>
+          <a:prstGeom xmlns:a="http://schemas.openxmlformats.org/drawingml/2006/main" prst="rect">
+            <a:avLst/>
+          </a:prstGeom>
+          <a:noFill xmlns:a="http://schemas.openxmlformats.org/drawingml/2006/main"/>
+          <a:ln xmlns:a="http://schemas.openxmlformats.org/drawingml/2006/main" w="0">
+            <a:noFill/>
+            <a:prstDash val="solid"/>
+          </a:ln>
+        </p:spPr>
+        <p:txBody>
+          <a:bodyPr xmlns:a="http://schemas.openxmlformats.org/drawingml/2006/main" anchor="t"/>
+          <a:lstStyle xmlns:a="http://schemas.openxmlformats.org/drawingml/2006/main"/>
+          <a:p xmlns:a="http://schemas.openxmlformats.org/drawingml/2006/main">
+            <a:pPr algn="l">
+              <a:defRPr sz="1875" b="1" i="0">
+                <a:solidFill>
                   <a:srgbClr val="17171C"/>
                 </a:solidFill>
               </a:defRPr>
             </a:pPr>
             <a:r>
+              <a:rPr sz="1875" b="1" i="0">
+                <a:solidFill>
+                  <a:srgbClr val="17171C"/>
+                </a:solidFill>
+              </a:rPr>
+              <a:t>3,000 applicants  →  3,430 rows</a:t>
+            </a:r>
+          </a:p>
+        </p:txBody>
+      </p:sp>
+      <p:sp>
+        <p:nvSpPr>
+          <p:cNvPr id="9" name="failure1-counts">
+            <a:extLst xmlns:a="http://schemas.openxmlformats.org/drawingml/2006/main">
+              <a:ext uri="{FF2B5EF4-FFF2-40B4-BE49-F238E27FC236}">
+                <a16:creationId xmlns:a16="http://schemas.microsoft.com/office/drawing/2014/main" id="{0E3D1C85-E393-47F5-8B39-32172AB13C09}"/>
+              </a:ext>
+            </a:extLst>
+          </p:cNvPr>
+          <p:cNvSpPr>
+            <a:spLocks xmlns:a="http://schemas.openxmlformats.org/drawingml/2006/main" noGrp="1"/>
+          </p:cNvSpPr>
+          <p:nvPr/>
+        </p:nvSpPr>
+        <p:spPr>
+          <a:xfrm xmlns:a="http://schemas.openxmlformats.org/drawingml/2006/main">
+            <a:off x="857250" y="2543175"/>
+            <a:ext cx="4762500" cy="361950"/>
+          </a:xfrm>
+          <a:prstGeom xmlns:a="http://schemas.openxmlformats.org/drawingml/2006/main" prst="rect">
+            <a:avLst/>
+          </a:prstGeom>
+          <a:noFill xmlns:a="http://schemas.openxmlformats.org/drawingml/2006/main"/>
+          <a:ln xmlns:a="http://schemas.openxmlformats.org/drawingml/2006/main" w="0">
+            <a:noFill/>
+            <a:prstDash val="solid"/>
+          </a:ln>
+        </p:spPr>
+        <p:txBody>
+          <a:bodyPr xmlns:a="http://schemas.openxmlformats.org/drawingml/2006/main" anchor="t"/>
+          <a:lstStyle xmlns:a="http://schemas.openxmlformats.org/drawingml/2006/main"/>
+          <a:p xmlns:a="http://schemas.openxmlformats.org/drawingml/2006/main">
+            <a:pPr algn="l">
+              <a:defRPr sz="1725" b="0" i="0">
+                <a:solidFill>
+                  <a:srgbClr val="17171C"/>
+                </a:solidFill>
+              </a:defRPr>
+            </a:pPr>
+            <a:r>
+              <a:rPr sz="1725" b="0" i="0">
+                <a:solidFill>
+                  <a:srgbClr val="17171C"/>
+                </a:solidFill>
+              </a:rPr>
+              <a:t>350 duplicate IDs  •  430 excess rows</a:t>
+            </a:r>
+          </a:p>
+        </p:txBody>
+      </p:sp>
+      <p:sp>
+        <p:nvSpPr>
+          <p:cNvPr id="10" name="failure1-pattern">
+            <a:extLst xmlns:a="http://schemas.openxmlformats.org/drawingml/2006/main">
+              <a:ext uri="{FF2B5EF4-FFF2-40B4-BE49-F238E27FC236}">
+                <a16:creationId xmlns:a16="http://schemas.microsoft.com/office/drawing/2014/main" id="{A610E6F8-C32B-49C7-BB49-81011DB97931}"/>
+              </a:ext>
+            </a:extLst>
+          </p:cNvPr>
+          <p:cNvSpPr>
+            <a:spLocks xmlns:a="http://schemas.openxmlformats.org/drawingml/2006/main" noGrp="1"/>
+          </p:cNvSpPr>
+          <p:nvPr/>
+        </p:nvSpPr>
+        <p:spPr>
+          <a:xfrm xmlns:a="http://schemas.openxmlformats.org/drawingml/2006/main">
+            <a:off x="857250" y="3057525"/>
+            <a:ext cx="4762500" cy="723900"/>
+          </a:xfrm>
+          <a:prstGeom xmlns:a="http://schemas.openxmlformats.org/drawingml/2006/main" prst="rect">
+            <a:avLst/>
+          </a:prstGeom>
+          <a:noFill xmlns:a="http://schemas.openxmlformats.org/drawingml/2006/main"/>
+          <a:ln xmlns:a="http://schemas.openxmlformats.org/drawingml/2006/main" w="0">
+            <a:noFill/>
+            <a:prstDash val="solid"/>
+          </a:ln>
+        </p:spPr>
+        <p:txBody>
+          <a:bodyPr xmlns:a="http://schemas.openxmlformats.org/drawingml/2006/main" anchor="t"/>
+          <a:lstStyle xmlns:a="http://schemas.openxmlformats.org/drawingml/2006/main"/>
+          <a:p xmlns:a="http://schemas.openxmlformats.org/drawingml/2006/main">
+            <a:pPr algn="l">
+              <a:defRPr sz="1650" b="0" i="0">
+                <a:solidFill>
+                  <a:srgbClr val="17171C"/>
+                </a:solidFill>
+              </a:defRPr>
+            </a:pPr>
+            <a:r>
+              <a:rPr sz="1650" b="0" i="0">
+                <a:solidFill>
+                  <a:srgbClr val="17171C"/>
+                </a:solidFill>
+              </a:rPr>
+              <a:t>All duplicates are offered applicants;</a:t>
+            </a:r>
+          </a:p>
+          <a:p xmlns:a="http://schemas.openxmlformats.org/drawingml/2006/main">
+            <a:pPr algn="l">
+              <a:defRPr sz="1650" b="0" i="0">
+                <a:solidFill>
+                  <a:srgbClr val="17171C"/>
+                </a:solidFill>
+              </a:defRPr>
+            </a:pPr>
+            <a:r>
+              <a:rPr sz="1650" b="0" i="0">
+                <a:solidFill>
+                  <a:srgbClr val="17171C"/>
+                </a:solidFill>
+              </a:rPr>
+              <a:t>frequent attenders receive extra weight.</a:t>
+            </a:r>
+          </a:p>
+        </p:txBody>
+      </p:sp>
+      <p:sp>
+        <p:nvSpPr>
+          <p:cNvPr id="11" name="rule-625-150">
+            <a:extLst xmlns:a="http://schemas.openxmlformats.org/drawingml/2006/main">
+              <a:ext uri="{FF2B5EF4-FFF2-40B4-BE49-F238E27FC236}">
+                <a16:creationId xmlns:a16="http://schemas.microsoft.com/office/drawing/2014/main" id="{5CAF398B-2C22-488C-B3DC-A2488603665E}"/>
+              </a:ext>
+            </a:extLst>
+          </p:cNvPr>
+          <p:cNvSpPr>
+            <a:spLocks xmlns:a="http://schemas.openxmlformats.org/drawingml/2006/main" noGrp="1"/>
+          </p:cNvSpPr>
+          <p:nvPr/>
+        </p:nvSpPr>
+        <p:spPr>
+          <a:xfrm xmlns:a="http://schemas.openxmlformats.org/drawingml/2006/main">
+            <a:off x="5953125" y="1428750"/>
+            <a:ext cx="19050" cy="0"/>
+          </a:xfrm>
+          <a:prstGeom xmlns:a="http://schemas.openxmlformats.org/drawingml/2006/main" prst="rect">
+            <a:avLst/>
+          </a:prstGeom>
+          <a:ln xmlns:a="http://schemas.openxmlformats.org/drawingml/2006/main" w="0">
+            <a:prstDash val="solid"/>
+          </a:ln>
+        </p:spPr>
+      </p:sp>
+      <p:sp>
+        <p:nvSpPr>
+          <p:cNvPr id="12" name="failure2-number">
+            <a:extLst xmlns:a="http://schemas.openxmlformats.org/drawingml/2006/main">
+              <a:ext uri="{FF2B5EF4-FFF2-40B4-BE49-F238E27FC236}">
+                <a16:creationId xmlns:a16="http://schemas.microsoft.com/office/drawing/2014/main" id="{A435533C-5C13-4C9E-8B36-B56E1D39FF7B}"/>
+              </a:ext>
+            </a:extLst>
+          </p:cNvPr>
+          <p:cNvSpPr>
+            <a:spLocks xmlns:a="http://schemas.openxmlformats.org/drawingml/2006/main" noGrp="1"/>
+          </p:cNvSpPr>
+          <p:nvPr/>
+        </p:nvSpPr>
+        <p:spPr>
+          <a:xfrm xmlns:a="http://schemas.openxmlformats.org/drawingml/2006/main">
+            <a:off x="6286500" y="1381125"/>
+            <a:ext cx="495300" cy="523875"/>
+          </a:xfrm>
+          <a:prstGeom xmlns:a="http://schemas.openxmlformats.org/drawingml/2006/main" prst="rect">
+            <a:avLst/>
+          </a:prstGeom>
+          <a:noFill xmlns:a="http://schemas.openxmlformats.org/drawingml/2006/main"/>
+          <a:ln xmlns:a="http://schemas.openxmlformats.org/drawingml/2006/main" w="0">
+            <a:noFill/>
+            <a:prstDash val="solid"/>
+          </a:ln>
+        </p:spPr>
+        <p:txBody>
+          <a:bodyPr xmlns:a="http://schemas.openxmlformats.org/drawingml/2006/main" anchor="t"/>
+          <a:lstStyle xmlns:a="http://schemas.openxmlformats.org/drawingml/2006/main"/>
+          <a:p xmlns:a="http://schemas.openxmlformats.org/drawingml/2006/main">
+            <a:pPr algn="l">
+              <a:defRPr sz="3150" b="1" i="0">
+                <a:solidFill>
+                  <a:srgbClr val="FF0000"/>
+                </a:solidFill>
+              </a:defRPr>
+            </a:pPr>
+            <a:r>
+              <a:rPr sz="3150" b="1" i="0">
+                <a:solidFill>
+                  <a:srgbClr val="FF0000"/>
+                </a:solidFill>
+              </a:rPr>
+              <a:t>2</a:t>
+            </a:r>
+          </a:p>
+        </p:txBody>
+      </p:sp>
+      <p:sp>
+        <p:nvSpPr>
+          <p:cNvPr id="13" name="failure2-title">
+            <a:extLst xmlns:a="http://schemas.openxmlformats.org/drawingml/2006/main">
+              <a:ext uri="{FF2B5EF4-FFF2-40B4-BE49-F238E27FC236}">
+                <a16:creationId xmlns:a16="http://schemas.microsoft.com/office/drawing/2014/main" id="{5C2821FE-B426-4F86-B997-9EAA7D3DEDEF}"/>
+              </a:ext>
+            </a:extLst>
+          </p:cNvPr>
+          <p:cNvSpPr>
+            <a:spLocks xmlns:a="http://schemas.openxmlformats.org/drawingml/2006/main" noGrp="1"/>
+          </p:cNvSpPr>
+          <p:nvPr/>
+        </p:nvSpPr>
+        <p:spPr>
+          <a:xfrm xmlns:a="http://schemas.openxmlformats.org/drawingml/2006/main">
+            <a:off x="6877050" y="1438275"/>
+            <a:ext cx="4000500" cy="419100"/>
+          </a:xfrm>
+          <a:prstGeom xmlns:a="http://schemas.openxmlformats.org/drawingml/2006/main" prst="rect">
+            <a:avLst/>
+          </a:prstGeom>
+          <a:noFill xmlns:a="http://schemas.openxmlformats.org/drawingml/2006/main"/>
+          <a:ln xmlns:a="http://schemas.openxmlformats.org/drawingml/2006/main" w="0">
+            <a:noFill/>
+            <a:prstDash val="solid"/>
+          </a:ln>
+        </p:spPr>
+        <p:txBody>
+          <a:bodyPr xmlns:a="http://schemas.openxmlformats.org/drawingml/2006/main" anchor="t"/>
+          <a:lstStyle xmlns:a="http://schemas.openxmlformats.org/drawingml/2006/main"/>
+          <a:p xmlns:a="http://schemas.openxmlformats.org/drawingml/2006/main">
+            <a:pPr algn="l">
+              <a:defRPr sz="2175" b="1" i="0">
+                <a:solidFill>
+                  <a:srgbClr val="FF0000"/>
+                </a:solidFill>
+              </a:defRPr>
+            </a:pPr>
+            <a:r>
               <a:rPr sz="2175" b="1" i="0">
                 <a:solidFill>
+                  <a:srgbClr val="FF0000"/>
+                </a:solidFill>
+              </a:rPr>
+              <a:t>Estimand drift</a:t>
+            </a:r>
+          </a:p>
+        </p:txBody>
+      </p:sp>
+      <p:sp>
+        <p:nvSpPr>
+          <p:cNvPr id="14" name="failure2-randomized">
+            <a:extLst xmlns:a="http://schemas.openxmlformats.org/drawingml/2006/main">
+              <a:ext uri="{FF2B5EF4-FFF2-40B4-BE49-F238E27FC236}">
+                <a16:creationId xmlns:a16="http://schemas.microsoft.com/office/drawing/2014/main" id="{E3783D74-BFE8-444E-8251-B9F3760566E8}"/>
+              </a:ext>
+            </a:extLst>
+          </p:cNvPr>
+          <p:cNvSpPr>
+            <a:spLocks xmlns:a="http://schemas.openxmlformats.org/drawingml/2006/main" noGrp="1"/>
+          </p:cNvSpPr>
+          <p:nvPr/>
+        </p:nvSpPr>
+        <p:spPr>
+          <a:xfrm xmlns:a="http://schemas.openxmlformats.org/drawingml/2006/main">
+            <a:off x="6305550" y="2028825"/>
+            <a:ext cx="4667250" cy="666750"/>
+          </a:xfrm>
+          <a:prstGeom xmlns:a="http://schemas.openxmlformats.org/drawingml/2006/main" prst="rect">
+            <a:avLst/>
+          </a:prstGeom>
+          <a:noFill xmlns:a="http://schemas.openxmlformats.org/drawingml/2006/main"/>
+          <a:ln xmlns:a="http://schemas.openxmlformats.org/drawingml/2006/main" w="0">
+            <a:noFill/>
+            <a:prstDash val="solid"/>
+          </a:ln>
+        </p:spPr>
+        <p:txBody>
+          <a:bodyPr xmlns:a="http://schemas.openxmlformats.org/drawingml/2006/main" anchor="t"/>
+          <a:lstStyle xmlns:a="http://schemas.openxmlformats.org/drawingml/2006/main"/>
+          <a:p xmlns:a="http://schemas.openxmlformats.org/drawingml/2006/main">
+            <a:pPr algn="l">
+              <a:defRPr sz="1725" b="1" i="0">
+                <a:solidFill>
                   <a:srgbClr val="17171C"/>
                 </a:solidFill>
-              </a:rPr>
-              <a:t>but only 3,000 applicant IDs</a:t>
-            </a:r>
-          </a:p>
-        </p:txBody>
-      </p:sp>
-      <p:sp>
-        <p:nvSpPr>
-          <p:cNvPr id="8" name="dups">
-            <a:extLst xmlns:a="http://schemas.openxmlformats.org/drawingml/2006/main">
-              <a:ext uri="{FF2B5EF4-FFF2-40B4-BE49-F238E27FC236}">
-                <a16:creationId xmlns:a16="http://schemas.microsoft.com/office/drawing/2014/main" id="{F56FB3B6-9C37-4E88-B589-A54114FBA6C7}"/>
-              </a:ext>
-            </a:extLst>
-          </p:cNvPr>
-          <p:cNvSpPr>
-            <a:spLocks xmlns:a="http://schemas.openxmlformats.org/drawingml/2006/main" noGrp="1"/>
-          </p:cNvSpPr>
-          <p:nvPr/>
-        </p:nvSpPr>
-        <p:spPr>
-          <a:xfrm xmlns:a="http://schemas.openxmlformats.org/drawingml/2006/main">
-            <a:off x="876300" y="2247900"/>
-            <a:ext cx="8858250" cy="428625"/>
-          </a:xfrm>
-          <a:prstGeom xmlns:a="http://schemas.openxmlformats.org/drawingml/2006/main" prst="rect">
-            <a:avLst/>
-          </a:prstGeom>
-          <a:noFill xmlns:a="http://schemas.openxmlformats.org/drawingml/2006/main"/>
-          <a:ln xmlns:a="http://schemas.openxmlformats.org/drawingml/2006/main" w="0">
-            <a:noFill/>
-            <a:prstDash val="solid"/>
-          </a:ln>
-        </p:spPr>
-        <p:txBody>
-          <a:bodyPr xmlns:a="http://schemas.openxmlformats.org/drawingml/2006/main" anchor="t"/>
-          <a:lstStyle xmlns:a="http://schemas.openxmlformats.org/drawingml/2006/main"/>
-          <a:p xmlns:a="http://schemas.openxmlformats.org/drawingml/2006/main">
-            <a:pPr algn="l">
-              <a:defRPr sz="2025" b="0" i="0">
+              </a:defRPr>
+            </a:pPr>
+            <a:r>
+              <a:rPr sz="1725" b="1" i="0">
                 <a:solidFill>
                   <a:srgbClr val="17171C"/>
                 </a:solidFill>
-              </a:defRPr>
-            </a:pPr>
-            <a:r>
-              <a:rPr sz="2025" b="0" i="0">
+              </a:rPr>
+              <a:t>Randomized treatment:</a:t>
+            </a:r>
+          </a:p>
+          <a:p xmlns:a="http://schemas.openxmlformats.org/drawingml/2006/main">
+            <a:pPr algn="l">
+              <a:defRPr sz="1725" b="1" i="0">
                 <a:solidFill>
                   <a:srgbClr val="17171C"/>
                 </a:solidFill>
-              </a:rPr>
-              <a:t>350 applicant IDs are duplicated.</a:t>
-            </a:r>
-          </a:p>
-        </p:txBody>
-      </p:sp>
-      <p:sp>
-        <p:nvSpPr>
-          <p:cNvPr id="9" name="concentration">
-            <a:extLst xmlns:a="http://schemas.openxmlformats.org/drawingml/2006/main">
-              <a:ext uri="{FF2B5EF4-FFF2-40B4-BE49-F238E27FC236}">
-                <a16:creationId xmlns:a16="http://schemas.microsoft.com/office/drawing/2014/main" id="{8E329E32-2992-404E-9ECD-143BDE74A743}"/>
-              </a:ext>
-            </a:extLst>
-          </p:cNvPr>
-          <p:cNvSpPr>
-            <a:spLocks xmlns:a="http://schemas.openxmlformats.org/drawingml/2006/main" noGrp="1"/>
-          </p:cNvSpPr>
-          <p:nvPr/>
-        </p:nvSpPr>
-        <p:spPr>
-          <a:xfrm xmlns:a="http://schemas.openxmlformats.org/drawingml/2006/main">
-            <a:off x="876300" y="2800350"/>
-            <a:ext cx="9906000" cy="428625"/>
-          </a:xfrm>
-          <a:prstGeom xmlns:a="http://schemas.openxmlformats.org/drawingml/2006/main" prst="rect">
-            <a:avLst/>
-          </a:prstGeom>
-          <a:noFill xmlns:a="http://schemas.openxmlformats.org/drawingml/2006/main"/>
-          <a:ln xmlns:a="http://schemas.openxmlformats.org/drawingml/2006/main" w="0">
-            <a:noFill/>
-            <a:prstDash val="solid"/>
-          </a:ln>
-        </p:spPr>
-        <p:txBody>
-          <a:bodyPr xmlns:a="http://schemas.openxmlformats.org/drawingml/2006/main" anchor="t"/>
-          <a:lstStyle xmlns:a="http://schemas.openxmlformats.org/drawingml/2006/main"/>
-          <a:p xmlns:a="http://schemas.openxmlformats.org/drawingml/2006/main">
-            <a:pPr algn="l">
-              <a:defRPr sz="2025" b="0" i="0">
+              </a:defRPr>
+            </a:pPr>
+            <a:r>
+              <a:rPr sz="1725" b="1" i="0">
                 <a:solidFill>
                   <a:srgbClr val="17171C"/>
                 </a:solidFill>
-              </a:defRPr>
-            </a:pPr>
-            <a:r>
-              <a:rPr sz="2025" b="0" i="0">
+              </a:rPr>
+              <a:t>offered_training</a:t>
+            </a:r>
+          </a:p>
+        </p:txBody>
+      </p:sp>
+      <p:sp>
+        <p:nvSpPr>
+          <p:cNvPr id="15" name="failure2-used">
+            <a:extLst xmlns:a="http://schemas.openxmlformats.org/drawingml/2006/main">
+              <a:ext uri="{FF2B5EF4-FFF2-40B4-BE49-F238E27FC236}">
+                <a16:creationId xmlns:a16="http://schemas.microsoft.com/office/drawing/2014/main" id="{2DC650AF-BA66-4610-8962-E934CC331B22}"/>
+              </a:ext>
+            </a:extLst>
+          </p:cNvPr>
+          <p:cNvSpPr>
+            <a:spLocks xmlns:a="http://schemas.openxmlformats.org/drawingml/2006/main" noGrp="1"/>
+          </p:cNvSpPr>
+          <p:nvPr/>
+        </p:nvSpPr>
+        <p:spPr>
+          <a:xfrm xmlns:a="http://schemas.openxmlformats.org/drawingml/2006/main">
+            <a:off x="6305550" y="2809875"/>
+            <a:ext cx="4857750" cy="723900"/>
+          </a:xfrm>
+          <a:prstGeom xmlns:a="http://schemas.openxmlformats.org/drawingml/2006/main" prst="rect">
+            <a:avLst/>
+          </a:prstGeom>
+          <a:noFill xmlns:a="http://schemas.openxmlformats.org/drawingml/2006/main"/>
+          <a:ln xmlns:a="http://schemas.openxmlformats.org/drawingml/2006/main" w="0">
+            <a:noFill/>
+            <a:prstDash val="solid"/>
+          </a:ln>
+        </p:spPr>
+        <p:txBody>
+          <a:bodyPr xmlns:a="http://schemas.openxmlformats.org/drawingml/2006/main" anchor="t"/>
+          <a:lstStyle xmlns:a="http://schemas.openxmlformats.org/drawingml/2006/main"/>
+          <a:p xmlns:a="http://schemas.openxmlformats.org/drawingml/2006/main">
+            <a:pPr algn="l">
+              <a:defRPr sz="1650" b="1" i="0">
+                <a:solidFill>
+                  <a:srgbClr val="FF0000"/>
+                </a:solidFill>
+              </a:defRPr>
+            </a:pPr>
+            <a:r>
+              <a:rPr sz="1650" b="1" i="0">
+                <a:solidFill>
+                  <a:srgbClr val="FF0000"/>
+                </a:solidFill>
+              </a:rPr>
+              <a:t>Inherited comparison:</a:t>
+            </a:r>
+          </a:p>
+          <a:p xmlns:a="http://schemas.openxmlformats.org/drawingml/2006/main">
+            <a:pPr algn="l">
+              <a:defRPr sz="1650" b="1" i="0">
+                <a:solidFill>
+                  <a:srgbClr val="FF0000"/>
+                </a:solidFill>
+              </a:defRPr>
+            </a:pPr>
+            <a:r>
+              <a:rPr sz="1650" b="1" i="0">
+                <a:solidFill>
+                  <a:srgbClr val="FF0000"/>
+                </a:solidFill>
+              </a:rPr>
+              <a:t>post-randomization program_participant</a:t>
+            </a:r>
+          </a:p>
+        </p:txBody>
+      </p:sp>
+      <p:sp>
+        <p:nvSpPr>
+          <p:cNvPr id="16" name="matrix-title">
+            <a:extLst xmlns:a="http://schemas.openxmlformats.org/drawingml/2006/main">
+              <a:ext uri="{FF2B5EF4-FFF2-40B4-BE49-F238E27FC236}">
+                <a16:creationId xmlns:a16="http://schemas.microsoft.com/office/drawing/2014/main" id="{138012B5-8B17-45A8-BEA4-113C99ABA9DC}"/>
+              </a:ext>
+            </a:extLst>
+          </p:cNvPr>
+          <p:cNvSpPr>
+            <a:spLocks xmlns:a="http://schemas.openxmlformats.org/drawingml/2006/main" noGrp="1"/>
+          </p:cNvSpPr>
+          <p:nvPr/>
+        </p:nvSpPr>
+        <p:spPr>
+          <a:xfrm xmlns:a="http://schemas.openxmlformats.org/drawingml/2006/main">
+            <a:off x="6305550" y="3695700"/>
+            <a:ext cx="2190750" cy="285750"/>
+          </a:xfrm>
+          <a:prstGeom xmlns:a="http://schemas.openxmlformats.org/drawingml/2006/main" prst="rect">
+            <a:avLst/>
+          </a:prstGeom>
+          <a:noFill xmlns:a="http://schemas.openxmlformats.org/drawingml/2006/main"/>
+          <a:ln xmlns:a="http://schemas.openxmlformats.org/drawingml/2006/main" w="0">
+            <a:noFill/>
+            <a:prstDash val="solid"/>
+          </a:ln>
+        </p:spPr>
+        <p:txBody>
+          <a:bodyPr xmlns:a="http://schemas.openxmlformats.org/drawingml/2006/main" anchor="t"/>
+          <a:lstStyle xmlns:a="http://schemas.openxmlformats.org/drawingml/2006/main"/>
+          <a:p xmlns:a="http://schemas.openxmlformats.org/drawingml/2006/main">
+            <a:pPr algn="l">
+              <a:defRPr sz="1350" b="1" i="0">
+                <a:solidFill>
+                  <a:srgbClr val="3333B2"/>
+                </a:solidFill>
+              </a:defRPr>
+            </a:pPr>
+            <a:r>
+              <a:rPr sz="1350" b="1" i="0">
+                <a:solidFill>
+                  <a:srgbClr val="3333B2"/>
+                </a:solidFill>
+              </a:rPr>
+              <a:t>Compliance matrix</a:t>
+            </a:r>
+          </a:p>
+        </p:txBody>
+      </p:sp>
+      <p:sp>
+        <p:nvSpPr>
+          <p:cNvPr id="17" name="matrix-head">
+            <a:extLst xmlns:a="http://schemas.openxmlformats.org/drawingml/2006/main">
+              <a:ext uri="{FF2B5EF4-FFF2-40B4-BE49-F238E27FC236}">
+                <a16:creationId xmlns:a16="http://schemas.microsoft.com/office/drawing/2014/main" id="{88F42AAB-14C5-4236-B2DC-98CC1F567104}"/>
+              </a:ext>
+            </a:extLst>
+          </p:cNvPr>
+          <p:cNvSpPr>
+            <a:spLocks xmlns:a="http://schemas.openxmlformats.org/drawingml/2006/main" noGrp="1"/>
+          </p:cNvSpPr>
+          <p:nvPr/>
+        </p:nvSpPr>
+        <p:spPr>
+          <a:xfrm xmlns:a="http://schemas.openxmlformats.org/drawingml/2006/main">
+            <a:off x="8248650" y="3695700"/>
+            <a:ext cx="2571750" cy="285750"/>
+          </a:xfrm>
+          <a:prstGeom xmlns:a="http://schemas.openxmlformats.org/drawingml/2006/main" prst="rect">
+            <a:avLst/>
+          </a:prstGeom>
+          <a:noFill xmlns:a="http://schemas.openxmlformats.org/drawingml/2006/main"/>
+          <a:ln xmlns:a="http://schemas.openxmlformats.org/drawingml/2006/main" w="0">
+            <a:noFill/>
+            <a:prstDash val="solid"/>
+          </a:ln>
+        </p:spPr>
+        <p:txBody>
+          <a:bodyPr xmlns:a="http://schemas.openxmlformats.org/drawingml/2006/main" anchor="t"/>
+          <a:lstStyle xmlns:a="http://schemas.openxmlformats.org/drawingml/2006/main"/>
+          <a:p xmlns:a="http://schemas.openxmlformats.org/drawingml/2006/main">
+            <a:pPr algn="l">
+              <a:defRPr sz="1350" b="1" i="0">
+                <a:solidFill>
+                  <a:srgbClr val="3333B2"/>
+                </a:solidFill>
+              </a:defRPr>
+            </a:pPr>
+            <a:r>
+              <a:rPr sz="1350" b="1" i="0">
+                <a:solidFill>
+                  <a:srgbClr val="3333B2"/>
+                </a:solidFill>
+              </a:rPr>
+              <a:t>Participate     No</a:t>
+            </a:r>
+          </a:p>
+        </p:txBody>
+      </p:sp>
+      <p:sp>
+        <p:nvSpPr>
+          <p:cNvPr id="18" name="matrix-offered">
+            <a:extLst xmlns:a="http://schemas.openxmlformats.org/drawingml/2006/main">
+              <a:ext uri="{FF2B5EF4-FFF2-40B4-BE49-F238E27FC236}">
+                <a16:creationId xmlns:a16="http://schemas.microsoft.com/office/drawing/2014/main" id="{A7CB080B-222D-4363-943D-F9EE099712CB}"/>
+              </a:ext>
+            </a:extLst>
+          </p:cNvPr>
+          <p:cNvSpPr>
+            <a:spLocks xmlns:a="http://schemas.openxmlformats.org/drawingml/2006/main" noGrp="1"/>
+          </p:cNvSpPr>
+          <p:nvPr/>
+        </p:nvSpPr>
+        <p:spPr>
+          <a:xfrm xmlns:a="http://schemas.openxmlformats.org/drawingml/2006/main">
+            <a:off x="6305550" y="4048125"/>
+            <a:ext cx="1809750" cy="285750"/>
+          </a:xfrm>
+          <a:prstGeom xmlns:a="http://schemas.openxmlformats.org/drawingml/2006/main" prst="rect">
+            <a:avLst/>
+          </a:prstGeom>
+          <a:noFill xmlns:a="http://schemas.openxmlformats.org/drawingml/2006/main"/>
+          <a:ln xmlns:a="http://schemas.openxmlformats.org/drawingml/2006/main" w="0">
+            <a:noFill/>
+            <a:prstDash val="solid"/>
+          </a:ln>
+        </p:spPr>
+        <p:txBody>
+          <a:bodyPr xmlns:a="http://schemas.openxmlformats.org/drawingml/2006/main" anchor="t"/>
+          <a:lstStyle xmlns:a="http://schemas.openxmlformats.org/drawingml/2006/main"/>
+          <a:p xmlns:a="http://schemas.openxmlformats.org/drawingml/2006/main">
+            <a:pPr algn="l">
+              <a:defRPr sz="1425" b="1" i="0">
                 <a:solidFill>
                   <a:srgbClr val="17171C"/>
                 </a:solidFill>
-              </a:rPr>
-              <a:t>Duplicates are concentrated among applicants offered training.</a:t>
-            </a:r>
-          </a:p>
-        </p:txBody>
-      </p:sp>
-      <p:sp>
-        <p:nvSpPr>
-          <p:cNvPr id="10" name="replacement">
-            <a:extLst xmlns:a="http://schemas.openxmlformats.org/drawingml/2006/main">
-              <a:ext uri="{FF2B5EF4-FFF2-40B4-BE49-F238E27FC236}">
-                <a16:creationId xmlns:a16="http://schemas.microsoft.com/office/drawing/2014/main" id="{FB684D3E-AEDB-4BB1-82D6-2B8950EA7553}"/>
-              </a:ext>
-            </a:extLst>
-          </p:cNvPr>
-          <p:cNvSpPr>
-            <a:spLocks xmlns:a="http://schemas.openxmlformats.org/drawingml/2006/main" noGrp="1"/>
-          </p:cNvSpPr>
-          <p:nvPr/>
-        </p:nvSpPr>
-        <p:spPr>
-          <a:xfrm xmlns:a="http://schemas.openxmlformats.org/drawingml/2006/main">
-            <a:off x="876300" y="3352800"/>
-            <a:ext cx="10096500" cy="619125"/>
-          </a:xfrm>
-          <a:prstGeom xmlns:a="http://schemas.openxmlformats.org/drawingml/2006/main" prst="rect">
-            <a:avLst/>
-          </a:prstGeom>
-          <a:noFill xmlns:a="http://schemas.openxmlformats.org/drawingml/2006/main"/>
-          <a:ln xmlns:a="http://schemas.openxmlformats.org/drawingml/2006/main" w="0">
-            <a:noFill/>
-            <a:prstDash val="solid"/>
-          </a:ln>
-        </p:spPr>
-        <p:txBody>
-          <a:bodyPr xmlns:a="http://schemas.openxmlformats.org/drawingml/2006/main" anchor="t"/>
-          <a:lstStyle xmlns:a="http://schemas.openxmlformats.org/drawingml/2006/main"/>
-          <a:p xmlns:a="http://schemas.openxmlformats.org/drawingml/2006/main">
-            <a:pPr algn="l">
-              <a:defRPr sz="2025" b="1" i="0">
-                <a:solidFill>
-                  <a:srgbClr val="FF0000"/>
-                </a:solidFill>
-              </a:defRPr>
-            </a:pPr>
-            <a:r>
-              <a:rPr sz="2025" b="1" i="0">
-                <a:solidFill>
-                  <a:srgbClr val="FF0000"/>
-                </a:solidFill>
-              </a:rPr>
-              <a:t>The inherited analysis used program_participant as treatment instead of randomized offered_training.</a:t>
-            </a:r>
-          </a:p>
-        </p:txBody>
-      </p:sp>
-      <p:sp>
-        <p:nvSpPr>
-          <p:cNvPr id="11" name="rule-92-436">
-            <a:extLst xmlns:a="http://schemas.openxmlformats.org/drawingml/2006/main">
-              <a:ext uri="{FF2B5EF4-FFF2-40B4-BE49-F238E27FC236}">
-                <a16:creationId xmlns:a16="http://schemas.microsoft.com/office/drawing/2014/main" id="{73DF3DEA-A84E-432A-A37F-ABA7B459D70D}"/>
-              </a:ext>
-            </a:extLst>
-          </p:cNvPr>
-          <p:cNvSpPr>
-            <a:spLocks xmlns:a="http://schemas.openxmlformats.org/drawingml/2006/main" noGrp="1"/>
-          </p:cNvSpPr>
-          <p:nvPr/>
-        </p:nvSpPr>
-        <p:spPr>
-          <a:xfrm xmlns:a="http://schemas.openxmlformats.org/drawingml/2006/main">
-            <a:off x="876300" y="4152900"/>
-            <a:ext cx="9715500" cy="28575"/>
+              </a:defRPr>
+            </a:pPr>
+            <a:r>
+              <a:rPr sz="1425" b="1" i="0">
+                <a:solidFill>
+                  <a:srgbClr val="17171C"/>
+                </a:solidFill>
+              </a:rPr>
+              <a:t>Offered</a:t>
+            </a:r>
+          </a:p>
+        </p:txBody>
+      </p:sp>
+      <p:sp>
+        <p:nvSpPr>
+          <p:cNvPr id="19" name="matrix-offered-values">
+            <a:extLst xmlns:a="http://schemas.openxmlformats.org/drawingml/2006/main">
+              <a:ext uri="{FF2B5EF4-FFF2-40B4-BE49-F238E27FC236}">
+                <a16:creationId xmlns:a16="http://schemas.microsoft.com/office/drawing/2014/main" id="{D49F8CF7-3AC6-42E2-BFE7-B974E6248233}"/>
+              </a:ext>
+            </a:extLst>
+          </p:cNvPr>
+          <p:cNvSpPr>
+            <a:spLocks xmlns:a="http://schemas.openxmlformats.org/drawingml/2006/main" noGrp="1"/>
+          </p:cNvSpPr>
+          <p:nvPr/>
+        </p:nvSpPr>
+        <p:spPr>
+          <a:xfrm xmlns:a="http://schemas.openxmlformats.org/drawingml/2006/main">
+            <a:off x="8248650" y="4048125"/>
+            <a:ext cx="2571750" cy="285750"/>
+          </a:xfrm>
+          <a:prstGeom xmlns:a="http://schemas.openxmlformats.org/drawingml/2006/main" prst="rect">
+            <a:avLst/>
+          </a:prstGeom>
+          <a:noFill xmlns:a="http://schemas.openxmlformats.org/drawingml/2006/main"/>
+          <a:ln xmlns:a="http://schemas.openxmlformats.org/drawingml/2006/main" w="0">
+            <a:noFill/>
+            <a:prstDash val="solid"/>
+          </a:ln>
+        </p:spPr>
+        <p:txBody>
+          <a:bodyPr xmlns:a="http://schemas.openxmlformats.org/drawingml/2006/main" anchor="t"/>
+          <a:lstStyle xmlns:a="http://schemas.openxmlformats.org/drawingml/2006/main"/>
+          <a:p xmlns:a="http://schemas.openxmlformats.org/drawingml/2006/main">
+            <a:pPr algn="l">
+              <a:defRPr sz="1425" b="0" i="0">
+                <a:solidFill>
+                  <a:srgbClr val="17171C"/>
+                </a:solidFill>
+              </a:defRPr>
+            </a:pPr>
+            <a:r>
+              <a:rPr sz="1425" b="0" i="0">
+                <a:solidFill>
+                  <a:srgbClr val="17171C"/>
+                </a:solidFill>
+              </a:rPr>
+              <a:t>1,350          150</a:t>
+            </a:r>
+          </a:p>
+        </p:txBody>
+      </p:sp>
+      <p:sp>
+        <p:nvSpPr>
+          <p:cNvPr id="20" name="matrix-control">
+            <a:extLst xmlns:a="http://schemas.openxmlformats.org/drawingml/2006/main">
+              <a:ext uri="{FF2B5EF4-FFF2-40B4-BE49-F238E27FC236}">
+                <a16:creationId xmlns:a16="http://schemas.microsoft.com/office/drawing/2014/main" id="{9112C9B1-952A-42DE-B0E9-ADBEED875124}"/>
+              </a:ext>
+            </a:extLst>
+          </p:cNvPr>
+          <p:cNvSpPr>
+            <a:spLocks xmlns:a="http://schemas.openxmlformats.org/drawingml/2006/main" noGrp="1"/>
+          </p:cNvSpPr>
+          <p:nvPr/>
+        </p:nvSpPr>
+        <p:spPr>
+          <a:xfrm xmlns:a="http://schemas.openxmlformats.org/drawingml/2006/main">
+            <a:off x="6305550" y="4400550"/>
+            <a:ext cx="1809750" cy="285750"/>
+          </a:xfrm>
+          <a:prstGeom xmlns:a="http://schemas.openxmlformats.org/drawingml/2006/main" prst="rect">
+            <a:avLst/>
+          </a:prstGeom>
+          <a:noFill xmlns:a="http://schemas.openxmlformats.org/drawingml/2006/main"/>
+          <a:ln xmlns:a="http://schemas.openxmlformats.org/drawingml/2006/main" w="0">
+            <a:noFill/>
+            <a:prstDash val="solid"/>
+          </a:ln>
+        </p:spPr>
+        <p:txBody>
+          <a:bodyPr xmlns:a="http://schemas.openxmlformats.org/drawingml/2006/main" anchor="t"/>
+          <a:lstStyle xmlns:a="http://schemas.openxmlformats.org/drawingml/2006/main"/>
+          <a:p xmlns:a="http://schemas.openxmlformats.org/drawingml/2006/main">
+            <a:pPr algn="l">
+              <a:defRPr sz="1425" b="1" i="0">
+                <a:solidFill>
+                  <a:srgbClr val="17171C"/>
+                </a:solidFill>
+              </a:defRPr>
+            </a:pPr>
+            <a:r>
+              <a:rPr sz="1425" b="1" i="0">
+                <a:solidFill>
+                  <a:srgbClr val="17171C"/>
+                </a:solidFill>
+              </a:rPr>
+              <a:t>Control</a:t>
+            </a:r>
+          </a:p>
+        </p:txBody>
+      </p:sp>
+      <p:sp>
+        <p:nvSpPr>
+          <p:cNvPr id="21" name="matrix-control-values">
+            <a:extLst xmlns:a="http://schemas.openxmlformats.org/drawingml/2006/main">
+              <a:ext uri="{FF2B5EF4-FFF2-40B4-BE49-F238E27FC236}">
+                <a16:creationId xmlns:a16="http://schemas.microsoft.com/office/drawing/2014/main" id="{C2D69461-8014-4693-A244-3B11B46BFECD}"/>
+              </a:ext>
+            </a:extLst>
+          </p:cNvPr>
+          <p:cNvSpPr>
+            <a:spLocks xmlns:a="http://schemas.openxmlformats.org/drawingml/2006/main" noGrp="1"/>
+          </p:cNvSpPr>
+          <p:nvPr/>
+        </p:nvSpPr>
+        <p:spPr>
+          <a:xfrm xmlns:a="http://schemas.openxmlformats.org/drawingml/2006/main">
+            <a:off x="8248650" y="4400550"/>
+            <a:ext cx="2571750" cy="285750"/>
+          </a:xfrm>
+          <a:prstGeom xmlns:a="http://schemas.openxmlformats.org/drawingml/2006/main" prst="rect">
+            <a:avLst/>
+          </a:prstGeom>
+          <a:noFill xmlns:a="http://schemas.openxmlformats.org/drawingml/2006/main"/>
+          <a:ln xmlns:a="http://schemas.openxmlformats.org/drawingml/2006/main" w="0">
+            <a:noFill/>
+            <a:prstDash val="solid"/>
+          </a:ln>
+        </p:spPr>
+        <p:txBody>
+          <a:bodyPr xmlns:a="http://schemas.openxmlformats.org/drawingml/2006/main" anchor="t"/>
+          <a:lstStyle xmlns:a="http://schemas.openxmlformats.org/drawingml/2006/main"/>
+          <a:p xmlns:a="http://schemas.openxmlformats.org/drawingml/2006/main">
+            <a:pPr algn="l">
+              <a:defRPr sz="1425" b="0" i="0">
+                <a:solidFill>
+                  <a:srgbClr val="17171C"/>
+                </a:solidFill>
+              </a:defRPr>
+            </a:pPr>
+            <a:r>
+              <a:rPr sz="1425" b="0" i="0">
+                <a:solidFill>
+                  <a:srgbClr val="17171C"/>
+                </a:solidFill>
+              </a:rPr>
+              <a:t>45          1,455</a:t>
+            </a:r>
+          </a:p>
+        </p:txBody>
+      </p:sp>
+      <p:sp>
+        <p:nvSpPr>
+          <p:cNvPr id="22" name="rule-90-520">
+            <a:extLst xmlns:a="http://schemas.openxmlformats.org/drawingml/2006/main">
+              <a:ext uri="{FF2B5EF4-FFF2-40B4-BE49-F238E27FC236}">
+                <a16:creationId xmlns:a16="http://schemas.microsoft.com/office/drawing/2014/main" id="{BEC0C19C-EB86-411F-8856-274598E1ED25}"/>
+              </a:ext>
+            </a:extLst>
+          </p:cNvPr>
+          <p:cNvSpPr>
+            <a:spLocks xmlns:a="http://schemas.openxmlformats.org/drawingml/2006/main" noGrp="1"/>
+          </p:cNvSpPr>
+          <p:nvPr/>
+        </p:nvSpPr>
+        <p:spPr>
+          <a:xfrm xmlns:a="http://schemas.openxmlformats.org/drawingml/2006/main">
+            <a:off x="857250" y="4953000"/>
+            <a:ext cx="10001250" cy="28575"/>
           </a:xfrm>
           <a:prstGeom xmlns:a="http://schemas.openxmlformats.org/drawingml/2006/main" prst="rect">
             <a:avLst/>
@@ -15517,100 +16647,50 @@
       </p:sp>
       <p:sp>
         <p:nvSpPr>
-          <p:cNvPr id="12" name="decision">
-            <a:extLst xmlns:a="http://schemas.openxmlformats.org/drawingml/2006/main">
-              <a:ext uri="{FF2B5EF4-FFF2-40B4-BE49-F238E27FC236}">
-                <a16:creationId xmlns:a16="http://schemas.microsoft.com/office/drawing/2014/main" id="{6E4327D0-551D-4524-B8BE-5F775BD09E04}"/>
-              </a:ext>
-            </a:extLst>
-          </p:cNvPr>
-          <p:cNvSpPr>
-            <a:spLocks xmlns:a="http://schemas.openxmlformats.org/drawingml/2006/main" noGrp="1"/>
-          </p:cNvSpPr>
-          <p:nvPr/>
-        </p:nvSpPr>
-        <p:spPr>
-          <a:xfrm xmlns:a="http://schemas.openxmlformats.org/drawingml/2006/main">
-            <a:off x="876300" y="4400550"/>
-            <a:ext cx="4667250" cy="523875"/>
-          </a:xfrm>
-          <a:prstGeom xmlns:a="http://schemas.openxmlformats.org/drawingml/2006/main" prst="rect">
-            <a:avLst/>
-          </a:prstGeom>
-          <a:noFill xmlns:a="http://schemas.openxmlformats.org/drawingml/2006/main"/>
-          <a:ln xmlns:a="http://schemas.openxmlformats.org/drawingml/2006/main" w="0">
-            <a:noFill/>
-            <a:prstDash val="solid"/>
-          </a:ln>
-        </p:spPr>
-        <p:txBody>
-          <a:bodyPr xmlns:a="http://schemas.openxmlformats.org/drawingml/2006/main" anchor="t"/>
-          <a:lstStyle xmlns:a="http://schemas.openxmlformats.org/drawingml/2006/main"/>
-          <a:p xmlns:a="http://schemas.openxmlformats.org/drawingml/2006/main">
-            <a:pPr algn="l">
-              <a:defRPr sz="2700" b="1" i="0">
+          <p:cNvPr id="23" name="bottom">
+            <a:extLst xmlns:a="http://schemas.openxmlformats.org/drawingml/2006/main">
+              <a:ext uri="{FF2B5EF4-FFF2-40B4-BE49-F238E27FC236}">
+                <a16:creationId xmlns:a16="http://schemas.microsoft.com/office/drawing/2014/main" id="{B2C0090E-21F5-4A32-9AB9-B5F00ED9D80B}"/>
+              </a:ext>
+            </a:extLst>
+          </p:cNvPr>
+          <p:cNvSpPr>
+            <a:spLocks xmlns:a="http://schemas.openxmlformats.org/drawingml/2006/main" noGrp="1"/>
+          </p:cNvSpPr>
+          <p:nvPr/>
+        </p:nvSpPr>
+        <p:spPr>
+          <a:xfrm xmlns:a="http://schemas.openxmlformats.org/drawingml/2006/main">
+            <a:off x="857250" y="5143500"/>
+            <a:ext cx="10001250" cy="457200"/>
+          </a:xfrm>
+          <a:prstGeom xmlns:a="http://schemas.openxmlformats.org/drawingml/2006/main" prst="rect">
+            <a:avLst/>
+          </a:prstGeom>
+          <a:noFill xmlns:a="http://schemas.openxmlformats.org/drawingml/2006/main"/>
+          <a:ln xmlns:a="http://schemas.openxmlformats.org/drawingml/2006/main" w="0">
+            <a:noFill/>
+            <a:prstDash val="solid"/>
+          </a:ln>
+        </p:spPr>
+        <p:txBody>
+          <a:bodyPr xmlns:a="http://schemas.openxmlformats.org/drawingml/2006/main" anchor="t"/>
+          <a:lstStyle xmlns:a="http://schemas.openxmlformats.org/drawingml/2006/main"/>
+          <a:p xmlns:a="http://schemas.openxmlformats.org/drawingml/2006/main">
+            <a:pPr algn="ctr">
+              <a:defRPr sz="2550" b="1" i="0">
                 <a:solidFill>
                   <a:srgbClr val="FF0000"/>
                 </a:solidFill>
               </a:defRPr>
             </a:pPr>
             <a:r>
-              <a:rPr sz="2700" b="1" i="0">
+              <a:rPr sz="2550" b="1" i="0">
                 <a:solidFill>
                   <a:srgbClr val="FF0000"/>
                 </a:solidFill>
               </a:rPr>
-              <a:t>Decision: BLOCK</a:t>
-            </a:r>
-          </a:p>
-        </p:txBody>
-      </p:sp>
-      <p:sp>
-        <p:nvSpPr>
-          <p:cNvPr id="13" name="repair">
-            <a:extLst xmlns:a="http://schemas.openxmlformats.org/drawingml/2006/main">
-              <a:ext uri="{FF2B5EF4-FFF2-40B4-BE49-F238E27FC236}">
-                <a16:creationId xmlns:a16="http://schemas.microsoft.com/office/drawing/2014/main" id="{FDFAD635-D062-4321-9416-E276CE8430E1}"/>
-              </a:ext>
-            </a:extLst>
-          </p:cNvPr>
-          <p:cNvSpPr>
-            <a:spLocks xmlns:a="http://schemas.openxmlformats.org/drawingml/2006/main" noGrp="1"/>
-          </p:cNvSpPr>
-          <p:nvPr/>
-        </p:nvSpPr>
-        <p:spPr>
-          <a:xfrm xmlns:a="http://schemas.openxmlformats.org/drawingml/2006/main">
-            <a:off x="876300" y="5010150"/>
-            <a:ext cx="9906000" cy="514350"/>
-          </a:xfrm>
-          <a:prstGeom xmlns:a="http://schemas.openxmlformats.org/drawingml/2006/main" prst="rect">
-            <a:avLst/>
-          </a:prstGeom>
-          <a:noFill xmlns:a="http://schemas.openxmlformats.org/drawingml/2006/main"/>
-          <a:ln xmlns:a="http://schemas.openxmlformats.org/drawingml/2006/main" w="0">
-            <a:noFill/>
-            <a:prstDash val="solid"/>
-          </a:ln>
-        </p:spPr>
-        <p:txBody>
-          <a:bodyPr xmlns:a="http://schemas.openxmlformats.org/drawingml/2006/main" anchor="t"/>
-          <a:lstStyle xmlns:a="http://schemas.openxmlformats.org/drawingml/2006/main"/>
-          <a:p xmlns:a="http://schemas.openxmlformats.org/drawingml/2006/main">
-            <a:pPr algn="l">
-              <a:defRPr sz="1650" b="1" i="0">
-                <a:solidFill>
-                  <a:srgbClr val="17171C"/>
-                </a:solidFill>
-              </a:defRPr>
-            </a:pPr>
-            <a:r>
-              <a:rPr sz="1650" b="1" i="0">
-                <a:solidFill>
-                  <a:srgbClr val="17171C"/>
-                </a:solidFill>
-              </a:rPr>
-              <a:t>offered_training remains in the CSV. Repair at the applicant level: treat attendance as a diagnostic; keep offered_training as treatment.</a:t>
+              <a:t>+5.6 pp is not the ITT.</a:t>
             </a:r>
           </a:p>
         </p:txBody>
@@ -15618,7 +16698,7 @@
     </p:spTree>
     <p:extLst>
       <p:ext uri="{BB962C8B-B14F-4D97-AF65-F5344CB8AC3E}">
-        <p14:creationId xmlns:p14="http://schemas.microsoft.com/office/powerpoint/2010/main" val="247036835"/>
+        <p14:creationId xmlns:p14="http://schemas.microsoft.com/office/powerpoint/2010/main" val="2063298299"/>
       </p:ext>
     </p:extLst>
   </p:cSld>
@@ -15646,10 +16726,10 @@
       </p:grpSpPr>
       <p:sp>
         <p:nvSpPr>
-          <p:cNvPr id="25" name="slide-title">
-            <a:extLst xmlns:a="http://schemas.openxmlformats.org/drawingml/2006/main">
-              <a:ext uri="{FF2B5EF4-FFF2-40B4-BE49-F238E27FC236}">
-                <a16:creationId xmlns:a16="http://schemas.microsoft.com/office/drawing/2014/main" id="{080CD7CC-7935-4A42-AC1B-CE1CBCC99C82}"/>
+          <p:cNvPr id="35" name="slide-title">
+            <a:extLst xmlns:a="http://schemas.openxmlformats.org/drawingml/2006/main">
+              <a:ext uri="{FF2B5EF4-FFF2-40B4-BE49-F238E27FC236}">
+                <a16:creationId xmlns:a16="http://schemas.microsoft.com/office/drawing/2014/main" id="{9264CDD1-0E12-4047-B0C1-44871C154094}"/>
               </a:ext>
             </a:extLst>
           </p:cNvPr>
@@ -15689,7 +16769,7 @@
                   <a:srgbClr val="3333B2"/>
                 </a:solidFill>
               </a:rPr>
-              <a:t>Case B — Expected StatsClaw audit output</a:t>
+              <a:t>Case B audit — Rows and applicants diverge</a:t>
             </a:r>
           </a:p>
         </p:txBody>
@@ -15699,7 +16779,7 @@
           <p:cNvPr id="2" name="rule-68-107">
             <a:extLst xmlns:a="http://schemas.openxmlformats.org/drawingml/2006/main">
               <a:ext uri="{FF2B5EF4-FFF2-40B4-BE49-F238E27FC236}">
-                <a16:creationId xmlns:a16="http://schemas.microsoft.com/office/drawing/2014/main" id="{2F2D6F9A-536E-4D5C-9471-4B0EEC339990}"/>
+                <a16:creationId xmlns:a16="http://schemas.microsoft.com/office/drawing/2014/main" id="{A87BE591-EF65-4CBE-9D3F-7607E9876634}"/>
               </a:ext>
             </a:extLst>
           </p:cNvPr>
@@ -15732,7 +16812,7 @@
           <p:cNvPr id="3" name="page-number">
             <a:extLst xmlns:a="http://schemas.openxmlformats.org/drawingml/2006/main">
               <a:ext uri="{FF2B5EF4-FFF2-40B4-BE49-F238E27FC236}">
-                <a16:creationId xmlns:a16="http://schemas.microsoft.com/office/drawing/2014/main" id="{CA4D39E5-F2DB-451A-9D7A-143418A791FB}"/>
+                <a16:creationId xmlns:a16="http://schemas.microsoft.com/office/drawing/2014/main" id="{71AF5E32-BF88-4AEF-AF80-A1F11E1D0A38}"/>
               </a:ext>
             </a:extLst>
           </p:cNvPr>
@@ -15779,122 +16859,105 @@
       </p:sp>
       <p:sp>
         <p:nvSpPr>
-          <p:cNvPr id="4" name="audit-label-0">
-            <a:extLst xmlns:a="http://schemas.openxmlformats.org/drawingml/2006/main">
-              <a:ext uri="{FF2B5EF4-FFF2-40B4-BE49-F238E27FC236}">
-                <a16:creationId xmlns:a16="http://schemas.microsoft.com/office/drawing/2014/main" id="{CC062543-0867-4BE5-AAF1-F8E3D6863B13}"/>
-              </a:ext>
-            </a:extLst>
-          </p:cNvPr>
-          <p:cNvSpPr>
-            <a:spLocks xmlns:a="http://schemas.openxmlformats.org/drawingml/2006/main" noGrp="1"/>
-          </p:cNvSpPr>
-          <p:nvPr/>
-        </p:nvSpPr>
-        <p:spPr>
-          <a:xfrm xmlns:a="http://schemas.openxmlformats.org/drawingml/2006/main">
-            <a:off x="781050" y="1257300"/>
-            <a:ext cx="3143250" cy="323850"/>
-          </a:xfrm>
-          <a:prstGeom xmlns:a="http://schemas.openxmlformats.org/drawingml/2006/main" prst="rect">
-            <a:avLst/>
-          </a:prstGeom>
-          <a:noFill xmlns:a="http://schemas.openxmlformats.org/drawingml/2006/main"/>
-          <a:ln xmlns:a="http://schemas.openxmlformats.org/drawingml/2006/main" w="0">
-            <a:noFill/>
-            <a:prstDash val="solid"/>
-          </a:ln>
-        </p:spPr>
-        <p:txBody>
-          <a:bodyPr xmlns:a="http://schemas.openxmlformats.org/drawingml/2006/main" anchor="t"/>
-          <a:lstStyle xmlns:a="http://schemas.openxmlformats.org/drawingml/2006/main"/>
-          <a:p xmlns:a="http://schemas.openxmlformats.org/drawingml/2006/main">
-            <a:pPr algn="l">
-              <a:defRPr sz="1425" b="1" i="0">
-                <a:solidFill>
-                  <a:srgbClr val="3333B2"/>
-                </a:solidFill>
-              </a:defRPr>
-            </a:pPr>
-            <a:r>
-              <a:rPr sz="1425" b="1" i="0">
-                <a:solidFill>
-                  <a:srgbClr val="3333B2"/>
-                </a:solidFill>
-              </a:rPr>
-              <a:t>ROWS</a:t>
-            </a:r>
-          </a:p>
-        </p:txBody>
-      </p:sp>
-      <p:sp>
-        <p:nvSpPr>
-          <p:cNvPr id="5" name="audit-value-0">
-            <a:extLst xmlns:a="http://schemas.openxmlformats.org/drawingml/2006/main">
-              <a:ext uri="{FF2B5EF4-FFF2-40B4-BE49-F238E27FC236}">
-                <a16:creationId xmlns:a16="http://schemas.microsoft.com/office/drawing/2014/main" id="{C45FB862-52A6-4A3D-A85E-20C568E65D76}"/>
-              </a:ext>
-            </a:extLst>
-          </p:cNvPr>
-          <p:cNvSpPr>
-            <a:spLocks xmlns:a="http://schemas.openxmlformats.org/drawingml/2006/main" noGrp="1"/>
-          </p:cNvSpPr>
-          <p:nvPr/>
-        </p:nvSpPr>
-        <p:spPr>
-          <a:xfrm xmlns:a="http://schemas.openxmlformats.org/drawingml/2006/main">
-            <a:off x="4095750" y="1257300"/>
-            <a:ext cx="6953250" cy="323850"/>
-          </a:xfrm>
-          <a:prstGeom xmlns:a="http://schemas.openxmlformats.org/drawingml/2006/main" prst="rect">
-            <a:avLst/>
-          </a:prstGeom>
-          <a:noFill xmlns:a="http://schemas.openxmlformats.org/drawingml/2006/main"/>
-          <a:ln xmlns:a="http://schemas.openxmlformats.org/drawingml/2006/main" w="0">
-            <a:noFill/>
-            <a:prstDash val="solid"/>
-          </a:ln>
-        </p:spPr>
-        <p:txBody>
-          <a:bodyPr xmlns:a="http://schemas.openxmlformats.org/drawingml/2006/main" anchor="t"/>
-          <a:lstStyle xmlns:a="http://schemas.openxmlformats.org/drawingml/2006/main"/>
-          <a:p xmlns:a="http://schemas.openxmlformats.org/drawingml/2006/main">
-            <a:pPr algn="l">
-              <a:defRPr sz="1725" b="0" i="0">
-                <a:solidFill>
-                  <a:srgbClr val="17171C"/>
-                </a:solidFill>
-              </a:defRPr>
-            </a:pPr>
-            <a:r>
-              <a:rPr sz="1725" b="0" i="0">
-                <a:solidFill>
-                  <a:srgbClr val="17171C"/>
-                </a:solidFill>
-              </a:rPr>
-              <a:t>3,430</a:t>
-            </a:r>
-          </a:p>
-        </p:txBody>
-      </p:sp>
-      <p:sp>
-        <p:nvSpPr>
-          <p:cNvPr id="6" name="rule-82-177">
-            <a:extLst xmlns:a="http://schemas.openxmlformats.org/drawingml/2006/main">
-              <a:ext uri="{FF2B5EF4-FFF2-40B4-BE49-F238E27FC236}">
-                <a16:creationId xmlns:a16="http://schemas.microsoft.com/office/drawing/2014/main" id="{48B9E79A-92F5-497B-98EE-C2ACE33D73BE}"/>
-              </a:ext>
-            </a:extLst>
-          </p:cNvPr>
-          <p:cNvSpPr>
-            <a:spLocks xmlns:a="http://schemas.openxmlformats.org/drawingml/2006/main" noGrp="1"/>
-          </p:cNvSpPr>
-          <p:nvPr/>
-        </p:nvSpPr>
-        <p:spPr>
-          <a:xfrm xmlns:a="http://schemas.openxmlformats.org/drawingml/2006/main">
-            <a:off x="781050" y="1685925"/>
-            <a:ext cx="10096500" cy="9525"/>
+          <p:cNvPr id="4" name="rule-130-570">
+            <a:extLst xmlns:a="http://schemas.openxmlformats.org/drawingml/2006/main">
+              <a:ext uri="{FF2B5EF4-FFF2-40B4-BE49-F238E27FC236}">
+                <a16:creationId xmlns:a16="http://schemas.microsoft.com/office/drawing/2014/main" id="{96AD8AD8-4E7B-4DDF-A226-868A75CFE705}"/>
+              </a:ext>
+            </a:extLst>
+          </p:cNvPr>
+          <p:cNvSpPr>
+            <a:spLocks xmlns:a="http://schemas.openxmlformats.org/drawingml/2006/main" noGrp="1"/>
+          </p:cNvSpPr>
+          <p:nvPr/>
+        </p:nvSpPr>
+        <p:spPr>
+          <a:xfrm xmlns:a="http://schemas.openxmlformats.org/drawingml/2006/main">
+            <a:off x="1238250" y="5429250"/>
+            <a:ext cx="6667500" cy="19050"/>
+          </a:xfrm>
+          <a:prstGeom xmlns:a="http://schemas.openxmlformats.org/drawingml/2006/main" prst="rect">
+            <a:avLst/>
+          </a:prstGeom>
+          <a:solidFill xmlns:a="http://schemas.openxmlformats.org/drawingml/2006/main">
+            <a:srgbClr val="5C5C69"/>
+          </a:solidFill>
+          <a:ln xmlns:a="http://schemas.openxmlformats.org/drawingml/2006/main" w="0">
+            <a:solidFill>
+              <a:srgbClr val="5C5C69"/>
+            </a:solidFill>
+            <a:prstDash val="solid"/>
+          </a:ln>
+        </p:spPr>
+      </p:sp>
+      <p:sp>
+        <p:nvSpPr>
+          <p:cNvPr id="5" name="audit-axis-0">
+            <a:extLst xmlns:a="http://schemas.openxmlformats.org/drawingml/2006/main">
+              <a:ext uri="{FF2B5EF4-FFF2-40B4-BE49-F238E27FC236}">
+                <a16:creationId xmlns:a16="http://schemas.microsoft.com/office/drawing/2014/main" id="{ECD69B0D-B6A9-457F-9D61-DF5755381093}"/>
+              </a:ext>
+            </a:extLst>
+          </p:cNvPr>
+          <p:cNvSpPr>
+            <a:spLocks xmlns:a="http://schemas.openxmlformats.org/drawingml/2006/main" noGrp="1"/>
+          </p:cNvSpPr>
+          <p:nvPr/>
+        </p:nvSpPr>
+        <p:spPr>
+          <a:xfrm xmlns:a="http://schemas.openxmlformats.org/drawingml/2006/main">
+            <a:off x="476250" y="5305425"/>
+            <a:ext cx="685800" cy="247650"/>
+          </a:xfrm>
+          <a:prstGeom xmlns:a="http://schemas.openxmlformats.org/drawingml/2006/main" prst="rect">
+            <a:avLst/>
+          </a:prstGeom>
+          <a:noFill xmlns:a="http://schemas.openxmlformats.org/drawingml/2006/main"/>
+          <a:ln xmlns:a="http://schemas.openxmlformats.org/drawingml/2006/main" w="0">
+            <a:noFill/>
+            <a:prstDash val="solid"/>
+          </a:ln>
+        </p:spPr>
+        <p:txBody>
+          <a:bodyPr xmlns:a="http://schemas.openxmlformats.org/drawingml/2006/main" anchor="t"/>
+          <a:lstStyle xmlns:a="http://schemas.openxmlformats.org/drawingml/2006/main"/>
+          <a:p xmlns:a="http://schemas.openxmlformats.org/drawingml/2006/main">
+            <a:pPr algn="r">
+              <a:defRPr sz="1050" b="0" i="0">
+                <a:solidFill>
+                  <a:srgbClr val="5C5C69"/>
+                </a:solidFill>
+              </a:defRPr>
+            </a:pPr>
+            <a:r>
+              <a:rPr sz="1050" b="0" i="0">
+                <a:solidFill>
+                  <a:srgbClr val="5C5C69"/>
+                </a:solidFill>
+              </a:rPr>
+              <a:t>0</a:t>
+            </a:r>
+          </a:p>
+        </p:txBody>
+      </p:sp>
+      <p:sp>
+        <p:nvSpPr>
+          <p:cNvPr id="6" name="rule-130-479">
+            <a:extLst xmlns:a="http://schemas.openxmlformats.org/drawingml/2006/main">
+              <a:ext uri="{FF2B5EF4-FFF2-40B4-BE49-F238E27FC236}">
+                <a16:creationId xmlns:a16="http://schemas.microsoft.com/office/drawing/2014/main" id="{32F175C2-0364-41BA-8115-B6160D72A348}"/>
+              </a:ext>
+            </a:extLst>
+          </p:cNvPr>
+          <p:cNvSpPr>
+            <a:spLocks xmlns:a="http://schemas.openxmlformats.org/drawingml/2006/main" noGrp="1"/>
+          </p:cNvSpPr>
+          <p:nvPr/>
+        </p:nvSpPr>
+        <p:spPr>
+          <a:xfrm xmlns:a="http://schemas.openxmlformats.org/drawingml/2006/main">
+            <a:off x="1238250" y="4562475"/>
+            <a:ext cx="6667500" cy="9525"/>
           </a:xfrm>
           <a:prstGeom xmlns:a="http://schemas.openxmlformats.org/drawingml/2006/main" prst="rect">
             <a:avLst/>
@@ -15912,122 +16975,72 @@
       </p:sp>
       <p:sp>
         <p:nvSpPr>
-          <p:cNvPr id="7" name="audit-label-1">
-            <a:extLst xmlns:a="http://schemas.openxmlformats.org/drawingml/2006/main">
-              <a:ext uri="{FF2B5EF4-FFF2-40B4-BE49-F238E27FC236}">
-                <a16:creationId xmlns:a16="http://schemas.microsoft.com/office/drawing/2014/main" id="{18100EE0-00B2-4853-BF14-0CFC2FC7CD6C}"/>
-              </a:ext>
-            </a:extLst>
-          </p:cNvPr>
-          <p:cNvSpPr>
-            <a:spLocks xmlns:a="http://schemas.openxmlformats.org/drawingml/2006/main" noGrp="1"/>
-          </p:cNvSpPr>
-          <p:nvPr/>
-        </p:nvSpPr>
-        <p:spPr>
-          <a:xfrm xmlns:a="http://schemas.openxmlformats.org/drawingml/2006/main">
-            <a:off x="781050" y="1876425"/>
-            <a:ext cx="3143250" cy="323850"/>
-          </a:xfrm>
-          <a:prstGeom xmlns:a="http://schemas.openxmlformats.org/drawingml/2006/main" prst="rect">
-            <a:avLst/>
-          </a:prstGeom>
-          <a:noFill xmlns:a="http://schemas.openxmlformats.org/drawingml/2006/main"/>
-          <a:ln xmlns:a="http://schemas.openxmlformats.org/drawingml/2006/main" w="0">
-            <a:noFill/>
-            <a:prstDash val="solid"/>
-          </a:ln>
-        </p:spPr>
-        <p:txBody>
-          <a:bodyPr xmlns:a="http://schemas.openxmlformats.org/drawingml/2006/main" anchor="t"/>
-          <a:lstStyle xmlns:a="http://schemas.openxmlformats.org/drawingml/2006/main"/>
-          <a:p xmlns:a="http://schemas.openxmlformats.org/drawingml/2006/main">
-            <a:pPr algn="l">
-              <a:defRPr sz="1425" b="1" i="0">
-                <a:solidFill>
-                  <a:srgbClr val="3333B2"/>
-                </a:solidFill>
-              </a:defRPr>
-            </a:pPr>
-            <a:r>
-              <a:rPr sz="1425" b="1" i="0">
-                <a:solidFill>
-                  <a:srgbClr val="3333B2"/>
-                </a:solidFill>
-              </a:rPr>
-              <a:t>UNIQUE APPLICANT IDs</a:t>
-            </a:r>
-          </a:p>
-        </p:txBody>
-      </p:sp>
-      <p:sp>
-        <p:nvSpPr>
-          <p:cNvPr id="8" name="audit-value-1">
-            <a:extLst xmlns:a="http://schemas.openxmlformats.org/drawingml/2006/main">
-              <a:ext uri="{FF2B5EF4-FFF2-40B4-BE49-F238E27FC236}">
-                <a16:creationId xmlns:a16="http://schemas.microsoft.com/office/drawing/2014/main" id="{BEF0D11C-26CA-41C6-B15E-3BF201D99F17}"/>
-              </a:ext>
-            </a:extLst>
-          </p:cNvPr>
-          <p:cNvSpPr>
-            <a:spLocks xmlns:a="http://schemas.openxmlformats.org/drawingml/2006/main" noGrp="1"/>
-          </p:cNvSpPr>
-          <p:nvPr/>
-        </p:nvSpPr>
-        <p:spPr>
-          <a:xfrm xmlns:a="http://schemas.openxmlformats.org/drawingml/2006/main">
-            <a:off x="4095750" y="1876425"/>
-            <a:ext cx="6953250" cy="323850"/>
-          </a:xfrm>
-          <a:prstGeom xmlns:a="http://schemas.openxmlformats.org/drawingml/2006/main" prst="rect">
-            <a:avLst/>
-          </a:prstGeom>
-          <a:noFill xmlns:a="http://schemas.openxmlformats.org/drawingml/2006/main"/>
-          <a:ln xmlns:a="http://schemas.openxmlformats.org/drawingml/2006/main" w="0">
-            <a:noFill/>
-            <a:prstDash val="solid"/>
-          </a:ln>
-        </p:spPr>
-        <p:txBody>
-          <a:bodyPr xmlns:a="http://schemas.openxmlformats.org/drawingml/2006/main" anchor="t"/>
-          <a:lstStyle xmlns:a="http://schemas.openxmlformats.org/drawingml/2006/main"/>
-          <a:p xmlns:a="http://schemas.openxmlformats.org/drawingml/2006/main">
-            <a:pPr algn="l">
-              <a:defRPr sz="1725" b="0" i="0">
-                <a:solidFill>
-                  <a:srgbClr val="17171C"/>
-                </a:solidFill>
-              </a:defRPr>
-            </a:pPr>
-            <a:r>
-              <a:rPr sz="1725" b="0" i="0">
-                <a:solidFill>
-                  <a:srgbClr val="17171C"/>
-                </a:solidFill>
-              </a:rPr>
-              <a:t>3,000</a:t>
-            </a:r>
-          </a:p>
-        </p:txBody>
-      </p:sp>
-      <p:sp>
-        <p:nvSpPr>
-          <p:cNvPr id="9" name="rule-82-242">
-            <a:extLst xmlns:a="http://schemas.openxmlformats.org/drawingml/2006/main">
-              <a:ext uri="{FF2B5EF4-FFF2-40B4-BE49-F238E27FC236}">
-                <a16:creationId xmlns:a16="http://schemas.microsoft.com/office/drawing/2014/main" id="{BD807F7C-A916-474B-9AE2-41CEC4F71DDB}"/>
-              </a:ext>
-            </a:extLst>
-          </p:cNvPr>
-          <p:cNvSpPr>
-            <a:spLocks xmlns:a="http://schemas.openxmlformats.org/drawingml/2006/main" noGrp="1"/>
-          </p:cNvSpPr>
-          <p:nvPr/>
-        </p:nvSpPr>
-        <p:spPr>
-          <a:xfrm xmlns:a="http://schemas.openxmlformats.org/drawingml/2006/main">
-            <a:off x="781050" y="2305050"/>
-            <a:ext cx="10096500" cy="9525"/>
+          <p:cNvPr id="7" name="audit-axis-500">
+            <a:extLst xmlns:a="http://schemas.openxmlformats.org/drawingml/2006/main">
+              <a:ext uri="{FF2B5EF4-FFF2-40B4-BE49-F238E27FC236}">
+                <a16:creationId xmlns:a16="http://schemas.microsoft.com/office/drawing/2014/main" id="{09756BD6-0809-47AE-894E-90DA034CF7F8}"/>
+              </a:ext>
+            </a:extLst>
+          </p:cNvPr>
+          <p:cNvSpPr>
+            <a:spLocks xmlns:a="http://schemas.openxmlformats.org/drawingml/2006/main" noGrp="1"/>
+          </p:cNvSpPr>
+          <p:nvPr/>
+        </p:nvSpPr>
+        <p:spPr>
+          <a:xfrm xmlns:a="http://schemas.openxmlformats.org/drawingml/2006/main">
+            <a:off x="476250" y="4438650"/>
+            <a:ext cx="685800" cy="247650"/>
+          </a:xfrm>
+          <a:prstGeom xmlns:a="http://schemas.openxmlformats.org/drawingml/2006/main" prst="rect">
+            <a:avLst/>
+          </a:prstGeom>
+          <a:noFill xmlns:a="http://schemas.openxmlformats.org/drawingml/2006/main"/>
+          <a:ln xmlns:a="http://schemas.openxmlformats.org/drawingml/2006/main" w="0">
+            <a:noFill/>
+            <a:prstDash val="solid"/>
+          </a:ln>
+        </p:spPr>
+        <p:txBody>
+          <a:bodyPr xmlns:a="http://schemas.openxmlformats.org/drawingml/2006/main" anchor="t"/>
+          <a:lstStyle xmlns:a="http://schemas.openxmlformats.org/drawingml/2006/main"/>
+          <a:p xmlns:a="http://schemas.openxmlformats.org/drawingml/2006/main">
+            <a:pPr algn="r">
+              <a:defRPr sz="1050" b="0" i="0">
+                <a:solidFill>
+                  <a:srgbClr val="5C5C69"/>
+                </a:solidFill>
+              </a:defRPr>
+            </a:pPr>
+            <a:r>
+              <a:rPr sz="1050" b="0" i="0">
+                <a:solidFill>
+                  <a:srgbClr val="5C5C69"/>
+                </a:solidFill>
+              </a:rPr>
+              <a:t>500</a:t>
+            </a:r>
+          </a:p>
+        </p:txBody>
+      </p:sp>
+      <p:sp>
+        <p:nvSpPr>
+          <p:cNvPr id="8" name="rule-130-388">
+            <a:extLst xmlns:a="http://schemas.openxmlformats.org/drawingml/2006/main">
+              <a:ext uri="{FF2B5EF4-FFF2-40B4-BE49-F238E27FC236}">
+                <a16:creationId xmlns:a16="http://schemas.microsoft.com/office/drawing/2014/main" id="{AF7BA2F6-381F-4DEC-8A50-20B6280B4A7D}"/>
+              </a:ext>
+            </a:extLst>
+          </p:cNvPr>
+          <p:cNvSpPr>
+            <a:spLocks xmlns:a="http://schemas.openxmlformats.org/drawingml/2006/main" noGrp="1"/>
+          </p:cNvSpPr>
+          <p:nvPr/>
+        </p:nvSpPr>
+        <p:spPr>
+          <a:xfrm xmlns:a="http://schemas.openxmlformats.org/drawingml/2006/main">
+            <a:off x="1238250" y="3695700"/>
+            <a:ext cx="6667500" cy="9525"/>
           </a:xfrm>
           <a:prstGeom xmlns:a="http://schemas.openxmlformats.org/drawingml/2006/main" prst="rect">
             <a:avLst/>
@@ -16045,122 +17058,72 @@
       </p:sp>
       <p:sp>
         <p:nvSpPr>
-          <p:cNvPr id="10" name="audit-label-2">
-            <a:extLst xmlns:a="http://schemas.openxmlformats.org/drawingml/2006/main">
-              <a:ext uri="{FF2B5EF4-FFF2-40B4-BE49-F238E27FC236}">
-                <a16:creationId xmlns:a16="http://schemas.microsoft.com/office/drawing/2014/main" id="{E4809F79-5CCF-4DBD-8363-20C1CDA7C89C}"/>
-              </a:ext>
-            </a:extLst>
-          </p:cNvPr>
-          <p:cNvSpPr>
-            <a:spLocks xmlns:a="http://schemas.openxmlformats.org/drawingml/2006/main" noGrp="1"/>
-          </p:cNvSpPr>
-          <p:nvPr/>
-        </p:nvSpPr>
-        <p:spPr>
-          <a:xfrm xmlns:a="http://schemas.openxmlformats.org/drawingml/2006/main">
-            <a:off x="781050" y="2495550"/>
-            <a:ext cx="3143250" cy="323850"/>
-          </a:xfrm>
-          <a:prstGeom xmlns:a="http://schemas.openxmlformats.org/drawingml/2006/main" prst="rect">
-            <a:avLst/>
-          </a:prstGeom>
-          <a:noFill xmlns:a="http://schemas.openxmlformats.org/drawingml/2006/main"/>
-          <a:ln xmlns:a="http://schemas.openxmlformats.org/drawingml/2006/main" w="0">
-            <a:noFill/>
-            <a:prstDash val="solid"/>
-          </a:ln>
-        </p:spPr>
-        <p:txBody>
-          <a:bodyPr xmlns:a="http://schemas.openxmlformats.org/drawingml/2006/main" anchor="t"/>
-          <a:lstStyle xmlns:a="http://schemas.openxmlformats.org/drawingml/2006/main"/>
-          <a:p xmlns:a="http://schemas.openxmlformats.org/drawingml/2006/main">
-            <a:pPr algn="l">
-              <a:defRPr sz="1425" b="1" i="0">
-                <a:solidFill>
-                  <a:srgbClr val="3333B2"/>
-                </a:solidFill>
-              </a:defRPr>
-            </a:pPr>
-            <a:r>
-              <a:rPr sz="1425" b="1" i="0">
-                <a:solidFill>
-                  <a:srgbClr val="3333B2"/>
-                </a:solidFill>
-              </a:rPr>
-              <a:t>DUPLICATED IDs</a:t>
-            </a:r>
-          </a:p>
-        </p:txBody>
-      </p:sp>
-      <p:sp>
-        <p:nvSpPr>
-          <p:cNvPr id="11" name="audit-value-2">
-            <a:extLst xmlns:a="http://schemas.openxmlformats.org/drawingml/2006/main">
-              <a:ext uri="{FF2B5EF4-FFF2-40B4-BE49-F238E27FC236}">
-                <a16:creationId xmlns:a16="http://schemas.microsoft.com/office/drawing/2014/main" id="{FFAFD56E-8346-43F7-8BE8-2F60A30B475E}"/>
-              </a:ext>
-            </a:extLst>
-          </p:cNvPr>
-          <p:cNvSpPr>
-            <a:spLocks xmlns:a="http://schemas.openxmlformats.org/drawingml/2006/main" noGrp="1"/>
-          </p:cNvSpPr>
-          <p:nvPr/>
-        </p:nvSpPr>
-        <p:spPr>
-          <a:xfrm xmlns:a="http://schemas.openxmlformats.org/drawingml/2006/main">
-            <a:off x="4095750" y="2495550"/>
-            <a:ext cx="6953250" cy="323850"/>
-          </a:xfrm>
-          <a:prstGeom xmlns:a="http://schemas.openxmlformats.org/drawingml/2006/main" prst="rect">
-            <a:avLst/>
-          </a:prstGeom>
-          <a:noFill xmlns:a="http://schemas.openxmlformats.org/drawingml/2006/main"/>
-          <a:ln xmlns:a="http://schemas.openxmlformats.org/drawingml/2006/main" w="0">
-            <a:noFill/>
-            <a:prstDash val="solid"/>
-          </a:ln>
-        </p:spPr>
-        <p:txBody>
-          <a:bodyPr xmlns:a="http://schemas.openxmlformats.org/drawingml/2006/main" anchor="t"/>
-          <a:lstStyle xmlns:a="http://schemas.openxmlformats.org/drawingml/2006/main"/>
-          <a:p xmlns:a="http://schemas.openxmlformats.org/drawingml/2006/main">
-            <a:pPr algn="l">
-              <a:defRPr sz="1725" b="0" i="0">
-                <a:solidFill>
-                  <a:srgbClr val="17171C"/>
-                </a:solidFill>
-              </a:defRPr>
-            </a:pPr>
-            <a:r>
-              <a:rPr sz="1725" b="0" i="0">
-                <a:solidFill>
-                  <a:srgbClr val="17171C"/>
-                </a:solidFill>
-              </a:rPr>
-              <a:t>350</a:t>
-            </a:r>
-          </a:p>
-        </p:txBody>
-      </p:sp>
-      <p:sp>
-        <p:nvSpPr>
-          <p:cNvPr id="12" name="rule-82-307">
-            <a:extLst xmlns:a="http://schemas.openxmlformats.org/drawingml/2006/main">
-              <a:ext uri="{FF2B5EF4-FFF2-40B4-BE49-F238E27FC236}">
-                <a16:creationId xmlns:a16="http://schemas.microsoft.com/office/drawing/2014/main" id="{EF926225-395F-4EA4-A85C-0A050FCF213A}"/>
-              </a:ext>
-            </a:extLst>
-          </p:cNvPr>
-          <p:cNvSpPr>
-            <a:spLocks xmlns:a="http://schemas.openxmlformats.org/drawingml/2006/main" noGrp="1"/>
-          </p:cNvSpPr>
-          <p:nvPr/>
-        </p:nvSpPr>
-        <p:spPr>
-          <a:xfrm xmlns:a="http://schemas.openxmlformats.org/drawingml/2006/main">
-            <a:off x="781050" y="2924175"/>
-            <a:ext cx="10096500" cy="9525"/>
+          <p:cNvPr id="9" name="audit-axis-1000">
+            <a:extLst xmlns:a="http://schemas.openxmlformats.org/drawingml/2006/main">
+              <a:ext uri="{FF2B5EF4-FFF2-40B4-BE49-F238E27FC236}">
+                <a16:creationId xmlns:a16="http://schemas.microsoft.com/office/drawing/2014/main" id="{59508EE8-1058-464B-9861-36BA22B9003B}"/>
+              </a:ext>
+            </a:extLst>
+          </p:cNvPr>
+          <p:cNvSpPr>
+            <a:spLocks xmlns:a="http://schemas.openxmlformats.org/drawingml/2006/main" noGrp="1"/>
+          </p:cNvSpPr>
+          <p:nvPr/>
+        </p:nvSpPr>
+        <p:spPr>
+          <a:xfrm xmlns:a="http://schemas.openxmlformats.org/drawingml/2006/main">
+            <a:off x="476250" y="3571875"/>
+            <a:ext cx="685800" cy="247650"/>
+          </a:xfrm>
+          <a:prstGeom xmlns:a="http://schemas.openxmlformats.org/drawingml/2006/main" prst="rect">
+            <a:avLst/>
+          </a:prstGeom>
+          <a:noFill xmlns:a="http://schemas.openxmlformats.org/drawingml/2006/main"/>
+          <a:ln xmlns:a="http://schemas.openxmlformats.org/drawingml/2006/main" w="0">
+            <a:noFill/>
+            <a:prstDash val="solid"/>
+          </a:ln>
+        </p:spPr>
+        <p:txBody>
+          <a:bodyPr xmlns:a="http://schemas.openxmlformats.org/drawingml/2006/main" anchor="t"/>
+          <a:lstStyle xmlns:a="http://schemas.openxmlformats.org/drawingml/2006/main"/>
+          <a:p xmlns:a="http://schemas.openxmlformats.org/drawingml/2006/main">
+            <a:pPr algn="r">
+              <a:defRPr sz="1050" b="0" i="0">
+                <a:solidFill>
+                  <a:srgbClr val="5C5C69"/>
+                </a:solidFill>
+              </a:defRPr>
+            </a:pPr>
+            <a:r>
+              <a:rPr sz="1050" b="0" i="0">
+                <a:solidFill>
+                  <a:srgbClr val="5C5C69"/>
+                </a:solidFill>
+              </a:rPr>
+              <a:t>1,000</a:t>
+            </a:r>
+          </a:p>
+        </p:txBody>
+      </p:sp>
+      <p:sp>
+        <p:nvSpPr>
+          <p:cNvPr id="10" name="rule-130-297">
+            <a:extLst xmlns:a="http://schemas.openxmlformats.org/drawingml/2006/main">
+              <a:ext uri="{FF2B5EF4-FFF2-40B4-BE49-F238E27FC236}">
+                <a16:creationId xmlns:a16="http://schemas.microsoft.com/office/drawing/2014/main" id="{A3F644AF-7CE1-4E2D-A1D7-E2ABDF31919C}"/>
+              </a:ext>
+            </a:extLst>
+          </p:cNvPr>
+          <p:cNvSpPr>
+            <a:spLocks xmlns:a="http://schemas.openxmlformats.org/drawingml/2006/main" noGrp="1"/>
+          </p:cNvSpPr>
+          <p:nvPr/>
+        </p:nvSpPr>
+        <p:spPr>
+          <a:xfrm xmlns:a="http://schemas.openxmlformats.org/drawingml/2006/main">
+            <a:off x="1238250" y="2828925"/>
+            <a:ext cx="6667500" cy="9525"/>
           </a:xfrm>
           <a:prstGeom xmlns:a="http://schemas.openxmlformats.org/drawingml/2006/main" prst="rect">
             <a:avLst/>
@@ -16178,122 +17141,72 @@
       </p:sp>
       <p:sp>
         <p:nvSpPr>
-          <p:cNvPr id="13" name="audit-label-3">
-            <a:extLst xmlns:a="http://schemas.openxmlformats.org/drawingml/2006/main">
-              <a:ext uri="{FF2B5EF4-FFF2-40B4-BE49-F238E27FC236}">
-                <a16:creationId xmlns:a16="http://schemas.microsoft.com/office/drawing/2014/main" id="{0EF495CC-CCA5-4C26-947A-75DB479D0937}"/>
-              </a:ext>
-            </a:extLst>
-          </p:cNvPr>
-          <p:cNvSpPr>
-            <a:spLocks xmlns:a="http://schemas.openxmlformats.org/drawingml/2006/main" noGrp="1"/>
-          </p:cNvSpPr>
-          <p:nvPr/>
-        </p:nvSpPr>
-        <p:spPr>
-          <a:xfrm xmlns:a="http://schemas.openxmlformats.org/drawingml/2006/main">
-            <a:off x="781050" y="3114675"/>
-            <a:ext cx="3143250" cy="323850"/>
-          </a:xfrm>
-          <a:prstGeom xmlns:a="http://schemas.openxmlformats.org/drawingml/2006/main" prst="rect">
-            <a:avLst/>
-          </a:prstGeom>
-          <a:noFill xmlns:a="http://schemas.openxmlformats.org/drawingml/2006/main"/>
-          <a:ln xmlns:a="http://schemas.openxmlformats.org/drawingml/2006/main" w="0">
-            <a:noFill/>
-            <a:prstDash val="solid"/>
-          </a:ln>
-        </p:spPr>
-        <p:txBody>
-          <a:bodyPr xmlns:a="http://schemas.openxmlformats.org/drawingml/2006/main" anchor="t"/>
-          <a:lstStyle xmlns:a="http://schemas.openxmlformats.org/drawingml/2006/main"/>
-          <a:p xmlns:a="http://schemas.openxmlformats.org/drawingml/2006/main">
-            <a:pPr algn="l">
-              <a:defRPr sz="1425" b="1" i="0">
-                <a:solidFill>
-                  <a:srgbClr val="3333B2"/>
-                </a:solidFill>
-              </a:defRPr>
-            </a:pPr>
-            <a:r>
-              <a:rPr sz="1425" b="1" i="0">
-                <a:solidFill>
-                  <a:srgbClr val="3333B2"/>
-                </a:solidFill>
-              </a:rPr>
-              <a:t>EXCESS ROWS</a:t>
-            </a:r>
-          </a:p>
-        </p:txBody>
-      </p:sp>
-      <p:sp>
-        <p:nvSpPr>
-          <p:cNvPr id="14" name="audit-value-3">
-            <a:extLst xmlns:a="http://schemas.openxmlformats.org/drawingml/2006/main">
-              <a:ext uri="{FF2B5EF4-FFF2-40B4-BE49-F238E27FC236}">
-                <a16:creationId xmlns:a16="http://schemas.microsoft.com/office/drawing/2014/main" id="{D322C4C8-CBA9-4CE8-B1E3-12F6D1915418}"/>
-              </a:ext>
-            </a:extLst>
-          </p:cNvPr>
-          <p:cNvSpPr>
-            <a:spLocks xmlns:a="http://schemas.openxmlformats.org/drawingml/2006/main" noGrp="1"/>
-          </p:cNvSpPr>
-          <p:nvPr/>
-        </p:nvSpPr>
-        <p:spPr>
-          <a:xfrm xmlns:a="http://schemas.openxmlformats.org/drawingml/2006/main">
-            <a:off x="4095750" y="3114675"/>
-            <a:ext cx="6953250" cy="323850"/>
-          </a:xfrm>
-          <a:prstGeom xmlns:a="http://schemas.openxmlformats.org/drawingml/2006/main" prst="rect">
-            <a:avLst/>
-          </a:prstGeom>
-          <a:noFill xmlns:a="http://schemas.openxmlformats.org/drawingml/2006/main"/>
-          <a:ln xmlns:a="http://schemas.openxmlformats.org/drawingml/2006/main" w="0">
-            <a:noFill/>
-            <a:prstDash val="solid"/>
-          </a:ln>
-        </p:spPr>
-        <p:txBody>
-          <a:bodyPr xmlns:a="http://schemas.openxmlformats.org/drawingml/2006/main" anchor="t"/>
-          <a:lstStyle xmlns:a="http://schemas.openxmlformats.org/drawingml/2006/main"/>
-          <a:p xmlns:a="http://schemas.openxmlformats.org/drawingml/2006/main">
-            <a:pPr algn="l">
-              <a:defRPr sz="1725" b="0" i="0">
-                <a:solidFill>
-                  <a:srgbClr val="17171C"/>
-                </a:solidFill>
-              </a:defRPr>
-            </a:pPr>
-            <a:r>
-              <a:rPr sz="1725" b="0" i="0">
-                <a:solidFill>
-                  <a:srgbClr val="17171C"/>
-                </a:solidFill>
-              </a:rPr>
-              <a:t>430</a:t>
-            </a:r>
-          </a:p>
-        </p:txBody>
-      </p:sp>
-      <p:sp>
-        <p:nvSpPr>
-          <p:cNvPr id="15" name="rule-82-372">
-            <a:extLst xmlns:a="http://schemas.openxmlformats.org/drawingml/2006/main">
-              <a:ext uri="{FF2B5EF4-FFF2-40B4-BE49-F238E27FC236}">
-                <a16:creationId xmlns:a16="http://schemas.microsoft.com/office/drawing/2014/main" id="{273723CD-94B2-46A1-904B-2265FC0F4E8F}"/>
-              </a:ext>
-            </a:extLst>
-          </p:cNvPr>
-          <p:cNvSpPr>
-            <a:spLocks xmlns:a="http://schemas.openxmlformats.org/drawingml/2006/main" noGrp="1"/>
-          </p:cNvSpPr>
-          <p:nvPr/>
-        </p:nvSpPr>
-        <p:spPr>
-          <a:xfrm xmlns:a="http://schemas.openxmlformats.org/drawingml/2006/main">
-            <a:off x="781050" y="3543300"/>
-            <a:ext cx="10096500" cy="9525"/>
+          <p:cNvPr id="11" name="audit-axis-1500">
+            <a:extLst xmlns:a="http://schemas.openxmlformats.org/drawingml/2006/main">
+              <a:ext uri="{FF2B5EF4-FFF2-40B4-BE49-F238E27FC236}">
+                <a16:creationId xmlns:a16="http://schemas.microsoft.com/office/drawing/2014/main" id="{7E51A1A3-FE4F-49F3-AB82-C8BF66221794}"/>
+              </a:ext>
+            </a:extLst>
+          </p:cNvPr>
+          <p:cNvSpPr>
+            <a:spLocks xmlns:a="http://schemas.openxmlformats.org/drawingml/2006/main" noGrp="1"/>
+          </p:cNvSpPr>
+          <p:nvPr/>
+        </p:nvSpPr>
+        <p:spPr>
+          <a:xfrm xmlns:a="http://schemas.openxmlformats.org/drawingml/2006/main">
+            <a:off x="476250" y="2705100"/>
+            <a:ext cx="685800" cy="247650"/>
+          </a:xfrm>
+          <a:prstGeom xmlns:a="http://schemas.openxmlformats.org/drawingml/2006/main" prst="rect">
+            <a:avLst/>
+          </a:prstGeom>
+          <a:noFill xmlns:a="http://schemas.openxmlformats.org/drawingml/2006/main"/>
+          <a:ln xmlns:a="http://schemas.openxmlformats.org/drawingml/2006/main" w="0">
+            <a:noFill/>
+            <a:prstDash val="solid"/>
+          </a:ln>
+        </p:spPr>
+        <p:txBody>
+          <a:bodyPr xmlns:a="http://schemas.openxmlformats.org/drawingml/2006/main" anchor="t"/>
+          <a:lstStyle xmlns:a="http://schemas.openxmlformats.org/drawingml/2006/main"/>
+          <a:p xmlns:a="http://schemas.openxmlformats.org/drawingml/2006/main">
+            <a:pPr algn="r">
+              <a:defRPr sz="1050" b="0" i="0">
+                <a:solidFill>
+                  <a:srgbClr val="5C5C69"/>
+                </a:solidFill>
+              </a:defRPr>
+            </a:pPr>
+            <a:r>
+              <a:rPr sz="1050" b="0" i="0">
+                <a:solidFill>
+                  <a:srgbClr val="5C5C69"/>
+                </a:solidFill>
+              </a:rPr>
+              <a:t>1,500</a:t>
+            </a:r>
+          </a:p>
+        </p:txBody>
+      </p:sp>
+      <p:sp>
+        <p:nvSpPr>
+          <p:cNvPr id="12" name="rule-130-206">
+            <a:extLst xmlns:a="http://schemas.openxmlformats.org/drawingml/2006/main">
+              <a:ext uri="{FF2B5EF4-FFF2-40B4-BE49-F238E27FC236}">
+                <a16:creationId xmlns:a16="http://schemas.microsoft.com/office/drawing/2014/main" id="{A1C003C6-656F-4B4E-A49A-6E519BB1EB21}"/>
+              </a:ext>
+            </a:extLst>
+          </p:cNvPr>
+          <p:cNvSpPr>
+            <a:spLocks xmlns:a="http://schemas.openxmlformats.org/drawingml/2006/main" noGrp="1"/>
+          </p:cNvSpPr>
+          <p:nvPr/>
+        </p:nvSpPr>
+        <p:spPr>
+          <a:xfrm xmlns:a="http://schemas.openxmlformats.org/drawingml/2006/main">
+            <a:off x="1238250" y="1962150"/>
+            <a:ext cx="6667500" cy="9525"/>
           </a:xfrm>
           <a:prstGeom xmlns:a="http://schemas.openxmlformats.org/drawingml/2006/main" prst="rect">
             <a:avLst/>
@@ -16311,132 +17224,514 @@
       </p:sp>
       <p:sp>
         <p:nvSpPr>
-          <p:cNvPr id="16" name="audit-label-4">
-            <a:extLst xmlns:a="http://schemas.openxmlformats.org/drawingml/2006/main">
-              <a:ext uri="{FF2B5EF4-FFF2-40B4-BE49-F238E27FC236}">
-                <a16:creationId xmlns:a16="http://schemas.microsoft.com/office/drawing/2014/main" id="{987A2348-1ABC-4249-86C5-1E398CC3F136}"/>
-              </a:ext>
-            </a:extLst>
-          </p:cNvPr>
-          <p:cNvSpPr>
-            <a:spLocks xmlns:a="http://schemas.openxmlformats.org/drawingml/2006/main" noGrp="1"/>
-          </p:cNvSpPr>
-          <p:nvPr/>
-        </p:nvSpPr>
-        <p:spPr>
-          <a:xfrm xmlns:a="http://schemas.openxmlformats.org/drawingml/2006/main">
-            <a:off x="781050" y="3733800"/>
-            <a:ext cx="3143250" cy="323850"/>
-          </a:xfrm>
-          <a:prstGeom xmlns:a="http://schemas.openxmlformats.org/drawingml/2006/main" prst="rect">
-            <a:avLst/>
-          </a:prstGeom>
-          <a:noFill xmlns:a="http://schemas.openxmlformats.org/drawingml/2006/main"/>
-          <a:ln xmlns:a="http://schemas.openxmlformats.org/drawingml/2006/main" w="0">
-            <a:noFill/>
-            <a:prstDash val="solid"/>
-          </a:ln>
-        </p:spPr>
-        <p:txBody>
-          <a:bodyPr xmlns:a="http://schemas.openxmlformats.org/drawingml/2006/main" anchor="t"/>
-          <a:lstStyle xmlns:a="http://schemas.openxmlformats.org/drawingml/2006/main"/>
-          <a:p xmlns:a="http://schemas.openxmlformats.org/drawingml/2006/main">
-            <a:pPr algn="l">
-              <a:defRPr sz="1425" b="1" i="0">
+          <p:cNvPr id="13" name="audit-axis-2000">
+            <a:extLst xmlns:a="http://schemas.openxmlformats.org/drawingml/2006/main">
+              <a:ext uri="{FF2B5EF4-FFF2-40B4-BE49-F238E27FC236}">
+                <a16:creationId xmlns:a16="http://schemas.microsoft.com/office/drawing/2014/main" id="{A75A6827-0E0E-431C-A52B-73D4C0D5DF79}"/>
+              </a:ext>
+            </a:extLst>
+          </p:cNvPr>
+          <p:cNvSpPr>
+            <a:spLocks xmlns:a="http://schemas.openxmlformats.org/drawingml/2006/main" noGrp="1"/>
+          </p:cNvSpPr>
+          <p:nvPr/>
+        </p:nvSpPr>
+        <p:spPr>
+          <a:xfrm xmlns:a="http://schemas.openxmlformats.org/drawingml/2006/main">
+            <a:off x="476250" y="1838325"/>
+            <a:ext cx="685800" cy="247650"/>
+          </a:xfrm>
+          <a:prstGeom xmlns:a="http://schemas.openxmlformats.org/drawingml/2006/main" prst="rect">
+            <a:avLst/>
+          </a:prstGeom>
+          <a:noFill xmlns:a="http://schemas.openxmlformats.org/drawingml/2006/main"/>
+          <a:ln xmlns:a="http://schemas.openxmlformats.org/drawingml/2006/main" w="0">
+            <a:noFill/>
+            <a:prstDash val="solid"/>
+          </a:ln>
+        </p:spPr>
+        <p:txBody>
+          <a:bodyPr xmlns:a="http://schemas.openxmlformats.org/drawingml/2006/main" anchor="t"/>
+          <a:lstStyle xmlns:a="http://schemas.openxmlformats.org/drawingml/2006/main"/>
+          <a:p xmlns:a="http://schemas.openxmlformats.org/drawingml/2006/main">
+            <a:pPr algn="r">
+              <a:defRPr sz="1050" b="0" i="0">
+                <a:solidFill>
+                  <a:srgbClr val="5C5C69"/>
+                </a:solidFill>
+              </a:defRPr>
+            </a:pPr>
+            <a:r>
+              <a:rPr sz="1050" b="0" i="0">
+                <a:solidFill>
+                  <a:srgbClr val="5C5C69"/>
+                </a:solidFill>
+              </a:rPr>
+              <a:t>2,000</a:t>
+            </a:r>
+          </a:p>
+        </p:txBody>
+      </p:sp>
+      <p:sp>
+        <p:nvSpPr>
+          <p:cNvPr id="14" name="audit-control-rows">
+            <a:extLst xmlns:a="http://schemas.openxmlformats.org/drawingml/2006/main">
+              <a:ext uri="{FF2B5EF4-FFF2-40B4-BE49-F238E27FC236}">
+                <a16:creationId xmlns:a16="http://schemas.microsoft.com/office/drawing/2014/main" id="{FF62D58C-0FC4-4531-BBC2-CEEA3BC1FC3E}"/>
+              </a:ext>
+            </a:extLst>
+          </p:cNvPr>
+          <p:cNvSpPr>
+            <a:spLocks xmlns:a="http://schemas.openxmlformats.org/drawingml/2006/main" noGrp="1"/>
+          </p:cNvSpPr>
+          <p:nvPr/>
+        </p:nvSpPr>
+        <p:spPr>
+          <a:xfrm xmlns:a="http://schemas.openxmlformats.org/drawingml/2006/main">
+            <a:off x="1952625" y="2828925"/>
+            <a:ext cx="838200" cy="2600325"/>
+          </a:xfrm>
+          <a:prstGeom xmlns:a="http://schemas.openxmlformats.org/drawingml/2006/main" prst="rect">
+            <a:avLst/>
+          </a:prstGeom>
+          <a:solidFill xmlns:a="http://schemas.openxmlformats.org/drawingml/2006/main">
+            <a:srgbClr val="3333B2"/>
+          </a:solidFill>
+          <a:ln xmlns:a="http://schemas.openxmlformats.org/drawingml/2006/main" w="0">
+            <a:solidFill>
+              <a:srgbClr val="3333B2"/>
+            </a:solidFill>
+            <a:prstDash val="solid"/>
+          </a:ln>
+        </p:spPr>
+      </p:sp>
+      <p:sp>
+        <p:nvSpPr>
+          <p:cNvPr id="15" name="audit-control-applicants">
+            <a:extLst xmlns:a="http://schemas.openxmlformats.org/drawingml/2006/main">
+              <a:ext uri="{FF2B5EF4-FFF2-40B4-BE49-F238E27FC236}">
+                <a16:creationId xmlns:a16="http://schemas.microsoft.com/office/drawing/2014/main" id="{3C500F9F-34F3-4995-877D-ABBA4AC85561}"/>
+              </a:ext>
+            </a:extLst>
+          </p:cNvPr>
+          <p:cNvSpPr>
+            <a:spLocks xmlns:a="http://schemas.openxmlformats.org/drawingml/2006/main" noGrp="1"/>
+          </p:cNvSpPr>
+          <p:nvPr/>
+        </p:nvSpPr>
+        <p:spPr>
+          <a:xfrm xmlns:a="http://schemas.openxmlformats.org/drawingml/2006/main">
+            <a:off x="2886075" y="2828925"/>
+            <a:ext cx="838200" cy="2600325"/>
+          </a:xfrm>
+          <a:prstGeom xmlns:a="http://schemas.openxmlformats.org/drawingml/2006/main" prst="rect">
+            <a:avLst/>
+          </a:prstGeom>
+          <a:solidFill xmlns:a="http://schemas.openxmlformats.org/drawingml/2006/main">
+            <a:srgbClr val="5C5C69"/>
+          </a:solidFill>
+          <a:ln xmlns:a="http://schemas.openxmlformats.org/drawingml/2006/main" w="0">
+            <a:solidFill>
+              <a:srgbClr val="5C5C69"/>
+            </a:solidFill>
+            <a:prstDash val="solid"/>
+          </a:ln>
+        </p:spPr>
+      </p:sp>
+      <p:sp>
+        <p:nvSpPr>
+          <p:cNvPr id="16" name="audit-offered-rows">
+            <a:extLst xmlns:a="http://schemas.openxmlformats.org/drawingml/2006/main">
+              <a:ext uri="{FF2B5EF4-FFF2-40B4-BE49-F238E27FC236}">
+                <a16:creationId xmlns:a16="http://schemas.microsoft.com/office/drawing/2014/main" id="{DFFC6A37-1CAC-411D-9E03-8ED4AA11F637}"/>
+              </a:ext>
+            </a:extLst>
+          </p:cNvPr>
+          <p:cNvSpPr>
+            <a:spLocks xmlns:a="http://schemas.openxmlformats.org/drawingml/2006/main" noGrp="1"/>
+          </p:cNvSpPr>
+          <p:nvPr/>
+        </p:nvSpPr>
+        <p:spPr>
+          <a:xfrm xmlns:a="http://schemas.openxmlformats.org/drawingml/2006/main">
+            <a:off x="4905375" y="2085975"/>
+            <a:ext cx="838200" cy="3343275"/>
+          </a:xfrm>
+          <a:prstGeom xmlns:a="http://schemas.openxmlformats.org/drawingml/2006/main" prst="rect">
+            <a:avLst/>
+          </a:prstGeom>
+          <a:solidFill xmlns:a="http://schemas.openxmlformats.org/drawingml/2006/main">
+            <a:srgbClr val="3333B2"/>
+          </a:solidFill>
+          <a:ln xmlns:a="http://schemas.openxmlformats.org/drawingml/2006/main" w="0">
+            <a:solidFill>
+              <a:srgbClr val="3333B2"/>
+            </a:solidFill>
+            <a:prstDash val="solid"/>
+          </a:ln>
+        </p:spPr>
+      </p:sp>
+      <p:sp>
+        <p:nvSpPr>
+          <p:cNvPr id="17" name="audit-offered-applicants">
+            <a:extLst xmlns:a="http://schemas.openxmlformats.org/drawingml/2006/main">
+              <a:ext uri="{FF2B5EF4-FFF2-40B4-BE49-F238E27FC236}">
+                <a16:creationId xmlns:a16="http://schemas.microsoft.com/office/drawing/2014/main" id="{B7BB1EEE-A1A6-460D-953B-EB75D56B6CF5}"/>
+              </a:ext>
+            </a:extLst>
+          </p:cNvPr>
+          <p:cNvSpPr>
+            <a:spLocks xmlns:a="http://schemas.openxmlformats.org/drawingml/2006/main" noGrp="1"/>
+          </p:cNvSpPr>
+          <p:nvPr/>
+        </p:nvSpPr>
+        <p:spPr>
+          <a:xfrm xmlns:a="http://schemas.openxmlformats.org/drawingml/2006/main">
+            <a:off x="5838825" y="2828925"/>
+            <a:ext cx="838200" cy="2600325"/>
+          </a:xfrm>
+          <a:prstGeom xmlns:a="http://schemas.openxmlformats.org/drawingml/2006/main" prst="rect">
+            <a:avLst/>
+          </a:prstGeom>
+          <a:solidFill xmlns:a="http://schemas.openxmlformats.org/drawingml/2006/main">
+            <a:srgbClr val="5C5C69"/>
+          </a:solidFill>
+          <a:ln xmlns:a="http://schemas.openxmlformats.org/drawingml/2006/main" w="0">
+            <a:solidFill>
+              <a:srgbClr val="5C5C69"/>
+            </a:solidFill>
+            <a:prstDash val="solid"/>
+          </a:ln>
+        </p:spPr>
+      </p:sp>
+      <p:sp>
+        <p:nvSpPr>
+          <p:cNvPr id="18" name="audit-label-cr">
+            <a:extLst xmlns:a="http://schemas.openxmlformats.org/drawingml/2006/main">
+              <a:ext uri="{FF2B5EF4-FFF2-40B4-BE49-F238E27FC236}">
+                <a16:creationId xmlns:a16="http://schemas.microsoft.com/office/drawing/2014/main" id="{38DAF48D-E5B2-4839-AC18-7E0FDC6EAE2B}"/>
+              </a:ext>
+            </a:extLst>
+          </p:cNvPr>
+          <p:cNvSpPr>
+            <a:spLocks xmlns:a="http://schemas.openxmlformats.org/drawingml/2006/main" noGrp="1"/>
+          </p:cNvSpPr>
+          <p:nvPr/>
+        </p:nvSpPr>
+        <p:spPr>
+          <a:xfrm xmlns:a="http://schemas.openxmlformats.org/drawingml/2006/main">
+            <a:off x="1847850" y="2505075"/>
+            <a:ext cx="1047750" cy="285750"/>
+          </a:xfrm>
+          <a:prstGeom xmlns:a="http://schemas.openxmlformats.org/drawingml/2006/main" prst="rect">
+            <a:avLst/>
+          </a:prstGeom>
+          <a:noFill xmlns:a="http://schemas.openxmlformats.org/drawingml/2006/main"/>
+          <a:ln xmlns:a="http://schemas.openxmlformats.org/drawingml/2006/main" w="0">
+            <a:noFill/>
+            <a:prstDash val="solid"/>
+          </a:ln>
+        </p:spPr>
+        <p:txBody>
+          <a:bodyPr xmlns:a="http://schemas.openxmlformats.org/drawingml/2006/main" anchor="t"/>
+          <a:lstStyle xmlns:a="http://schemas.openxmlformats.org/drawingml/2006/main"/>
+          <a:p xmlns:a="http://schemas.openxmlformats.org/drawingml/2006/main">
+            <a:pPr algn="ctr">
+              <a:defRPr sz="1350" b="1" i="0">
+                <a:solidFill>
+                  <a:srgbClr val="17171C"/>
+                </a:solidFill>
+              </a:defRPr>
+            </a:pPr>
+            <a:r>
+              <a:rPr sz="1350" b="1" i="0">
+                <a:solidFill>
+                  <a:srgbClr val="17171C"/>
+                </a:solidFill>
+              </a:rPr>
+              <a:t>1,500</a:t>
+            </a:r>
+          </a:p>
+        </p:txBody>
+      </p:sp>
+      <p:sp>
+        <p:nvSpPr>
+          <p:cNvPr id="19" name="audit-label-ca">
+            <a:extLst xmlns:a="http://schemas.openxmlformats.org/drawingml/2006/main">
+              <a:ext uri="{FF2B5EF4-FFF2-40B4-BE49-F238E27FC236}">
+                <a16:creationId xmlns:a16="http://schemas.microsoft.com/office/drawing/2014/main" id="{571A4C24-3A41-4657-A950-43E19F8BCCC5}"/>
+              </a:ext>
+            </a:extLst>
+          </p:cNvPr>
+          <p:cNvSpPr>
+            <a:spLocks xmlns:a="http://schemas.openxmlformats.org/drawingml/2006/main" noGrp="1"/>
+          </p:cNvSpPr>
+          <p:nvPr/>
+        </p:nvSpPr>
+        <p:spPr>
+          <a:xfrm xmlns:a="http://schemas.openxmlformats.org/drawingml/2006/main">
+            <a:off x="2781300" y="2505075"/>
+            <a:ext cx="1047750" cy="285750"/>
+          </a:xfrm>
+          <a:prstGeom xmlns:a="http://schemas.openxmlformats.org/drawingml/2006/main" prst="rect">
+            <a:avLst/>
+          </a:prstGeom>
+          <a:noFill xmlns:a="http://schemas.openxmlformats.org/drawingml/2006/main"/>
+          <a:ln xmlns:a="http://schemas.openxmlformats.org/drawingml/2006/main" w="0">
+            <a:noFill/>
+            <a:prstDash val="solid"/>
+          </a:ln>
+        </p:spPr>
+        <p:txBody>
+          <a:bodyPr xmlns:a="http://schemas.openxmlformats.org/drawingml/2006/main" anchor="t"/>
+          <a:lstStyle xmlns:a="http://schemas.openxmlformats.org/drawingml/2006/main"/>
+          <a:p xmlns:a="http://schemas.openxmlformats.org/drawingml/2006/main">
+            <a:pPr algn="ctr">
+              <a:defRPr sz="1350" b="1" i="0">
+                <a:solidFill>
+                  <a:srgbClr val="17171C"/>
+                </a:solidFill>
+              </a:defRPr>
+            </a:pPr>
+            <a:r>
+              <a:rPr sz="1350" b="1" i="0">
+                <a:solidFill>
+                  <a:srgbClr val="17171C"/>
+                </a:solidFill>
+              </a:rPr>
+              <a:t>1,500</a:t>
+            </a:r>
+          </a:p>
+        </p:txBody>
+      </p:sp>
+      <p:sp>
+        <p:nvSpPr>
+          <p:cNvPr id="20" name="audit-label-or">
+            <a:extLst xmlns:a="http://schemas.openxmlformats.org/drawingml/2006/main">
+              <a:ext uri="{FF2B5EF4-FFF2-40B4-BE49-F238E27FC236}">
+                <a16:creationId xmlns:a16="http://schemas.microsoft.com/office/drawing/2014/main" id="{9EE61B69-A932-4931-892B-6558CFC9EB1D}"/>
+              </a:ext>
+            </a:extLst>
+          </p:cNvPr>
+          <p:cNvSpPr>
+            <a:spLocks xmlns:a="http://schemas.openxmlformats.org/drawingml/2006/main" noGrp="1"/>
+          </p:cNvSpPr>
+          <p:nvPr/>
+        </p:nvSpPr>
+        <p:spPr>
+          <a:xfrm xmlns:a="http://schemas.openxmlformats.org/drawingml/2006/main">
+            <a:off x="4800600" y="1762125"/>
+            <a:ext cx="1047750" cy="285750"/>
+          </a:xfrm>
+          <a:prstGeom xmlns:a="http://schemas.openxmlformats.org/drawingml/2006/main" prst="rect">
+            <a:avLst/>
+          </a:prstGeom>
+          <a:noFill xmlns:a="http://schemas.openxmlformats.org/drawingml/2006/main"/>
+          <a:ln xmlns:a="http://schemas.openxmlformats.org/drawingml/2006/main" w="0">
+            <a:noFill/>
+            <a:prstDash val="solid"/>
+          </a:ln>
+        </p:spPr>
+        <p:txBody>
+          <a:bodyPr xmlns:a="http://schemas.openxmlformats.org/drawingml/2006/main" anchor="t"/>
+          <a:lstStyle xmlns:a="http://schemas.openxmlformats.org/drawingml/2006/main"/>
+          <a:p xmlns:a="http://schemas.openxmlformats.org/drawingml/2006/main">
+            <a:pPr algn="ctr">
+              <a:defRPr sz="1350" b="1" i="0">
                 <a:solidFill>
                   <a:srgbClr val="3333B2"/>
                 </a:solidFill>
               </a:defRPr>
             </a:pPr>
             <a:r>
-              <a:rPr sz="1425" b="1" i="0">
+              <a:rPr sz="1350" b="1" i="0">
                 <a:solidFill>
                   <a:srgbClr val="3333B2"/>
                 </a:solidFill>
               </a:rPr>
-              <a:t>DUPLICATION PATTERN</a:t>
-            </a:r>
-          </a:p>
-        </p:txBody>
-      </p:sp>
-      <p:sp>
-        <p:nvSpPr>
-          <p:cNvPr id="17" name="audit-value-4">
-            <a:extLst xmlns:a="http://schemas.openxmlformats.org/drawingml/2006/main">
-              <a:ext uri="{FF2B5EF4-FFF2-40B4-BE49-F238E27FC236}">
-                <a16:creationId xmlns:a16="http://schemas.microsoft.com/office/drawing/2014/main" id="{E3BBC866-F731-4750-B3B8-E1B99F1A7CD0}"/>
-              </a:ext>
-            </a:extLst>
-          </p:cNvPr>
-          <p:cNvSpPr>
-            <a:spLocks xmlns:a="http://schemas.openxmlformats.org/drawingml/2006/main" noGrp="1"/>
-          </p:cNvSpPr>
-          <p:nvPr/>
-        </p:nvSpPr>
-        <p:spPr>
-          <a:xfrm xmlns:a="http://schemas.openxmlformats.org/drawingml/2006/main">
-            <a:off x="4095750" y="3733800"/>
-            <a:ext cx="6953250" cy="323850"/>
-          </a:xfrm>
-          <a:prstGeom xmlns:a="http://schemas.openxmlformats.org/drawingml/2006/main" prst="rect">
-            <a:avLst/>
-          </a:prstGeom>
-          <a:noFill xmlns:a="http://schemas.openxmlformats.org/drawingml/2006/main"/>
-          <a:ln xmlns:a="http://schemas.openxmlformats.org/drawingml/2006/main" w="0">
-            <a:noFill/>
-            <a:prstDash val="solid"/>
-          </a:ln>
-        </p:spPr>
-        <p:txBody>
-          <a:bodyPr xmlns:a="http://schemas.openxmlformats.org/drawingml/2006/main" anchor="t"/>
-          <a:lstStyle xmlns:a="http://schemas.openxmlformats.org/drawingml/2006/main"/>
-          <a:p xmlns:a="http://schemas.openxmlformats.org/drawingml/2006/main">
-            <a:pPr algn="l">
-              <a:defRPr sz="1725" b="0" i="0">
+              <a:t>1,930</a:t>
+            </a:r>
+          </a:p>
+        </p:txBody>
+      </p:sp>
+      <p:sp>
+        <p:nvSpPr>
+          <p:cNvPr id="21" name="audit-label-oa">
+            <a:extLst xmlns:a="http://schemas.openxmlformats.org/drawingml/2006/main">
+              <a:ext uri="{FF2B5EF4-FFF2-40B4-BE49-F238E27FC236}">
+                <a16:creationId xmlns:a16="http://schemas.microsoft.com/office/drawing/2014/main" id="{089AE173-2564-4A6C-9757-08B82B2B4DCC}"/>
+              </a:ext>
+            </a:extLst>
+          </p:cNvPr>
+          <p:cNvSpPr>
+            <a:spLocks xmlns:a="http://schemas.openxmlformats.org/drawingml/2006/main" noGrp="1"/>
+          </p:cNvSpPr>
+          <p:nvPr/>
+        </p:nvSpPr>
+        <p:spPr>
+          <a:xfrm xmlns:a="http://schemas.openxmlformats.org/drawingml/2006/main">
+            <a:off x="5734050" y="2505075"/>
+            <a:ext cx="1047750" cy="285750"/>
+          </a:xfrm>
+          <a:prstGeom xmlns:a="http://schemas.openxmlformats.org/drawingml/2006/main" prst="rect">
+            <a:avLst/>
+          </a:prstGeom>
+          <a:noFill xmlns:a="http://schemas.openxmlformats.org/drawingml/2006/main"/>
+          <a:ln xmlns:a="http://schemas.openxmlformats.org/drawingml/2006/main" w="0">
+            <a:noFill/>
+            <a:prstDash val="solid"/>
+          </a:ln>
+        </p:spPr>
+        <p:txBody>
+          <a:bodyPr xmlns:a="http://schemas.openxmlformats.org/drawingml/2006/main" anchor="t"/>
+          <a:lstStyle xmlns:a="http://schemas.openxmlformats.org/drawingml/2006/main"/>
+          <a:p xmlns:a="http://schemas.openxmlformats.org/drawingml/2006/main">
+            <a:pPr algn="ctr">
+              <a:defRPr sz="1350" b="1" i="0">
                 <a:solidFill>
                   <a:srgbClr val="17171C"/>
                 </a:solidFill>
               </a:defRPr>
             </a:pPr>
             <a:r>
-              <a:rPr sz="1725" b="0" i="0">
+              <a:rPr sz="1350" b="1" i="0">
                 <a:solidFill>
                   <a:srgbClr val="17171C"/>
                 </a:solidFill>
               </a:rPr>
-              <a:t>All duplicated IDs are offered applicants</a:t>
-            </a:r>
-          </a:p>
-        </p:txBody>
-      </p:sp>
-      <p:sp>
-        <p:nvSpPr>
-          <p:cNvPr id="18" name="rule-82-437">
-            <a:extLst xmlns:a="http://schemas.openxmlformats.org/drawingml/2006/main">
-              <a:ext uri="{FF2B5EF4-FFF2-40B4-BE49-F238E27FC236}">
-                <a16:creationId xmlns:a16="http://schemas.microsoft.com/office/drawing/2014/main" id="{BAEF53DA-7DCE-4D3B-B3F8-9374AF28B299}"/>
-              </a:ext>
-            </a:extLst>
-          </p:cNvPr>
-          <p:cNvSpPr>
-            <a:spLocks xmlns:a="http://schemas.openxmlformats.org/drawingml/2006/main" noGrp="1"/>
-          </p:cNvSpPr>
-          <p:nvPr/>
-        </p:nvSpPr>
-        <p:spPr>
-          <a:xfrm xmlns:a="http://schemas.openxmlformats.org/drawingml/2006/main">
-            <a:off x="781050" y="4162425"/>
-            <a:ext cx="10096500" cy="9525"/>
+              <a:t>1,500</a:t>
+            </a:r>
+          </a:p>
+        </p:txBody>
+      </p:sp>
+      <p:sp>
+        <p:nvSpPr>
+          <p:cNvPr id="22" name="audit-control-category">
+            <a:extLst xmlns:a="http://schemas.openxmlformats.org/drawingml/2006/main">
+              <a:ext uri="{FF2B5EF4-FFF2-40B4-BE49-F238E27FC236}">
+                <a16:creationId xmlns:a16="http://schemas.microsoft.com/office/drawing/2014/main" id="{26408633-93D7-42CD-BADC-23325DF8B70F}"/>
+              </a:ext>
+            </a:extLst>
+          </p:cNvPr>
+          <p:cNvSpPr>
+            <a:spLocks xmlns:a="http://schemas.openxmlformats.org/drawingml/2006/main" noGrp="1"/>
+          </p:cNvSpPr>
+          <p:nvPr/>
+        </p:nvSpPr>
+        <p:spPr>
+          <a:xfrm xmlns:a="http://schemas.openxmlformats.org/drawingml/2006/main">
+            <a:off x="1885950" y="5524500"/>
+            <a:ext cx="1905000" cy="304800"/>
+          </a:xfrm>
+          <a:prstGeom xmlns:a="http://schemas.openxmlformats.org/drawingml/2006/main" prst="rect">
+            <a:avLst/>
+          </a:prstGeom>
+          <a:noFill xmlns:a="http://schemas.openxmlformats.org/drawingml/2006/main"/>
+          <a:ln xmlns:a="http://schemas.openxmlformats.org/drawingml/2006/main" w="0">
+            <a:noFill/>
+            <a:prstDash val="solid"/>
+          </a:ln>
+        </p:spPr>
+        <p:txBody>
+          <a:bodyPr xmlns:a="http://schemas.openxmlformats.org/drawingml/2006/main" anchor="t"/>
+          <a:lstStyle xmlns:a="http://schemas.openxmlformats.org/drawingml/2006/main"/>
+          <a:p xmlns:a="http://schemas.openxmlformats.org/drawingml/2006/main">
+            <a:pPr algn="ctr">
+              <a:defRPr sz="1500" b="1" i="0">
+                <a:solidFill>
+                  <a:srgbClr val="17171C"/>
+                </a:solidFill>
+              </a:defRPr>
+            </a:pPr>
+            <a:r>
+              <a:rPr sz="1500" b="1" i="0">
+                <a:solidFill>
+                  <a:srgbClr val="17171C"/>
+                </a:solidFill>
+              </a:rPr>
+              <a:t>Control</a:t>
+            </a:r>
+          </a:p>
+        </p:txBody>
+      </p:sp>
+      <p:sp>
+        <p:nvSpPr>
+          <p:cNvPr id="23" name="audit-offered-category">
+            <a:extLst xmlns:a="http://schemas.openxmlformats.org/drawingml/2006/main">
+              <a:ext uri="{FF2B5EF4-FFF2-40B4-BE49-F238E27FC236}">
+                <a16:creationId xmlns:a16="http://schemas.microsoft.com/office/drawing/2014/main" id="{4D0DD109-8421-4A09-AF00-25E8557CEE6D}"/>
+              </a:ext>
+            </a:extLst>
+          </p:cNvPr>
+          <p:cNvSpPr>
+            <a:spLocks xmlns:a="http://schemas.openxmlformats.org/drawingml/2006/main" noGrp="1"/>
+          </p:cNvSpPr>
+          <p:nvPr/>
+        </p:nvSpPr>
+        <p:spPr>
+          <a:xfrm xmlns:a="http://schemas.openxmlformats.org/drawingml/2006/main">
+            <a:off x="4838700" y="5524500"/>
+            <a:ext cx="1905000" cy="304800"/>
+          </a:xfrm>
+          <a:prstGeom xmlns:a="http://schemas.openxmlformats.org/drawingml/2006/main" prst="rect">
+            <a:avLst/>
+          </a:prstGeom>
+          <a:noFill xmlns:a="http://schemas.openxmlformats.org/drawingml/2006/main"/>
+          <a:ln xmlns:a="http://schemas.openxmlformats.org/drawingml/2006/main" w="0">
+            <a:noFill/>
+            <a:prstDash val="solid"/>
+          </a:ln>
+        </p:spPr>
+        <p:txBody>
+          <a:bodyPr xmlns:a="http://schemas.openxmlformats.org/drawingml/2006/main" anchor="t"/>
+          <a:lstStyle xmlns:a="http://schemas.openxmlformats.org/drawingml/2006/main"/>
+          <a:p xmlns:a="http://schemas.openxmlformats.org/drawingml/2006/main">
+            <a:pPr algn="ctr">
+              <a:defRPr sz="1500" b="1" i="0">
+                <a:solidFill>
+                  <a:srgbClr val="17171C"/>
+                </a:solidFill>
+              </a:defRPr>
+            </a:pPr>
+            <a:r>
+              <a:rPr sz="1500" b="1" i="0">
+                <a:solidFill>
+                  <a:srgbClr val="17171C"/>
+                </a:solidFill>
+              </a:rPr>
+              <a:t>Offered</a:t>
+            </a:r>
+          </a:p>
+        </p:txBody>
+      </p:sp>
+      <p:sp>
+        <p:nvSpPr>
+          <p:cNvPr id="24" name="audit-legend-rows">
+            <a:extLst xmlns:a="http://schemas.openxmlformats.org/drawingml/2006/main">
+              <a:ext uri="{FF2B5EF4-FFF2-40B4-BE49-F238E27FC236}">
+                <a16:creationId xmlns:a16="http://schemas.microsoft.com/office/drawing/2014/main" id="{6D23E198-A293-43AA-BDC9-80FAC4223863}"/>
+              </a:ext>
+            </a:extLst>
+          </p:cNvPr>
+          <p:cNvSpPr>
+            <a:spLocks xmlns:a="http://schemas.openxmlformats.org/drawingml/2006/main" noGrp="1"/>
+          </p:cNvSpPr>
+          <p:nvPr/>
+        </p:nvSpPr>
+        <p:spPr>
+          <a:xfrm xmlns:a="http://schemas.openxmlformats.org/drawingml/2006/main">
+            <a:off x="1952625" y="5905500"/>
+            <a:ext cx="190500" cy="190500"/>
           </a:xfrm>
           <a:prstGeom xmlns:a="http://schemas.openxmlformats.org/drawingml/2006/main" prst="rect">
             <a:avLst/>
           </a:prstGeom>
           <a:solidFill xmlns:a="http://schemas.openxmlformats.org/drawingml/2006/main">
-            <a:srgbClr val="D9D9E6"/>
+            <a:srgbClr val="3333B2"/>
           </a:solidFill>
           <a:ln xmlns:a="http://schemas.openxmlformats.org/drawingml/2006/main" w="0">
             <a:solidFill>
-              <a:srgbClr val="D9D9E6"/>
+              <a:srgbClr val="3333B2"/>
             </a:solidFill>
             <a:prstDash val="solid"/>
           </a:ln>
@@ -16444,132 +17739,82 @@
       </p:sp>
       <p:sp>
         <p:nvSpPr>
-          <p:cNvPr id="19" name="audit-label-5">
-            <a:extLst xmlns:a="http://schemas.openxmlformats.org/drawingml/2006/main">
-              <a:ext uri="{FF2B5EF4-FFF2-40B4-BE49-F238E27FC236}">
-                <a16:creationId xmlns:a16="http://schemas.microsoft.com/office/drawing/2014/main" id="{4B676D90-8921-436E-B19C-5CFD4A8D6902}"/>
-              </a:ext>
-            </a:extLst>
-          </p:cNvPr>
-          <p:cNvSpPr>
-            <a:spLocks xmlns:a="http://schemas.openxmlformats.org/drawingml/2006/main" noGrp="1"/>
-          </p:cNvSpPr>
-          <p:nvPr/>
-        </p:nvSpPr>
-        <p:spPr>
-          <a:xfrm xmlns:a="http://schemas.openxmlformats.org/drawingml/2006/main">
-            <a:off x="781050" y="4352925"/>
-            <a:ext cx="3143250" cy="323850"/>
-          </a:xfrm>
-          <a:prstGeom xmlns:a="http://schemas.openxmlformats.org/drawingml/2006/main" prst="rect">
-            <a:avLst/>
-          </a:prstGeom>
-          <a:noFill xmlns:a="http://schemas.openxmlformats.org/drawingml/2006/main"/>
-          <a:ln xmlns:a="http://schemas.openxmlformats.org/drawingml/2006/main" w="0">
-            <a:noFill/>
-            <a:prstDash val="solid"/>
-          </a:ln>
-        </p:spPr>
-        <p:txBody>
-          <a:bodyPr xmlns:a="http://schemas.openxmlformats.org/drawingml/2006/main" anchor="t"/>
-          <a:lstStyle xmlns:a="http://schemas.openxmlformats.org/drawingml/2006/main"/>
-          <a:p xmlns:a="http://schemas.openxmlformats.org/drawingml/2006/main">
-            <a:pPr algn="l">
-              <a:defRPr sz="1425" b="1" i="0">
-                <a:solidFill>
-                  <a:srgbClr val="3333B2"/>
-                </a:solidFill>
-              </a:defRPr>
-            </a:pPr>
-            <a:r>
-              <a:rPr sz="1425" b="1" i="0">
-                <a:solidFill>
-                  <a:srgbClr val="3333B2"/>
-                </a:solidFill>
-              </a:rPr>
-              <a:t>PARTICIPATION</a:t>
-            </a:r>
-          </a:p>
-        </p:txBody>
-      </p:sp>
-      <p:sp>
-        <p:nvSpPr>
-          <p:cNvPr id="20" name="audit-value-5">
-            <a:extLst xmlns:a="http://schemas.openxmlformats.org/drawingml/2006/main">
-              <a:ext uri="{FF2B5EF4-FFF2-40B4-BE49-F238E27FC236}">
-                <a16:creationId xmlns:a16="http://schemas.microsoft.com/office/drawing/2014/main" id="{68E49516-9321-48A2-A539-D5DBC4B991C7}"/>
-              </a:ext>
-            </a:extLst>
-          </p:cNvPr>
-          <p:cNvSpPr>
-            <a:spLocks xmlns:a="http://schemas.openxmlformats.org/drawingml/2006/main" noGrp="1"/>
-          </p:cNvSpPr>
-          <p:nvPr/>
-        </p:nvSpPr>
-        <p:spPr>
-          <a:xfrm xmlns:a="http://schemas.openxmlformats.org/drawingml/2006/main">
-            <a:off x="4095750" y="4352925"/>
-            <a:ext cx="6953250" cy="323850"/>
-          </a:xfrm>
-          <a:prstGeom xmlns:a="http://schemas.openxmlformats.org/drawingml/2006/main" prst="rect">
-            <a:avLst/>
-          </a:prstGeom>
-          <a:noFill xmlns:a="http://schemas.openxmlformats.org/drawingml/2006/main"/>
-          <a:ln xmlns:a="http://schemas.openxmlformats.org/drawingml/2006/main" w="0">
-            <a:noFill/>
-            <a:prstDash val="solid"/>
-          </a:ln>
-        </p:spPr>
-        <p:txBody>
-          <a:bodyPr xmlns:a="http://schemas.openxmlformats.org/drawingml/2006/main" anchor="t"/>
-          <a:lstStyle xmlns:a="http://schemas.openxmlformats.org/drawingml/2006/main"/>
-          <a:p xmlns:a="http://schemas.openxmlformats.org/drawingml/2006/main">
-            <a:pPr algn="l">
-              <a:defRPr sz="1725" b="0" i="0">
+          <p:cNvPr id="25" name="audit-legend-rows-label">
+            <a:extLst xmlns:a="http://schemas.openxmlformats.org/drawingml/2006/main">
+              <a:ext uri="{FF2B5EF4-FFF2-40B4-BE49-F238E27FC236}">
+                <a16:creationId xmlns:a16="http://schemas.microsoft.com/office/drawing/2014/main" id="{A7EEA183-9A5C-4C8E-885C-B47D94FC0A76}"/>
+              </a:ext>
+            </a:extLst>
+          </p:cNvPr>
+          <p:cNvSpPr>
+            <a:spLocks xmlns:a="http://schemas.openxmlformats.org/drawingml/2006/main" noGrp="1"/>
+          </p:cNvSpPr>
+          <p:nvPr/>
+        </p:nvSpPr>
+        <p:spPr>
+          <a:xfrm xmlns:a="http://schemas.openxmlformats.org/drawingml/2006/main">
+            <a:off x="2219325" y="5876925"/>
+            <a:ext cx="857250" cy="266700"/>
+          </a:xfrm>
+          <a:prstGeom xmlns:a="http://schemas.openxmlformats.org/drawingml/2006/main" prst="rect">
+            <a:avLst/>
+          </a:prstGeom>
+          <a:noFill xmlns:a="http://schemas.openxmlformats.org/drawingml/2006/main"/>
+          <a:ln xmlns:a="http://schemas.openxmlformats.org/drawingml/2006/main" w="0">
+            <a:noFill/>
+            <a:prstDash val="solid"/>
+          </a:ln>
+        </p:spPr>
+        <p:txBody>
+          <a:bodyPr xmlns:a="http://schemas.openxmlformats.org/drawingml/2006/main" anchor="t"/>
+          <a:lstStyle xmlns:a="http://schemas.openxmlformats.org/drawingml/2006/main"/>
+          <a:p xmlns:a="http://schemas.openxmlformats.org/drawingml/2006/main">
+            <a:pPr algn="l">
+              <a:defRPr sz="1200" b="0" i="0">
                 <a:solidFill>
                   <a:srgbClr val="17171C"/>
                 </a:solidFill>
               </a:defRPr>
             </a:pPr>
             <a:r>
-              <a:rPr sz="1725" b="0" i="0">
+              <a:rPr sz="1200" b="0" i="0">
                 <a:solidFill>
                   <a:srgbClr val="17171C"/>
                 </a:solidFill>
               </a:rPr>
-              <a:t>1,395 participants  •  1,605 non-participants</a:t>
-            </a:r>
-          </a:p>
-        </p:txBody>
-      </p:sp>
-      <p:sp>
-        <p:nvSpPr>
-          <p:cNvPr id="21" name="rule-82-502">
-            <a:extLst xmlns:a="http://schemas.openxmlformats.org/drawingml/2006/main">
-              <a:ext uri="{FF2B5EF4-FFF2-40B4-BE49-F238E27FC236}">
-                <a16:creationId xmlns:a16="http://schemas.microsoft.com/office/drawing/2014/main" id="{33B1710A-40B9-47C6-BF91-02F0EC8C7419}"/>
-              </a:ext>
-            </a:extLst>
-          </p:cNvPr>
-          <p:cNvSpPr>
-            <a:spLocks xmlns:a="http://schemas.openxmlformats.org/drawingml/2006/main" noGrp="1"/>
-          </p:cNvSpPr>
-          <p:nvPr/>
-        </p:nvSpPr>
-        <p:spPr>
-          <a:xfrm xmlns:a="http://schemas.openxmlformats.org/drawingml/2006/main">
-            <a:off x="781050" y="4781550"/>
-            <a:ext cx="10096500" cy="9525"/>
+              <a:t>Rows</a:t>
+            </a:r>
+          </a:p>
+        </p:txBody>
+      </p:sp>
+      <p:sp>
+        <p:nvSpPr>
+          <p:cNvPr id="26" name="audit-legend-applicants">
+            <a:extLst xmlns:a="http://schemas.openxmlformats.org/drawingml/2006/main">
+              <a:ext uri="{FF2B5EF4-FFF2-40B4-BE49-F238E27FC236}">
+                <a16:creationId xmlns:a16="http://schemas.microsoft.com/office/drawing/2014/main" id="{B00CB374-3F7A-4C86-8530-6DCAA1E59FC8}"/>
+              </a:ext>
+            </a:extLst>
+          </p:cNvPr>
+          <p:cNvSpPr>
+            <a:spLocks xmlns:a="http://schemas.openxmlformats.org/drawingml/2006/main" noGrp="1"/>
+          </p:cNvSpPr>
+          <p:nvPr/>
+        </p:nvSpPr>
+        <p:spPr>
+          <a:xfrm xmlns:a="http://schemas.openxmlformats.org/drawingml/2006/main">
+            <a:off x="3190875" y="5905500"/>
+            <a:ext cx="190500" cy="190500"/>
           </a:xfrm>
           <a:prstGeom xmlns:a="http://schemas.openxmlformats.org/drawingml/2006/main" prst="rect">
             <a:avLst/>
           </a:prstGeom>
           <a:solidFill xmlns:a="http://schemas.openxmlformats.org/drawingml/2006/main">
-            <a:srgbClr val="D9D9E6"/>
+            <a:srgbClr val="5C5C69"/>
           </a:solidFill>
           <a:ln xmlns:a="http://schemas.openxmlformats.org/drawingml/2006/main" w="0">
             <a:solidFill>
-              <a:srgbClr val="D9D9E6"/>
+              <a:srgbClr val="5C5C69"/>
             </a:solidFill>
             <a:prstDash val="solid"/>
           </a:ln>
@@ -16577,150 +17822,377 @@
       </p:sp>
       <p:sp>
         <p:nvSpPr>
-          <p:cNvPr id="22" name="audit-label-6">
-            <a:extLst xmlns:a="http://schemas.openxmlformats.org/drawingml/2006/main">
-              <a:ext uri="{FF2B5EF4-FFF2-40B4-BE49-F238E27FC236}">
-                <a16:creationId xmlns:a16="http://schemas.microsoft.com/office/drawing/2014/main" id="{45BE8DED-E006-443A-80EC-BEDEF3EF6F05}"/>
-              </a:ext>
-            </a:extLst>
-          </p:cNvPr>
-          <p:cNvSpPr>
-            <a:spLocks xmlns:a="http://schemas.openxmlformats.org/drawingml/2006/main" noGrp="1"/>
-          </p:cNvSpPr>
-          <p:nvPr/>
-        </p:nvSpPr>
-        <p:spPr>
-          <a:xfrm xmlns:a="http://schemas.openxmlformats.org/drawingml/2006/main">
-            <a:off x="781050" y="4972050"/>
-            <a:ext cx="3143250" cy="323850"/>
-          </a:xfrm>
-          <a:prstGeom xmlns:a="http://schemas.openxmlformats.org/drawingml/2006/main" prst="rect">
-            <a:avLst/>
-          </a:prstGeom>
-          <a:noFill xmlns:a="http://schemas.openxmlformats.org/drawingml/2006/main"/>
-          <a:ln xmlns:a="http://schemas.openxmlformats.org/drawingml/2006/main" w="0">
-            <a:noFill/>
-            <a:prstDash val="solid"/>
-          </a:ln>
-        </p:spPr>
-        <p:txBody>
-          <a:bodyPr xmlns:a="http://schemas.openxmlformats.org/drawingml/2006/main" anchor="t"/>
-          <a:lstStyle xmlns:a="http://schemas.openxmlformats.org/drawingml/2006/main"/>
-          <a:p xmlns:a="http://schemas.openxmlformats.org/drawingml/2006/main">
-            <a:pPr algn="l">
-              <a:defRPr sz="1425" b="1" i="0">
-                <a:solidFill>
-                  <a:srgbClr val="3333B2"/>
-                </a:solidFill>
-              </a:defRPr>
-            </a:pPr>
-            <a:r>
-              <a:rPr sz="1425" b="1" i="0">
-                <a:solidFill>
-                  <a:srgbClr val="3333B2"/>
-                </a:solidFill>
-              </a:rPr>
-              <a:t>STATUS</a:t>
-            </a:r>
-          </a:p>
-        </p:txBody>
-      </p:sp>
-      <p:sp>
-        <p:nvSpPr>
-          <p:cNvPr id="23" name="audit-value-6">
-            <a:extLst xmlns:a="http://schemas.openxmlformats.org/drawingml/2006/main">
-              <a:ext uri="{FF2B5EF4-FFF2-40B4-BE49-F238E27FC236}">
-                <a16:creationId xmlns:a16="http://schemas.microsoft.com/office/drawing/2014/main" id="{BEFA1303-1C36-4FD7-B5CD-9BEAFE5FEED9}"/>
-              </a:ext>
-            </a:extLst>
-          </p:cNvPr>
-          <p:cNvSpPr>
-            <a:spLocks xmlns:a="http://schemas.openxmlformats.org/drawingml/2006/main" noGrp="1"/>
-          </p:cNvSpPr>
-          <p:nvPr/>
-        </p:nvSpPr>
-        <p:spPr>
-          <a:xfrm xmlns:a="http://schemas.openxmlformats.org/drawingml/2006/main">
-            <a:off x="4095750" y="4972050"/>
-            <a:ext cx="6953250" cy="323850"/>
-          </a:xfrm>
-          <a:prstGeom xmlns:a="http://schemas.openxmlformats.org/drawingml/2006/main" prst="rect">
-            <a:avLst/>
-          </a:prstGeom>
-          <a:noFill xmlns:a="http://schemas.openxmlformats.org/drawingml/2006/main"/>
-          <a:ln xmlns:a="http://schemas.openxmlformats.org/drawingml/2006/main" w="0">
-            <a:noFill/>
-            <a:prstDash val="solid"/>
-          </a:ln>
-        </p:spPr>
-        <p:txBody>
-          <a:bodyPr xmlns:a="http://schemas.openxmlformats.org/drawingml/2006/main" anchor="t"/>
-          <a:lstStyle xmlns:a="http://schemas.openxmlformats.org/drawingml/2006/main"/>
-          <a:p xmlns:a="http://schemas.openxmlformats.org/drawingml/2006/main">
-            <a:pPr algn="l">
-              <a:defRPr sz="2400" b="1" i="0">
+          <p:cNvPr id="27" name="audit-legend-applicants-label">
+            <a:extLst xmlns:a="http://schemas.openxmlformats.org/drawingml/2006/main">
+              <a:ext uri="{FF2B5EF4-FFF2-40B4-BE49-F238E27FC236}">
+                <a16:creationId xmlns:a16="http://schemas.microsoft.com/office/drawing/2014/main" id="{7899447C-61EE-4945-99E6-4E60BBFB6D98}"/>
+              </a:ext>
+            </a:extLst>
+          </p:cNvPr>
+          <p:cNvSpPr>
+            <a:spLocks xmlns:a="http://schemas.openxmlformats.org/drawingml/2006/main" noGrp="1"/>
+          </p:cNvSpPr>
+          <p:nvPr/>
+        </p:nvSpPr>
+        <p:spPr>
+          <a:xfrm xmlns:a="http://schemas.openxmlformats.org/drawingml/2006/main">
+            <a:off x="3457575" y="5876925"/>
+            <a:ext cx="1809750" cy="266700"/>
+          </a:xfrm>
+          <a:prstGeom xmlns:a="http://schemas.openxmlformats.org/drawingml/2006/main" prst="rect">
+            <a:avLst/>
+          </a:prstGeom>
+          <a:noFill xmlns:a="http://schemas.openxmlformats.org/drawingml/2006/main"/>
+          <a:ln xmlns:a="http://schemas.openxmlformats.org/drawingml/2006/main" w="0">
+            <a:noFill/>
+            <a:prstDash val="solid"/>
+          </a:ln>
+        </p:spPr>
+        <p:txBody>
+          <a:bodyPr xmlns:a="http://schemas.openxmlformats.org/drawingml/2006/main" anchor="t"/>
+          <a:lstStyle xmlns:a="http://schemas.openxmlformats.org/drawingml/2006/main"/>
+          <a:p xmlns:a="http://schemas.openxmlformats.org/drawingml/2006/main">
+            <a:pPr algn="l">
+              <a:defRPr sz="1200" b="0" i="0">
+                <a:solidFill>
+                  <a:srgbClr val="17171C"/>
+                </a:solidFill>
+              </a:defRPr>
+            </a:pPr>
+            <a:r>
+              <a:rPr sz="1200" b="0" i="0">
+                <a:solidFill>
+                  <a:srgbClr val="17171C"/>
+                </a:solidFill>
+              </a:rPr>
+              <a:t>Unique applicants</a:t>
+            </a:r>
+          </a:p>
+        </p:txBody>
+      </p:sp>
+      <p:sp>
+        <p:nvSpPr>
+          <p:cNvPr id="28" name="rule-858-145">
+            <a:extLst xmlns:a="http://schemas.openxmlformats.org/drawingml/2006/main">
+              <a:ext uri="{FF2B5EF4-FFF2-40B4-BE49-F238E27FC236}">
+                <a16:creationId xmlns:a16="http://schemas.microsoft.com/office/drawing/2014/main" id="{A878C070-31F4-4DF8-9258-9F5C4E0BB8D9}"/>
+              </a:ext>
+            </a:extLst>
+          </p:cNvPr>
+          <p:cNvSpPr>
+            <a:spLocks xmlns:a="http://schemas.openxmlformats.org/drawingml/2006/main" noGrp="1"/>
+          </p:cNvSpPr>
+          <p:nvPr/>
+        </p:nvSpPr>
+        <p:spPr>
+          <a:xfrm xmlns:a="http://schemas.openxmlformats.org/drawingml/2006/main">
+            <a:off x="8172450" y="1381125"/>
+            <a:ext cx="19050" cy="0"/>
+          </a:xfrm>
+          <a:prstGeom xmlns:a="http://schemas.openxmlformats.org/drawingml/2006/main" prst="rect">
+            <a:avLst/>
+          </a:prstGeom>
+          <a:ln xmlns:a="http://schemas.openxmlformats.org/drawingml/2006/main" w="0">
+            <a:prstDash val="solid"/>
+          </a:ln>
+        </p:spPr>
+      </p:sp>
+      <p:sp>
+        <p:nvSpPr>
+          <p:cNvPr id="29" name="rail-rows">
+            <a:extLst xmlns:a="http://schemas.openxmlformats.org/drawingml/2006/main">
+              <a:ext uri="{FF2B5EF4-FFF2-40B4-BE49-F238E27FC236}">
+                <a16:creationId xmlns:a16="http://schemas.microsoft.com/office/drawing/2014/main" id="{8E450DE9-3A44-456F-966B-8CE4F2703C20}"/>
+              </a:ext>
+            </a:extLst>
+          </p:cNvPr>
+          <p:cNvSpPr>
+            <a:spLocks xmlns:a="http://schemas.openxmlformats.org/drawingml/2006/main" noGrp="1"/>
+          </p:cNvSpPr>
+          <p:nvPr/>
+        </p:nvSpPr>
+        <p:spPr>
+          <a:xfrm xmlns:a="http://schemas.openxmlformats.org/drawingml/2006/main">
+            <a:off x="8496300" y="1495425"/>
+            <a:ext cx="2667000" cy="381000"/>
+          </a:xfrm>
+          <a:prstGeom xmlns:a="http://schemas.openxmlformats.org/drawingml/2006/main" prst="rect">
+            <a:avLst/>
+          </a:prstGeom>
+          <a:noFill xmlns:a="http://schemas.openxmlformats.org/drawingml/2006/main"/>
+          <a:ln xmlns:a="http://schemas.openxmlformats.org/drawingml/2006/main" w="0">
+            <a:noFill/>
+            <a:prstDash val="solid"/>
+          </a:ln>
+        </p:spPr>
+        <p:txBody>
+          <a:bodyPr xmlns:a="http://schemas.openxmlformats.org/drawingml/2006/main" anchor="t"/>
+          <a:lstStyle xmlns:a="http://schemas.openxmlformats.org/drawingml/2006/main"/>
+          <a:p xmlns:a="http://schemas.openxmlformats.org/drawingml/2006/main">
+            <a:pPr algn="l">
+              <a:defRPr sz="2025" b="1" i="0">
+                <a:solidFill>
+                  <a:srgbClr val="17171C"/>
+                </a:solidFill>
+              </a:defRPr>
+            </a:pPr>
+            <a:r>
+              <a:rPr sz="2025" b="1" i="0">
+                <a:solidFill>
+                  <a:srgbClr val="17171C"/>
+                </a:solidFill>
+              </a:rPr>
+              <a:t>3,430 rows</a:t>
+            </a:r>
+          </a:p>
+        </p:txBody>
+      </p:sp>
+      <p:sp>
+        <p:nvSpPr>
+          <p:cNvPr id="30" name="rail-applicants">
+            <a:extLst xmlns:a="http://schemas.openxmlformats.org/drawingml/2006/main">
+              <a:ext uri="{FF2B5EF4-FFF2-40B4-BE49-F238E27FC236}">
+                <a16:creationId xmlns:a16="http://schemas.microsoft.com/office/drawing/2014/main" id="{BAF4ECAD-06C6-4D0C-854C-4639708233FB}"/>
+              </a:ext>
+            </a:extLst>
+          </p:cNvPr>
+          <p:cNvSpPr>
+            <a:spLocks xmlns:a="http://schemas.openxmlformats.org/drawingml/2006/main" noGrp="1"/>
+          </p:cNvSpPr>
+          <p:nvPr/>
+        </p:nvSpPr>
+        <p:spPr>
+          <a:xfrm xmlns:a="http://schemas.openxmlformats.org/drawingml/2006/main">
+            <a:off x="8496300" y="2114550"/>
+            <a:ext cx="2667000" cy="381000"/>
+          </a:xfrm>
+          <a:prstGeom xmlns:a="http://schemas.openxmlformats.org/drawingml/2006/main" prst="rect">
+            <a:avLst/>
+          </a:prstGeom>
+          <a:noFill xmlns:a="http://schemas.openxmlformats.org/drawingml/2006/main"/>
+          <a:ln xmlns:a="http://schemas.openxmlformats.org/drawingml/2006/main" w="0">
+            <a:noFill/>
+            <a:prstDash val="solid"/>
+          </a:ln>
+        </p:spPr>
+        <p:txBody>
+          <a:bodyPr xmlns:a="http://schemas.openxmlformats.org/drawingml/2006/main" anchor="t"/>
+          <a:lstStyle xmlns:a="http://schemas.openxmlformats.org/drawingml/2006/main"/>
+          <a:p xmlns:a="http://schemas.openxmlformats.org/drawingml/2006/main">
+            <a:pPr algn="l">
+              <a:defRPr sz="2025" b="1" i="0">
+                <a:solidFill>
+                  <a:srgbClr val="17171C"/>
+                </a:solidFill>
+              </a:defRPr>
+            </a:pPr>
+            <a:r>
+              <a:rPr sz="2025" b="1" i="0">
+                <a:solidFill>
+                  <a:srgbClr val="17171C"/>
+                </a:solidFill>
+              </a:rPr>
+              <a:t>3,000 applicants</a:t>
+            </a:r>
+          </a:p>
+        </p:txBody>
+      </p:sp>
+      <p:sp>
+        <p:nvSpPr>
+          <p:cNvPr id="31" name="rail-duplicates">
+            <a:extLst xmlns:a="http://schemas.openxmlformats.org/drawingml/2006/main">
+              <a:ext uri="{FF2B5EF4-FFF2-40B4-BE49-F238E27FC236}">
+                <a16:creationId xmlns:a16="http://schemas.microsoft.com/office/drawing/2014/main" id="{04195FC0-4C89-477B-A48F-BCD08E71D7C9}"/>
+              </a:ext>
+            </a:extLst>
+          </p:cNvPr>
+          <p:cNvSpPr>
+            <a:spLocks xmlns:a="http://schemas.openxmlformats.org/drawingml/2006/main" noGrp="1"/>
+          </p:cNvSpPr>
+          <p:nvPr/>
+        </p:nvSpPr>
+        <p:spPr>
+          <a:xfrm xmlns:a="http://schemas.openxmlformats.org/drawingml/2006/main">
+            <a:off x="8496300" y="2733675"/>
+            <a:ext cx="2667000" cy="381000"/>
+          </a:xfrm>
+          <a:prstGeom xmlns:a="http://schemas.openxmlformats.org/drawingml/2006/main" prst="rect">
+            <a:avLst/>
+          </a:prstGeom>
+          <a:noFill xmlns:a="http://schemas.openxmlformats.org/drawingml/2006/main"/>
+          <a:ln xmlns:a="http://schemas.openxmlformats.org/drawingml/2006/main" w="0">
+            <a:noFill/>
+            <a:prstDash val="solid"/>
+          </a:ln>
+        </p:spPr>
+        <p:txBody>
+          <a:bodyPr xmlns:a="http://schemas.openxmlformats.org/drawingml/2006/main" anchor="t"/>
+          <a:lstStyle xmlns:a="http://schemas.openxmlformats.org/drawingml/2006/main"/>
+          <a:p xmlns:a="http://schemas.openxmlformats.org/drawingml/2006/main">
+            <a:pPr algn="l">
+              <a:defRPr sz="1875" b="1" i="0">
+                <a:solidFill>
+                  <a:srgbClr val="17171C"/>
+                </a:solidFill>
+              </a:defRPr>
+            </a:pPr>
+            <a:r>
+              <a:rPr sz="1875" b="1" i="0">
+                <a:solidFill>
+                  <a:srgbClr val="17171C"/>
+                </a:solidFill>
+              </a:rPr>
+              <a:t>350 duplicated IDs</a:t>
+            </a:r>
+          </a:p>
+        </p:txBody>
+      </p:sp>
+      <p:sp>
+        <p:nvSpPr>
+          <p:cNvPr id="32" name="rail-pattern">
+            <a:extLst xmlns:a="http://schemas.openxmlformats.org/drawingml/2006/main">
+              <a:ext uri="{FF2B5EF4-FFF2-40B4-BE49-F238E27FC236}">
+                <a16:creationId xmlns:a16="http://schemas.microsoft.com/office/drawing/2014/main" id="{5B893BCE-5C85-4ED1-B773-9DDF8AEA5B2E}"/>
+              </a:ext>
+            </a:extLst>
+          </p:cNvPr>
+          <p:cNvSpPr>
+            <a:spLocks xmlns:a="http://schemas.openxmlformats.org/drawingml/2006/main" noGrp="1"/>
+          </p:cNvSpPr>
+          <p:nvPr/>
+        </p:nvSpPr>
+        <p:spPr>
+          <a:xfrm xmlns:a="http://schemas.openxmlformats.org/drawingml/2006/main">
+            <a:off x="8496300" y="3352800"/>
+            <a:ext cx="2667000" cy="571500"/>
+          </a:xfrm>
+          <a:prstGeom xmlns:a="http://schemas.openxmlformats.org/drawingml/2006/main" prst="rect">
+            <a:avLst/>
+          </a:prstGeom>
+          <a:noFill xmlns:a="http://schemas.openxmlformats.org/drawingml/2006/main"/>
+          <a:ln xmlns:a="http://schemas.openxmlformats.org/drawingml/2006/main" w="0">
+            <a:noFill/>
+            <a:prstDash val="solid"/>
+          </a:ln>
+        </p:spPr>
+        <p:txBody>
+          <a:bodyPr xmlns:a="http://schemas.openxmlformats.org/drawingml/2006/main" anchor="t"/>
+          <a:lstStyle xmlns:a="http://schemas.openxmlformats.org/drawingml/2006/main"/>
+          <a:p xmlns:a="http://schemas.openxmlformats.org/drawingml/2006/main">
+            <a:pPr algn="l">
+              <a:defRPr sz="1800" b="1" i="0">
                 <a:solidFill>
                   <a:srgbClr val="FF0000"/>
                 </a:solidFill>
               </a:defRPr>
             </a:pPr>
             <a:r>
-              <a:rPr sz="2400" b="1" i="0">
+              <a:rPr sz="1800" b="1" i="0">
                 <a:solidFill>
                   <a:srgbClr val="FF0000"/>
                 </a:solidFill>
               </a:rPr>
+              <a:t>All duplicates offered</a:t>
+            </a:r>
+          </a:p>
+        </p:txBody>
+      </p:sp>
+      <p:sp>
+        <p:nvSpPr>
+          <p:cNvPr id="33" name="rail-excess">
+            <a:extLst xmlns:a="http://schemas.openxmlformats.org/drawingml/2006/main">
+              <a:ext uri="{FF2B5EF4-FFF2-40B4-BE49-F238E27FC236}">
+                <a16:creationId xmlns:a16="http://schemas.microsoft.com/office/drawing/2014/main" id="{1C8E5988-B4F3-44CC-B2F2-07C9B069B008}"/>
+              </a:ext>
+            </a:extLst>
+          </p:cNvPr>
+          <p:cNvSpPr>
+            <a:spLocks xmlns:a="http://schemas.openxmlformats.org/drawingml/2006/main" noGrp="1"/>
+          </p:cNvSpPr>
+          <p:nvPr/>
+        </p:nvSpPr>
+        <p:spPr>
+          <a:xfrm xmlns:a="http://schemas.openxmlformats.org/drawingml/2006/main">
+            <a:off x="8496300" y="4114800"/>
+            <a:ext cx="2667000" cy="400050"/>
+          </a:xfrm>
+          <a:prstGeom xmlns:a="http://schemas.openxmlformats.org/drawingml/2006/main" prst="rect">
+            <a:avLst/>
+          </a:prstGeom>
+          <a:noFill xmlns:a="http://schemas.openxmlformats.org/drawingml/2006/main"/>
+          <a:ln xmlns:a="http://schemas.openxmlformats.org/drawingml/2006/main" w="0">
+            <a:noFill/>
+            <a:prstDash val="solid"/>
+          </a:ln>
+        </p:spPr>
+        <p:txBody>
+          <a:bodyPr xmlns:a="http://schemas.openxmlformats.org/drawingml/2006/main" anchor="t"/>
+          <a:lstStyle xmlns:a="http://schemas.openxmlformats.org/drawingml/2006/main"/>
+          <a:p xmlns:a="http://schemas.openxmlformats.org/drawingml/2006/main">
+            <a:pPr algn="l">
+              <a:defRPr sz="2025" b="1" i="0">
+                <a:solidFill>
+                  <a:srgbClr val="FF0000"/>
+                </a:solidFill>
+              </a:defRPr>
+            </a:pPr>
+            <a:r>
+              <a:rPr sz="2025" b="1" i="0">
+                <a:solidFill>
+                  <a:srgbClr val="FF0000"/>
+                </a:solidFill>
+              </a:rPr>
+              <a:t>+430 excess rows</a:t>
+            </a:r>
+          </a:p>
+        </p:txBody>
+      </p:sp>
+      <p:sp>
+        <p:nvSpPr>
+          <p:cNvPr id="34" name="rail-status">
+            <a:extLst xmlns:a="http://schemas.openxmlformats.org/drawingml/2006/main">
+              <a:ext uri="{FF2B5EF4-FFF2-40B4-BE49-F238E27FC236}">
+                <a16:creationId xmlns:a16="http://schemas.microsoft.com/office/drawing/2014/main" id="{24BCB488-4513-4EEF-B52C-F5CDD6B4E45C}"/>
+              </a:ext>
+            </a:extLst>
+          </p:cNvPr>
+          <p:cNvSpPr>
+            <a:spLocks xmlns:a="http://schemas.openxmlformats.org/drawingml/2006/main" noGrp="1"/>
+          </p:cNvSpPr>
+          <p:nvPr/>
+        </p:nvSpPr>
+        <p:spPr>
+          <a:xfrm xmlns:a="http://schemas.openxmlformats.org/drawingml/2006/main">
+            <a:off x="8496300" y="5000625"/>
+            <a:ext cx="2667000" cy="523875"/>
+          </a:xfrm>
+          <a:prstGeom xmlns:a="http://schemas.openxmlformats.org/drawingml/2006/main" prst="rect">
+            <a:avLst/>
+          </a:prstGeom>
+          <a:noFill xmlns:a="http://schemas.openxmlformats.org/drawingml/2006/main"/>
+          <a:ln xmlns:a="http://schemas.openxmlformats.org/drawingml/2006/main" w="0">
+            <a:noFill/>
+            <a:prstDash val="solid"/>
+          </a:ln>
+        </p:spPr>
+        <p:txBody>
+          <a:bodyPr xmlns:a="http://schemas.openxmlformats.org/drawingml/2006/main" anchor="t"/>
+          <a:lstStyle xmlns:a="http://schemas.openxmlformats.org/drawingml/2006/main"/>
+          <a:p xmlns:a="http://schemas.openxmlformats.org/drawingml/2006/main">
+            <a:pPr algn="l">
+              <a:defRPr sz="3150" b="1" i="0">
+                <a:solidFill>
+                  <a:srgbClr val="FF0000"/>
+                </a:solidFill>
+              </a:defRPr>
+            </a:pPr>
+            <a:r>
+              <a:rPr sz="3150" b="1" i="0">
+                <a:solidFill>
+                  <a:srgbClr val="FF0000"/>
+                </a:solidFill>
+              </a:rPr>
               <a:t>BLOCK</a:t>
-            </a:r>
-          </a:p>
-        </p:txBody>
-      </p:sp>
-      <p:sp>
-        <p:nvSpPr>
-          <p:cNvPr id="24" name="framing">
-            <a:extLst xmlns:a="http://schemas.openxmlformats.org/drawingml/2006/main">
-              <a:ext uri="{FF2B5EF4-FFF2-40B4-BE49-F238E27FC236}">
-                <a16:creationId xmlns:a16="http://schemas.microsoft.com/office/drawing/2014/main" id="{49BA6717-32C6-4263-9D46-75E5DC14B312}"/>
-              </a:ext>
-            </a:extLst>
-          </p:cNvPr>
-          <p:cNvSpPr>
-            <a:spLocks xmlns:a="http://schemas.openxmlformats.org/drawingml/2006/main" noGrp="1"/>
-          </p:cNvSpPr>
-          <p:nvPr/>
-        </p:nvSpPr>
-        <p:spPr>
-          <a:xfrm xmlns:a="http://schemas.openxmlformats.org/drawingml/2006/main">
-            <a:off x="781050" y="5791200"/>
-            <a:ext cx="9810750" cy="361950"/>
-          </a:xfrm>
-          <a:prstGeom xmlns:a="http://schemas.openxmlformats.org/drawingml/2006/main" prst="rect">
-            <a:avLst/>
-          </a:prstGeom>
-          <a:noFill xmlns:a="http://schemas.openxmlformats.org/drawingml/2006/main"/>
-          <a:ln xmlns:a="http://schemas.openxmlformats.org/drawingml/2006/main" w="0">
-            <a:noFill/>
-            <a:prstDash val="solid"/>
-          </a:ln>
-        </p:spPr>
-        <p:txBody>
-          <a:bodyPr xmlns:a="http://schemas.openxmlformats.org/drawingml/2006/main" anchor="t"/>
-          <a:lstStyle xmlns:a="http://schemas.openxmlformats.org/drawingml/2006/main"/>
-          <a:p xmlns:a="http://schemas.openxmlformats.org/drawingml/2006/main">
-            <a:pPr algn="l">
-              <a:defRPr sz="1725" b="1" i="0">
-                <a:solidFill>
-                  <a:srgbClr val="BF0040"/>
-                </a:solidFill>
-              </a:defRPr>
-            </a:pPr>
-            <a:r>
-              <a:rPr sz="1725" b="1" i="0">
-                <a:solidFill>
-                  <a:srgbClr val="BF0040"/>
-                </a:solidFill>
-              </a:rPr>
-              <a:t>The row structure changes the comparison; presentation is blocked.</a:t>
             </a:r>
           </a:p>
         </p:txBody>
@@ -16728,7 +18200,7 @@
     </p:spTree>
     <p:extLst>
       <p:ext uri="{BB962C8B-B14F-4D97-AF65-F5344CB8AC3E}">
-        <p14:creationId xmlns:p14="http://schemas.microsoft.com/office/powerpoint/2010/main" val="1313697579"/>
+        <p14:creationId xmlns:p14="http://schemas.microsoft.com/office/powerpoint/2010/main" val="1671624013"/>
       </p:ext>
     </p:extLst>
   </p:cSld>
@@ -16756,10 +18228,10 @@
       </p:grpSpPr>
       <p:sp>
         <p:nvSpPr>
-          <p:cNvPr id="31" name="slide-title">
-            <a:extLst xmlns:a="http://schemas.openxmlformats.org/drawingml/2006/main">
-              <a:ext uri="{FF2B5EF4-FFF2-40B4-BE49-F238E27FC236}">
-                <a16:creationId xmlns:a16="http://schemas.microsoft.com/office/drawing/2014/main" id="{2B44A4C3-0A34-49FA-9AFC-C4998A021A89}"/>
+          <p:cNvPr id="26" name="slide-title">
+            <a:extLst xmlns:a="http://schemas.openxmlformats.org/drawingml/2006/main">
+              <a:ext uri="{FF2B5EF4-FFF2-40B4-BE49-F238E27FC236}">
+                <a16:creationId xmlns:a16="http://schemas.microsoft.com/office/drawing/2014/main" id="{58C5207A-C7EB-4D61-A9C0-34E4A35CB8DF}"/>
               </a:ext>
             </a:extLst>
           </p:cNvPr>
@@ -16799,7 +18271,7 @@
                   <a:srgbClr val="3333B2"/>
                 </a:solidFill>
               </a:rPr>
-              <a:t>Case B — 430 excess rows appear among offered applicants</a:t>
+              <a:t>Case B repair — Applicant-level ITT is +7 pp</a:t>
             </a:r>
           </a:p>
         </p:txBody>
@@ -16809,7 +18281,7 @@
           <p:cNvPr id="2" name="rule-68-107">
             <a:extLst xmlns:a="http://schemas.openxmlformats.org/drawingml/2006/main">
               <a:ext uri="{FF2B5EF4-FFF2-40B4-BE49-F238E27FC236}">
-                <a16:creationId xmlns:a16="http://schemas.microsoft.com/office/drawing/2014/main" id="{CC362B87-6051-4FB6-B016-B3AD7C5DFA1B}"/>
+                <a16:creationId xmlns:a16="http://schemas.microsoft.com/office/drawing/2014/main" id="{C1F6683C-BAAA-4BDB-8B4C-F7CD81D1B6D8}"/>
               </a:ext>
             </a:extLst>
           </p:cNvPr>
@@ -16842,7 +18314,7 @@
           <p:cNvPr id="3" name="page-number">
             <a:extLst xmlns:a="http://schemas.openxmlformats.org/drawingml/2006/main">
               <a:ext uri="{FF2B5EF4-FFF2-40B4-BE49-F238E27FC236}">
-                <a16:creationId xmlns:a16="http://schemas.microsoft.com/office/drawing/2014/main" id="{D69D2C75-F08A-4B25-957A-9AD3C02D2E71}"/>
+                <a16:creationId xmlns:a16="http://schemas.microsoft.com/office/drawing/2014/main" id="{7C6D3E3F-F22C-430F-95F0-B22D6EEE3B53}"/>
               </a:ext>
             </a:extLst>
           </p:cNvPr>
@@ -16892,7 +18364,7 @@
           <p:cNvPr id="4" name="rule-130-570">
             <a:extLst xmlns:a="http://schemas.openxmlformats.org/drawingml/2006/main">
               <a:ext uri="{FF2B5EF4-FFF2-40B4-BE49-F238E27FC236}">
-                <a16:creationId xmlns:a16="http://schemas.microsoft.com/office/drawing/2014/main" id="{60C95F54-62F2-4685-A9CD-E39B3DB024CD}"/>
+                <a16:creationId xmlns:a16="http://schemas.microsoft.com/office/drawing/2014/main" id="{771DDE37-BF06-46E9-8B73-92FC24840DF5}"/>
               </a:ext>
             </a:extLst>
           </p:cNvPr>
@@ -16904,7 +18376,7 @@
         <p:spPr>
           <a:xfrm xmlns:a="http://schemas.openxmlformats.org/drawingml/2006/main">
             <a:off x="1238250" y="5429250"/>
-            <a:ext cx="6858000" cy="19050"/>
+            <a:ext cx="6762750" cy="19050"/>
           </a:xfrm>
           <a:prstGeom xmlns:a="http://schemas.openxmlformats.org/drawingml/2006/main" prst="rect">
             <a:avLst/>
@@ -16922,22 +18394,22 @@
       </p:sp>
       <p:sp>
         <p:nvSpPr>
-          <p:cNvPr id="5" name="case-b-axis-0">
-            <a:extLst xmlns:a="http://schemas.openxmlformats.org/drawingml/2006/main">
-              <a:ext uri="{FF2B5EF4-FFF2-40B4-BE49-F238E27FC236}">
-                <a16:creationId xmlns:a16="http://schemas.microsoft.com/office/drawing/2014/main" id="{0318F663-F547-4E0E-B4B8-3CD9006FB94A}"/>
-              </a:ext>
-            </a:extLst>
-          </p:cNvPr>
-          <p:cNvSpPr>
-            <a:spLocks xmlns:a="http://schemas.openxmlformats.org/drawingml/2006/main" noGrp="1"/>
-          </p:cNvSpPr>
-          <p:nvPr/>
-        </p:nvSpPr>
-        <p:spPr>
-          <a:xfrm xmlns:a="http://schemas.openxmlformats.org/drawingml/2006/main">
-            <a:off x="476250" y="5305425"/>
-            <a:ext cx="685800" cy="247650"/>
+          <p:cNvPr id="5" name="itt-axis-0">
+            <a:extLst xmlns:a="http://schemas.openxmlformats.org/drawingml/2006/main">
+              <a:ext uri="{FF2B5EF4-FFF2-40B4-BE49-F238E27FC236}">
+                <a16:creationId xmlns:a16="http://schemas.microsoft.com/office/drawing/2014/main" id="{51D8E642-537E-4185-A80B-A391DA2F6534}"/>
+              </a:ext>
+            </a:extLst>
+          </p:cNvPr>
+          <p:cNvSpPr>
+            <a:spLocks xmlns:a="http://schemas.openxmlformats.org/drawingml/2006/main" noGrp="1"/>
+          </p:cNvSpPr>
+          <p:nvPr/>
+        </p:nvSpPr>
+        <p:spPr>
+          <a:xfrm xmlns:a="http://schemas.openxmlformats.org/drawingml/2006/main">
+            <a:off x="552450" y="5305425"/>
+            <a:ext cx="619125" cy="247650"/>
           </a:xfrm>
           <a:prstGeom xmlns:a="http://schemas.openxmlformats.org/drawingml/2006/main" prst="rect">
             <a:avLst/>
@@ -16965,29 +18437,29 @@
                   <a:srgbClr val="5C5C69"/>
                 </a:solidFill>
               </a:rPr>
-              <a:t>0</a:t>
-            </a:r>
-          </a:p>
-        </p:txBody>
-      </p:sp>
-      <p:sp>
-        <p:nvSpPr>
-          <p:cNvPr id="6" name="rule-130-479">
-            <a:extLst xmlns:a="http://schemas.openxmlformats.org/drawingml/2006/main">
-              <a:ext uri="{FF2B5EF4-FFF2-40B4-BE49-F238E27FC236}">
-                <a16:creationId xmlns:a16="http://schemas.microsoft.com/office/drawing/2014/main" id="{47C8A8E5-65C7-4387-8240-60A77A825388}"/>
-              </a:ext>
-            </a:extLst>
-          </p:cNvPr>
-          <p:cNvSpPr>
-            <a:spLocks xmlns:a="http://schemas.openxmlformats.org/drawingml/2006/main" noGrp="1"/>
-          </p:cNvSpPr>
-          <p:nvPr/>
-        </p:nvSpPr>
-        <p:spPr>
-          <a:xfrm xmlns:a="http://schemas.openxmlformats.org/drawingml/2006/main">
-            <a:off x="1238250" y="4562475"/>
-            <a:ext cx="6858000" cy="9525"/>
+              <a:t>0%</a:t>
+            </a:r>
+          </a:p>
+        </p:txBody>
+      </p:sp>
+      <p:sp>
+        <p:nvSpPr>
+          <p:cNvPr id="6" name="rule-130-492">
+            <a:extLst xmlns:a="http://schemas.openxmlformats.org/drawingml/2006/main">
+              <a:ext uri="{FF2B5EF4-FFF2-40B4-BE49-F238E27FC236}">
+                <a16:creationId xmlns:a16="http://schemas.microsoft.com/office/drawing/2014/main" id="{E5CDEA42-3DEC-40FF-BB3A-95F4F49D9A28}"/>
+              </a:ext>
+            </a:extLst>
+          </p:cNvPr>
+          <p:cNvSpPr>
+            <a:spLocks xmlns:a="http://schemas.openxmlformats.org/drawingml/2006/main" noGrp="1"/>
+          </p:cNvSpPr>
+          <p:nvPr/>
+        </p:nvSpPr>
+        <p:spPr>
+          <a:xfrm xmlns:a="http://schemas.openxmlformats.org/drawingml/2006/main">
+            <a:off x="1238250" y="4686300"/>
+            <a:ext cx="6762750" cy="9525"/>
           </a:xfrm>
           <a:prstGeom xmlns:a="http://schemas.openxmlformats.org/drawingml/2006/main" prst="rect">
             <a:avLst/>
@@ -17005,22 +18477,22 @@
       </p:sp>
       <p:sp>
         <p:nvSpPr>
-          <p:cNvPr id="7" name="case-b-axis-500">
-            <a:extLst xmlns:a="http://schemas.openxmlformats.org/drawingml/2006/main">
-              <a:ext uri="{FF2B5EF4-FFF2-40B4-BE49-F238E27FC236}">
-                <a16:creationId xmlns:a16="http://schemas.microsoft.com/office/drawing/2014/main" id="{B4ED005F-CA1E-454B-8051-9A6301B61B74}"/>
-              </a:ext>
-            </a:extLst>
-          </p:cNvPr>
-          <p:cNvSpPr>
-            <a:spLocks xmlns:a="http://schemas.openxmlformats.org/drawingml/2006/main" noGrp="1"/>
-          </p:cNvSpPr>
-          <p:nvPr/>
-        </p:nvSpPr>
-        <p:spPr>
-          <a:xfrm xmlns:a="http://schemas.openxmlformats.org/drawingml/2006/main">
-            <a:off x="476250" y="4438650"/>
-            <a:ext cx="685800" cy="247650"/>
+          <p:cNvPr id="7" name="itt-axis-20">
+            <a:extLst xmlns:a="http://schemas.openxmlformats.org/drawingml/2006/main">
+              <a:ext uri="{FF2B5EF4-FFF2-40B4-BE49-F238E27FC236}">
+                <a16:creationId xmlns:a16="http://schemas.microsoft.com/office/drawing/2014/main" id="{3E657C9B-7E37-4FC5-A4B2-388136F1CDBB}"/>
+              </a:ext>
+            </a:extLst>
+          </p:cNvPr>
+          <p:cNvSpPr>
+            <a:spLocks xmlns:a="http://schemas.openxmlformats.org/drawingml/2006/main" noGrp="1"/>
+          </p:cNvSpPr>
+          <p:nvPr/>
+        </p:nvSpPr>
+        <p:spPr>
+          <a:xfrm xmlns:a="http://schemas.openxmlformats.org/drawingml/2006/main">
+            <a:off x="552450" y="4562475"/>
+            <a:ext cx="619125" cy="247650"/>
           </a:xfrm>
           <a:prstGeom xmlns:a="http://schemas.openxmlformats.org/drawingml/2006/main" prst="rect">
             <a:avLst/>
@@ -17048,29 +18520,29 @@
                   <a:srgbClr val="5C5C69"/>
                 </a:solidFill>
               </a:rPr>
-              <a:t>500</a:t>
-            </a:r>
-          </a:p>
-        </p:txBody>
-      </p:sp>
-      <p:sp>
-        <p:nvSpPr>
-          <p:cNvPr id="8" name="rule-130-388">
-            <a:extLst xmlns:a="http://schemas.openxmlformats.org/drawingml/2006/main">
-              <a:ext uri="{FF2B5EF4-FFF2-40B4-BE49-F238E27FC236}">
-                <a16:creationId xmlns:a16="http://schemas.microsoft.com/office/drawing/2014/main" id="{77F86365-C399-445E-B259-56B587D58B76}"/>
-              </a:ext>
-            </a:extLst>
-          </p:cNvPr>
-          <p:cNvSpPr>
-            <a:spLocks xmlns:a="http://schemas.openxmlformats.org/drawingml/2006/main" noGrp="1"/>
-          </p:cNvSpPr>
-          <p:nvPr/>
-        </p:nvSpPr>
-        <p:spPr>
-          <a:xfrm xmlns:a="http://schemas.openxmlformats.org/drawingml/2006/main">
-            <a:off x="1238250" y="3695700"/>
-            <a:ext cx="6858000" cy="9525"/>
+              <a:t>20%</a:t>
+            </a:r>
+          </a:p>
+        </p:txBody>
+      </p:sp>
+      <p:sp>
+        <p:nvSpPr>
+          <p:cNvPr id="8" name="rule-130-414">
+            <a:extLst xmlns:a="http://schemas.openxmlformats.org/drawingml/2006/main">
+              <a:ext uri="{FF2B5EF4-FFF2-40B4-BE49-F238E27FC236}">
+                <a16:creationId xmlns:a16="http://schemas.microsoft.com/office/drawing/2014/main" id="{1C071465-2012-4B81-8343-BC3C568D8AC7}"/>
+              </a:ext>
+            </a:extLst>
+          </p:cNvPr>
+          <p:cNvSpPr>
+            <a:spLocks xmlns:a="http://schemas.openxmlformats.org/drawingml/2006/main" noGrp="1"/>
+          </p:cNvSpPr>
+          <p:nvPr/>
+        </p:nvSpPr>
+        <p:spPr>
+          <a:xfrm xmlns:a="http://schemas.openxmlformats.org/drawingml/2006/main">
+            <a:off x="1238250" y="3943350"/>
+            <a:ext cx="6762750" cy="9525"/>
           </a:xfrm>
           <a:prstGeom xmlns:a="http://schemas.openxmlformats.org/drawingml/2006/main" prst="rect">
             <a:avLst/>
@@ -17088,22 +18560,22 @@
       </p:sp>
       <p:sp>
         <p:nvSpPr>
-          <p:cNvPr id="9" name="case-b-axis-1000">
-            <a:extLst xmlns:a="http://schemas.openxmlformats.org/drawingml/2006/main">
-              <a:ext uri="{FF2B5EF4-FFF2-40B4-BE49-F238E27FC236}">
-                <a16:creationId xmlns:a16="http://schemas.microsoft.com/office/drawing/2014/main" id="{4307FE12-603D-4FF7-B1A2-B25535D681AD}"/>
-              </a:ext>
-            </a:extLst>
-          </p:cNvPr>
-          <p:cNvSpPr>
-            <a:spLocks xmlns:a="http://schemas.openxmlformats.org/drawingml/2006/main" noGrp="1"/>
-          </p:cNvSpPr>
-          <p:nvPr/>
-        </p:nvSpPr>
-        <p:spPr>
-          <a:xfrm xmlns:a="http://schemas.openxmlformats.org/drawingml/2006/main">
-            <a:off x="476250" y="3571875"/>
-            <a:ext cx="685800" cy="247650"/>
+          <p:cNvPr id="9" name="itt-axis-40">
+            <a:extLst xmlns:a="http://schemas.openxmlformats.org/drawingml/2006/main">
+              <a:ext uri="{FF2B5EF4-FFF2-40B4-BE49-F238E27FC236}">
+                <a16:creationId xmlns:a16="http://schemas.microsoft.com/office/drawing/2014/main" id="{DEEF6DA6-1F0E-4B08-A01A-DD5CDAC7FA0C}"/>
+              </a:ext>
+            </a:extLst>
+          </p:cNvPr>
+          <p:cNvSpPr>
+            <a:spLocks xmlns:a="http://schemas.openxmlformats.org/drawingml/2006/main" noGrp="1"/>
+          </p:cNvSpPr>
+          <p:nvPr/>
+        </p:nvSpPr>
+        <p:spPr>
+          <a:xfrm xmlns:a="http://schemas.openxmlformats.org/drawingml/2006/main">
+            <a:off x="552450" y="3819525"/>
+            <a:ext cx="619125" cy="247650"/>
           </a:xfrm>
           <a:prstGeom xmlns:a="http://schemas.openxmlformats.org/drawingml/2006/main" prst="rect">
             <a:avLst/>
@@ -17131,29 +18603,29 @@
                   <a:srgbClr val="5C5C69"/>
                 </a:solidFill>
               </a:rPr>
-              <a:t>1,000</a:t>
-            </a:r>
-          </a:p>
-        </p:txBody>
-      </p:sp>
-      <p:sp>
-        <p:nvSpPr>
-          <p:cNvPr id="10" name="rule-130-297">
-            <a:extLst xmlns:a="http://schemas.openxmlformats.org/drawingml/2006/main">
-              <a:ext uri="{FF2B5EF4-FFF2-40B4-BE49-F238E27FC236}">
-                <a16:creationId xmlns:a16="http://schemas.microsoft.com/office/drawing/2014/main" id="{698DEDCC-C707-45C6-A66D-1E04F0CDC811}"/>
-              </a:ext>
-            </a:extLst>
-          </p:cNvPr>
-          <p:cNvSpPr>
-            <a:spLocks xmlns:a="http://schemas.openxmlformats.org/drawingml/2006/main" noGrp="1"/>
-          </p:cNvSpPr>
-          <p:nvPr/>
-        </p:nvSpPr>
-        <p:spPr>
-          <a:xfrm xmlns:a="http://schemas.openxmlformats.org/drawingml/2006/main">
-            <a:off x="1238250" y="2828925"/>
-            <a:ext cx="6858000" cy="9525"/>
+              <a:t>40%</a:t>
+            </a:r>
+          </a:p>
+        </p:txBody>
+      </p:sp>
+      <p:sp>
+        <p:nvSpPr>
+          <p:cNvPr id="10" name="rule-130-336">
+            <a:extLst xmlns:a="http://schemas.openxmlformats.org/drawingml/2006/main">
+              <a:ext uri="{FF2B5EF4-FFF2-40B4-BE49-F238E27FC236}">
+                <a16:creationId xmlns:a16="http://schemas.microsoft.com/office/drawing/2014/main" id="{7F78BB79-B5D1-4DD5-A530-E156DC2FB047}"/>
+              </a:ext>
+            </a:extLst>
+          </p:cNvPr>
+          <p:cNvSpPr>
+            <a:spLocks xmlns:a="http://schemas.openxmlformats.org/drawingml/2006/main" noGrp="1"/>
+          </p:cNvSpPr>
+          <p:nvPr/>
+        </p:nvSpPr>
+        <p:spPr>
+          <a:xfrm xmlns:a="http://schemas.openxmlformats.org/drawingml/2006/main">
+            <a:off x="1238250" y="3200400"/>
+            <a:ext cx="6762750" cy="9525"/>
           </a:xfrm>
           <a:prstGeom xmlns:a="http://schemas.openxmlformats.org/drawingml/2006/main" prst="rect">
             <a:avLst/>
@@ -17171,22 +18643,22 @@
       </p:sp>
       <p:sp>
         <p:nvSpPr>
-          <p:cNvPr id="11" name="case-b-axis-1500">
-            <a:extLst xmlns:a="http://schemas.openxmlformats.org/drawingml/2006/main">
-              <a:ext uri="{FF2B5EF4-FFF2-40B4-BE49-F238E27FC236}">
-                <a16:creationId xmlns:a16="http://schemas.microsoft.com/office/drawing/2014/main" id="{47C43C9A-5605-4B71-8B51-3086DD13F5B9}"/>
-              </a:ext>
-            </a:extLst>
-          </p:cNvPr>
-          <p:cNvSpPr>
-            <a:spLocks xmlns:a="http://schemas.openxmlformats.org/drawingml/2006/main" noGrp="1"/>
-          </p:cNvSpPr>
-          <p:nvPr/>
-        </p:nvSpPr>
-        <p:spPr>
-          <a:xfrm xmlns:a="http://schemas.openxmlformats.org/drawingml/2006/main">
-            <a:off x="476250" y="2705100"/>
-            <a:ext cx="685800" cy="247650"/>
+          <p:cNvPr id="11" name="itt-axis-60">
+            <a:extLst xmlns:a="http://schemas.openxmlformats.org/drawingml/2006/main">
+              <a:ext uri="{FF2B5EF4-FFF2-40B4-BE49-F238E27FC236}">
+                <a16:creationId xmlns:a16="http://schemas.microsoft.com/office/drawing/2014/main" id="{3F177768-DC6D-4D56-863B-D35219126DAA}"/>
+              </a:ext>
+            </a:extLst>
+          </p:cNvPr>
+          <p:cNvSpPr>
+            <a:spLocks xmlns:a="http://schemas.openxmlformats.org/drawingml/2006/main" noGrp="1"/>
+          </p:cNvSpPr>
+          <p:nvPr/>
+        </p:nvSpPr>
+        <p:spPr>
+          <a:xfrm xmlns:a="http://schemas.openxmlformats.org/drawingml/2006/main">
+            <a:off x="552450" y="3076575"/>
+            <a:ext cx="619125" cy="247650"/>
           </a:xfrm>
           <a:prstGeom xmlns:a="http://schemas.openxmlformats.org/drawingml/2006/main" prst="rect">
             <a:avLst/>
@@ -17214,29 +18686,29 @@
                   <a:srgbClr val="5C5C69"/>
                 </a:solidFill>
               </a:rPr>
-              <a:t>1,500</a:t>
-            </a:r>
-          </a:p>
-        </p:txBody>
-      </p:sp>
-      <p:sp>
-        <p:nvSpPr>
-          <p:cNvPr id="12" name="rule-130-206">
-            <a:extLst xmlns:a="http://schemas.openxmlformats.org/drawingml/2006/main">
-              <a:ext uri="{FF2B5EF4-FFF2-40B4-BE49-F238E27FC236}">
-                <a16:creationId xmlns:a16="http://schemas.microsoft.com/office/drawing/2014/main" id="{C8622DF1-41E2-498D-B0F9-9938EDDCDFF5}"/>
-              </a:ext>
-            </a:extLst>
-          </p:cNvPr>
-          <p:cNvSpPr>
-            <a:spLocks xmlns:a="http://schemas.openxmlformats.org/drawingml/2006/main" noGrp="1"/>
-          </p:cNvSpPr>
-          <p:nvPr/>
-        </p:nvSpPr>
-        <p:spPr>
-          <a:xfrm xmlns:a="http://schemas.openxmlformats.org/drawingml/2006/main">
-            <a:off x="1238250" y="1962150"/>
-            <a:ext cx="6858000" cy="9525"/>
+              <a:t>60%</a:t>
+            </a:r>
+          </a:p>
+        </p:txBody>
+      </p:sp>
+      <p:sp>
+        <p:nvSpPr>
+          <p:cNvPr id="12" name="rule-130-258">
+            <a:extLst xmlns:a="http://schemas.openxmlformats.org/drawingml/2006/main">
+              <a:ext uri="{FF2B5EF4-FFF2-40B4-BE49-F238E27FC236}">
+                <a16:creationId xmlns:a16="http://schemas.microsoft.com/office/drawing/2014/main" id="{2BA827D0-2BBE-4728-997C-B599FE8976B2}"/>
+              </a:ext>
+            </a:extLst>
+          </p:cNvPr>
+          <p:cNvSpPr>
+            <a:spLocks xmlns:a="http://schemas.openxmlformats.org/drawingml/2006/main" noGrp="1"/>
+          </p:cNvSpPr>
+          <p:nvPr/>
+        </p:nvSpPr>
+        <p:spPr>
+          <a:xfrm xmlns:a="http://schemas.openxmlformats.org/drawingml/2006/main">
+            <a:off x="1238250" y="2457450"/>
+            <a:ext cx="6762750" cy="9525"/>
           </a:xfrm>
           <a:prstGeom xmlns:a="http://schemas.openxmlformats.org/drawingml/2006/main" prst="rect">
             <a:avLst/>
@@ -17254,22 +18726,22 @@
       </p:sp>
       <p:sp>
         <p:nvSpPr>
-          <p:cNvPr id="13" name="case-b-axis-2000">
-            <a:extLst xmlns:a="http://schemas.openxmlformats.org/drawingml/2006/main">
-              <a:ext uri="{FF2B5EF4-FFF2-40B4-BE49-F238E27FC236}">
-                <a16:creationId xmlns:a16="http://schemas.microsoft.com/office/drawing/2014/main" id="{3DB33BA6-0CC6-40FE-BF1D-12D59EE18F73}"/>
-              </a:ext>
-            </a:extLst>
-          </p:cNvPr>
-          <p:cNvSpPr>
-            <a:spLocks xmlns:a="http://schemas.openxmlformats.org/drawingml/2006/main" noGrp="1"/>
-          </p:cNvSpPr>
-          <p:nvPr/>
-        </p:nvSpPr>
-        <p:spPr>
-          <a:xfrm xmlns:a="http://schemas.openxmlformats.org/drawingml/2006/main">
-            <a:off x="476250" y="1838325"/>
-            <a:ext cx="685800" cy="247650"/>
+          <p:cNvPr id="13" name="itt-axis-80">
+            <a:extLst xmlns:a="http://schemas.openxmlformats.org/drawingml/2006/main">
+              <a:ext uri="{FF2B5EF4-FFF2-40B4-BE49-F238E27FC236}">
+                <a16:creationId xmlns:a16="http://schemas.microsoft.com/office/drawing/2014/main" id="{8608FA0D-8FB2-4687-9627-9C73FAB157A5}"/>
+              </a:ext>
+            </a:extLst>
+          </p:cNvPr>
+          <p:cNvSpPr>
+            <a:spLocks xmlns:a="http://schemas.openxmlformats.org/drawingml/2006/main" noGrp="1"/>
+          </p:cNvSpPr>
+          <p:nvPr/>
+        </p:nvSpPr>
+        <p:spPr>
+          <a:xfrm xmlns:a="http://schemas.openxmlformats.org/drawingml/2006/main">
+            <a:off x="552450" y="2333625"/>
+            <a:ext cx="619125" cy="247650"/>
           </a:xfrm>
           <a:prstGeom xmlns:a="http://schemas.openxmlformats.org/drawingml/2006/main" prst="rect">
             <a:avLst/>
@@ -17297,29 +18769,145 @@
                   <a:srgbClr val="5C5C69"/>
                 </a:solidFill>
               </a:rPr>
-              <a:t>2,000</a:t>
-            </a:r>
-          </a:p>
-        </p:txBody>
-      </p:sp>
-      <p:sp>
-        <p:nvSpPr>
-          <p:cNvPr id="14" name="case-b-control-rows">
-            <a:extLst xmlns:a="http://schemas.openxmlformats.org/drawingml/2006/main">
-              <a:ext uri="{FF2B5EF4-FFF2-40B4-BE49-F238E27FC236}">
-                <a16:creationId xmlns:a16="http://schemas.microsoft.com/office/drawing/2014/main" id="{7930C4E7-A268-4844-99B6-60D40A968446}"/>
-              </a:ext>
-            </a:extLst>
-          </p:cNvPr>
-          <p:cNvSpPr>
-            <a:spLocks xmlns:a="http://schemas.openxmlformats.org/drawingml/2006/main" noGrp="1"/>
-          </p:cNvSpPr>
-          <p:nvPr/>
-        </p:nvSpPr>
-        <p:spPr>
-          <a:xfrm xmlns:a="http://schemas.openxmlformats.org/drawingml/2006/main">
-            <a:off x="2047875" y="2828925"/>
-            <a:ext cx="857250" cy="2600325"/>
+              <a:t>80%</a:t>
+            </a:r>
+          </a:p>
+        </p:txBody>
+      </p:sp>
+      <p:sp>
+        <p:nvSpPr>
+          <p:cNvPr id="14" name="rule-130-180">
+            <a:extLst xmlns:a="http://schemas.openxmlformats.org/drawingml/2006/main">
+              <a:ext uri="{FF2B5EF4-FFF2-40B4-BE49-F238E27FC236}">
+                <a16:creationId xmlns:a16="http://schemas.microsoft.com/office/drawing/2014/main" id="{A396D074-A88C-4976-BB29-D5FC96C8E790}"/>
+              </a:ext>
+            </a:extLst>
+          </p:cNvPr>
+          <p:cNvSpPr>
+            <a:spLocks xmlns:a="http://schemas.openxmlformats.org/drawingml/2006/main" noGrp="1"/>
+          </p:cNvSpPr>
+          <p:nvPr/>
+        </p:nvSpPr>
+        <p:spPr>
+          <a:xfrm xmlns:a="http://schemas.openxmlformats.org/drawingml/2006/main">
+            <a:off x="1238250" y="1714500"/>
+            <a:ext cx="6762750" cy="9525"/>
+          </a:xfrm>
+          <a:prstGeom xmlns:a="http://schemas.openxmlformats.org/drawingml/2006/main" prst="rect">
+            <a:avLst/>
+          </a:prstGeom>
+          <a:solidFill xmlns:a="http://schemas.openxmlformats.org/drawingml/2006/main">
+            <a:srgbClr val="D9D9E6"/>
+          </a:solidFill>
+          <a:ln xmlns:a="http://schemas.openxmlformats.org/drawingml/2006/main" w="0">
+            <a:solidFill>
+              <a:srgbClr val="D9D9E6"/>
+            </a:solidFill>
+            <a:prstDash val="solid"/>
+          </a:ln>
+        </p:spPr>
+      </p:sp>
+      <p:sp>
+        <p:nvSpPr>
+          <p:cNvPr id="15" name="itt-axis-100">
+            <a:extLst xmlns:a="http://schemas.openxmlformats.org/drawingml/2006/main">
+              <a:ext uri="{FF2B5EF4-FFF2-40B4-BE49-F238E27FC236}">
+                <a16:creationId xmlns:a16="http://schemas.microsoft.com/office/drawing/2014/main" id="{7FDF5B97-132E-40C6-A21C-EB468EAAFAE7}"/>
+              </a:ext>
+            </a:extLst>
+          </p:cNvPr>
+          <p:cNvSpPr>
+            <a:spLocks xmlns:a="http://schemas.openxmlformats.org/drawingml/2006/main" noGrp="1"/>
+          </p:cNvSpPr>
+          <p:nvPr/>
+        </p:nvSpPr>
+        <p:spPr>
+          <a:xfrm xmlns:a="http://schemas.openxmlformats.org/drawingml/2006/main">
+            <a:off x="552450" y="1590675"/>
+            <a:ext cx="619125" cy="247650"/>
+          </a:xfrm>
+          <a:prstGeom xmlns:a="http://schemas.openxmlformats.org/drawingml/2006/main" prst="rect">
+            <a:avLst/>
+          </a:prstGeom>
+          <a:noFill xmlns:a="http://schemas.openxmlformats.org/drawingml/2006/main"/>
+          <a:ln xmlns:a="http://schemas.openxmlformats.org/drawingml/2006/main" w="0">
+            <a:noFill/>
+            <a:prstDash val="solid"/>
+          </a:ln>
+        </p:spPr>
+        <p:txBody>
+          <a:bodyPr xmlns:a="http://schemas.openxmlformats.org/drawingml/2006/main" anchor="t"/>
+          <a:lstStyle xmlns:a="http://schemas.openxmlformats.org/drawingml/2006/main"/>
+          <a:p xmlns:a="http://schemas.openxmlformats.org/drawingml/2006/main">
+            <a:pPr algn="r">
+              <a:defRPr sz="1050" b="0" i="0">
+                <a:solidFill>
+                  <a:srgbClr val="5C5C69"/>
+                </a:solidFill>
+              </a:defRPr>
+            </a:pPr>
+            <a:r>
+              <a:rPr sz="1050" b="0" i="0">
+                <a:solidFill>
+                  <a:srgbClr val="5C5C69"/>
+                </a:solidFill>
+              </a:rPr>
+              <a:t>100%</a:t>
+            </a:r>
+          </a:p>
+        </p:txBody>
+      </p:sp>
+      <p:sp>
+        <p:nvSpPr>
+          <p:cNvPr id="16" name="itt-control-bar">
+            <a:extLst xmlns:a="http://schemas.openxmlformats.org/drawingml/2006/main">
+              <a:ext uri="{FF2B5EF4-FFF2-40B4-BE49-F238E27FC236}">
+                <a16:creationId xmlns:a16="http://schemas.microsoft.com/office/drawing/2014/main" id="{A6330D15-8648-45E2-B5FD-DC59E8544701}"/>
+              </a:ext>
+            </a:extLst>
+          </p:cNvPr>
+          <p:cNvSpPr>
+            <a:spLocks xmlns:a="http://schemas.openxmlformats.org/drawingml/2006/main" noGrp="1"/>
+          </p:cNvSpPr>
+          <p:nvPr/>
+        </p:nvSpPr>
+        <p:spPr>
+          <a:xfrm xmlns:a="http://schemas.openxmlformats.org/drawingml/2006/main">
+            <a:off x="2476500" y="3124200"/>
+            <a:ext cx="1476375" cy="2305050"/>
+          </a:xfrm>
+          <a:prstGeom xmlns:a="http://schemas.openxmlformats.org/drawingml/2006/main" prst="rect">
+            <a:avLst/>
+          </a:prstGeom>
+          <a:solidFill xmlns:a="http://schemas.openxmlformats.org/drawingml/2006/main">
+            <a:srgbClr val="5C5C69"/>
+          </a:solidFill>
+          <a:ln xmlns:a="http://schemas.openxmlformats.org/drawingml/2006/main" w="0">
+            <a:solidFill>
+              <a:srgbClr val="5C5C69"/>
+            </a:solidFill>
+            <a:prstDash val="solid"/>
+          </a:ln>
+        </p:spPr>
+      </p:sp>
+      <p:sp>
+        <p:nvSpPr>
+          <p:cNvPr id="17" name="itt-offered-bar">
+            <a:extLst xmlns:a="http://schemas.openxmlformats.org/drawingml/2006/main">
+              <a:ext uri="{FF2B5EF4-FFF2-40B4-BE49-F238E27FC236}">
+                <a16:creationId xmlns:a16="http://schemas.microsoft.com/office/drawing/2014/main" id="{9D7BDC2E-B6DA-48D9-A551-9AE09D6E5970}"/>
+              </a:ext>
+            </a:extLst>
+          </p:cNvPr>
+          <p:cNvSpPr>
+            <a:spLocks xmlns:a="http://schemas.openxmlformats.org/drawingml/2006/main" noGrp="1"/>
+          </p:cNvSpPr>
+          <p:nvPr/>
+        </p:nvSpPr>
+        <p:spPr>
+          <a:xfrm xmlns:a="http://schemas.openxmlformats.org/drawingml/2006/main">
+            <a:off x="5286375" y="2867025"/>
+            <a:ext cx="1476375" cy="2562225"/>
           </a:xfrm>
           <a:prstGeom xmlns:a="http://schemas.openxmlformats.org/drawingml/2006/main" prst="rect">
             <a:avLst/>
@@ -17337,121 +18925,440 @@
       </p:sp>
       <p:sp>
         <p:nvSpPr>
-          <p:cNvPr id="15" name="case-b-control-applicants">
-            <a:extLst xmlns:a="http://schemas.openxmlformats.org/drawingml/2006/main">
-              <a:ext uri="{FF2B5EF4-FFF2-40B4-BE49-F238E27FC236}">
-                <a16:creationId xmlns:a16="http://schemas.microsoft.com/office/drawing/2014/main" id="{1A201C26-59F4-4A27-9A2A-C44E47A7B5A6}"/>
-              </a:ext>
-            </a:extLst>
-          </p:cNvPr>
-          <p:cNvSpPr>
-            <a:spLocks xmlns:a="http://schemas.openxmlformats.org/drawingml/2006/main" noGrp="1"/>
-          </p:cNvSpPr>
-          <p:nvPr/>
-        </p:nvSpPr>
-        <p:spPr>
-          <a:xfrm xmlns:a="http://schemas.openxmlformats.org/drawingml/2006/main">
-            <a:off x="3000375" y="2828925"/>
-            <a:ext cx="857250" cy="2600325"/>
-          </a:xfrm>
-          <a:prstGeom xmlns:a="http://schemas.openxmlformats.org/drawingml/2006/main" prst="rect">
-            <a:avLst/>
-          </a:prstGeom>
-          <a:solidFill xmlns:a="http://schemas.openxmlformats.org/drawingml/2006/main">
-            <a:srgbClr val="5C5C69"/>
-          </a:solidFill>
-          <a:ln xmlns:a="http://schemas.openxmlformats.org/drawingml/2006/main" w="0">
-            <a:solidFill>
-              <a:srgbClr val="5C5C69"/>
-            </a:solidFill>
-            <a:prstDash val="solid"/>
-          </a:ln>
-        </p:spPr>
-      </p:sp>
-      <p:sp>
-        <p:nvSpPr>
-          <p:cNvPr id="16" name="case-b-offered-rows">
-            <a:extLst xmlns:a="http://schemas.openxmlformats.org/drawingml/2006/main">
-              <a:ext uri="{FF2B5EF4-FFF2-40B4-BE49-F238E27FC236}">
-                <a16:creationId xmlns:a16="http://schemas.microsoft.com/office/drawing/2014/main" id="{38E2800A-0584-4D94-9E4F-417D036D24B9}"/>
-              </a:ext>
-            </a:extLst>
-          </p:cNvPr>
-          <p:cNvSpPr>
-            <a:spLocks xmlns:a="http://schemas.openxmlformats.org/drawingml/2006/main" noGrp="1"/>
-          </p:cNvSpPr>
-          <p:nvPr/>
-        </p:nvSpPr>
-        <p:spPr>
-          <a:xfrm xmlns:a="http://schemas.openxmlformats.org/drawingml/2006/main">
-            <a:off x="5191125" y="2085975"/>
-            <a:ext cx="857250" cy="3343275"/>
-          </a:xfrm>
-          <a:prstGeom xmlns:a="http://schemas.openxmlformats.org/drawingml/2006/main" prst="rect">
-            <a:avLst/>
-          </a:prstGeom>
-          <a:solidFill xmlns:a="http://schemas.openxmlformats.org/drawingml/2006/main">
-            <a:srgbClr val="3333B2"/>
-          </a:solidFill>
-          <a:ln xmlns:a="http://schemas.openxmlformats.org/drawingml/2006/main" w="0">
-            <a:solidFill>
-              <a:srgbClr val="3333B2"/>
-            </a:solidFill>
-            <a:prstDash val="solid"/>
-          </a:ln>
-        </p:spPr>
-      </p:sp>
-      <p:sp>
-        <p:nvSpPr>
-          <p:cNvPr id="17" name="case-b-offered-applicants">
-            <a:extLst xmlns:a="http://schemas.openxmlformats.org/drawingml/2006/main">
-              <a:ext uri="{FF2B5EF4-FFF2-40B4-BE49-F238E27FC236}">
-                <a16:creationId xmlns:a16="http://schemas.microsoft.com/office/drawing/2014/main" id="{07ED48F7-584C-4A46-ACC9-F83A86E5CBE7}"/>
-              </a:ext>
-            </a:extLst>
-          </p:cNvPr>
-          <p:cNvSpPr>
-            <a:spLocks xmlns:a="http://schemas.openxmlformats.org/drawingml/2006/main" noGrp="1"/>
-          </p:cNvSpPr>
-          <p:nvPr/>
-        </p:nvSpPr>
-        <p:spPr>
-          <a:xfrm xmlns:a="http://schemas.openxmlformats.org/drawingml/2006/main">
-            <a:off x="6143625" y="2828925"/>
-            <a:ext cx="857250" cy="2600325"/>
-          </a:xfrm>
-          <a:prstGeom xmlns:a="http://schemas.openxmlformats.org/drawingml/2006/main" prst="rect">
-            <a:avLst/>
-          </a:prstGeom>
-          <a:solidFill xmlns:a="http://schemas.openxmlformats.org/drawingml/2006/main">
-            <a:srgbClr val="5C5C69"/>
-          </a:solidFill>
-          <a:ln xmlns:a="http://schemas.openxmlformats.org/drawingml/2006/main" w="0">
-            <a:solidFill>
-              <a:srgbClr val="5C5C69"/>
-            </a:solidFill>
-            <a:prstDash val="solid"/>
-          </a:ln>
-        </p:spPr>
-      </p:sp>
-      <p:sp>
-        <p:nvSpPr>
-          <p:cNvPr id="18" name="case-b-label-cr">
-            <a:extLst xmlns:a="http://schemas.openxmlformats.org/drawingml/2006/main">
-              <a:ext uri="{FF2B5EF4-FFF2-40B4-BE49-F238E27FC236}">
-                <a16:creationId xmlns:a16="http://schemas.microsoft.com/office/drawing/2014/main" id="{A4326004-D539-4E87-9BE7-43B4A871AB33}"/>
-              </a:ext>
-            </a:extLst>
-          </p:cNvPr>
-          <p:cNvSpPr>
-            <a:spLocks xmlns:a="http://schemas.openxmlformats.org/drawingml/2006/main" noGrp="1"/>
-          </p:cNvSpPr>
-          <p:nvPr/>
-        </p:nvSpPr>
-        <p:spPr>
-          <a:xfrm xmlns:a="http://schemas.openxmlformats.org/drawingml/2006/main">
-            <a:off x="1952625" y="2505075"/>
-            <a:ext cx="1047750" cy="285750"/>
+          <p:cNvPr id="18" name="itt-control-label">
+            <a:extLst xmlns:a="http://schemas.openxmlformats.org/drawingml/2006/main">
+              <a:ext uri="{FF2B5EF4-FFF2-40B4-BE49-F238E27FC236}">
+                <a16:creationId xmlns:a16="http://schemas.microsoft.com/office/drawing/2014/main" id="{C044E42E-29D0-4BA2-A249-A8DE207ECA44}"/>
+              </a:ext>
+            </a:extLst>
+          </p:cNvPr>
+          <p:cNvSpPr>
+            <a:spLocks xmlns:a="http://schemas.openxmlformats.org/drawingml/2006/main" noGrp="1"/>
+          </p:cNvSpPr>
+          <p:nvPr/>
+        </p:nvSpPr>
+        <p:spPr>
+          <a:xfrm xmlns:a="http://schemas.openxmlformats.org/drawingml/2006/main">
+            <a:off x="2476500" y="2762250"/>
+            <a:ext cx="1476375" cy="323850"/>
+          </a:xfrm>
+          <a:prstGeom xmlns:a="http://schemas.openxmlformats.org/drawingml/2006/main" prst="rect">
+            <a:avLst/>
+          </a:prstGeom>
+          <a:noFill xmlns:a="http://schemas.openxmlformats.org/drawingml/2006/main"/>
+          <a:ln xmlns:a="http://schemas.openxmlformats.org/drawingml/2006/main" w="0">
+            <a:noFill/>
+            <a:prstDash val="solid"/>
+          </a:ln>
+        </p:spPr>
+        <p:txBody>
+          <a:bodyPr xmlns:a="http://schemas.openxmlformats.org/drawingml/2006/main" anchor="t"/>
+          <a:lstStyle xmlns:a="http://schemas.openxmlformats.org/drawingml/2006/main"/>
+          <a:p xmlns:a="http://schemas.openxmlformats.org/drawingml/2006/main">
+            <a:pPr algn="ctr">
+              <a:defRPr sz="1800" b="1" i="0">
+                <a:solidFill>
+                  <a:srgbClr val="17171C"/>
+                </a:solidFill>
+              </a:defRPr>
+            </a:pPr>
+            <a:r>
+              <a:rPr sz="1800" b="1" i="0">
+                <a:solidFill>
+                  <a:srgbClr val="17171C"/>
+                </a:solidFill>
+              </a:rPr>
+              <a:t>62%</a:t>
+            </a:r>
+          </a:p>
+        </p:txBody>
+      </p:sp>
+      <p:sp>
+        <p:nvSpPr>
+          <p:cNvPr id="19" name="itt-offered-label">
+            <a:extLst xmlns:a="http://schemas.openxmlformats.org/drawingml/2006/main">
+              <a:ext uri="{FF2B5EF4-FFF2-40B4-BE49-F238E27FC236}">
+                <a16:creationId xmlns:a16="http://schemas.microsoft.com/office/drawing/2014/main" id="{733C13FB-C454-4200-98C1-3D5F18E23999}"/>
+              </a:ext>
+            </a:extLst>
+          </p:cNvPr>
+          <p:cNvSpPr>
+            <a:spLocks xmlns:a="http://schemas.openxmlformats.org/drawingml/2006/main" noGrp="1"/>
+          </p:cNvSpPr>
+          <p:nvPr/>
+        </p:nvSpPr>
+        <p:spPr>
+          <a:xfrm xmlns:a="http://schemas.openxmlformats.org/drawingml/2006/main">
+            <a:off x="5286375" y="2505075"/>
+            <a:ext cx="1476375" cy="323850"/>
+          </a:xfrm>
+          <a:prstGeom xmlns:a="http://schemas.openxmlformats.org/drawingml/2006/main" prst="rect">
+            <a:avLst/>
+          </a:prstGeom>
+          <a:noFill xmlns:a="http://schemas.openxmlformats.org/drawingml/2006/main"/>
+          <a:ln xmlns:a="http://schemas.openxmlformats.org/drawingml/2006/main" w="0">
+            <a:noFill/>
+            <a:prstDash val="solid"/>
+          </a:ln>
+        </p:spPr>
+        <p:txBody>
+          <a:bodyPr xmlns:a="http://schemas.openxmlformats.org/drawingml/2006/main" anchor="t"/>
+          <a:lstStyle xmlns:a="http://schemas.openxmlformats.org/drawingml/2006/main"/>
+          <a:p xmlns:a="http://schemas.openxmlformats.org/drawingml/2006/main">
+            <a:pPr algn="ctr">
+              <a:defRPr sz="1800" b="1" i="0">
+                <a:solidFill>
+                  <a:srgbClr val="3333B2"/>
+                </a:solidFill>
+              </a:defRPr>
+            </a:pPr>
+            <a:r>
+              <a:rPr sz="1800" b="1" i="0">
+                <a:solidFill>
+                  <a:srgbClr val="3333B2"/>
+                </a:solidFill>
+              </a:rPr>
+              <a:t>69%</a:t>
+            </a:r>
+          </a:p>
+        </p:txBody>
+      </p:sp>
+      <p:sp>
+        <p:nvSpPr>
+          <p:cNvPr id="20" name="itt-control-category">
+            <a:extLst xmlns:a="http://schemas.openxmlformats.org/drawingml/2006/main">
+              <a:ext uri="{FF2B5EF4-FFF2-40B4-BE49-F238E27FC236}">
+                <a16:creationId xmlns:a16="http://schemas.microsoft.com/office/drawing/2014/main" id="{49CA143C-F564-4E2B-8506-9908DA512136}"/>
+              </a:ext>
+            </a:extLst>
+          </p:cNvPr>
+          <p:cNvSpPr>
+            <a:spLocks xmlns:a="http://schemas.openxmlformats.org/drawingml/2006/main" noGrp="1"/>
+          </p:cNvSpPr>
+          <p:nvPr/>
+        </p:nvSpPr>
+        <p:spPr>
+          <a:xfrm xmlns:a="http://schemas.openxmlformats.org/drawingml/2006/main">
+            <a:off x="2333625" y="5524500"/>
+            <a:ext cx="1762125" cy="323850"/>
+          </a:xfrm>
+          <a:prstGeom xmlns:a="http://schemas.openxmlformats.org/drawingml/2006/main" prst="rect">
+            <a:avLst/>
+          </a:prstGeom>
+          <a:noFill xmlns:a="http://schemas.openxmlformats.org/drawingml/2006/main"/>
+          <a:ln xmlns:a="http://schemas.openxmlformats.org/drawingml/2006/main" w="0">
+            <a:noFill/>
+            <a:prstDash val="solid"/>
+          </a:ln>
+        </p:spPr>
+        <p:txBody>
+          <a:bodyPr xmlns:a="http://schemas.openxmlformats.org/drawingml/2006/main" anchor="t"/>
+          <a:lstStyle xmlns:a="http://schemas.openxmlformats.org/drawingml/2006/main"/>
+          <a:p xmlns:a="http://schemas.openxmlformats.org/drawingml/2006/main">
+            <a:pPr algn="ctr">
+              <a:defRPr sz="1500" b="1" i="0">
+                <a:solidFill>
+                  <a:srgbClr val="17171C"/>
+                </a:solidFill>
+              </a:defRPr>
+            </a:pPr>
+            <a:r>
+              <a:rPr sz="1500" b="1" i="0">
+                <a:solidFill>
+                  <a:srgbClr val="17171C"/>
+                </a:solidFill>
+              </a:rPr>
+              <a:t>Control</a:t>
+            </a:r>
+          </a:p>
+        </p:txBody>
+      </p:sp>
+      <p:sp>
+        <p:nvSpPr>
+          <p:cNvPr id="21" name="itt-offered-category">
+            <a:extLst xmlns:a="http://schemas.openxmlformats.org/drawingml/2006/main">
+              <a:ext uri="{FF2B5EF4-FFF2-40B4-BE49-F238E27FC236}">
+                <a16:creationId xmlns:a16="http://schemas.microsoft.com/office/drawing/2014/main" id="{1E44FF40-3EE2-44CE-B600-05EBE07EADCF}"/>
+              </a:ext>
+            </a:extLst>
+          </p:cNvPr>
+          <p:cNvSpPr>
+            <a:spLocks xmlns:a="http://schemas.openxmlformats.org/drawingml/2006/main" noGrp="1"/>
+          </p:cNvSpPr>
+          <p:nvPr/>
+        </p:nvSpPr>
+        <p:spPr>
+          <a:xfrm xmlns:a="http://schemas.openxmlformats.org/drawingml/2006/main">
+            <a:off x="5143500" y="5524500"/>
+            <a:ext cx="1762125" cy="323850"/>
+          </a:xfrm>
+          <a:prstGeom xmlns:a="http://schemas.openxmlformats.org/drawingml/2006/main" prst="rect">
+            <a:avLst/>
+          </a:prstGeom>
+          <a:noFill xmlns:a="http://schemas.openxmlformats.org/drawingml/2006/main"/>
+          <a:ln xmlns:a="http://schemas.openxmlformats.org/drawingml/2006/main" w="0">
+            <a:noFill/>
+            <a:prstDash val="solid"/>
+          </a:ln>
+        </p:spPr>
+        <p:txBody>
+          <a:bodyPr xmlns:a="http://schemas.openxmlformats.org/drawingml/2006/main" anchor="t"/>
+          <a:lstStyle xmlns:a="http://schemas.openxmlformats.org/drawingml/2006/main"/>
+          <a:p xmlns:a="http://schemas.openxmlformats.org/drawingml/2006/main">
+            <a:pPr algn="ctr">
+              <a:defRPr sz="1500" b="1" i="0">
+                <a:solidFill>
+                  <a:srgbClr val="17171C"/>
+                </a:solidFill>
+              </a:defRPr>
+            </a:pPr>
+            <a:r>
+              <a:rPr sz="1500" b="1" i="0">
+                <a:solidFill>
+                  <a:srgbClr val="17171C"/>
+                </a:solidFill>
+              </a:rPr>
+              <a:t>Offered</a:t>
+            </a:r>
+          </a:p>
+        </p:txBody>
+      </p:sp>
+      <p:sp>
+        <p:nvSpPr>
+          <p:cNvPr id="22" name="itt-control-exact">
+            <a:extLst xmlns:a="http://schemas.openxmlformats.org/drawingml/2006/main">
+              <a:ext uri="{FF2B5EF4-FFF2-40B4-BE49-F238E27FC236}">
+                <a16:creationId xmlns:a16="http://schemas.microsoft.com/office/drawing/2014/main" id="{B089EA65-D659-4810-BE46-DA9A6EA1B5EE}"/>
+              </a:ext>
+            </a:extLst>
+          </p:cNvPr>
+          <p:cNvSpPr>
+            <a:spLocks xmlns:a="http://schemas.openxmlformats.org/drawingml/2006/main" noGrp="1"/>
+          </p:cNvSpPr>
+          <p:nvPr/>
+        </p:nvSpPr>
+        <p:spPr>
+          <a:xfrm xmlns:a="http://schemas.openxmlformats.org/drawingml/2006/main">
+            <a:off x="8620125" y="1695450"/>
+            <a:ext cx="2571750" cy="952500"/>
+          </a:xfrm>
+          <a:prstGeom xmlns:a="http://schemas.openxmlformats.org/drawingml/2006/main" prst="rect">
+            <a:avLst/>
+          </a:prstGeom>
+          <a:noFill xmlns:a="http://schemas.openxmlformats.org/drawingml/2006/main"/>
+          <a:ln xmlns:a="http://schemas.openxmlformats.org/drawingml/2006/main" w="0">
+            <a:noFill/>
+            <a:prstDash val="solid"/>
+          </a:ln>
+        </p:spPr>
+        <p:txBody>
+          <a:bodyPr xmlns:a="http://schemas.openxmlformats.org/drawingml/2006/main" anchor="t"/>
+          <a:lstStyle xmlns:a="http://schemas.openxmlformats.org/drawingml/2006/main"/>
+          <a:p xmlns:a="http://schemas.openxmlformats.org/drawingml/2006/main">
+            <a:pPr algn="ctr">
+              <a:defRPr sz="1725" b="1" i="0">
+                <a:solidFill>
+                  <a:srgbClr val="17171C"/>
+                </a:solidFill>
+              </a:defRPr>
+            </a:pPr>
+            <a:r>
+              <a:rPr sz="1725" b="1" i="0">
+                <a:solidFill>
+                  <a:srgbClr val="17171C"/>
+                </a:solidFill>
+              </a:rPr>
+              <a:t>Control</a:t>
+            </a:r>
+          </a:p>
+          <a:p xmlns:a="http://schemas.openxmlformats.org/drawingml/2006/main">
+            <a:pPr algn="ctr">
+              <a:defRPr sz="1725" b="1" i="0">
+                <a:solidFill>
+                  <a:srgbClr val="17171C"/>
+                </a:solidFill>
+              </a:defRPr>
+            </a:pPr>
+            <a:r>
+              <a:rPr sz="1725" b="1" i="0">
+                <a:solidFill>
+                  <a:srgbClr val="17171C"/>
+                </a:solidFill>
+              </a:rPr>
+              <a:t>930 / 1,500</a:t>
+            </a:r>
+          </a:p>
+          <a:p xmlns:a="http://schemas.openxmlformats.org/drawingml/2006/main">
+            <a:pPr algn="ctr">
+              <a:defRPr sz="1725" b="1" i="0">
+                <a:solidFill>
+                  <a:srgbClr val="17171C"/>
+                </a:solidFill>
+              </a:defRPr>
+            </a:pPr>
+            <a:r>
+              <a:rPr sz="1725" b="1" i="0">
+                <a:solidFill>
+                  <a:srgbClr val="17171C"/>
+                </a:solidFill>
+              </a:rPr>
+              <a:t>62%</a:t>
+            </a:r>
+          </a:p>
+        </p:txBody>
+      </p:sp>
+      <p:sp>
+        <p:nvSpPr>
+          <p:cNvPr id="23" name="itt-offered-exact">
+            <a:extLst xmlns:a="http://schemas.openxmlformats.org/drawingml/2006/main">
+              <a:ext uri="{FF2B5EF4-FFF2-40B4-BE49-F238E27FC236}">
+                <a16:creationId xmlns:a16="http://schemas.microsoft.com/office/drawing/2014/main" id="{B5F2B7E1-1249-4F26-ADED-C5A566ECB411}"/>
+              </a:ext>
+            </a:extLst>
+          </p:cNvPr>
+          <p:cNvSpPr>
+            <a:spLocks xmlns:a="http://schemas.openxmlformats.org/drawingml/2006/main" noGrp="1"/>
+          </p:cNvSpPr>
+          <p:nvPr/>
+        </p:nvSpPr>
+        <p:spPr>
+          <a:xfrm xmlns:a="http://schemas.openxmlformats.org/drawingml/2006/main">
+            <a:off x="8620125" y="3000375"/>
+            <a:ext cx="2571750" cy="952500"/>
+          </a:xfrm>
+          <a:prstGeom xmlns:a="http://schemas.openxmlformats.org/drawingml/2006/main" prst="rect">
+            <a:avLst/>
+          </a:prstGeom>
+          <a:noFill xmlns:a="http://schemas.openxmlformats.org/drawingml/2006/main"/>
+          <a:ln xmlns:a="http://schemas.openxmlformats.org/drawingml/2006/main" w="0">
+            <a:noFill/>
+            <a:prstDash val="solid"/>
+          </a:ln>
+        </p:spPr>
+        <p:txBody>
+          <a:bodyPr xmlns:a="http://schemas.openxmlformats.org/drawingml/2006/main" anchor="t"/>
+          <a:lstStyle xmlns:a="http://schemas.openxmlformats.org/drawingml/2006/main"/>
+          <a:p xmlns:a="http://schemas.openxmlformats.org/drawingml/2006/main">
+            <a:pPr algn="ctr">
+              <a:defRPr sz="1725" b="1" i="0">
+                <a:solidFill>
+                  <a:srgbClr val="17171C"/>
+                </a:solidFill>
+              </a:defRPr>
+            </a:pPr>
+            <a:r>
+              <a:rPr sz="1725" b="1" i="0">
+                <a:solidFill>
+                  <a:srgbClr val="17171C"/>
+                </a:solidFill>
+              </a:rPr>
+              <a:t>Offered</a:t>
+            </a:r>
+          </a:p>
+          <a:p xmlns:a="http://schemas.openxmlformats.org/drawingml/2006/main">
+            <a:pPr algn="ctr">
+              <a:defRPr sz="1725" b="1" i="0">
+                <a:solidFill>
+                  <a:srgbClr val="17171C"/>
+                </a:solidFill>
+              </a:defRPr>
+            </a:pPr>
+            <a:r>
+              <a:rPr sz="1725" b="1" i="0">
+                <a:solidFill>
+                  <a:srgbClr val="17171C"/>
+                </a:solidFill>
+              </a:rPr>
+              <a:t>1,035 / 1,500</a:t>
+            </a:r>
+          </a:p>
+          <a:p xmlns:a="http://schemas.openxmlformats.org/drawingml/2006/main">
+            <a:pPr algn="ctr">
+              <a:defRPr sz="1725" b="1" i="0">
+                <a:solidFill>
+                  <a:srgbClr val="17171C"/>
+                </a:solidFill>
+              </a:defRPr>
+            </a:pPr>
+            <a:r>
+              <a:rPr sz="1725" b="1" i="0">
+                <a:solidFill>
+                  <a:srgbClr val="17171C"/>
+                </a:solidFill>
+              </a:rPr>
+              <a:t>69%</a:t>
+            </a:r>
+          </a:p>
+        </p:txBody>
+      </p:sp>
+      <p:sp>
+        <p:nvSpPr>
+          <p:cNvPr id="24" name="itt-difference">
+            <a:extLst xmlns:a="http://schemas.openxmlformats.org/drawingml/2006/main">
+              <a:ext uri="{FF2B5EF4-FFF2-40B4-BE49-F238E27FC236}">
+                <a16:creationId xmlns:a16="http://schemas.microsoft.com/office/drawing/2014/main" id="{7E9F1893-9E4E-432B-BF60-3BF7254B5BF6}"/>
+              </a:ext>
+            </a:extLst>
+          </p:cNvPr>
+          <p:cNvSpPr>
+            <a:spLocks xmlns:a="http://schemas.openxmlformats.org/drawingml/2006/main" noGrp="1"/>
+          </p:cNvSpPr>
+          <p:nvPr/>
+        </p:nvSpPr>
+        <p:spPr>
+          <a:xfrm xmlns:a="http://schemas.openxmlformats.org/drawingml/2006/main">
+            <a:off x="8620125" y="4476750"/>
+            <a:ext cx="2571750" cy="523875"/>
+          </a:xfrm>
+          <a:prstGeom xmlns:a="http://schemas.openxmlformats.org/drawingml/2006/main" prst="rect">
+            <a:avLst/>
+          </a:prstGeom>
+          <a:noFill xmlns:a="http://schemas.openxmlformats.org/drawingml/2006/main"/>
+          <a:ln xmlns:a="http://schemas.openxmlformats.org/drawingml/2006/main" w="0">
+            <a:noFill/>
+            <a:prstDash val="solid"/>
+          </a:ln>
+        </p:spPr>
+        <p:txBody>
+          <a:bodyPr xmlns:a="http://schemas.openxmlformats.org/drawingml/2006/main" anchor="t"/>
+          <a:lstStyle xmlns:a="http://schemas.openxmlformats.org/drawingml/2006/main"/>
+          <a:p xmlns:a="http://schemas.openxmlformats.org/drawingml/2006/main">
+            <a:pPr algn="ctr">
+              <a:defRPr sz="2400" b="1" i="0">
+                <a:solidFill>
+                  <a:srgbClr val="BF0040"/>
+                </a:solidFill>
+              </a:defRPr>
+            </a:pPr>
+            <a:r>
+              <a:rPr sz="2400" b="1" i="0">
+                <a:solidFill>
+                  <a:srgbClr val="BF0040"/>
+                </a:solidFill>
+              </a:rPr>
+              <a:t>ITT  +7 pp</a:t>
+            </a:r>
+          </a:p>
+        </p:txBody>
+      </p:sp>
+      <p:sp>
+        <p:nvSpPr>
+          <p:cNvPr id="25" name="itt-note">
+            <a:extLst xmlns:a="http://schemas.openxmlformats.org/drawingml/2006/main">
+              <a:ext uri="{FF2B5EF4-FFF2-40B4-BE49-F238E27FC236}">
+                <a16:creationId xmlns:a16="http://schemas.microsoft.com/office/drawing/2014/main" id="{963B97AE-2D61-4488-AF56-1420AAA8F6E0}"/>
+              </a:ext>
+            </a:extLst>
+          </p:cNvPr>
+          <p:cNvSpPr>
+            <a:spLocks xmlns:a="http://schemas.openxmlformats.org/drawingml/2006/main" noGrp="1"/>
+          </p:cNvSpPr>
+          <p:nvPr/>
+        </p:nvSpPr>
+        <p:spPr>
+          <a:xfrm xmlns:a="http://schemas.openxmlformats.org/drawingml/2006/main">
+            <a:off x="8286750" y="5200650"/>
+            <a:ext cx="3238500" cy="571500"/>
           </a:xfrm>
           <a:prstGeom xmlns:a="http://schemas.openxmlformats.org/drawingml/2006/main" prst="rect">
             <a:avLst/>
@@ -17469,651 +19376,34 @@
             <a:pPr algn="ctr">
               <a:defRPr sz="1350" b="1" i="0">
                 <a:solidFill>
-                  <a:srgbClr val="17171C"/>
+                  <a:srgbClr val="FF0000"/>
                 </a:solidFill>
               </a:defRPr>
             </a:pPr>
             <a:r>
               <a:rPr sz="1350" b="1" i="0">
                 <a:solidFill>
-                  <a:srgbClr val="17171C"/>
-                </a:solidFill>
-              </a:rPr>
-              <a:t>1,500</a:t>
-            </a:r>
-          </a:p>
-        </p:txBody>
-      </p:sp>
-      <p:sp>
-        <p:nvSpPr>
-          <p:cNvPr id="19" name="case-b-label-ca">
-            <a:extLst xmlns:a="http://schemas.openxmlformats.org/drawingml/2006/main">
-              <a:ext uri="{FF2B5EF4-FFF2-40B4-BE49-F238E27FC236}">
-                <a16:creationId xmlns:a16="http://schemas.microsoft.com/office/drawing/2014/main" id="{CD4DCB79-3EEE-48DF-AF1F-B827CF8C1283}"/>
-              </a:ext>
-            </a:extLst>
-          </p:cNvPr>
-          <p:cNvSpPr>
-            <a:spLocks xmlns:a="http://schemas.openxmlformats.org/drawingml/2006/main" noGrp="1"/>
-          </p:cNvSpPr>
-          <p:nvPr/>
-        </p:nvSpPr>
-        <p:spPr>
-          <a:xfrm xmlns:a="http://schemas.openxmlformats.org/drawingml/2006/main">
-            <a:off x="2905125" y="2505075"/>
-            <a:ext cx="1047750" cy="285750"/>
-          </a:xfrm>
-          <a:prstGeom xmlns:a="http://schemas.openxmlformats.org/drawingml/2006/main" prst="rect">
-            <a:avLst/>
-          </a:prstGeom>
-          <a:noFill xmlns:a="http://schemas.openxmlformats.org/drawingml/2006/main"/>
-          <a:ln xmlns:a="http://schemas.openxmlformats.org/drawingml/2006/main" w="0">
-            <a:noFill/>
-            <a:prstDash val="solid"/>
-          </a:ln>
-        </p:spPr>
-        <p:txBody>
-          <a:bodyPr xmlns:a="http://schemas.openxmlformats.org/drawingml/2006/main" anchor="t"/>
-          <a:lstStyle xmlns:a="http://schemas.openxmlformats.org/drawingml/2006/main"/>
+                  <a:srgbClr val="FF0000"/>
+                </a:solidFill>
+              </a:rPr>
+              <a:t>Inherited +5.6 pp uses a different unit</a:t>
+            </a:r>
+          </a:p>
           <a:p xmlns:a="http://schemas.openxmlformats.org/drawingml/2006/main">
             <a:pPr algn="ctr">
               <a:defRPr sz="1350" b="1" i="0">
                 <a:solidFill>
-                  <a:srgbClr val="17171C"/>
+                  <a:srgbClr val="FF0000"/>
                 </a:solidFill>
               </a:defRPr>
             </a:pPr>
             <a:r>
               <a:rPr sz="1350" b="1" i="0">
                 <a:solidFill>
-                  <a:srgbClr val="17171C"/>
-                </a:solidFill>
-              </a:rPr>
-              <a:t>1,500</a:t>
-            </a:r>
-          </a:p>
-        </p:txBody>
-      </p:sp>
-      <p:sp>
-        <p:nvSpPr>
-          <p:cNvPr id="20" name="case-b-label-or">
-            <a:extLst xmlns:a="http://schemas.openxmlformats.org/drawingml/2006/main">
-              <a:ext uri="{FF2B5EF4-FFF2-40B4-BE49-F238E27FC236}">
-                <a16:creationId xmlns:a16="http://schemas.microsoft.com/office/drawing/2014/main" id="{ADF21B9D-DCD3-412C-9B8A-EB0A29D60A8D}"/>
-              </a:ext>
-            </a:extLst>
-          </p:cNvPr>
-          <p:cNvSpPr>
-            <a:spLocks xmlns:a="http://schemas.openxmlformats.org/drawingml/2006/main" noGrp="1"/>
-          </p:cNvSpPr>
-          <p:nvPr/>
-        </p:nvSpPr>
-        <p:spPr>
-          <a:xfrm xmlns:a="http://schemas.openxmlformats.org/drawingml/2006/main">
-            <a:off x="5095875" y="1762125"/>
-            <a:ext cx="1047750" cy="285750"/>
-          </a:xfrm>
-          <a:prstGeom xmlns:a="http://schemas.openxmlformats.org/drawingml/2006/main" prst="rect">
-            <a:avLst/>
-          </a:prstGeom>
-          <a:noFill xmlns:a="http://schemas.openxmlformats.org/drawingml/2006/main"/>
-          <a:ln xmlns:a="http://schemas.openxmlformats.org/drawingml/2006/main" w="0">
-            <a:noFill/>
-            <a:prstDash val="solid"/>
-          </a:ln>
-        </p:spPr>
-        <p:txBody>
-          <a:bodyPr xmlns:a="http://schemas.openxmlformats.org/drawingml/2006/main" anchor="t"/>
-          <a:lstStyle xmlns:a="http://schemas.openxmlformats.org/drawingml/2006/main"/>
-          <a:p xmlns:a="http://schemas.openxmlformats.org/drawingml/2006/main">
-            <a:pPr algn="ctr">
-              <a:defRPr sz="1350" b="1" i="0">
-                <a:solidFill>
-                  <a:srgbClr val="3333B2"/>
-                </a:solidFill>
-              </a:defRPr>
-            </a:pPr>
-            <a:r>
-              <a:rPr sz="1350" b="1" i="0">
-                <a:solidFill>
-                  <a:srgbClr val="3333B2"/>
-                </a:solidFill>
-              </a:rPr>
-              <a:t>1,930</a:t>
-            </a:r>
-          </a:p>
-        </p:txBody>
-      </p:sp>
-      <p:sp>
-        <p:nvSpPr>
-          <p:cNvPr id="21" name="case-b-label-oa">
-            <a:extLst xmlns:a="http://schemas.openxmlformats.org/drawingml/2006/main">
-              <a:ext uri="{FF2B5EF4-FFF2-40B4-BE49-F238E27FC236}">
-                <a16:creationId xmlns:a16="http://schemas.microsoft.com/office/drawing/2014/main" id="{9B0278A4-6567-4EA0-BCCC-FB04D06EDDDE}"/>
-              </a:ext>
-            </a:extLst>
-          </p:cNvPr>
-          <p:cNvSpPr>
-            <a:spLocks xmlns:a="http://schemas.openxmlformats.org/drawingml/2006/main" noGrp="1"/>
-          </p:cNvSpPr>
-          <p:nvPr/>
-        </p:nvSpPr>
-        <p:spPr>
-          <a:xfrm xmlns:a="http://schemas.openxmlformats.org/drawingml/2006/main">
-            <a:off x="6048375" y="2505075"/>
-            <a:ext cx="1047750" cy="285750"/>
-          </a:xfrm>
-          <a:prstGeom xmlns:a="http://schemas.openxmlformats.org/drawingml/2006/main" prst="rect">
-            <a:avLst/>
-          </a:prstGeom>
-          <a:noFill xmlns:a="http://schemas.openxmlformats.org/drawingml/2006/main"/>
-          <a:ln xmlns:a="http://schemas.openxmlformats.org/drawingml/2006/main" w="0">
-            <a:noFill/>
-            <a:prstDash val="solid"/>
-          </a:ln>
-        </p:spPr>
-        <p:txBody>
-          <a:bodyPr xmlns:a="http://schemas.openxmlformats.org/drawingml/2006/main" anchor="t"/>
-          <a:lstStyle xmlns:a="http://schemas.openxmlformats.org/drawingml/2006/main"/>
-          <a:p xmlns:a="http://schemas.openxmlformats.org/drawingml/2006/main">
-            <a:pPr algn="ctr">
-              <a:defRPr sz="1350" b="1" i="0">
-                <a:solidFill>
-                  <a:srgbClr val="17171C"/>
-                </a:solidFill>
-              </a:defRPr>
-            </a:pPr>
-            <a:r>
-              <a:rPr sz="1350" b="1" i="0">
-                <a:solidFill>
-                  <a:srgbClr val="17171C"/>
-                </a:solidFill>
-              </a:rPr>
-              <a:t>1,500</a:t>
-            </a:r>
-          </a:p>
-        </p:txBody>
-      </p:sp>
-      <p:sp>
-        <p:nvSpPr>
-          <p:cNvPr id="22" name="case-b-control-category">
-            <a:extLst xmlns:a="http://schemas.openxmlformats.org/drawingml/2006/main">
-              <a:ext uri="{FF2B5EF4-FFF2-40B4-BE49-F238E27FC236}">
-                <a16:creationId xmlns:a16="http://schemas.microsoft.com/office/drawing/2014/main" id="{30E99DB8-9788-4B3A-AE5D-FEB3C608CF85}"/>
-              </a:ext>
-            </a:extLst>
-          </p:cNvPr>
-          <p:cNvSpPr>
-            <a:spLocks xmlns:a="http://schemas.openxmlformats.org/drawingml/2006/main" noGrp="1"/>
-          </p:cNvSpPr>
-          <p:nvPr/>
-        </p:nvSpPr>
-        <p:spPr>
-          <a:xfrm xmlns:a="http://schemas.openxmlformats.org/drawingml/2006/main">
-            <a:off x="2000250" y="5524500"/>
-            <a:ext cx="1905000" cy="304800"/>
-          </a:xfrm>
-          <a:prstGeom xmlns:a="http://schemas.openxmlformats.org/drawingml/2006/main" prst="rect">
-            <a:avLst/>
-          </a:prstGeom>
-          <a:noFill xmlns:a="http://schemas.openxmlformats.org/drawingml/2006/main"/>
-          <a:ln xmlns:a="http://schemas.openxmlformats.org/drawingml/2006/main" w="0">
-            <a:noFill/>
-            <a:prstDash val="solid"/>
-          </a:ln>
-        </p:spPr>
-        <p:txBody>
-          <a:bodyPr xmlns:a="http://schemas.openxmlformats.org/drawingml/2006/main" anchor="t"/>
-          <a:lstStyle xmlns:a="http://schemas.openxmlformats.org/drawingml/2006/main"/>
-          <a:p xmlns:a="http://schemas.openxmlformats.org/drawingml/2006/main">
-            <a:pPr algn="ctr">
-              <a:defRPr sz="1500" b="1" i="0">
-                <a:solidFill>
-                  <a:srgbClr val="17171C"/>
-                </a:solidFill>
-              </a:defRPr>
-            </a:pPr>
-            <a:r>
-              <a:rPr sz="1500" b="1" i="0">
-                <a:solidFill>
-                  <a:srgbClr val="17171C"/>
-                </a:solidFill>
-              </a:rPr>
-              <a:t>Control</a:t>
-            </a:r>
-          </a:p>
-        </p:txBody>
-      </p:sp>
-      <p:sp>
-        <p:nvSpPr>
-          <p:cNvPr id="23" name="case-b-offered-category">
-            <a:extLst xmlns:a="http://schemas.openxmlformats.org/drawingml/2006/main">
-              <a:ext uri="{FF2B5EF4-FFF2-40B4-BE49-F238E27FC236}">
-                <a16:creationId xmlns:a16="http://schemas.microsoft.com/office/drawing/2014/main" id="{0EFBB698-F1FB-4853-8A2F-967C59684A28}"/>
-              </a:ext>
-            </a:extLst>
-          </p:cNvPr>
-          <p:cNvSpPr>
-            <a:spLocks xmlns:a="http://schemas.openxmlformats.org/drawingml/2006/main" noGrp="1"/>
-          </p:cNvSpPr>
-          <p:nvPr/>
-        </p:nvSpPr>
-        <p:spPr>
-          <a:xfrm xmlns:a="http://schemas.openxmlformats.org/drawingml/2006/main">
-            <a:off x="5143500" y="5524500"/>
-            <a:ext cx="1905000" cy="304800"/>
-          </a:xfrm>
-          <a:prstGeom xmlns:a="http://schemas.openxmlformats.org/drawingml/2006/main" prst="rect">
-            <a:avLst/>
-          </a:prstGeom>
-          <a:noFill xmlns:a="http://schemas.openxmlformats.org/drawingml/2006/main"/>
-          <a:ln xmlns:a="http://schemas.openxmlformats.org/drawingml/2006/main" w="0">
-            <a:noFill/>
-            <a:prstDash val="solid"/>
-          </a:ln>
-        </p:spPr>
-        <p:txBody>
-          <a:bodyPr xmlns:a="http://schemas.openxmlformats.org/drawingml/2006/main" anchor="t"/>
-          <a:lstStyle xmlns:a="http://schemas.openxmlformats.org/drawingml/2006/main"/>
-          <a:p xmlns:a="http://schemas.openxmlformats.org/drawingml/2006/main">
-            <a:pPr algn="ctr">
-              <a:defRPr sz="1500" b="1" i="0">
-                <a:solidFill>
-                  <a:srgbClr val="17171C"/>
-                </a:solidFill>
-              </a:defRPr>
-            </a:pPr>
-            <a:r>
-              <a:rPr sz="1500" b="1" i="0">
-                <a:solidFill>
-                  <a:srgbClr val="17171C"/>
-                </a:solidFill>
-              </a:rPr>
-              <a:t>Offered</a:t>
-            </a:r>
-          </a:p>
-        </p:txBody>
-      </p:sp>
-      <p:sp>
-        <p:nvSpPr>
-          <p:cNvPr id="24" name="case-b-legend-rows">
-            <a:extLst xmlns:a="http://schemas.openxmlformats.org/drawingml/2006/main">
-              <a:ext uri="{FF2B5EF4-FFF2-40B4-BE49-F238E27FC236}">
-                <a16:creationId xmlns:a16="http://schemas.microsoft.com/office/drawing/2014/main" id="{68EF5BBC-0E16-4D24-9C6C-F38936257E18}"/>
-              </a:ext>
-            </a:extLst>
-          </p:cNvPr>
-          <p:cNvSpPr>
-            <a:spLocks xmlns:a="http://schemas.openxmlformats.org/drawingml/2006/main" noGrp="1"/>
-          </p:cNvSpPr>
-          <p:nvPr/>
-        </p:nvSpPr>
-        <p:spPr>
-          <a:xfrm xmlns:a="http://schemas.openxmlformats.org/drawingml/2006/main">
-            <a:off x="2000250" y="5905500"/>
-            <a:ext cx="190500" cy="190500"/>
-          </a:xfrm>
-          <a:prstGeom xmlns:a="http://schemas.openxmlformats.org/drawingml/2006/main" prst="rect">
-            <a:avLst/>
-          </a:prstGeom>
-          <a:solidFill xmlns:a="http://schemas.openxmlformats.org/drawingml/2006/main">
-            <a:srgbClr val="3333B2"/>
-          </a:solidFill>
-          <a:ln xmlns:a="http://schemas.openxmlformats.org/drawingml/2006/main" w="0">
-            <a:solidFill>
-              <a:srgbClr val="3333B2"/>
-            </a:solidFill>
-            <a:prstDash val="solid"/>
-          </a:ln>
-        </p:spPr>
-      </p:sp>
-      <p:sp>
-        <p:nvSpPr>
-          <p:cNvPr id="25" name="case-b-legend-rows-label">
-            <a:extLst xmlns:a="http://schemas.openxmlformats.org/drawingml/2006/main">
-              <a:ext uri="{FF2B5EF4-FFF2-40B4-BE49-F238E27FC236}">
-                <a16:creationId xmlns:a16="http://schemas.microsoft.com/office/drawing/2014/main" id="{31347F0A-320B-418C-95E8-4DD0425CA36D}"/>
-              </a:ext>
-            </a:extLst>
-          </p:cNvPr>
-          <p:cNvSpPr>
-            <a:spLocks xmlns:a="http://schemas.openxmlformats.org/drawingml/2006/main" noGrp="1"/>
-          </p:cNvSpPr>
-          <p:nvPr/>
-        </p:nvSpPr>
-        <p:spPr>
-          <a:xfrm xmlns:a="http://schemas.openxmlformats.org/drawingml/2006/main">
-            <a:off x="2266950" y="5876925"/>
-            <a:ext cx="952500" cy="266700"/>
-          </a:xfrm>
-          <a:prstGeom xmlns:a="http://schemas.openxmlformats.org/drawingml/2006/main" prst="rect">
-            <a:avLst/>
-          </a:prstGeom>
-          <a:noFill xmlns:a="http://schemas.openxmlformats.org/drawingml/2006/main"/>
-          <a:ln xmlns:a="http://schemas.openxmlformats.org/drawingml/2006/main" w="0">
-            <a:noFill/>
-            <a:prstDash val="solid"/>
-          </a:ln>
-        </p:spPr>
-        <p:txBody>
-          <a:bodyPr xmlns:a="http://schemas.openxmlformats.org/drawingml/2006/main" anchor="t"/>
-          <a:lstStyle xmlns:a="http://schemas.openxmlformats.org/drawingml/2006/main"/>
-          <a:p xmlns:a="http://schemas.openxmlformats.org/drawingml/2006/main">
-            <a:pPr algn="l">
-              <a:defRPr sz="1200" b="0" i="0">
-                <a:solidFill>
-                  <a:srgbClr val="17171C"/>
-                </a:solidFill>
-              </a:defRPr>
-            </a:pPr>
-            <a:r>
-              <a:rPr sz="1200" b="0" i="0">
-                <a:solidFill>
-                  <a:srgbClr val="17171C"/>
-                </a:solidFill>
-              </a:rPr>
-              <a:t>Rows</a:t>
-            </a:r>
-          </a:p>
-        </p:txBody>
-      </p:sp>
-      <p:sp>
-        <p:nvSpPr>
-          <p:cNvPr id="26" name="case-b-legend-applicants">
-            <a:extLst xmlns:a="http://schemas.openxmlformats.org/drawingml/2006/main">
-              <a:ext uri="{FF2B5EF4-FFF2-40B4-BE49-F238E27FC236}">
-                <a16:creationId xmlns:a16="http://schemas.microsoft.com/office/drawing/2014/main" id="{89C6D345-5823-4CBF-A34F-FBC38708C53D}"/>
-              </a:ext>
-            </a:extLst>
-          </p:cNvPr>
-          <p:cNvSpPr>
-            <a:spLocks xmlns:a="http://schemas.openxmlformats.org/drawingml/2006/main" noGrp="1"/>
-          </p:cNvSpPr>
-          <p:nvPr/>
-        </p:nvSpPr>
-        <p:spPr>
-          <a:xfrm xmlns:a="http://schemas.openxmlformats.org/drawingml/2006/main">
-            <a:off x="3381375" y="5905500"/>
-            <a:ext cx="190500" cy="190500"/>
-          </a:xfrm>
-          <a:prstGeom xmlns:a="http://schemas.openxmlformats.org/drawingml/2006/main" prst="rect">
-            <a:avLst/>
-          </a:prstGeom>
-          <a:solidFill xmlns:a="http://schemas.openxmlformats.org/drawingml/2006/main">
-            <a:srgbClr val="5C5C69"/>
-          </a:solidFill>
-          <a:ln xmlns:a="http://schemas.openxmlformats.org/drawingml/2006/main" w="0">
-            <a:solidFill>
-              <a:srgbClr val="5C5C69"/>
-            </a:solidFill>
-            <a:prstDash val="solid"/>
-          </a:ln>
-        </p:spPr>
-      </p:sp>
-      <p:sp>
-        <p:nvSpPr>
-          <p:cNvPr id="27" name="case-b-legend-applicants-label">
-            <a:extLst xmlns:a="http://schemas.openxmlformats.org/drawingml/2006/main">
-              <a:ext uri="{FF2B5EF4-FFF2-40B4-BE49-F238E27FC236}">
-                <a16:creationId xmlns:a16="http://schemas.microsoft.com/office/drawing/2014/main" id="{40DD7461-A2A8-4CBE-9EED-9CCC367F20A5}"/>
-              </a:ext>
-            </a:extLst>
-          </p:cNvPr>
-          <p:cNvSpPr>
-            <a:spLocks xmlns:a="http://schemas.openxmlformats.org/drawingml/2006/main" noGrp="1"/>
-          </p:cNvSpPr>
-          <p:nvPr/>
-        </p:nvSpPr>
-        <p:spPr>
-          <a:xfrm xmlns:a="http://schemas.openxmlformats.org/drawingml/2006/main">
-            <a:off x="3648075" y="5876925"/>
-            <a:ext cx="1905000" cy="266700"/>
-          </a:xfrm>
-          <a:prstGeom xmlns:a="http://schemas.openxmlformats.org/drawingml/2006/main" prst="rect">
-            <a:avLst/>
-          </a:prstGeom>
-          <a:noFill xmlns:a="http://schemas.openxmlformats.org/drawingml/2006/main"/>
-          <a:ln xmlns:a="http://schemas.openxmlformats.org/drawingml/2006/main" w="0">
-            <a:noFill/>
-            <a:prstDash val="solid"/>
-          </a:ln>
-        </p:spPr>
-        <p:txBody>
-          <a:bodyPr xmlns:a="http://schemas.openxmlformats.org/drawingml/2006/main" anchor="t"/>
-          <a:lstStyle xmlns:a="http://schemas.openxmlformats.org/drawingml/2006/main"/>
-          <a:p xmlns:a="http://schemas.openxmlformats.org/drawingml/2006/main">
-            <a:pPr algn="l">
-              <a:defRPr sz="1200" b="0" i="0">
-                <a:solidFill>
-                  <a:srgbClr val="17171C"/>
-                </a:solidFill>
-              </a:defRPr>
-            </a:pPr>
-            <a:r>
-              <a:rPr sz="1200" b="0" i="0">
-                <a:solidFill>
-                  <a:srgbClr val="17171C"/>
-                </a:solidFill>
-              </a:rPr>
-              <a:t>Unique applicants</a:t>
-            </a:r>
-          </a:p>
-        </p:txBody>
-      </p:sp>
-      <p:sp>
-        <p:nvSpPr>
-          <p:cNvPr id="28" name="control-exact">
-            <a:extLst xmlns:a="http://schemas.openxmlformats.org/drawingml/2006/main">
-              <a:ext uri="{FF2B5EF4-FFF2-40B4-BE49-F238E27FC236}">
-                <a16:creationId xmlns:a16="http://schemas.microsoft.com/office/drawing/2014/main" id="{95C73E42-411C-434E-A711-1D1A46A36595}"/>
-              </a:ext>
-            </a:extLst>
-          </p:cNvPr>
-          <p:cNvSpPr>
-            <a:spLocks xmlns:a="http://schemas.openxmlformats.org/drawingml/2006/main" noGrp="1"/>
-          </p:cNvSpPr>
-          <p:nvPr/>
-        </p:nvSpPr>
-        <p:spPr>
-          <a:xfrm xmlns:a="http://schemas.openxmlformats.org/drawingml/2006/main">
-            <a:off x="8620125" y="1714500"/>
-            <a:ext cx="2571750" cy="952500"/>
-          </a:xfrm>
-          <a:prstGeom xmlns:a="http://schemas.openxmlformats.org/drawingml/2006/main" prst="rect">
-            <a:avLst/>
-          </a:prstGeom>
-          <a:noFill xmlns:a="http://schemas.openxmlformats.org/drawingml/2006/main"/>
-          <a:ln xmlns:a="http://schemas.openxmlformats.org/drawingml/2006/main" w="0">
-            <a:noFill/>
-            <a:prstDash val="solid"/>
-          </a:ln>
-        </p:spPr>
-        <p:txBody>
-          <a:bodyPr xmlns:a="http://schemas.openxmlformats.org/drawingml/2006/main" anchor="t"/>
-          <a:lstStyle xmlns:a="http://schemas.openxmlformats.org/drawingml/2006/main"/>
-          <a:p xmlns:a="http://schemas.openxmlformats.org/drawingml/2006/main">
-            <a:pPr algn="ctr">
-              <a:defRPr sz="1650" b="1" i="0">
-                <a:solidFill>
-                  <a:srgbClr val="17171C"/>
-                </a:solidFill>
-              </a:defRPr>
-            </a:pPr>
-            <a:r>
-              <a:rPr sz="1650" b="1" i="0">
-                <a:solidFill>
-                  <a:srgbClr val="17171C"/>
-                </a:solidFill>
-              </a:rPr>
-              <a:t>CONTROL</a:t>
-            </a:r>
-          </a:p>
-          <a:p xmlns:a="http://schemas.openxmlformats.org/drawingml/2006/main">
-            <a:pPr algn="ctr">
-              <a:defRPr sz="1650" b="1" i="0">
-                <a:solidFill>
-                  <a:srgbClr val="17171C"/>
-                </a:solidFill>
-              </a:defRPr>
-            </a:pPr>
-            <a:r>
-              <a:rPr sz="1650" b="1" i="0">
-                <a:solidFill>
-                  <a:srgbClr val="17171C"/>
-                </a:solidFill>
-              </a:rPr>
-              <a:t>1,500 rows</a:t>
-            </a:r>
-          </a:p>
-          <a:p xmlns:a="http://schemas.openxmlformats.org/drawingml/2006/main">
-            <a:pPr algn="ctr">
-              <a:defRPr sz="1650" b="1" i="0">
-                <a:solidFill>
-                  <a:srgbClr val="17171C"/>
-                </a:solidFill>
-              </a:defRPr>
-            </a:pPr>
-            <a:r>
-              <a:rPr sz="1650" b="1" i="0">
-                <a:solidFill>
-                  <a:srgbClr val="17171C"/>
-                </a:solidFill>
-              </a:rPr>
-              <a:t>1,500 applicants</a:t>
-            </a:r>
-          </a:p>
-        </p:txBody>
-      </p:sp>
-      <p:sp>
-        <p:nvSpPr>
-          <p:cNvPr id="29" name="offered-exact">
-            <a:extLst xmlns:a="http://schemas.openxmlformats.org/drawingml/2006/main">
-              <a:ext uri="{FF2B5EF4-FFF2-40B4-BE49-F238E27FC236}">
-                <a16:creationId xmlns:a16="http://schemas.microsoft.com/office/drawing/2014/main" id="{596B7777-D0C4-49FA-861D-C66098BB50E1}"/>
-              </a:ext>
-            </a:extLst>
-          </p:cNvPr>
-          <p:cNvSpPr>
-            <a:spLocks xmlns:a="http://schemas.openxmlformats.org/drawingml/2006/main" noGrp="1"/>
-          </p:cNvSpPr>
-          <p:nvPr/>
-        </p:nvSpPr>
-        <p:spPr>
-          <a:xfrm xmlns:a="http://schemas.openxmlformats.org/drawingml/2006/main">
-            <a:off x="8620125" y="3048000"/>
-            <a:ext cx="2571750" cy="952500"/>
-          </a:xfrm>
-          <a:prstGeom xmlns:a="http://schemas.openxmlformats.org/drawingml/2006/main" prst="rect">
-            <a:avLst/>
-          </a:prstGeom>
-          <a:noFill xmlns:a="http://schemas.openxmlformats.org/drawingml/2006/main"/>
-          <a:ln xmlns:a="http://schemas.openxmlformats.org/drawingml/2006/main" w="0">
-            <a:noFill/>
-            <a:prstDash val="solid"/>
-          </a:ln>
-        </p:spPr>
-        <p:txBody>
-          <a:bodyPr xmlns:a="http://schemas.openxmlformats.org/drawingml/2006/main" anchor="t"/>
-          <a:lstStyle xmlns:a="http://schemas.openxmlformats.org/drawingml/2006/main"/>
-          <a:p xmlns:a="http://schemas.openxmlformats.org/drawingml/2006/main">
-            <a:pPr algn="ctr">
-              <a:defRPr sz="1650" b="1" i="0">
-                <a:solidFill>
-                  <a:srgbClr val="17171C"/>
-                </a:solidFill>
-              </a:defRPr>
-            </a:pPr>
-            <a:r>
-              <a:rPr sz="1650" b="1" i="0">
-                <a:solidFill>
-                  <a:srgbClr val="17171C"/>
-                </a:solidFill>
-              </a:rPr>
-              <a:t>OFFERED</a:t>
-            </a:r>
-          </a:p>
-          <a:p xmlns:a="http://schemas.openxmlformats.org/drawingml/2006/main">
-            <a:pPr algn="ctr">
-              <a:defRPr sz="1650" b="1" i="0">
-                <a:solidFill>
-                  <a:srgbClr val="17171C"/>
-                </a:solidFill>
-              </a:defRPr>
-            </a:pPr>
-            <a:r>
-              <a:rPr sz="1650" b="1" i="0">
-                <a:solidFill>
-                  <a:srgbClr val="17171C"/>
-                </a:solidFill>
-              </a:rPr>
-              <a:t>1,930 rows</a:t>
-            </a:r>
-          </a:p>
-          <a:p xmlns:a="http://schemas.openxmlformats.org/drawingml/2006/main">
-            <a:pPr algn="ctr">
-              <a:defRPr sz="1650" b="1" i="0">
-                <a:solidFill>
-                  <a:srgbClr val="17171C"/>
-                </a:solidFill>
-              </a:defRPr>
-            </a:pPr>
-            <a:r>
-              <a:rPr sz="1650" b="1" i="0">
-                <a:solidFill>
-                  <a:srgbClr val="17171C"/>
-                </a:solidFill>
-              </a:rPr>
-              <a:t>1,500 applicants</a:t>
-            </a:r>
-          </a:p>
-        </p:txBody>
-      </p:sp>
-      <p:sp>
-        <p:nvSpPr>
-          <p:cNvPr id="30" name="excess">
-            <a:extLst xmlns:a="http://schemas.openxmlformats.org/drawingml/2006/main">
-              <a:ext uri="{FF2B5EF4-FFF2-40B4-BE49-F238E27FC236}">
-                <a16:creationId xmlns:a16="http://schemas.microsoft.com/office/drawing/2014/main" id="{B6126467-9296-46DD-9173-67D3B10EACB5}"/>
-              </a:ext>
-            </a:extLst>
-          </p:cNvPr>
-          <p:cNvSpPr>
-            <a:spLocks xmlns:a="http://schemas.openxmlformats.org/drawingml/2006/main" noGrp="1"/>
-          </p:cNvSpPr>
-          <p:nvPr/>
-        </p:nvSpPr>
-        <p:spPr>
-          <a:xfrm xmlns:a="http://schemas.openxmlformats.org/drawingml/2006/main">
-            <a:off x="8620125" y="4629150"/>
-            <a:ext cx="2571750" cy="523875"/>
-          </a:xfrm>
-          <a:prstGeom xmlns:a="http://schemas.openxmlformats.org/drawingml/2006/main" prst="rect">
-            <a:avLst/>
-          </a:prstGeom>
-          <a:noFill xmlns:a="http://schemas.openxmlformats.org/drawingml/2006/main"/>
-          <a:ln xmlns:a="http://schemas.openxmlformats.org/drawingml/2006/main" w="0">
-            <a:noFill/>
-            <a:prstDash val="solid"/>
-          </a:ln>
-        </p:spPr>
-        <p:txBody>
-          <a:bodyPr xmlns:a="http://schemas.openxmlformats.org/drawingml/2006/main" anchor="t"/>
-          <a:lstStyle xmlns:a="http://schemas.openxmlformats.org/drawingml/2006/main"/>
-          <a:p xmlns:a="http://schemas.openxmlformats.org/drawingml/2006/main">
-            <a:pPr algn="ctr">
-              <a:defRPr sz="2175" b="1" i="0">
-                <a:solidFill>
                   <a:srgbClr val="FF0000"/>
                 </a:solidFill>
-              </a:defRPr>
-            </a:pPr>
-            <a:r>
-              <a:rPr sz="2175" b="1" i="0">
-                <a:solidFill>
-                  <a:srgbClr val="FF0000"/>
-                </a:solidFill>
-              </a:rPr>
-              <a:t>+430 excess rows</a:t>
+              </a:rPr>
+              <a:t>and a nonrandom exposure.</a:t>
             </a:r>
           </a:p>
         </p:txBody>
@@ -18121,7 +19411,7 @@
     </p:spTree>
     <p:extLst>
       <p:ext uri="{BB962C8B-B14F-4D97-AF65-F5344CB8AC3E}">
-        <p14:creationId xmlns:p14="http://schemas.microsoft.com/office/powerpoint/2010/main" val="1972757865"/>
+        <p14:creationId xmlns:p14="http://schemas.microsoft.com/office/powerpoint/2010/main" val="525352203"/>
       </p:ext>
     </p:extLst>
   </p:cSld>
@@ -18152,7 +19442,7 @@
           <p:cNvPr id="11" name="slide-title">
             <a:extLst xmlns:a="http://schemas.openxmlformats.org/drawingml/2006/main">
               <a:ext uri="{FF2B5EF4-FFF2-40B4-BE49-F238E27FC236}">
-                <a16:creationId xmlns:a16="http://schemas.microsoft.com/office/drawing/2014/main" id="{85657460-D13A-4FA5-A056-A119E2F45FD1}"/>
+                <a16:creationId xmlns:a16="http://schemas.microsoft.com/office/drawing/2014/main" id="{C885ED32-C0FB-4091-8F82-80146A7BD5A1}"/>
               </a:ext>
             </a:extLst>
           </p:cNvPr>
@@ -18202,7 +19492,7 @@
           <p:cNvPr id="2" name="rule-68-107">
             <a:extLst xmlns:a="http://schemas.openxmlformats.org/drawingml/2006/main">
               <a:ext uri="{FF2B5EF4-FFF2-40B4-BE49-F238E27FC236}">
-                <a16:creationId xmlns:a16="http://schemas.microsoft.com/office/drawing/2014/main" id="{16361D05-6A05-4EF7-82FA-2F4D0FC2CD0E}"/>
+                <a16:creationId xmlns:a16="http://schemas.microsoft.com/office/drawing/2014/main" id="{FD53A1A5-DD25-4C3C-A461-432FA95AA82C}"/>
               </a:ext>
             </a:extLst>
           </p:cNvPr>
@@ -18235,7 +19525,7 @@
           <p:cNvPr id="3" name="page-number">
             <a:extLst xmlns:a="http://schemas.openxmlformats.org/drawingml/2006/main">
               <a:ext uri="{FF2B5EF4-FFF2-40B4-BE49-F238E27FC236}">
-                <a16:creationId xmlns:a16="http://schemas.microsoft.com/office/drawing/2014/main" id="{7899D08B-4985-4225-84D6-5AF453830A67}"/>
+                <a16:creationId xmlns:a16="http://schemas.microsoft.com/office/drawing/2014/main" id="{29151E83-EB61-43B0-BA5B-D1841C08D66E}"/>
               </a:ext>
             </a:extLst>
           </p:cNvPr>
@@ -18285,7 +19575,7 @@
           <p:cNvPr id="4" name="clean-head">
             <a:extLst xmlns:a="http://schemas.openxmlformats.org/drawingml/2006/main">
               <a:ext uri="{FF2B5EF4-FFF2-40B4-BE49-F238E27FC236}">
-                <a16:creationId xmlns:a16="http://schemas.microsoft.com/office/drawing/2014/main" id="{4B2CB7E2-B184-4AA8-A1C7-D1A5F0C1CD9B}"/>
+                <a16:creationId xmlns:a16="http://schemas.microsoft.com/office/drawing/2014/main" id="{E0AB14B8-C003-498E-A014-C5563E46E840}"/>
               </a:ext>
             </a:extLst>
           </p:cNvPr>
@@ -18335,7 +19625,7 @@
           <p:cNvPr id="5" name="clean">
             <a:extLst xmlns:a="http://schemas.openxmlformats.org/drawingml/2006/main">
               <a:ext uri="{FF2B5EF4-FFF2-40B4-BE49-F238E27FC236}">
-                <a16:creationId xmlns:a16="http://schemas.microsoft.com/office/drawing/2014/main" id="{160FCFDF-AA6C-47EC-A296-74D959F53BA1}"/>
+                <a16:creationId xmlns:a16="http://schemas.microsoft.com/office/drawing/2014/main" id="{5A5DF74A-064B-4992-8982-3FB8FBDC99CC}"/>
               </a:ext>
             </a:extLst>
           </p:cNvPr>
@@ -18385,7 +19675,7 @@
           <p:cNvPr id="6" name="rule-84-300">
             <a:extLst xmlns:a="http://schemas.openxmlformats.org/drawingml/2006/main">
               <a:ext uri="{FF2B5EF4-FFF2-40B4-BE49-F238E27FC236}">
-                <a16:creationId xmlns:a16="http://schemas.microsoft.com/office/drawing/2014/main" id="{2B3EBFE5-A60A-4DB2-87C0-B0D7F1F699E7}"/>
+                <a16:creationId xmlns:a16="http://schemas.microsoft.com/office/drawing/2014/main" id="{7BB1A6DF-19AF-42A8-976F-A875D17FB12D}"/>
               </a:ext>
             </a:extLst>
           </p:cNvPr>
@@ -18418,7 +19708,7 @@
           <p:cNvPr id="7" name="forensic-head">
             <a:extLst xmlns:a="http://schemas.openxmlformats.org/drawingml/2006/main">
               <a:ext uri="{FF2B5EF4-FFF2-40B4-BE49-F238E27FC236}">
-                <a16:creationId xmlns:a16="http://schemas.microsoft.com/office/drawing/2014/main" id="{47633A4F-7E88-4010-945D-AFC7D638920F}"/>
+                <a16:creationId xmlns:a16="http://schemas.microsoft.com/office/drawing/2014/main" id="{070442C0-7570-4555-8453-59C2CE881F1C}"/>
               </a:ext>
             </a:extLst>
           </p:cNvPr>
@@ -18468,7 +19758,7 @@
           <p:cNvPr id="8" name="forensic">
             <a:extLst xmlns:a="http://schemas.openxmlformats.org/drawingml/2006/main">
               <a:ext uri="{FF2B5EF4-FFF2-40B4-BE49-F238E27FC236}">
-                <a16:creationId xmlns:a16="http://schemas.microsoft.com/office/drawing/2014/main" id="{2B9F38CF-2011-4709-BCDA-91D7B907F56B}"/>
+                <a16:creationId xmlns:a16="http://schemas.microsoft.com/office/drawing/2014/main" id="{15620C32-E49E-484B-BC58-4E3D34CA1473}"/>
               </a:ext>
             </a:extLst>
           </p:cNvPr>
@@ -18518,7 +19808,7 @@
           <p:cNvPr id="9" name="sequence">
             <a:extLst xmlns:a="http://schemas.openxmlformats.org/drawingml/2006/main">
               <a:ext uri="{FF2B5EF4-FFF2-40B4-BE49-F238E27FC236}">
-                <a16:creationId xmlns:a16="http://schemas.microsoft.com/office/drawing/2014/main" id="{2E2353BB-9853-4ECC-BC42-3129E27A02C1}"/>
+                <a16:creationId xmlns:a16="http://schemas.microsoft.com/office/drawing/2014/main" id="{92512B49-F474-40CD-926E-0A104C04D0C7}"/>
               </a:ext>
             </a:extLst>
           </p:cNvPr>
@@ -18568,7 +19858,7 @@
           <p:cNvPr id="10" name="commit">
             <a:extLst xmlns:a="http://schemas.openxmlformats.org/drawingml/2006/main">
               <a:ext uri="{FF2B5EF4-FFF2-40B4-BE49-F238E27FC236}">
-                <a16:creationId xmlns:a16="http://schemas.microsoft.com/office/drawing/2014/main" id="{2CC60F8A-C798-4443-8FDF-3089F0420057}"/>
+                <a16:creationId xmlns:a16="http://schemas.microsoft.com/office/drawing/2014/main" id="{C6DD491D-AC63-487A-9EE3-C41F726F3579}"/>
               </a:ext>
             </a:extLst>
           </p:cNvPr>
@@ -18616,7 +19906,7 @@
     </p:spTree>
     <p:extLst>
       <p:ext uri="{BB962C8B-B14F-4D97-AF65-F5344CB8AC3E}">
-        <p14:creationId xmlns:p14="http://schemas.microsoft.com/office/powerpoint/2010/main" val="594814513"/>
+        <p14:creationId xmlns:p14="http://schemas.microsoft.com/office/powerpoint/2010/main" val="324974047"/>
       </p:ext>
     </p:extLst>
   </p:cSld>
@@ -18647,7 +19937,7 @@
           <p:cNvPr id="15" name="slide-title">
             <a:extLst xmlns:a="http://schemas.openxmlformats.org/drawingml/2006/main">
               <a:ext uri="{FF2B5EF4-FFF2-40B4-BE49-F238E27FC236}">
-                <a16:creationId xmlns:a16="http://schemas.microsoft.com/office/drawing/2014/main" id="{3BB1ADC5-9780-4618-AE57-103389ABBB40}"/>
+                <a16:creationId xmlns:a16="http://schemas.microsoft.com/office/drawing/2014/main" id="{206BD9A2-B944-455F-A4B1-FBAF1DE2D1CD}"/>
               </a:ext>
             </a:extLst>
           </p:cNvPr>
@@ -18697,7 +19987,7 @@
           <p:cNvPr id="2" name="rule-68-107">
             <a:extLst xmlns:a="http://schemas.openxmlformats.org/drawingml/2006/main">
               <a:ext uri="{FF2B5EF4-FFF2-40B4-BE49-F238E27FC236}">
-                <a16:creationId xmlns:a16="http://schemas.microsoft.com/office/drawing/2014/main" id="{7A521CF8-D266-468F-B257-E6C04959012C}"/>
+                <a16:creationId xmlns:a16="http://schemas.microsoft.com/office/drawing/2014/main" id="{51C22643-B057-4CF2-A473-AEB119107D81}"/>
               </a:ext>
             </a:extLst>
           </p:cNvPr>
@@ -18730,7 +20020,7 @@
           <p:cNvPr id="3" name="page-number">
             <a:extLst xmlns:a="http://schemas.openxmlformats.org/drawingml/2006/main">
               <a:ext uri="{FF2B5EF4-FFF2-40B4-BE49-F238E27FC236}">
-                <a16:creationId xmlns:a16="http://schemas.microsoft.com/office/drawing/2014/main" id="{DF68B792-618F-46B9-93BB-CA7185206618}"/>
+                <a16:creationId xmlns:a16="http://schemas.microsoft.com/office/drawing/2014/main" id="{5222475D-5C6D-4A24-9D7A-EEF97D5044E4}"/>
               </a:ext>
             </a:extLst>
           </p:cNvPr>
@@ -18780,7 +20070,7 @@
           <p:cNvPr id="4" name="native-label">
             <a:extLst xmlns:a="http://schemas.openxmlformats.org/drawingml/2006/main">
               <a:ext uri="{FF2B5EF4-FFF2-40B4-BE49-F238E27FC236}">
-                <a16:creationId xmlns:a16="http://schemas.microsoft.com/office/drawing/2014/main" id="{D1D6AFD8-2234-4E6E-B9BC-3905FFAB0F34}"/>
+                <a16:creationId xmlns:a16="http://schemas.microsoft.com/office/drawing/2014/main" id="{CAD86C3E-E865-45BF-B4EF-8753429359B2}"/>
               </a:ext>
             </a:extLst>
           </p:cNvPr>
@@ -18830,7 +20120,7 @@
           <p:cNvPr id="5" name="native-command">
             <a:extLst xmlns:a="http://schemas.openxmlformats.org/drawingml/2006/main">
               <a:ext uri="{FF2B5EF4-FFF2-40B4-BE49-F238E27FC236}">
-                <a16:creationId xmlns:a16="http://schemas.microsoft.com/office/drawing/2014/main" id="{83F3B1F6-DD56-4339-9AF9-40D7CEBFC9EA}"/>
+                <a16:creationId xmlns:a16="http://schemas.microsoft.com/office/drawing/2014/main" id="{2741304A-2EE0-4A97-9DF0-C05B13950DA3}"/>
               </a:ext>
             </a:extLst>
           </p:cNvPr>
@@ -18880,7 +20170,7 @@
           <p:cNvPr id="6" name="brew-label">
             <a:extLst xmlns:a="http://schemas.openxmlformats.org/drawingml/2006/main">
               <a:ext uri="{FF2B5EF4-FFF2-40B4-BE49-F238E27FC236}">
-                <a16:creationId xmlns:a16="http://schemas.microsoft.com/office/drawing/2014/main" id="{0501B766-FC6C-46E3-82A1-2321E174D0F6}"/>
+                <a16:creationId xmlns:a16="http://schemas.microsoft.com/office/drawing/2014/main" id="{0DD5AA55-6272-400E-91EE-395583C23A2B}"/>
               </a:ext>
             </a:extLst>
           </p:cNvPr>
@@ -18930,7 +20220,7 @@
           <p:cNvPr id="7" name="brew-command">
             <a:extLst xmlns:a="http://schemas.openxmlformats.org/drawingml/2006/main">
               <a:ext uri="{FF2B5EF4-FFF2-40B4-BE49-F238E27FC236}">
-                <a16:creationId xmlns:a16="http://schemas.microsoft.com/office/drawing/2014/main" id="{5EC0186D-A6D7-4F62-90B1-DEEDB9D2F22F}"/>
+                <a16:creationId xmlns:a16="http://schemas.microsoft.com/office/drawing/2014/main" id="{469FF6E6-E3D3-4BC2-B95A-F2CAE4B88422}"/>
               </a:ext>
             </a:extLst>
           </p:cNvPr>
@@ -18980,7 +20270,7 @@
           <p:cNvPr id="8" name="windows-label">
             <a:extLst xmlns:a="http://schemas.openxmlformats.org/drawingml/2006/main">
               <a:ext uri="{FF2B5EF4-FFF2-40B4-BE49-F238E27FC236}">
-                <a16:creationId xmlns:a16="http://schemas.microsoft.com/office/drawing/2014/main" id="{4539D599-7ED3-46F1-8800-8EDC8B8A3130}"/>
+                <a16:creationId xmlns:a16="http://schemas.microsoft.com/office/drawing/2014/main" id="{E4C2C703-D485-4926-8958-04CD5A2C7CF7}"/>
               </a:ext>
             </a:extLst>
           </p:cNvPr>
@@ -19030,7 +20320,7 @@
           <p:cNvPr id="9" name="windows-command">
             <a:extLst xmlns:a="http://schemas.openxmlformats.org/drawingml/2006/main">
               <a:ext uri="{FF2B5EF4-FFF2-40B4-BE49-F238E27FC236}">
-                <a16:creationId xmlns:a16="http://schemas.microsoft.com/office/drawing/2014/main" id="{5638A521-39A6-4486-B7F5-4BCF03E84898}"/>
+                <a16:creationId xmlns:a16="http://schemas.microsoft.com/office/drawing/2014/main" id="{D0FC4896-BFF4-4995-ADF8-9AF72F56FBE9}"/>
               </a:ext>
             </a:extLst>
           </p:cNvPr>
@@ -19080,7 +20370,7 @@
           <p:cNvPr id="10" name="rule-78-363">
             <a:extLst xmlns:a="http://schemas.openxmlformats.org/drawingml/2006/main">
               <a:ext uri="{FF2B5EF4-FFF2-40B4-BE49-F238E27FC236}">
-                <a16:creationId xmlns:a16="http://schemas.microsoft.com/office/drawing/2014/main" id="{06D82766-96D1-41E8-9A13-AFF6BDD8797F}"/>
+                <a16:creationId xmlns:a16="http://schemas.microsoft.com/office/drawing/2014/main" id="{B0852561-33E7-48F2-A903-1C554372A14E}"/>
               </a:ext>
             </a:extLst>
           </p:cNvPr>
@@ -19113,7 +20403,7 @@
           <p:cNvPr id="11" name="verify-label">
             <a:extLst xmlns:a="http://schemas.openxmlformats.org/drawingml/2006/main">
               <a:ext uri="{FF2B5EF4-FFF2-40B4-BE49-F238E27FC236}">
-                <a16:creationId xmlns:a16="http://schemas.microsoft.com/office/drawing/2014/main" id="{978C44D3-5B17-4414-A47D-66EC75484945}"/>
+                <a16:creationId xmlns:a16="http://schemas.microsoft.com/office/drawing/2014/main" id="{9313C3B0-02EB-43F7-80C3-DFAC5DDB0240}"/>
               </a:ext>
             </a:extLst>
           </p:cNvPr>
@@ -19163,7 +20453,7 @@
           <p:cNvPr id="12" name="verify-command">
             <a:extLst xmlns:a="http://schemas.openxmlformats.org/drawingml/2006/main">
               <a:ext uri="{FF2B5EF4-FFF2-40B4-BE49-F238E27FC236}">
-                <a16:creationId xmlns:a16="http://schemas.microsoft.com/office/drawing/2014/main" id="{F8DFB95E-7474-4495-8A63-947961D56A6C}"/>
+                <a16:creationId xmlns:a16="http://schemas.microsoft.com/office/drawing/2014/main" id="{AEC87F53-BB33-4014-A2F4-084B0CA3B4C8}"/>
               </a:ext>
             </a:extLst>
           </p:cNvPr>
@@ -19213,7 +20503,7 @@
           <p:cNvPr id="13" name="windows-note">
             <a:extLst xmlns:a="http://schemas.openxmlformats.org/drawingml/2006/main">
               <a:ext uri="{FF2B5EF4-FFF2-40B4-BE49-F238E27FC236}">
-                <a16:creationId xmlns:a16="http://schemas.microsoft.com/office/drawing/2014/main" id="{91CB4E6E-9A05-4392-B173-7BF504228910}"/>
+                <a16:creationId xmlns:a16="http://schemas.microsoft.com/office/drawing/2014/main" id="{60AF9A2A-247A-41C8-8746-66BE7B103925}"/>
               </a:ext>
             </a:extLst>
           </p:cNvPr>
@@ -19263,7 +20553,7 @@
           <p:cNvPr id="14" name="takeaway">
             <a:extLst xmlns:a="http://schemas.openxmlformats.org/drawingml/2006/main">
               <a:ext uri="{FF2B5EF4-FFF2-40B4-BE49-F238E27FC236}">
-                <a16:creationId xmlns:a16="http://schemas.microsoft.com/office/drawing/2014/main" id="{8A976FAC-A3A6-4BF1-B59A-C45C338B3F49}"/>
+                <a16:creationId xmlns:a16="http://schemas.microsoft.com/office/drawing/2014/main" id="{DE332022-9002-45CA-85F5-5ADB016792FF}"/>
               </a:ext>
             </a:extLst>
           </p:cNvPr>
@@ -19311,7 +20601,7 @@
     </p:spTree>
     <p:extLst>
       <p:ext uri="{BB962C8B-B14F-4D97-AF65-F5344CB8AC3E}">
-        <p14:creationId xmlns:p14="http://schemas.microsoft.com/office/powerpoint/2010/main" val="635932795"/>
+        <p14:creationId xmlns:p14="http://schemas.microsoft.com/office/powerpoint/2010/main" val="1540731126"/>
       </p:ext>
     </p:extLst>
   </p:cSld>
@@ -19342,7 +20632,7 @@
           <p:cNvPr id="15" name="slide-title">
             <a:extLst xmlns:a="http://schemas.openxmlformats.org/drawingml/2006/main">
               <a:ext uri="{FF2B5EF4-FFF2-40B4-BE49-F238E27FC236}">
-                <a16:creationId xmlns:a16="http://schemas.microsoft.com/office/drawing/2014/main" id="{4C3A9009-2CFA-48D7-9A1F-6F5598682E9A}"/>
+                <a16:creationId xmlns:a16="http://schemas.microsoft.com/office/drawing/2014/main" id="{CE8C4ED5-E854-4711-9979-DD318AF959BA}"/>
               </a:ext>
             </a:extLst>
           </p:cNvPr>
@@ -19392,7 +20682,7 @@
           <p:cNvPr id="2" name="rule-68-107">
             <a:extLst xmlns:a="http://schemas.openxmlformats.org/drawingml/2006/main">
               <a:ext uri="{FF2B5EF4-FFF2-40B4-BE49-F238E27FC236}">
-                <a16:creationId xmlns:a16="http://schemas.microsoft.com/office/drawing/2014/main" id="{BB618F54-504B-4062-A721-FD8D5EA86F01}"/>
+                <a16:creationId xmlns:a16="http://schemas.microsoft.com/office/drawing/2014/main" id="{8941D78E-9728-4CB6-B628-B7EA548CD06B}"/>
               </a:ext>
             </a:extLst>
           </p:cNvPr>
@@ -19425,7 +20715,7 @@
           <p:cNvPr id="3" name="page-number">
             <a:extLst xmlns:a="http://schemas.openxmlformats.org/drawingml/2006/main">
               <a:ext uri="{FF2B5EF4-FFF2-40B4-BE49-F238E27FC236}">
-                <a16:creationId xmlns:a16="http://schemas.microsoft.com/office/drawing/2014/main" id="{83F28718-8591-44BD-898C-C0C04E50643A}"/>
+                <a16:creationId xmlns:a16="http://schemas.microsoft.com/office/drawing/2014/main" id="{7A21DEC7-DF29-45E3-9D10-B642613855AE}"/>
               </a:ext>
             </a:extLst>
           </p:cNvPr>
@@ -19475,7 +20765,7 @@
           <p:cNvPr id="4" name="unix-label">
             <a:extLst xmlns:a="http://schemas.openxmlformats.org/drawingml/2006/main">
               <a:ext uri="{FF2B5EF4-FFF2-40B4-BE49-F238E27FC236}">
-                <a16:creationId xmlns:a16="http://schemas.microsoft.com/office/drawing/2014/main" id="{6FE70753-01D3-45BE-BE23-93711F6476AB}"/>
+                <a16:creationId xmlns:a16="http://schemas.microsoft.com/office/drawing/2014/main" id="{7B7F0335-8C3A-4C27-8CE3-8B94A0C2CEEA}"/>
               </a:ext>
             </a:extLst>
           </p:cNvPr>
@@ -19525,7 +20815,7 @@
           <p:cNvPr id="5" name="unix-command">
             <a:extLst xmlns:a="http://schemas.openxmlformats.org/drawingml/2006/main">
               <a:ext uri="{FF2B5EF4-FFF2-40B4-BE49-F238E27FC236}">
-                <a16:creationId xmlns:a16="http://schemas.microsoft.com/office/drawing/2014/main" id="{E33689ED-8256-49CB-8497-D17999161895}"/>
+                <a16:creationId xmlns:a16="http://schemas.microsoft.com/office/drawing/2014/main" id="{C2981FE2-AFCD-48DC-8302-298F518EAEB5}"/>
               </a:ext>
             </a:extLst>
           </p:cNvPr>
@@ -19575,7 +20865,7 @@
           <p:cNvPr id="6" name="windows-label">
             <a:extLst xmlns:a="http://schemas.openxmlformats.org/drawingml/2006/main">
               <a:ext uri="{FF2B5EF4-FFF2-40B4-BE49-F238E27FC236}">
-                <a16:creationId xmlns:a16="http://schemas.microsoft.com/office/drawing/2014/main" id="{82A6FA4B-CD1E-4A30-B98D-4273200145EF}"/>
+                <a16:creationId xmlns:a16="http://schemas.microsoft.com/office/drawing/2014/main" id="{EB496FDE-F617-496F-BE59-66771062D51C}"/>
               </a:ext>
             </a:extLst>
           </p:cNvPr>
@@ -19625,7 +20915,7 @@
           <p:cNvPr id="7" name="windows-command">
             <a:extLst xmlns:a="http://schemas.openxmlformats.org/drawingml/2006/main">
               <a:ext uri="{FF2B5EF4-FFF2-40B4-BE49-F238E27FC236}">
-                <a16:creationId xmlns:a16="http://schemas.microsoft.com/office/drawing/2014/main" id="{33E90206-554F-4903-94E7-3DFE347D9B5F}"/>
+                <a16:creationId xmlns:a16="http://schemas.microsoft.com/office/drawing/2014/main" id="{440D290A-1030-4A6B-B8A9-3AC30555FD1A}"/>
               </a:ext>
             </a:extLst>
           </p:cNvPr>
@@ -19675,7 +20965,7 @@
           <p:cNvPr id="8" name="rule-78-363">
             <a:extLst xmlns:a="http://schemas.openxmlformats.org/drawingml/2006/main">
               <a:ext uri="{FF2B5EF4-FFF2-40B4-BE49-F238E27FC236}">
-                <a16:creationId xmlns:a16="http://schemas.microsoft.com/office/drawing/2014/main" id="{0DC2A28D-8BCD-424C-A239-0CA90AC2C203}"/>
+                <a16:creationId xmlns:a16="http://schemas.microsoft.com/office/drawing/2014/main" id="{F0AD3B43-1603-4CD2-B171-6D21E90F7653}"/>
               </a:ext>
             </a:extLst>
           </p:cNvPr>
@@ -19708,7 +20998,7 @@
           <p:cNvPr id="9" name="alternatives-label">
             <a:extLst xmlns:a="http://schemas.openxmlformats.org/drawingml/2006/main">
               <a:ext uri="{FF2B5EF4-FFF2-40B4-BE49-F238E27FC236}">
-                <a16:creationId xmlns:a16="http://schemas.microsoft.com/office/drawing/2014/main" id="{18CA28FD-CBA2-4F01-8BA7-D95A58C9A56D}"/>
+                <a16:creationId xmlns:a16="http://schemas.microsoft.com/office/drawing/2014/main" id="{F1CF9EC2-8037-4878-9AF0-EF1B6D31A8C5}"/>
               </a:ext>
             </a:extLst>
           </p:cNvPr>
@@ -19758,7 +21048,7 @@
           <p:cNvPr id="10" name="npm-command">
             <a:extLst xmlns:a="http://schemas.openxmlformats.org/drawingml/2006/main">
               <a:ext uri="{FF2B5EF4-FFF2-40B4-BE49-F238E27FC236}">
-                <a16:creationId xmlns:a16="http://schemas.microsoft.com/office/drawing/2014/main" id="{DF766D2E-3881-4707-AA95-74A362B2D220}"/>
+                <a16:creationId xmlns:a16="http://schemas.microsoft.com/office/drawing/2014/main" id="{F63D43E0-233C-446D-A6A7-61E696E5977C}"/>
               </a:ext>
             </a:extLst>
           </p:cNvPr>
@@ -19808,7 +21098,7 @@
           <p:cNvPr id="11" name="brew-command">
             <a:extLst xmlns:a="http://schemas.openxmlformats.org/drawingml/2006/main">
               <a:ext uri="{FF2B5EF4-FFF2-40B4-BE49-F238E27FC236}">
-                <a16:creationId xmlns:a16="http://schemas.microsoft.com/office/drawing/2014/main" id="{34B90227-6131-4EA0-AF78-52F6CAEFDA97}"/>
+                <a16:creationId xmlns:a16="http://schemas.microsoft.com/office/drawing/2014/main" id="{E72F0D94-0176-4087-8DDA-09BEE1DA5AB3}"/>
               </a:ext>
             </a:extLst>
           </p:cNvPr>
@@ -19858,7 +21148,7 @@
           <p:cNvPr id="12" name="verify-label">
             <a:extLst xmlns:a="http://schemas.openxmlformats.org/drawingml/2006/main">
               <a:ext uri="{FF2B5EF4-FFF2-40B4-BE49-F238E27FC236}">
-                <a16:creationId xmlns:a16="http://schemas.microsoft.com/office/drawing/2014/main" id="{57BF06AF-0B49-48F4-898F-7328B07C2E4F}"/>
+                <a16:creationId xmlns:a16="http://schemas.microsoft.com/office/drawing/2014/main" id="{88701DF4-2C75-41DD-B9BC-A9F37DF86467}"/>
               </a:ext>
             </a:extLst>
           </p:cNvPr>
@@ -19908,7 +21198,7 @@
           <p:cNvPr id="13" name="verify-command">
             <a:extLst xmlns:a="http://schemas.openxmlformats.org/drawingml/2006/main">
               <a:ext uri="{FF2B5EF4-FFF2-40B4-BE49-F238E27FC236}">
-                <a16:creationId xmlns:a16="http://schemas.microsoft.com/office/drawing/2014/main" id="{C3C60E54-024E-4EB0-BB34-E975C6443CD2}"/>
+                <a16:creationId xmlns:a16="http://schemas.microsoft.com/office/drawing/2014/main" id="{FDE73538-1D45-4389-A5CE-5DDFC08918A5}"/>
               </a:ext>
             </a:extLst>
           </p:cNvPr>
@@ -19958,7 +21248,7 @@
           <p:cNvPr id="14" name="takeaway">
             <a:extLst xmlns:a="http://schemas.openxmlformats.org/drawingml/2006/main">
               <a:ext uri="{FF2B5EF4-FFF2-40B4-BE49-F238E27FC236}">
-                <a16:creationId xmlns:a16="http://schemas.microsoft.com/office/drawing/2014/main" id="{13BAF469-A18C-4583-8A32-EDBB2E8DCF2C}"/>
+                <a16:creationId xmlns:a16="http://schemas.microsoft.com/office/drawing/2014/main" id="{6EC62E68-AD19-4D08-9FA3-29FFB766E3F2}"/>
               </a:ext>
             </a:extLst>
           </p:cNvPr>
@@ -20006,7 +21296,7 @@
     </p:spTree>
     <p:extLst>
       <p:ext uri="{BB962C8B-B14F-4D97-AF65-F5344CB8AC3E}">
-        <p14:creationId xmlns:p14="http://schemas.microsoft.com/office/powerpoint/2010/main" val="715689941"/>
+        <p14:creationId xmlns:p14="http://schemas.microsoft.com/office/powerpoint/2010/main" val="1510406998"/>
       </p:ext>
     </p:extLst>
   </p:cSld>
@@ -20037,7 +21327,7 @@
           <p:cNvPr id="18" name="slide-title">
             <a:extLst xmlns:a="http://schemas.openxmlformats.org/drawingml/2006/main">
               <a:ext uri="{FF2B5EF4-FFF2-40B4-BE49-F238E27FC236}">
-                <a16:creationId xmlns:a16="http://schemas.microsoft.com/office/drawing/2014/main" id="{433F19C3-1C9F-42CF-96F5-776F6421F372}"/>
+                <a16:creationId xmlns:a16="http://schemas.microsoft.com/office/drawing/2014/main" id="{656051B5-5E9E-41CD-9267-E9357BCF1448}"/>
               </a:ext>
             </a:extLst>
           </p:cNvPr>
@@ -20087,7 +21377,7 @@
           <p:cNvPr id="2" name="rule-68-107">
             <a:extLst xmlns:a="http://schemas.openxmlformats.org/drawingml/2006/main">
               <a:ext uri="{FF2B5EF4-FFF2-40B4-BE49-F238E27FC236}">
-                <a16:creationId xmlns:a16="http://schemas.microsoft.com/office/drawing/2014/main" id="{3D6D9D07-1EE3-46FA-9C17-384CBA26CE7F}"/>
+                <a16:creationId xmlns:a16="http://schemas.microsoft.com/office/drawing/2014/main" id="{0CFD0616-589A-4A61-A40F-1F8B1C20DC1B}"/>
               </a:ext>
             </a:extLst>
           </p:cNvPr>
@@ -20120,7 +21410,7 @@
           <p:cNvPr id="3" name="page-number">
             <a:extLst xmlns:a="http://schemas.openxmlformats.org/drawingml/2006/main">
               <a:ext uri="{FF2B5EF4-FFF2-40B4-BE49-F238E27FC236}">
-                <a16:creationId xmlns:a16="http://schemas.microsoft.com/office/drawing/2014/main" id="{1DFC75AC-26EE-4940-988E-BD19F548A752}"/>
+                <a16:creationId xmlns:a16="http://schemas.microsoft.com/office/drawing/2014/main" id="{9A0E90CF-381E-4671-B874-1441D1BDDBCF}"/>
               </a:ext>
             </a:extLst>
           </p:cNvPr>
@@ -20170,7 +21460,7 @@
           <p:cNvPr id="4" name="mac-label">
             <a:extLst xmlns:a="http://schemas.openxmlformats.org/drawingml/2006/main">
               <a:ext uri="{FF2B5EF4-FFF2-40B4-BE49-F238E27FC236}">
-                <a16:creationId xmlns:a16="http://schemas.microsoft.com/office/drawing/2014/main" id="{ED5AD39E-29B9-4190-BD6E-6787B35556F3}"/>
+                <a16:creationId xmlns:a16="http://schemas.microsoft.com/office/drawing/2014/main" id="{1BD5E726-C031-451F-A044-8C4F73096389}"/>
               </a:ext>
             </a:extLst>
           </p:cNvPr>
@@ -20220,7 +21510,7 @@
           <p:cNvPr id="5" name="mac-command">
             <a:extLst xmlns:a="http://schemas.openxmlformats.org/drawingml/2006/main">
               <a:ext uri="{FF2B5EF4-FFF2-40B4-BE49-F238E27FC236}">
-                <a16:creationId xmlns:a16="http://schemas.microsoft.com/office/drawing/2014/main" id="{C1701198-1ACB-41C4-A5A5-E7D95AAFD87D}"/>
+                <a16:creationId xmlns:a16="http://schemas.microsoft.com/office/drawing/2014/main" id="{BC307FA0-9EB9-4BBB-94E2-7DE9504FFCAC}"/>
               </a:ext>
             </a:extLst>
           </p:cNvPr>
@@ -20270,7 +21560,7 @@
           <p:cNvPr id="6" name="win-label">
             <a:extLst xmlns:a="http://schemas.openxmlformats.org/drawingml/2006/main">
               <a:ext uri="{FF2B5EF4-FFF2-40B4-BE49-F238E27FC236}">
-                <a16:creationId xmlns:a16="http://schemas.microsoft.com/office/drawing/2014/main" id="{6E6E0901-04A9-4644-BAA6-6107BF8960AA}"/>
+                <a16:creationId xmlns:a16="http://schemas.microsoft.com/office/drawing/2014/main" id="{EB6D5BEE-B670-4763-857A-4FB3584AA686}"/>
               </a:ext>
             </a:extLst>
           </p:cNvPr>
@@ -20320,7 +21610,7 @@
           <p:cNvPr id="7" name="win-copy">
             <a:extLst xmlns:a="http://schemas.openxmlformats.org/drawingml/2006/main">
               <a:ext uri="{FF2B5EF4-FFF2-40B4-BE49-F238E27FC236}">
-                <a16:creationId xmlns:a16="http://schemas.microsoft.com/office/drawing/2014/main" id="{8DD5CC2C-D03D-485F-8475-CF715C7C903E}"/>
+                <a16:creationId xmlns:a16="http://schemas.microsoft.com/office/drawing/2014/main" id="{69C44DD5-C944-4474-A200-E62D1690EE63}"/>
               </a:ext>
             </a:extLst>
           </p:cNvPr>
@@ -20370,7 +21660,7 @@
           <p:cNvPr id="8" name="linux-label">
             <a:extLst xmlns:a="http://schemas.openxmlformats.org/drawingml/2006/main">
               <a:ext uri="{FF2B5EF4-FFF2-40B4-BE49-F238E27FC236}">
-                <a16:creationId xmlns:a16="http://schemas.microsoft.com/office/drawing/2014/main" id="{2CB0B7D4-1F5F-42E0-8D21-4CE96325906E}"/>
+                <a16:creationId xmlns:a16="http://schemas.microsoft.com/office/drawing/2014/main" id="{1F457D07-D6AC-47C7-89E9-561DD317B529}"/>
               </a:ext>
             </a:extLst>
           </p:cNvPr>
@@ -20420,7 +21710,7 @@
           <p:cNvPr id="9" name="linux-copy">
             <a:extLst xmlns:a="http://schemas.openxmlformats.org/drawingml/2006/main">
               <a:ext uri="{FF2B5EF4-FFF2-40B4-BE49-F238E27FC236}">
-                <a16:creationId xmlns:a16="http://schemas.microsoft.com/office/drawing/2014/main" id="{2A2540CB-B29E-43A1-BE8F-BE902A1F8330}"/>
+                <a16:creationId xmlns:a16="http://schemas.microsoft.com/office/drawing/2014/main" id="{E8FBF60E-1410-485E-A18A-80326EB5F2E4}"/>
               </a:ext>
             </a:extLst>
           </p:cNvPr>
@@ -20470,7 +21760,7 @@
           <p:cNvPr id="10" name="rule-78-242">
             <a:extLst xmlns:a="http://schemas.openxmlformats.org/drawingml/2006/main">
               <a:ext uri="{FF2B5EF4-FFF2-40B4-BE49-F238E27FC236}">
-                <a16:creationId xmlns:a16="http://schemas.microsoft.com/office/drawing/2014/main" id="{35A31283-2F2E-4F82-86A3-AEA8D7CD9BC2}"/>
+                <a16:creationId xmlns:a16="http://schemas.microsoft.com/office/drawing/2014/main" id="{3229C36E-4C98-40B7-9222-EE52A9DFDF1B}"/>
               </a:ext>
             </a:extLst>
           </p:cNvPr>
@@ -20503,7 +21793,7 @@
           <p:cNvPr id="11" name="workflow-label">
             <a:extLst xmlns:a="http://schemas.openxmlformats.org/drawingml/2006/main">
               <a:ext uri="{FF2B5EF4-FFF2-40B4-BE49-F238E27FC236}">
-                <a16:creationId xmlns:a16="http://schemas.microsoft.com/office/drawing/2014/main" id="{629C965D-FC1D-4A31-926F-62A5979BA823}"/>
+                <a16:creationId xmlns:a16="http://schemas.microsoft.com/office/drawing/2014/main" id="{936C0295-96F8-4114-AB3D-71B024AA6CAF}"/>
               </a:ext>
             </a:extLst>
           </p:cNvPr>
@@ -20553,7 +21843,7 @@
           <p:cNvPr id="12" name="workflow">
             <a:extLst xmlns:a="http://schemas.openxmlformats.org/drawingml/2006/main">
               <a:ext uri="{FF2B5EF4-FFF2-40B4-BE49-F238E27FC236}">
-                <a16:creationId xmlns:a16="http://schemas.microsoft.com/office/drawing/2014/main" id="{BF57A54B-EBD6-4AB8-A454-1DD75EC494CB}"/>
+                <a16:creationId xmlns:a16="http://schemas.microsoft.com/office/drawing/2014/main" id="{F6C89BB2-DFAF-4AC6-B2A5-71708E1E181B}"/>
               </a:ext>
             </a:extLst>
           </p:cNvPr>
@@ -20603,7 +21893,7 @@
           <p:cNvPr id="13" name="restart-note">
             <a:extLst xmlns:a="http://schemas.openxmlformats.org/drawingml/2006/main">
               <a:ext uri="{FF2B5EF4-FFF2-40B4-BE49-F238E27FC236}">
-                <a16:creationId xmlns:a16="http://schemas.microsoft.com/office/drawing/2014/main" id="{FDF9B697-D1F1-48DB-B663-9F097626AB5F}"/>
+                <a16:creationId xmlns:a16="http://schemas.microsoft.com/office/drawing/2014/main" id="{88F3A6C9-5D34-41CC-BE7F-FC185E8636D8}"/>
               </a:ext>
             </a:extLst>
           </p:cNvPr>
@@ -20653,7 +21943,7 @@
           <p:cNvPr id="14" name="safety-band">
             <a:extLst xmlns:a="http://schemas.openxmlformats.org/drawingml/2006/main">
               <a:ext uri="{FF2B5EF4-FFF2-40B4-BE49-F238E27FC236}">
-                <a16:creationId xmlns:a16="http://schemas.microsoft.com/office/drawing/2014/main" id="{A56717A3-044A-4930-9660-FD19DD4BD8EB}"/>
+                <a16:creationId xmlns:a16="http://schemas.microsoft.com/office/drawing/2014/main" id="{AA4FB606-1145-4E03-B493-CD1CE8927C68}"/>
               </a:ext>
             </a:extLst>
           </p:cNvPr>
@@ -20684,7 +21974,7 @@
           <p:cNvPr id="15" name="safety-title">
             <a:extLst xmlns:a="http://schemas.openxmlformats.org/drawingml/2006/main">
               <a:ext uri="{FF2B5EF4-FFF2-40B4-BE49-F238E27FC236}">
-                <a16:creationId xmlns:a16="http://schemas.microsoft.com/office/drawing/2014/main" id="{E4099D7C-73BD-410A-970A-702692CD6D86}"/>
+                <a16:creationId xmlns:a16="http://schemas.microsoft.com/office/drawing/2014/main" id="{5C630959-1E00-4C38-A617-7AF7F11E4635}"/>
               </a:ext>
             </a:extLst>
           </p:cNvPr>
@@ -20734,7 +22024,7 @@
           <p:cNvPr id="16" name="official">
             <a:extLst xmlns:a="http://schemas.openxmlformats.org/drawingml/2006/main">
               <a:ext uri="{FF2B5EF4-FFF2-40B4-BE49-F238E27FC236}">
-                <a16:creationId xmlns:a16="http://schemas.microsoft.com/office/drawing/2014/main" id="{DADFD875-C3F6-4CE8-BB74-743A3FC94378}"/>
+                <a16:creationId xmlns:a16="http://schemas.microsoft.com/office/drawing/2014/main" id="{D57E5FE1-4138-46EB-A6F7-23A9F49B7359}"/>
               </a:ext>
             </a:extLst>
           </p:cNvPr>
@@ -20784,7 +22074,7 @@
           <p:cNvPr id="17" name="keys">
             <a:extLst xmlns:a="http://schemas.openxmlformats.org/drawingml/2006/main">
               <a:ext uri="{FF2B5EF4-FFF2-40B4-BE49-F238E27FC236}">
-                <a16:creationId xmlns:a16="http://schemas.microsoft.com/office/drawing/2014/main" id="{2E6B779E-4328-475D-B1D5-F7414F15297B}"/>
+                <a16:creationId xmlns:a16="http://schemas.microsoft.com/office/drawing/2014/main" id="{76D627AF-E1D0-448D-9738-244F92B566B6}"/>
               </a:ext>
             </a:extLst>
           </p:cNvPr>
@@ -20832,7 +22122,7 @@
     </p:spTree>
     <p:extLst>
       <p:ext uri="{BB962C8B-B14F-4D97-AF65-F5344CB8AC3E}">
-        <p14:creationId xmlns:p14="http://schemas.microsoft.com/office/powerpoint/2010/main" val="727079495"/>
+        <p14:creationId xmlns:p14="http://schemas.microsoft.com/office/powerpoint/2010/main" val="906360175"/>
       </p:ext>
     </p:extLst>
   </p:cSld>
@@ -20863,7 +22153,7 @@
           <p:cNvPr id="15" name="slide-title">
             <a:extLst xmlns:a="http://schemas.openxmlformats.org/drawingml/2006/main">
               <a:ext uri="{FF2B5EF4-FFF2-40B4-BE49-F238E27FC236}">
-                <a16:creationId xmlns:a16="http://schemas.microsoft.com/office/drawing/2014/main" id="{69DBD758-4375-4274-97D1-EE907E52767C}"/>
+                <a16:creationId xmlns:a16="http://schemas.microsoft.com/office/drawing/2014/main" id="{931C4AB6-18E6-4AF9-8726-3B64F3A67580}"/>
               </a:ext>
             </a:extLst>
           </p:cNvPr>
@@ -20913,7 +22203,7 @@
           <p:cNvPr id="2" name="rule-68-107">
             <a:extLst xmlns:a="http://schemas.openxmlformats.org/drawingml/2006/main">
               <a:ext uri="{FF2B5EF4-FFF2-40B4-BE49-F238E27FC236}">
-                <a16:creationId xmlns:a16="http://schemas.microsoft.com/office/drawing/2014/main" id="{8D067709-5A8F-4036-B1B6-0F8F48DD33B6}"/>
+                <a16:creationId xmlns:a16="http://schemas.microsoft.com/office/drawing/2014/main" id="{3E559B06-187D-48DF-B39A-0376FE9A34ED}"/>
               </a:ext>
             </a:extLst>
           </p:cNvPr>
@@ -20946,7 +22236,7 @@
           <p:cNvPr id="3" name="page-number">
             <a:extLst xmlns:a="http://schemas.openxmlformats.org/drawingml/2006/main">
               <a:ext uri="{FF2B5EF4-FFF2-40B4-BE49-F238E27FC236}">
-                <a16:creationId xmlns:a16="http://schemas.microsoft.com/office/drawing/2014/main" id="{809EC22B-6844-4CBE-B288-96C84AFDB0F0}"/>
+                <a16:creationId xmlns:a16="http://schemas.microsoft.com/office/drawing/2014/main" id="{F4B40D30-AE3A-4B4B-A5CC-CE52140F6A7A}"/>
               </a:ext>
             </a:extLst>
           </p:cNvPr>
@@ -20996,7 +22286,7 @@
           <p:cNvPr id="4" name="check1">
             <a:extLst xmlns:a="http://schemas.openxmlformats.org/drawingml/2006/main">
               <a:ext uri="{FF2B5EF4-FFF2-40B4-BE49-F238E27FC236}">
-                <a16:creationId xmlns:a16="http://schemas.microsoft.com/office/drawing/2014/main" id="{9B586F92-5C82-4F7D-BC90-D5257CED5EF4}"/>
+                <a16:creationId xmlns:a16="http://schemas.microsoft.com/office/drawing/2014/main" id="{00193064-3723-4E94-A9D7-FC09D3FA3A01}"/>
               </a:ext>
             </a:extLst>
           </p:cNvPr>
@@ -21046,7 +22336,7 @@
           <p:cNvPr id="5" name="check1-command">
             <a:extLst xmlns:a="http://schemas.openxmlformats.org/drawingml/2006/main">
               <a:ext uri="{FF2B5EF4-FFF2-40B4-BE49-F238E27FC236}">
-                <a16:creationId xmlns:a16="http://schemas.microsoft.com/office/drawing/2014/main" id="{DDCED6D4-31AC-4B98-8E2B-8B460D6B6D6D}"/>
+                <a16:creationId xmlns:a16="http://schemas.microsoft.com/office/drawing/2014/main" id="{8B9B3EAF-9BB1-40A6-BD74-3FC320D32D03}"/>
               </a:ext>
             </a:extLst>
           </p:cNvPr>
@@ -21096,7 +22386,7 @@
           <p:cNvPr id="6" name="check2">
             <a:extLst xmlns:a="http://schemas.openxmlformats.org/drawingml/2006/main">
               <a:ext uri="{FF2B5EF4-FFF2-40B4-BE49-F238E27FC236}">
-                <a16:creationId xmlns:a16="http://schemas.microsoft.com/office/drawing/2014/main" id="{A4F5D38F-C008-4433-9004-01AAF7EFB92C}"/>
+                <a16:creationId xmlns:a16="http://schemas.microsoft.com/office/drawing/2014/main" id="{AA3DBA41-6522-4CAF-AEC8-23B50E3A4556}"/>
               </a:ext>
             </a:extLst>
           </p:cNvPr>
@@ -21146,7 +22436,7 @@
           <p:cNvPr id="7" name="check2-command">
             <a:extLst xmlns:a="http://schemas.openxmlformats.org/drawingml/2006/main">
               <a:ext uri="{FF2B5EF4-FFF2-40B4-BE49-F238E27FC236}">
-                <a16:creationId xmlns:a16="http://schemas.microsoft.com/office/drawing/2014/main" id="{47F78874-4580-433A-B758-5AC16702D9BA}"/>
+                <a16:creationId xmlns:a16="http://schemas.microsoft.com/office/drawing/2014/main" id="{80DDD63B-D995-4EC1-8E2D-7D901D149B2D}"/>
               </a:ext>
             </a:extLst>
           </p:cNvPr>
@@ -21196,7 +22486,7 @@
           <p:cNvPr id="8" name="check3">
             <a:extLst xmlns:a="http://schemas.openxmlformats.org/drawingml/2006/main">
               <a:ext uri="{FF2B5EF4-FFF2-40B4-BE49-F238E27FC236}">
-                <a16:creationId xmlns:a16="http://schemas.microsoft.com/office/drawing/2014/main" id="{E6914BC1-9522-47E7-9049-C00E83CE02C9}"/>
+                <a16:creationId xmlns:a16="http://schemas.microsoft.com/office/drawing/2014/main" id="{DB8ED306-0758-4ED9-8C06-C3133A4F7E92}"/>
               </a:ext>
             </a:extLst>
           </p:cNvPr>
@@ -21246,7 +22536,7 @@
           <p:cNvPr id="9" name="check3-copy">
             <a:extLst xmlns:a="http://schemas.openxmlformats.org/drawingml/2006/main">
               <a:ext uri="{FF2B5EF4-FFF2-40B4-BE49-F238E27FC236}">
-                <a16:creationId xmlns:a16="http://schemas.microsoft.com/office/drawing/2014/main" id="{0DD1A40B-65DB-43DB-97F5-E766FBF7045B}"/>
+                <a16:creationId xmlns:a16="http://schemas.microsoft.com/office/drawing/2014/main" id="{3B35947E-B76D-4CD8-A6D5-B1053E061A37}"/>
               </a:ext>
             </a:extLst>
           </p:cNvPr>
@@ -21296,7 +22586,7 @@
           <p:cNvPr id="10" name="check4">
             <a:extLst xmlns:a="http://schemas.openxmlformats.org/drawingml/2006/main">
               <a:ext uri="{FF2B5EF4-FFF2-40B4-BE49-F238E27FC236}">
-                <a16:creationId xmlns:a16="http://schemas.microsoft.com/office/drawing/2014/main" id="{1FAD1AA4-B0EE-4D7A-AB6A-E8A0880B8CB1}"/>
+                <a16:creationId xmlns:a16="http://schemas.microsoft.com/office/drawing/2014/main" id="{03BADC09-02AD-4BDA-B365-916B063221D2}"/>
               </a:ext>
             </a:extLst>
           </p:cNvPr>
@@ -21346,7 +22636,7 @@
           <p:cNvPr id="11" name="check4-copy">
             <a:extLst xmlns:a="http://schemas.openxmlformats.org/drawingml/2006/main">
               <a:ext uri="{FF2B5EF4-FFF2-40B4-BE49-F238E27FC236}">
-                <a16:creationId xmlns:a16="http://schemas.microsoft.com/office/drawing/2014/main" id="{B1269374-70FD-4D34-AA68-79895F561715}"/>
+                <a16:creationId xmlns:a16="http://schemas.microsoft.com/office/drawing/2014/main" id="{4644DA3E-3FBF-44C9-A6F0-473E6F4EAFB1}"/>
               </a:ext>
             </a:extLst>
           </p:cNvPr>
@@ -21396,7 +22686,7 @@
           <p:cNvPr id="12" name="check5">
             <a:extLst xmlns:a="http://schemas.openxmlformats.org/drawingml/2006/main">
               <a:ext uri="{FF2B5EF4-FFF2-40B4-BE49-F238E27FC236}">
-                <a16:creationId xmlns:a16="http://schemas.microsoft.com/office/drawing/2014/main" id="{E7B54452-7449-491C-A286-A930E531BD18}"/>
+                <a16:creationId xmlns:a16="http://schemas.microsoft.com/office/drawing/2014/main" id="{3169D461-6084-44DC-85A6-AB5306357D0B}"/>
               </a:ext>
             </a:extLst>
           </p:cNvPr>
@@ -21446,7 +22736,7 @@
           <p:cNvPr id="13" name="check5-copy">
             <a:extLst xmlns:a="http://schemas.openxmlformats.org/drawingml/2006/main">
               <a:ext uri="{FF2B5EF4-FFF2-40B4-BE49-F238E27FC236}">
-                <a16:creationId xmlns:a16="http://schemas.microsoft.com/office/drawing/2014/main" id="{7779B75B-76C0-4BA9-81B2-299F6AD874F7}"/>
+                <a16:creationId xmlns:a16="http://schemas.microsoft.com/office/drawing/2014/main" id="{4F52F43D-AB90-4371-A9EF-A2B381A4F683}"/>
               </a:ext>
             </a:extLst>
           </p:cNvPr>
@@ -21496,7 +22786,7 @@
           <p:cNvPr id="14" name="takeaway">
             <a:extLst xmlns:a="http://schemas.openxmlformats.org/drawingml/2006/main">
               <a:ext uri="{FF2B5EF4-FFF2-40B4-BE49-F238E27FC236}">
-                <a16:creationId xmlns:a16="http://schemas.microsoft.com/office/drawing/2014/main" id="{6F5E881A-A4C0-4330-96D5-70A84990FE6F}"/>
+                <a16:creationId xmlns:a16="http://schemas.microsoft.com/office/drawing/2014/main" id="{625ECEB3-43D8-4F63-B73C-866AD71BC1B2}"/>
               </a:ext>
             </a:extLst>
           </p:cNvPr>
@@ -21544,7 +22834,7 @@
     </p:spTree>
     <p:extLst>
       <p:ext uri="{BB962C8B-B14F-4D97-AF65-F5344CB8AC3E}">
-        <p14:creationId xmlns:p14="http://schemas.microsoft.com/office/powerpoint/2010/main" val="2063389685"/>
+        <p14:creationId xmlns:p14="http://schemas.microsoft.com/office/powerpoint/2010/main" val="408597736"/>
       </p:ext>
     </p:extLst>
   </p:cSld>
@@ -21575,7 +22865,7 @@
           <p:cNvPr id="17" name="slide-title">
             <a:extLst xmlns:a="http://schemas.openxmlformats.org/drawingml/2006/main">
               <a:ext uri="{FF2B5EF4-FFF2-40B4-BE49-F238E27FC236}">
-                <a16:creationId xmlns:a16="http://schemas.microsoft.com/office/drawing/2014/main" id="{DA5BB3F4-0EC0-45A2-8C19-360C9B87A4C2}"/>
+                <a16:creationId xmlns:a16="http://schemas.microsoft.com/office/drawing/2014/main" id="{72E0F530-09BF-4C5D-B92D-E2139C56421D}"/>
               </a:ext>
             </a:extLst>
           </p:cNvPr>
@@ -21625,7 +22915,7 @@
           <p:cNvPr id="2" name="rule-68-107">
             <a:extLst xmlns:a="http://schemas.openxmlformats.org/drawingml/2006/main">
               <a:ext uri="{FF2B5EF4-FFF2-40B4-BE49-F238E27FC236}">
-                <a16:creationId xmlns:a16="http://schemas.microsoft.com/office/drawing/2014/main" id="{174E3471-E68E-409C-A153-114437FCEEAF}"/>
+                <a16:creationId xmlns:a16="http://schemas.microsoft.com/office/drawing/2014/main" id="{265F47E0-656B-4A03-BD14-65610F85DBC2}"/>
               </a:ext>
             </a:extLst>
           </p:cNvPr>
@@ -21658,7 +22948,7 @@
           <p:cNvPr id="3" name="page-number">
             <a:extLst xmlns:a="http://schemas.openxmlformats.org/drawingml/2006/main">
               <a:ext uri="{FF2B5EF4-FFF2-40B4-BE49-F238E27FC236}">
-                <a16:creationId xmlns:a16="http://schemas.microsoft.com/office/drawing/2014/main" id="{8895D87F-4769-42E8-858D-06CA38AE9DDB}"/>
+                <a16:creationId xmlns:a16="http://schemas.microsoft.com/office/drawing/2014/main" id="{3334B9EA-DD9E-4F05-9A92-E20D78BA895F}"/>
               </a:ext>
             </a:extLst>
           </p:cNvPr>
@@ -21708,7 +22998,7 @@
           <p:cNvPr id="4" name="prereq-label">
             <a:extLst xmlns:a="http://schemas.openxmlformats.org/drawingml/2006/main">
               <a:ext uri="{FF2B5EF4-FFF2-40B4-BE49-F238E27FC236}">
-                <a16:creationId xmlns:a16="http://schemas.microsoft.com/office/drawing/2014/main" id="{C4C9015C-A4C2-4B63-8B58-EEC509F8635C}"/>
+                <a16:creationId xmlns:a16="http://schemas.microsoft.com/office/drawing/2014/main" id="{D3195BFD-C977-45B2-8DAF-C1E4BBFD4C1D}"/>
               </a:ext>
             </a:extLst>
           </p:cNvPr>
@@ -21758,7 +23048,7 @@
           <p:cNvPr id="5" name="prereq-copy">
             <a:extLst xmlns:a="http://schemas.openxmlformats.org/drawingml/2006/main">
               <a:ext uri="{FF2B5EF4-FFF2-40B4-BE49-F238E27FC236}">
-                <a16:creationId xmlns:a16="http://schemas.microsoft.com/office/drawing/2014/main" id="{CEDBFF01-D4E1-4D4D-A2F3-64AB782EBC17}"/>
+                <a16:creationId xmlns:a16="http://schemas.microsoft.com/office/drawing/2014/main" id="{577ED163-4E4A-46AF-835F-7C237DD03B90}"/>
               </a:ext>
             </a:extLst>
           </p:cNvPr>
@@ -21808,7 +23098,7 @@
           <p:cNvPr id="6" name="recommended-label">
             <a:extLst xmlns:a="http://schemas.openxmlformats.org/drawingml/2006/main">
               <a:ext uri="{FF2B5EF4-FFF2-40B4-BE49-F238E27FC236}">
-                <a16:creationId xmlns:a16="http://schemas.microsoft.com/office/drawing/2014/main" id="{B5ECF34E-5734-4ED7-B695-E0393AB40D09}"/>
+                <a16:creationId xmlns:a16="http://schemas.microsoft.com/office/drawing/2014/main" id="{DD47219A-11CC-41FB-9294-5E94FB108EF9}"/>
               </a:ext>
             </a:extLst>
           </p:cNvPr>
@@ -21858,7 +23148,7 @@
           <p:cNvPr id="7" name="recommended-command">
             <a:extLst xmlns:a="http://schemas.openxmlformats.org/drawingml/2006/main">
               <a:ext uri="{FF2B5EF4-FFF2-40B4-BE49-F238E27FC236}">
-                <a16:creationId xmlns:a16="http://schemas.microsoft.com/office/drawing/2014/main" id="{A3FCBC84-F25B-4E1C-83B8-2C6BC8B3072A}"/>
+                <a16:creationId xmlns:a16="http://schemas.microsoft.com/office/drawing/2014/main" id="{D6CE5EF0-B386-4A97-A46F-A9F9D5E83799}"/>
               </a:ext>
             </a:extLst>
           </p:cNvPr>
@@ -21908,7 +23198,7 @@
           <p:cNvPr id="8" name="rule-78-307">
             <a:extLst xmlns:a="http://schemas.openxmlformats.org/drawingml/2006/main">
               <a:ext uri="{FF2B5EF4-FFF2-40B4-BE49-F238E27FC236}">
-                <a16:creationId xmlns:a16="http://schemas.microsoft.com/office/drawing/2014/main" id="{2E587F26-1B0E-4D16-A262-8E822DDF1371}"/>
+                <a16:creationId xmlns:a16="http://schemas.microsoft.com/office/drawing/2014/main" id="{C980BA9A-335B-47D9-B1DF-2423097B66F8}"/>
               </a:ext>
             </a:extLst>
           </p:cNvPr>
@@ -21941,7 +23231,7 @@
           <p:cNvPr id="9" name="new-terminal">
             <a:extLst xmlns:a="http://schemas.openxmlformats.org/drawingml/2006/main">
               <a:ext uri="{FF2B5EF4-FFF2-40B4-BE49-F238E27FC236}">
-                <a16:creationId xmlns:a16="http://schemas.microsoft.com/office/drawing/2014/main" id="{2597CE05-920A-4C98-9299-D02871E7CC23}"/>
+                <a16:creationId xmlns:a16="http://schemas.microsoft.com/office/drawing/2014/main" id="{D8A27B28-07A0-4EC8-8D57-AECC005DBBC1}"/>
               </a:ext>
             </a:extLst>
           </p:cNvPr>
@@ -21991,7 +23281,7 @@
           <p:cNvPr id="10" name="install-sequence">
             <a:extLst xmlns:a="http://schemas.openxmlformats.org/drawingml/2006/main">
               <a:ext uri="{FF2B5EF4-FFF2-40B4-BE49-F238E27FC236}">
-                <a16:creationId xmlns:a16="http://schemas.microsoft.com/office/drawing/2014/main" id="{C7F3FDBF-082A-4B34-925E-C1612D245795}"/>
+                <a16:creationId xmlns:a16="http://schemas.microsoft.com/office/drawing/2014/main" id="{0728A283-BF34-4032-ABA3-2CD6E4A44CAA}"/>
               </a:ext>
             </a:extLst>
           </p:cNvPr>
@@ -22041,7 +23331,7 @@
           <p:cNvPr id="11" name="verify-label">
             <a:extLst xmlns:a="http://schemas.openxmlformats.org/drawingml/2006/main">
               <a:ext uri="{FF2B5EF4-FFF2-40B4-BE49-F238E27FC236}">
-                <a16:creationId xmlns:a16="http://schemas.microsoft.com/office/drawing/2014/main" id="{B269F984-F0BD-4267-9FE7-DE673F26D214}"/>
+                <a16:creationId xmlns:a16="http://schemas.microsoft.com/office/drawing/2014/main" id="{C3AA197B-1268-4D76-8C8A-B6BC11D3BCA0}"/>
               </a:ext>
             </a:extLst>
           </p:cNvPr>
@@ -22091,7 +23381,7 @@
           <p:cNvPr id="12" name="verify-copy">
             <a:extLst xmlns:a="http://schemas.openxmlformats.org/drawingml/2006/main">
               <a:ext uri="{FF2B5EF4-FFF2-40B4-BE49-F238E27FC236}">
-                <a16:creationId xmlns:a16="http://schemas.microsoft.com/office/drawing/2014/main" id="{81B18794-755C-431F-A238-97213DF92879}"/>
+                <a16:creationId xmlns:a16="http://schemas.microsoft.com/office/drawing/2014/main" id="{EAC4B1DC-F339-4FB3-809E-B70D6370CA2F}"/>
               </a:ext>
             </a:extLst>
           </p:cNvPr>
@@ -22141,7 +23431,7 @@
           <p:cNvPr id="13" name="manual-label">
             <a:extLst xmlns:a="http://schemas.openxmlformats.org/drawingml/2006/main">
               <a:ext uri="{FF2B5EF4-FFF2-40B4-BE49-F238E27FC236}">
-                <a16:creationId xmlns:a16="http://schemas.microsoft.com/office/drawing/2014/main" id="{916F14DA-8732-4B88-8C18-E79BD9EC8140}"/>
+                <a16:creationId xmlns:a16="http://schemas.microsoft.com/office/drawing/2014/main" id="{18A0550B-52F8-4716-A4CE-FC6A7F6DDF68}"/>
               </a:ext>
             </a:extLst>
           </p:cNvPr>
@@ -22191,7 +23481,7 @@
           <p:cNvPr id="14" name="manual-command1">
             <a:extLst xmlns:a="http://schemas.openxmlformats.org/drawingml/2006/main">
               <a:ext uri="{FF2B5EF4-FFF2-40B4-BE49-F238E27FC236}">
-                <a16:creationId xmlns:a16="http://schemas.microsoft.com/office/drawing/2014/main" id="{EBAF7186-13AF-4FAA-A950-A81AEA1765D2}"/>
+                <a16:creationId xmlns:a16="http://schemas.microsoft.com/office/drawing/2014/main" id="{2E05E70F-C26D-4190-8327-315A37A96237}"/>
               </a:ext>
             </a:extLst>
           </p:cNvPr>
@@ -22241,7 +23531,7 @@
           <p:cNvPr id="15" name="manual-command2">
             <a:extLst xmlns:a="http://schemas.openxmlformats.org/drawingml/2006/main">
               <a:ext uri="{FF2B5EF4-FFF2-40B4-BE49-F238E27FC236}">
-                <a16:creationId xmlns:a16="http://schemas.microsoft.com/office/drawing/2014/main" id="{FA33F1B4-DF59-4644-AEFC-A20B40E21B9C}"/>
+                <a16:creationId xmlns:a16="http://schemas.microsoft.com/office/drawing/2014/main" id="{14FFBA3B-BF87-4830-822C-BFB1D65B1606}"/>
               </a:ext>
             </a:extLst>
           </p:cNvPr>
@@ -22291,7 +23581,7 @@
           <p:cNvPr id="16" name="takeaway">
             <a:extLst xmlns:a="http://schemas.openxmlformats.org/drawingml/2006/main">
               <a:ext uri="{FF2B5EF4-FFF2-40B4-BE49-F238E27FC236}">
-                <a16:creationId xmlns:a16="http://schemas.microsoft.com/office/drawing/2014/main" id="{910C379B-8C0D-4C40-8E2B-C453479A08FC}"/>
+                <a16:creationId xmlns:a16="http://schemas.microsoft.com/office/drawing/2014/main" id="{154B6433-457D-4C59-8DDF-6F2D42D4A953}"/>
               </a:ext>
             </a:extLst>
           </p:cNvPr>
@@ -22339,7 +23629,7 @@
     </p:spTree>
     <p:extLst>
       <p:ext uri="{BB962C8B-B14F-4D97-AF65-F5344CB8AC3E}">
-        <p14:creationId xmlns:p14="http://schemas.microsoft.com/office/powerpoint/2010/main" val="106177199"/>
+        <p14:creationId xmlns:p14="http://schemas.microsoft.com/office/powerpoint/2010/main" val="364558711"/>
       </p:ext>
     </p:extLst>
   </p:cSld>
@@ -22370,7 +23660,7 @@
           <p:cNvPr id="16" name="slide-title">
             <a:extLst xmlns:a="http://schemas.openxmlformats.org/drawingml/2006/main">
               <a:ext uri="{FF2B5EF4-FFF2-40B4-BE49-F238E27FC236}">
-                <a16:creationId xmlns:a16="http://schemas.microsoft.com/office/drawing/2014/main" id="{439581CC-9FF2-4666-A22A-FCEFC097CA70}"/>
+                <a16:creationId xmlns:a16="http://schemas.microsoft.com/office/drawing/2014/main" id="{4F66646E-885F-4139-B68D-826220CBB9F9}"/>
               </a:ext>
             </a:extLst>
           </p:cNvPr>
@@ -22420,7 +23710,7 @@
           <p:cNvPr id="2" name="rule-68-107">
             <a:extLst xmlns:a="http://schemas.openxmlformats.org/drawingml/2006/main">
               <a:ext uri="{FF2B5EF4-FFF2-40B4-BE49-F238E27FC236}">
-                <a16:creationId xmlns:a16="http://schemas.microsoft.com/office/drawing/2014/main" id="{B233E24B-C9F6-4C62-90F9-2AE269154A89}"/>
+                <a16:creationId xmlns:a16="http://schemas.microsoft.com/office/drawing/2014/main" id="{8221E794-59DF-4300-B8EE-C093E4F8DEC1}"/>
               </a:ext>
             </a:extLst>
           </p:cNvPr>
@@ -22453,7 +23743,7 @@
           <p:cNvPr id="3" name="page-number">
             <a:extLst xmlns:a="http://schemas.openxmlformats.org/drawingml/2006/main">
               <a:ext uri="{FF2B5EF4-FFF2-40B4-BE49-F238E27FC236}">
-                <a16:creationId xmlns:a16="http://schemas.microsoft.com/office/drawing/2014/main" id="{53A97279-D3A2-4F66-A22D-BE9C4CCC7C63}"/>
+                <a16:creationId xmlns:a16="http://schemas.microsoft.com/office/drawing/2014/main" id="{DE70E9DF-B193-4CBE-A9F7-0AF8E3C980BE}"/>
               </a:ext>
             </a:extLst>
           </p:cNvPr>
@@ -22503,7 +23793,7 @@
           <p:cNvPr id="4" name="first-label">
             <a:extLst xmlns:a="http://schemas.openxmlformats.org/drawingml/2006/main">
               <a:ext uri="{FF2B5EF4-FFF2-40B4-BE49-F238E27FC236}">
-                <a16:creationId xmlns:a16="http://schemas.microsoft.com/office/drawing/2014/main" id="{A003A299-7C41-480E-840E-55D5DF55446E}"/>
+                <a16:creationId xmlns:a16="http://schemas.microsoft.com/office/drawing/2014/main" id="{9168892D-F98F-4791-9E35-D2C4AE37150F}"/>
               </a:ext>
             </a:extLst>
           </p:cNvPr>
@@ -22553,7 +23843,7 @@
           <p:cNvPr id="5" name="clone-command">
             <a:extLst xmlns:a="http://schemas.openxmlformats.org/drawingml/2006/main">
               <a:ext uri="{FF2B5EF4-FFF2-40B4-BE49-F238E27FC236}">
-                <a16:creationId xmlns:a16="http://schemas.microsoft.com/office/drawing/2014/main" id="{5D6B2629-C107-450C-B5CC-148332CAC959}"/>
+                <a16:creationId xmlns:a16="http://schemas.microsoft.com/office/drawing/2014/main" id="{5475BBDA-D508-46F0-98AC-9466B7FFE080}"/>
               </a:ext>
             </a:extLst>
           </p:cNvPr>
@@ -22603,7 +23893,7 @@
           <p:cNvPr id="6" name="cd-command">
             <a:extLst xmlns:a="http://schemas.openxmlformats.org/drawingml/2006/main">
               <a:ext uri="{FF2B5EF4-FFF2-40B4-BE49-F238E27FC236}">
-                <a16:creationId xmlns:a16="http://schemas.microsoft.com/office/drawing/2014/main" id="{39130A40-C604-4DB8-9963-9689FCA3F8D1}"/>
+                <a16:creationId xmlns:a16="http://schemas.microsoft.com/office/drawing/2014/main" id="{98922D70-3FD9-4ECF-AC07-53CEA906DB05}"/>
               </a:ext>
             </a:extLst>
           </p:cNvPr>
@@ -22653,7 +23943,7 @@
           <p:cNvPr id="7" name="ls-command">
             <a:extLst xmlns:a="http://schemas.openxmlformats.org/drawingml/2006/main">
               <a:ext uri="{FF2B5EF4-FFF2-40B4-BE49-F238E27FC236}">
-                <a16:creationId xmlns:a16="http://schemas.microsoft.com/office/drawing/2014/main" id="{91237273-9846-4A42-9177-546199FBDAC3}"/>
+                <a16:creationId xmlns:a16="http://schemas.microsoft.com/office/drawing/2014/main" id="{9B5D21D6-2D44-4EAF-AE55-FF689D09FC28}"/>
               </a:ext>
             </a:extLst>
           </p:cNvPr>
@@ -22703,7 +23993,7 @@
           <p:cNvPr id="8" name="rule-78-307">
             <a:extLst xmlns:a="http://schemas.openxmlformats.org/drawingml/2006/main">
               <a:ext uri="{FF2B5EF4-FFF2-40B4-BE49-F238E27FC236}">
-                <a16:creationId xmlns:a16="http://schemas.microsoft.com/office/drawing/2014/main" id="{95071B47-1F1B-444F-ABAD-0CBB329C8AC5}"/>
+                <a16:creationId xmlns:a16="http://schemas.microsoft.com/office/drawing/2014/main" id="{70D571D4-57B3-4D7A-8C1D-DF1E3F925700}"/>
               </a:ext>
             </a:extLst>
           </p:cNvPr>
@@ -22736,7 +24026,7 @@
           <p:cNvPr id="9" name="existing-label">
             <a:extLst xmlns:a="http://schemas.openxmlformats.org/drawingml/2006/main">
               <a:ext uri="{FF2B5EF4-FFF2-40B4-BE49-F238E27FC236}">
-                <a16:creationId xmlns:a16="http://schemas.microsoft.com/office/drawing/2014/main" id="{F084D16C-5D93-42FF-BA7D-66F868501135}"/>
+                <a16:creationId xmlns:a16="http://schemas.microsoft.com/office/drawing/2014/main" id="{65EE8BDD-88B4-453B-963F-B847A7A604A3}"/>
               </a:ext>
             </a:extLst>
           </p:cNvPr>
@@ -22786,7 +24076,7 @@
           <p:cNvPr id="10" name="switch-command">
             <a:extLst xmlns:a="http://schemas.openxmlformats.org/drawingml/2006/main">
               <a:ext uri="{FF2B5EF4-FFF2-40B4-BE49-F238E27FC236}">
-                <a16:creationId xmlns:a16="http://schemas.microsoft.com/office/drawing/2014/main" id="{E5309CD6-D651-47A2-989F-0C41AA250665}"/>
+                <a16:creationId xmlns:a16="http://schemas.microsoft.com/office/drawing/2014/main" id="{923F9490-1EF0-41E5-9EFB-F6EBB55EC921}"/>
               </a:ext>
             </a:extLst>
           </p:cNvPr>
@@ -22836,7 +24126,7 @@
           <p:cNvPr id="11" name="pull-command">
             <a:extLst xmlns:a="http://schemas.openxmlformats.org/drawingml/2006/main">
               <a:ext uri="{FF2B5EF4-FFF2-40B4-BE49-F238E27FC236}">
-                <a16:creationId xmlns:a16="http://schemas.microsoft.com/office/drawing/2014/main" id="{BFAA58E9-5624-49FB-AFF8-DAFA4775E6BE}"/>
+                <a16:creationId xmlns:a16="http://schemas.microsoft.com/office/drawing/2014/main" id="{293B8EA1-8D2B-4B94-84B4-C4B6FDA8BF68}"/>
               </a:ext>
             </a:extLst>
           </p:cNvPr>
@@ -22886,7 +24176,7 @@
           <p:cNvPr id="12" name="warning-band">
             <a:extLst xmlns:a="http://schemas.openxmlformats.org/drawingml/2006/main">
               <a:ext uri="{FF2B5EF4-FFF2-40B4-BE49-F238E27FC236}">
-                <a16:creationId xmlns:a16="http://schemas.microsoft.com/office/drawing/2014/main" id="{F899BF85-2CFF-4487-9EFC-2CEC99CC3E22}"/>
+                <a16:creationId xmlns:a16="http://schemas.microsoft.com/office/drawing/2014/main" id="{288BFD1A-1ACD-4460-B8E5-995AA505834C}"/>
               </a:ext>
             </a:extLst>
           </p:cNvPr>
@@ -22917,7 +24207,7 @@
           <p:cNvPr id="13" name="warning-title">
             <a:extLst xmlns:a="http://schemas.openxmlformats.org/drawingml/2006/main">
               <a:ext uri="{FF2B5EF4-FFF2-40B4-BE49-F238E27FC236}">
-                <a16:creationId xmlns:a16="http://schemas.microsoft.com/office/drawing/2014/main" id="{1A81658B-2EB2-45FB-BA96-4F97AF7F8D6C}"/>
+                <a16:creationId xmlns:a16="http://schemas.microsoft.com/office/drawing/2014/main" id="{FF032B00-4779-4BC5-8BF7-1C7AABA57B96}"/>
               </a:ext>
             </a:extLst>
           </p:cNvPr>
@@ -22967,7 +24257,7 @@
           <p:cNvPr id="14" name="warning-copy">
             <a:extLst xmlns:a="http://schemas.openxmlformats.org/drawingml/2006/main">
               <a:ext uri="{FF2B5EF4-FFF2-40B4-BE49-F238E27FC236}">
-                <a16:creationId xmlns:a16="http://schemas.microsoft.com/office/drawing/2014/main" id="{B326A81A-961D-4B27-B539-31E4A781E365}"/>
+                <a16:creationId xmlns:a16="http://schemas.microsoft.com/office/drawing/2014/main" id="{23539CE9-8BC0-4237-A564-947A700F83AB}"/>
               </a:ext>
             </a:extLst>
           </p:cNvPr>
@@ -23017,7 +24307,7 @@
           <p:cNvPr id="15" name="branch-command">
             <a:extLst xmlns:a="http://schemas.openxmlformats.org/drawingml/2006/main">
               <a:ext uri="{FF2B5EF4-FFF2-40B4-BE49-F238E27FC236}">
-                <a16:creationId xmlns:a16="http://schemas.microsoft.com/office/drawing/2014/main" id="{0913F217-D516-4607-A963-3581821B60D7}"/>
+                <a16:creationId xmlns:a16="http://schemas.microsoft.com/office/drawing/2014/main" id="{58DF8607-E6E9-4E2A-9204-8587644DF68A}"/>
               </a:ext>
             </a:extLst>
           </p:cNvPr>
@@ -23065,7 +24355,7 @@
     </p:spTree>
     <p:extLst>
       <p:ext uri="{BB962C8B-B14F-4D97-AF65-F5344CB8AC3E}">
-        <p14:creationId xmlns:p14="http://schemas.microsoft.com/office/powerpoint/2010/main" val="1926622492"/>
+        <p14:creationId xmlns:p14="http://schemas.microsoft.com/office/powerpoint/2010/main" val="1866859972"/>
       </p:ext>
     </p:extLst>
   </p:cSld>
@@ -23096,7 +24386,7 @@
           <p:cNvPr id="12" name="slide-title">
             <a:extLst xmlns:a="http://schemas.openxmlformats.org/drawingml/2006/main">
               <a:ext uri="{FF2B5EF4-FFF2-40B4-BE49-F238E27FC236}">
-                <a16:creationId xmlns:a16="http://schemas.microsoft.com/office/drawing/2014/main" id="{2FA2927F-6C0A-401F-9FA8-F477B2E5FD4C}"/>
+                <a16:creationId xmlns:a16="http://schemas.microsoft.com/office/drawing/2014/main" id="{FFA468BC-D209-4BCD-80A3-EDBC848152B5}"/>
               </a:ext>
             </a:extLst>
           </p:cNvPr>
@@ -23146,7 +24436,7 @@
           <p:cNvPr id="2" name="rule-68-107">
             <a:extLst xmlns:a="http://schemas.openxmlformats.org/drawingml/2006/main">
               <a:ext uri="{FF2B5EF4-FFF2-40B4-BE49-F238E27FC236}">
-                <a16:creationId xmlns:a16="http://schemas.microsoft.com/office/drawing/2014/main" id="{D3C5F64A-E604-4ED7-9C11-435C2D2178F8}"/>
+                <a16:creationId xmlns:a16="http://schemas.microsoft.com/office/drawing/2014/main" id="{86B1F526-4B9E-471E-8E50-C9317A1089F6}"/>
               </a:ext>
             </a:extLst>
           </p:cNvPr>
@@ -23179,7 +24469,7 @@
           <p:cNvPr id="3" name="page-number">
             <a:extLst xmlns:a="http://schemas.openxmlformats.org/drawingml/2006/main">
               <a:ext uri="{FF2B5EF4-FFF2-40B4-BE49-F238E27FC236}">
-                <a16:creationId xmlns:a16="http://schemas.microsoft.com/office/drawing/2014/main" id="{B3AD2A62-5092-404A-811A-F051B3DEEDA7}"/>
+                <a16:creationId xmlns:a16="http://schemas.microsoft.com/office/drawing/2014/main" id="{4BCD5BAF-515F-4240-9D90-4012C03085B8}"/>
               </a:ext>
             </a:extLst>
           </p:cNvPr>
@@ -23229,7 +24519,7 @@
           <p:cNvPr id="4" name="one">
             <a:extLst xmlns:a="http://schemas.openxmlformats.org/drawingml/2006/main">
               <a:ext uri="{FF2B5EF4-FFF2-40B4-BE49-F238E27FC236}">
-                <a16:creationId xmlns:a16="http://schemas.microsoft.com/office/drawing/2014/main" id="{3FA42B44-1127-45F9-92AF-C3E732182BBA}"/>
+                <a16:creationId xmlns:a16="http://schemas.microsoft.com/office/drawing/2014/main" id="{F7B06561-29D5-40C9-928F-B65E2CB47D04}"/>
               </a:ext>
             </a:extLst>
           </p:cNvPr>
@@ -23279,7 +24569,7 @@
           <p:cNvPr id="5" name="mission-one">
             <a:extLst xmlns:a="http://schemas.openxmlformats.org/drawingml/2006/main">
               <a:ext uri="{FF2B5EF4-FFF2-40B4-BE49-F238E27FC236}">
-                <a16:creationId xmlns:a16="http://schemas.microsoft.com/office/drawing/2014/main" id="{3AA96A2C-990E-4C59-87A0-812A7FE51185}"/>
+                <a16:creationId xmlns:a16="http://schemas.microsoft.com/office/drawing/2014/main" id="{C52BE2BA-427F-4486-9399-D8BD6AB68BEF}"/>
               </a:ext>
             </a:extLst>
           </p:cNvPr>
@@ -23329,7 +24619,7 @@
           <p:cNvPr id="6" name="mission-one-detail">
             <a:extLst xmlns:a="http://schemas.openxmlformats.org/drawingml/2006/main">
               <a:ext uri="{FF2B5EF4-FFF2-40B4-BE49-F238E27FC236}">
-                <a16:creationId xmlns:a16="http://schemas.microsoft.com/office/drawing/2014/main" id="{8E2493B8-3873-4FDA-BD69-FE8578856C14}"/>
+                <a16:creationId xmlns:a16="http://schemas.microsoft.com/office/drawing/2014/main" id="{FF60EF6E-BFA6-4411-9E05-DE6FB7E5536D}"/>
               </a:ext>
             </a:extLst>
           </p:cNvPr>
@@ -23379,7 +24669,7 @@
           <p:cNvPr id="7" name="rule-88-320">
             <a:extLst xmlns:a="http://schemas.openxmlformats.org/drawingml/2006/main">
               <a:ext uri="{FF2B5EF4-FFF2-40B4-BE49-F238E27FC236}">
-                <a16:creationId xmlns:a16="http://schemas.microsoft.com/office/drawing/2014/main" id="{961E8E6C-36F2-4FB0-ACE0-DB7C1F63DE34}"/>
+                <a16:creationId xmlns:a16="http://schemas.microsoft.com/office/drawing/2014/main" id="{CD14B7C5-1C03-44F9-8B6A-C8DA28CFD1E4}"/>
               </a:ext>
             </a:extLst>
           </p:cNvPr>
@@ -23412,7 +24702,7 @@
           <p:cNvPr id="8" name="two">
             <a:extLst xmlns:a="http://schemas.openxmlformats.org/drawingml/2006/main">
               <a:ext uri="{FF2B5EF4-FFF2-40B4-BE49-F238E27FC236}">
-                <a16:creationId xmlns:a16="http://schemas.microsoft.com/office/drawing/2014/main" id="{A7EF3CF4-D336-4DF9-BFF9-F45127288CBA}"/>
+                <a16:creationId xmlns:a16="http://schemas.microsoft.com/office/drawing/2014/main" id="{88BE3568-31BD-4278-A34A-3F81473D3AF9}"/>
               </a:ext>
             </a:extLst>
           </p:cNvPr>
@@ -23462,7 +24752,7 @@
           <p:cNvPr id="9" name="mission-two">
             <a:extLst xmlns:a="http://schemas.openxmlformats.org/drawingml/2006/main">
               <a:ext uri="{FF2B5EF4-FFF2-40B4-BE49-F238E27FC236}">
-                <a16:creationId xmlns:a16="http://schemas.microsoft.com/office/drawing/2014/main" id="{684E934E-6BF2-41A3-A813-54E630597EBC}"/>
+                <a16:creationId xmlns:a16="http://schemas.microsoft.com/office/drawing/2014/main" id="{1300445B-2217-435A-B09E-F0B404551BBE}"/>
               </a:ext>
             </a:extLst>
           </p:cNvPr>
@@ -23512,7 +24802,7 @@
           <p:cNvPr id="10" name="mission-two-detail">
             <a:extLst xmlns:a="http://schemas.openxmlformats.org/drawingml/2006/main">
               <a:ext uri="{FF2B5EF4-FFF2-40B4-BE49-F238E27FC236}">
-                <a16:creationId xmlns:a16="http://schemas.microsoft.com/office/drawing/2014/main" id="{05DB9F08-5279-400D-9794-A8085C4C35FF}"/>
+                <a16:creationId xmlns:a16="http://schemas.microsoft.com/office/drawing/2014/main" id="{5FC1E50E-4059-4CA5-8AEB-8162F199D201}"/>
               </a:ext>
             </a:extLst>
           </p:cNvPr>
@@ -23562,7 +24852,7 @@
           <p:cNvPr id="11" name="takeaway">
             <a:extLst xmlns:a="http://schemas.openxmlformats.org/drawingml/2006/main">
               <a:ext uri="{FF2B5EF4-FFF2-40B4-BE49-F238E27FC236}">
-                <a16:creationId xmlns:a16="http://schemas.microsoft.com/office/drawing/2014/main" id="{CD9FCEEC-DC81-4E1A-9B03-1F8FE37E0746}"/>
+                <a16:creationId xmlns:a16="http://schemas.microsoft.com/office/drawing/2014/main" id="{DF06824E-3A8B-417B-BE82-55855B31B67D}"/>
               </a:ext>
             </a:extLst>
           </p:cNvPr>
@@ -23610,7 +24900,7 @@
     </p:spTree>
     <p:extLst>
       <p:ext uri="{BB962C8B-B14F-4D97-AF65-F5344CB8AC3E}">
-        <p14:creationId xmlns:p14="http://schemas.microsoft.com/office/powerpoint/2010/main" val="1587098195"/>
+        <p14:creationId xmlns:p14="http://schemas.microsoft.com/office/powerpoint/2010/main" val="351131099"/>
       </p:ext>
     </p:extLst>
   </p:cSld>
